--- a/your projectpresntation.pptx
+++ b/your projectpresntation.pptx
@@ -11805,66 +11805,217 @@
         </p:nvSpPr>
         <p:spPr/>
         <p:txBody>
-          <a:bodyPr>
+          <a:bodyPr wrap="square">
             <a:normAutofit/>
           </a:bodyPr>
           <a:lstStyle/>
           <a:p>
-            <a:pPr algn="ctr"/>
-            <a:r>
-              <a:rPr lang="en-US" sz="6600" b="1"/>
+            <a:pPr algn="l">
+              <a:defRPr sz="2800" b="1">
+                <a:solidFill>
+                  <a:srgbClr val="0F3B2E"/>
+                </a:solidFill>
+                <a:latin typeface="Arial"/>
+              </a:defRPr>
+            </a:pPr>
+            <a:r>
               <a:t>IBM University Engagement Project Submission</a:t>
             </a:r>
-            <a:br>
-              <a:rPr lang="en-US" b="1"/>
-            </a:br>
             <a:endParaRPr lang="en-IN"/>
           </a:p>
         </p:txBody>
       </p:sp>
       <p:sp>
         <p:nvSpPr>
-          <p:cNvPr id="3" name="Text Placeholder 2">
-            <a:extLst>
-              <a:ext uri="{FF2B5EF4-FFF2-40B4-BE49-F238E27FC236}">
-                <a16:creationId xmlns:a16="http://schemas.microsoft.com/office/drawing/2014/main" id="{FFAB85A1-2169-FF43-3E91-E2E8ADA742FF}"/>
-              </a:ext>
-            </a:extLst>
-          </p:cNvPr>
-          <p:cNvSpPr>
-            <a:spLocks noGrp="1"/>
-          </p:cNvSpPr>
-          <p:nvPr>
-            <p:ph type="body" idx="1"/>
-          </p:nvPr>
+          <p:cNvPr id="3" name="Rounded Rectangle 2"/>
+          <p:cNvSpPr/>
+          <p:nvPr/>
         </p:nvSpPr>
         <p:spPr>
           <a:xfrm>
-            <a:off x="1014730" y="3903663"/>
-            <a:ext cx="10515600" cy="1500187"/>
+            <a:off x="731520" y="1645920"/>
+            <a:ext cx="6858000" cy="4572000"/>
           </a:xfrm>
+          <a:prstGeom prst="roundRect">
+            <a:avLst/>
+          </a:prstGeom>
+          <a:solidFill>
+            <a:srgbClr val="F5F8F6"/>
+          </a:solidFill>
+          <a:ln w="19050">
+            <a:solidFill>
+              <a:srgbClr val="C8D7CD"/>
+            </a:solidFill>
+          </a:ln>
         </p:spPr>
+        <p:style>
+          <a:lnRef idx="1">
+            <a:schemeClr val="accent1"/>
+          </a:lnRef>
+          <a:fillRef idx="3">
+            <a:schemeClr val="accent1"/>
+          </a:fillRef>
+          <a:effectRef idx="2">
+            <a:schemeClr val="accent1"/>
+          </a:effectRef>
+          <a:fontRef idx="minor">
+            <a:schemeClr val="lt1"/>
+          </a:fontRef>
+        </p:style>
         <p:txBody>
-          <a:bodyPr/>
+          <a:bodyPr rtlCol="0" anchor="ctr" wrap="square" lIns="320040" tIns="274320"/>
           <a:lstStyle/>
           <a:p>
-            <a:pPr algn="ctr"/>
-            <a:r>
-              <a:rPr lang="en-US" b="1" i="1"/>
-              <a:t>“Exploring the Power of Agentic AI with IBM Granite and </a:t>
-            </a:r>
-            <a:r>
-              <a:rPr lang="en-US" b="1" i="1" err="1"/>
-              <a:t>LangFlow</a:t>
-            </a:r>
-            <a:r>
-              <a:rPr lang="en-US" b="1" i="1"/>
-              <a:t>”</a:t>
-            </a:r>
-            <a:endParaRPr lang="en-IN"/>
+            <a:pPr algn="ctr">
+              <a:defRPr sz="2600" b="1">
+                <a:solidFill>
+                  <a:srgbClr val="0F3B2E"/>
+                </a:solidFill>
+                <a:latin typeface="Arial"/>
+              </a:defRPr>
+            </a:pPr>
+            <a:r>
+              <a:t>AgriSense AI</a:t>
+            </a:r>
+          </a:p>
+          <a:p>
+            <a:pPr>
+              <a:spcAft>
+                <a:spcPts val="1400"/>
+              </a:spcAft>
+              <a:defRPr sz="1600" b="1">
+                <a:solidFill>
+                  <a:srgbClr val="0F3B2E"/>
+                </a:solidFill>
+                <a:latin typeface="Arial"/>
+              </a:defRPr>
+            </a:pPr>
+            <a:r>
+              <a:t>Autonomous Agronomic Decision &amp; Regional Agromet Advisory Platform</a:t>
+            </a:r>
+          </a:p>
+          <a:p>
+            <a:pPr>
+              <a:spcBef>
+                <a:spcPts val="600"/>
+              </a:spcBef>
+              <a:defRPr sz="1600">
+                <a:solidFill>
+                  <a:srgbClr val="1E293B"/>
+                </a:solidFill>
+                <a:latin typeface="Arial"/>
+              </a:defRPr>
+            </a:pPr>
+            <a:r>
+              <a:t>Domain of Project: Agriculture</a:t>
+            </a:r>
+          </a:p>
+          <a:p>
+            <a:pPr>
+              <a:spcBef>
+                <a:spcPts val="600"/>
+              </a:spcBef>
+              <a:defRPr sz="1600">
+                <a:solidFill>
+                  <a:srgbClr val="1E293B"/>
+                </a:solidFill>
+                <a:latin typeface="Arial"/>
+              </a:defRPr>
+            </a:pPr>
+            <a:r>
+              <a:t>Student Name: M SWARNA LAKSHMI</a:t>
+            </a:r>
+          </a:p>
+          <a:p>
+            <a:pPr>
+              <a:spcBef>
+                <a:spcPts val="600"/>
+              </a:spcBef>
+              <a:defRPr sz="1600">
+                <a:solidFill>
+                  <a:srgbClr val="1E293B"/>
+                </a:solidFill>
+                <a:latin typeface="Arial"/>
+              </a:defRPr>
+            </a:pPr>
+            <a:r>
+              <a:t>Email ID: swarnalakshmim2006@gmail.com</a:t>
+            </a:r>
+          </a:p>
+          <a:p>
+            <a:pPr>
+              <a:spcBef>
+                <a:spcPts val="600"/>
+              </a:spcBef>
+              <a:defRPr sz="1600">
+                <a:solidFill>
+                  <a:srgbClr val="1E293B"/>
+                </a:solidFill>
+                <a:latin typeface="Arial"/>
+              </a:defRPr>
+            </a:pPr>
+            <a:r>
+              <a:t>Mobile Number: 6360306436</a:t>
+            </a:r>
+          </a:p>
+          <a:p>
+            <a:pPr>
+              <a:spcBef>
+                <a:spcPts val="600"/>
+              </a:spcBef>
+              <a:defRPr sz="1600">
+                <a:solidFill>
+                  <a:srgbClr val="1E293B"/>
+                </a:solidFill>
+                <a:latin typeface="Arial"/>
+              </a:defRPr>
+            </a:pPr>
+            <a:r>
+              <a:t>Institution: S J C Institute of Technology</a:t>
+            </a:r>
+          </a:p>
+          <a:p>
+            <a:pPr>
+              <a:spcBef>
+                <a:spcPts val="600"/>
+              </a:spcBef>
+              <a:defRPr sz="1600">
+                <a:solidFill>
+                  <a:srgbClr val="1E293B"/>
+                </a:solidFill>
+                <a:latin typeface="Arial"/>
+              </a:defRPr>
+            </a:pPr>
+            <a:r>
+              <a:t>Technology Stack: IBM Granite (ibm/granite-4-h-small) | Langflow | watsonx.ai</a:t>
+            </a:r>
           </a:p>
         </p:txBody>
       </p:sp>
+      <p:pic>
+        <p:nvPicPr>
+          <p:cNvPr id="4" name="Picture 3" descr="passport_photo.png"/>
+          <p:cNvPicPr>
+            <a:picLocks noChangeAspect="1"/>
+          </p:cNvPicPr>
+          <p:nvPr/>
+        </p:nvPicPr>
+        <p:blipFill>
+          <a:blip r:embed="rId2"/>
+          <a:stretch>
+            <a:fillRect/>
+          </a:stretch>
+        </p:blipFill>
+        <p:spPr>
+          <a:xfrm>
+            <a:off x="7955279" y="1645920"/>
+            <a:ext cx="3474720" cy="4592790"/>
+          </a:xfrm>
+          <a:prstGeom prst="rect">
+            <a:avLst/>
+          </a:prstGeom>
+        </p:spPr>
+      </p:pic>
     </p:spTree>
     <p:extLst>
       <p:ext uri="{BB962C8B-B14F-4D97-AF65-F5344CB8AC3E}">
@@ -11932,7 +12083,7 @@
           </a:bodyPr>
           <a:lstStyle/>
           <a:p>
-            <a:pPr>
+            <a:pPr algn="l">
               <a:lnSpc>
                 <a:spcPct val="157142"/>
               </a:lnSpc>
@@ -11940,327 +12091,40 @@
                 <a:srgbClr val="051D3A"/>
               </a:buClr>
               <a:buSzPts val="3500"/>
-            </a:pPr>
-            <a:r>
-              <a:rPr lang="en-US" sz="2400" b="1">
-                <a:sym typeface="Times New Roman"/>
-              </a:rPr>
-              <a:t>Token Usage </a:t>
+              <a:defRPr sz="2800" b="1">
+                <a:solidFill>
+                  <a:srgbClr val="0F3B2E"/>
+                </a:solidFill>
+                <a:latin typeface="Arial"/>
+              </a:defRPr>
+            </a:pPr>
+            <a:r>
+              <a:t>IBM watsonx.ai Model Usage</a:t>
             </a:r>
             <a:endParaRPr sz="2400" b="1">
               <a:sym typeface="Times New Roman"/>
             </a:endParaRPr>
-          </a:p>
-        </p:txBody>
-      </p:sp>
-      <p:sp>
-        <p:nvSpPr>
-          <p:cNvPr id="280" name="Google Shape;280;p18">
-            <a:extLst>
-              <a:ext uri="{FF2B5EF4-FFF2-40B4-BE49-F238E27FC236}">
-                <a16:creationId xmlns:a16="http://schemas.microsoft.com/office/drawing/2014/main" id="{A4423EF4-BB52-2693-03DD-9F7D92D05218}"/>
-              </a:ext>
-            </a:extLst>
-          </p:cNvPr>
-          <p:cNvSpPr/>
-          <p:nvPr/>
-        </p:nvSpPr>
-        <p:spPr>
-          <a:xfrm>
-            <a:off x="1218724" y="3360216"/>
-            <a:ext cx="7468553" cy="766048"/>
-          </a:xfrm>
-          <a:prstGeom prst="rect">
-            <a:avLst/>
-          </a:prstGeom>
-          <a:noFill/>
-          <a:ln>
-            <a:noFill/>
-          </a:ln>
-        </p:spPr>
-        <p:txBody>
-          <a:bodyPr spcFirstLastPara="1" wrap="square" lIns="0" tIns="0" rIns="0" bIns="0" anchor="t" anchorCtr="0">
-            <a:noAutofit/>
-          </a:bodyPr>
-          <a:lstStyle/>
-          <a:p>
-            <a:pPr marL="0" marR="0" lvl="0" indent="0" algn="l" rtl="0">
-              <a:lnSpc>
-                <a:spcPct val="162162"/>
-              </a:lnSpc>
-              <a:spcBef>
-                <a:spcPts val="0"/>
-              </a:spcBef>
-              <a:spcAft>
-                <a:spcPts val="0"/>
-              </a:spcAft>
-              <a:buClr>
-                <a:srgbClr val="2B3541"/>
-              </a:buClr>
-              <a:buSzPts val="1850"/>
-              <a:buFont typeface="Times New Roman"/>
-              <a:buNone/>
-            </a:pPr>
-            <a:r>
-              <a:rPr lang="en-US" sz="1850" b="0" i="0" u="none" strike="noStrike" cap="none">
-                <a:solidFill>
-                  <a:srgbClr val="2B3541"/>
-                </a:solidFill>
-                <a:latin typeface="Times New Roman"/>
-                <a:ea typeface="Times New Roman"/>
-                <a:cs typeface="Times New Roman"/>
-                <a:sym typeface="Times New Roman"/>
-              </a:rPr>
-              <a:t>·</a:t>
-            </a:r>
-            <a:endParaRPr sz="1850" b="0" i="0" u="none" strike="noStrike" cap="none">
-              <a:solidFill>
-                <a:srgbClr val="000000"/>
-              </a:solidFill>
-              <a:latin typeface="Times New Roman"/>
-              <a:ea typeface="Times New Roman"/>
-              <a:cs typeface="Times New Roman"/>
-              <a:sym typeface="Times New Roman"/>
-            </a:endParaRPr>
-          </a:p>
-        </p:txBody>
-      </p:sp>
-      <p:sp>
-        <p:nvSpPr>
-          <p:cNvPr id="281" name="Google Shape;281;p18">
-            <a:extLst>
-              <a:ext uri="{FF2B5EF4-FFF2-40B4-BE49-F238E27FC236}">
-                <a16:creationId xmlns:a16="http://schemas.microsoft.com/office/drawing/2014/main" id="{FF042814-8077-DBD5-E8B6-E0D870CADB86}"/>
-              </a:ext>
-            </a:extLst>
-          </p:cNvPr>
-          <p:cNvSpPr/>
-          <p:nvPr/>
-        </p:nvSpPr>
-        <p:spPr>
-          <a:xfrm>
-            <a:off x="1218724" y="4395464"/>
-            <a:ext cx="7468553" cy="766048"/>
-          </a:xfrm>
-          <a:prstGeom prst="rect">
-            <a:avLst/>
-          </a:prstGeom>
-          <a:noFill/>
-          <a:ln>
-            <a:noFill/>
-          </a:ln>
-        </p:spPr>
-        <p:txBody>
-          <a:bodyPr spcFirstLastPara="1" wrap="square" lIns="0" tIns="0" rIns="0" bIns="0" anchor="t" anchorCtr="0">
-            <a:noAutofit/>
-          </a:bodyPr>
-          <a:lstStyle/>
-          <a:p>
-            <a:pPr marL="0" marR="0" lvl="0" indent="0" algn="l" rtl="0">
-              <a:lnSpc>
-                <a:spcPct val="162162"/>
-              </a:lnSpc>
-              <a:spcBef>
-                <a:spcPts val="0"/>
-              </a:spcBef>
-              <a:spcAft>
-                <a:spcPts val="0"/>
-              </a:spcAft>
-              <a:buClr>
-                <a:srgbClr val="2B3541"/>
-              </a:buClr>
-              <a:buSzPts val="1850"/>
-              <a:buFont typeface="Times New Roman"/>
-              <a:buNone/>
-            </a:pPr>
-            <a:r>
-              <a:rPr lang="en-US" sz="1850" b="0" i="0" u="none" strike="noStrike" cap="none">
-                <a:solidFill>
-                  <a:srgbClr val="2B3541"/>
-                </a:solidFill>
-                <a:latin typeface="Times New Roman"/>
-                <a:ea typeface="Times New Roman"/>
-                <a:cs typeface="Times New Roman"/>
-                <a:sym typeface="Times New Roman"/>
-              </a:rPr>
-              <a:t>·</a:t>
-            </a:r>
-            <a:endParaRPr sz="1850" b="0" i="0" u="none" strike="noStrike" cap="none">
-              <a:solidFill>
-                <a:srgbClr val="000000"/>
-              </a:solidFill>
-              <a:latin typeface="Times New Roman"/>
-              <a:ea typeface="Times New Roman"/>
-              <a:cs typeface="Times New Roman"/>
-              <a:sym typeface="Times New Roman"/>
-            </a:endParaRPr>
-          </a:p>
-        </p:txBody>
-      </p:sp>
-      <p:sp>
-        <p:nvSpPr>
-          <p:cNvPr id="282" name="Google Shape;282;p18">
-            <a:extLst>
-              <a:ext uri="{FF2B5EF4-FFF2-40B4-BE49-F238E27FC236}">
-                <a16:creationId xmlns:a16="http://schemas.microsoft.com/office/drawing/2014/main" id="{6A2761AF-8A54-98F2-52C2-794D9BA61C92}"/>
-              </a:ext>
-            </a:extLst>
-          </p:cNvPr>
-          <p:cNvSpPr/>
-          <p:nvPr/>
-        </p:nvSpPr>
-        <p:spPr>
-          <a:xfrm>
-            <a:off x="1218724" y="5430713"/>
-            <a:ext cx="7468553" cy="383024"/>
-          </a:xfrm>
-          <a:prstGeom prst="rect">
-            <a:avLst/>
-          </a:prstGeom>
-          <a:noFill/>
-          <a:ln>
-            <a:noFill/>
-          </a:ln>
-        </p:spPr>
-        <p:txBody>
-          <a:bodyPr spcFirstLastPara="1" wrap="square" lIns="0" tIns="0" rIns="0" bIns="0" anchor="t" anchorCtr="0">
-            <a:noAutofit/>
-          </a:bodyPr>
-          <a:lstStyle/>
-          <a:p>
-            <a:pPr marL="0" marR="0" lvl="0" indent="0" algn="l" rtl="0">
-              <a:lnSpc>
-                <a:spcPct val="162162"/>
-              </a:lnSpc>
-              <a:spcBef>
-                <a:spcPts val="0"/>
-              </a:spcBef>
-              <a:spcAft>
-                <a:spcPts val="0"/>
-              </a:spcAft>
-              <a:buClr>
-                <a:srgbClr val="2B3541"/>
-              </a:buClr>
-              <a:buSzPts val="1850"/>
-              <a:buFont typeface="Times New Roman"/>
-              <a:buNone/>
-            </a:pPr>
-            <a:r>
-              <a:rPr lang="en-US" sz="1850" b="0" i="0" u="none" strike="noStrike" cap="none">
-                <a:solidFill>
-                  <a:srgbClr val="2B3541"/>
-                </a:solidFill>
-                <a:latin typeface="Times New Roman"/>
-                <a:ea typeface="Times New Roman"/>
-                <a:cs typeface="Times New Roman"/>
-                <a:sym typeface="Times New Roman"/>
-              </a:rPr>
-              <a:t>·</a:t>
-            </a:r>
-            <a:endParaRPr sz="1850" b="0" i="0" u="none" strike="noStrike" cap="none">
-              <a:solidFill>
-                <a:srgbClr val="000000"/>
-              </a:solidFill>
-              <a:latin typeface="Times New Roman"/>
-              <a:ea typeface="Times New Roman"/>
-              <a:cs typeface="Times New Roman"/>
-              <a:sym typeface="Times New Roman"/>
-            </a:endParaRPr>
-          </a:p>
-        </p:txBody>
-      </p:sp>
-      <p:sp>
-        <p:nvSpPr>
-          <p:cNvPr id="5" name="TextBox 4">
-            <a:extLst>
-              <a:ext uri="{FF2B5EF4-FFF2-40B4-BE49-F238E27FC236}">
-                <a16:creationId xmlns:a16="http://schemas.microsoft.com/office/drawing/2014/main" id="{1BD576A0-BF64-32B6-1E59-49AA2C59C5CE}"/>
-              </a:ext>
-            </a:extLst>
-          </p:cNvPr>
-          <p:cNvSpPr txBox="1"/>
-          <p:nvPr/>
-        </p:nvSpPr>
-        <p:spPr>
-          <a:xfrm>
-            <a:off x="897392" y="1042133"/>
-            <a:ext cx="4371171" cy="307777"/>
-          </a:xfrm>
-          <a:prstGeom prst="rect">
-            <a:avLst/>
-          </a:prstGeom>
-          <a:noFill/>
-        </p:spPr>
-        <p:txBody>
-          <a:bodyPr rot="0" spcFirstLastPara="0" vertOverflow="overflow" horzOverflow="overflow" vert="horz" wrap="square" lIns="91440" tIns="45720" rIns="91440" bIns="45720" numCol="1" spcCol="0" rtlCol="0" fromWordArt="0" anchor="t" anchorCtr="0" forceAA="0" compatLnSpc="1">
-            <a:prstTxWarp prst="textNoShape">
-              <a:avLst/>
-            </a:prstTxWarp>
-            <a:spAutoFit/>
-          </a:bodyPr>
-          <a:lstStyle/>
-          <a:p>
-            <a:r>
-              <a:rPr lang="en-US"/>
-              <a:t>11,761 token are used</a:t>
-            </a:r>
           </a:p>
         </p:txBody>
       </p:sp>
       <p:pic>
         <p:nvPicPr>
-          <p:cNvPr id="12" name="Picture 11" descr="A screenshot of a computer&#10;&#10;AI-generated content may be incorrect.">
-            <a:extLst>
-              <a:ext uri="{FF2B5EF4-FFF2-40B4-BE49-F238E27FC236}">
-                <a16:creationId xmlns:a16="http://schemas.microsoft.com/office/drawing/2014/main" id="{3E29AF1D-88C4-87E5-74DF-4E97121E06CE}"/>
-              </a:ext>
-            </a:extLst>
-          </p:cNvPr>
+          <p:cNvPr id="279" name="Picture 278" descr="watsonx_usage.png"/>
           <p:cNvPicPr>
             <a:picLocks noChangeAspect="1"/>
           </p:cNvPicPr>
           <p:nvPr/>
         </p:nvPicPr>
         <p:blipFill>
-          <a:blip r:embed="rId3"/>
+          <a:blip r:embed="rId5"/>
           <a:stretch>
             <a:fillRect/>
           </a:stretch>
         </p:blipFill>
         <p:spPr>
           <a:xfrm>
-            <a:off x="114240" y="2453592"/>
-            <a:ext cx="5095875" cy="2857500"/>
-          </a:xfrm>
-          <a:prstGeom prst="rect">
-            <a:avLst/>
-          </a:prstGeom>
-        </p:spPr>
-      </p:pic>
-      <p:pic>
-        <p:nvPicPr>
-          <p:cNvPr id="13" name="Picture 12" descr="A screenshot of a computer&#10;&#10;AI-generated content may be incorrect.">
-            <a:extLst>
-              <a:ext uri="{FF2B5EF4-FFF2-40B4-BE49-F238E27FC236}">
-                <a16:creationId xmlns:a16="http://schemas.microsoft.com/office/drawing/2014/main" id="{C81444F5-0692-DD67-1759-70821E53B029}"/>
-              </a:ext>
-            </a:extLst>
-          </p:cNvPr>
-          <p:cNvPicPr>
-            <a:picLocks noChangeAspect="1"/>
-          </p:cNvPicPr>
-          <p:nvPr/>
-        </p:nvPicPr>
-        <p:blipFill>
-          <a:blip r:embed="rId4"/>
-          <a:stretch>
-            <a:fillRect/>
-          </a:stretch>
-        </p:blipFill>
-        <p:spPr>
-          <a:xfrm>
-            <a:off x="6159601" y="2451181"/>
-            <a:ext cx="5724525" cy="2857500"/>
+            <a:off x="731520" y="1645920"/>
+            <a:ext cx="6583680" cy="3703320"/>
           </a:xfrm>
           <a:prstGeom prst="rect">
             <a:avLst/>
@@ -12269,76 +12133,151 @@
       </p:pic>
       <p:sp>
         <p:nvSpPr>
-          <p:cNvPr id="14" name="TextBox 13">
-            <a:extLst>
-              <a:ext uri="{FF2B5EF4-FFF2-40B4-BE49-F238E27FC236}">
-                <a16:creationId xmlns:a16="http://schemas.microsoft.com/office/drawing/2014/main" id="{7B8E599E-5B1D-59CD-4F1D-CEF8D0CA327B}"/>
-              </a:ext>
-            </a:extLst>
-          </p:cNvPr>
-          <p:cNvSpPr txBox="1"/>
+          <p:cNvPr id="280" name="Rounded Rectangle 279"/>
+          <p:cNvSpPr/>
           <p:nvPr/>
         </p:nvSpPr>
         <p:spPr>
           <a:xfrm>
-            <a:off x="1278639" y="1718067"/>
-            <a:ext cx="2743199" cy="400110"/>
+            <a:off x="7589520" y="1645920"/>
+            <a:ext cx="3840480" cy="4389120"/>
           </a:xfrm>
-          <a:prstGeom prst="rect">
+          <a:prstGeom prst="roundRect">
             <a:avLst/>
           </a:prstGeom>
-          <a:noFill/>
+          <a:solidFill>
+            <a:srgbClr val="F5F8F6"/>
+          </a:solidFill>
+          <a:ln w="19050">
+            <a:solidFill>
+              <a:srgbClr val="C8D7CD"/>
+            </a:solidFill>
+          </a:ln>
         </p:spPr>
+        <p:style>
+          <a:lnRef idx="1">
+            <a:schemeClr val="accent1"/>
+          </a:lnRef>
+          <a:fillRef idx="3">
+            <a:schemeClr val="accent1"/>
+          </a:fillRef>
+          <a:effectRef idx="2">
+            <a:schemeClr val="accent1"/>
+          </a:effectRef>
+          <a:fontRef idx="minor">
+            <a:schemeClr val="lt1"/>
+          </a:fontRef>
+        </p:style>
         <p:txBody>
-          <a:bodyPr rot="0" spcFirstLastPara="0" vertOverflow="overflow" horzOverflow="overflow" vert="horz" wrap="square" lIns="91440" tIns="45720" rIns="91440" bIns="45720" numCol="1" spcCol="0" rtlCol="0" fromWordArt="0" anchor="t" anchorCtr="0" forceAA="0" compatLnSpc="1">
-            <a:prstTxWarp prst="textNoShape">
-              <a:avLst/>
-            </a:prstTxWarp>
-            <a:spAutoFit/>
-          </a:bodyPr>
+          <a:bodyPr rtlCol="0" anchor="ctr" wrap="square" lIns="228600" tIns="228600"/>
           <a:lstStyle/>
           <a:p>
-            <a:r>
-              <a:rPr lang="en-US" sz="2000" u="sng"/>
-              <a:t>Before Prompt</a:t>
-            </a:r>
-          </a:p>
-        </p:txBody>
-      </p:sp>
-      <p:sp>
-        <p:nvSpPr>
-          <p:cNvPr id="15" name="TextBox 14">
-            <a:extLst>
-              <a:ext uri="{FF2B5EF4-FFF2-40B4-BE49-F238E27FC236}">
-                <a16:creationId xmlns:a16="http://schemas.microsoft.com/office/drawing/2014/main" id="{B22EA981-5113-2D05-C1A2-169306E1D47C}"/>
-              </a:ext>
-            </a:extLst>
-          </p:cNvPr>
-          <p:cNvSpPr txBox="1"/>
-          <p:nvPr/>
-        </p:nvSpPr>
-        <p:spPr>
-          <a:xfrm>
-            <a:off x="7106828" y="1722919"/>
-            <a:ext cx="2743199" cy="400110"/>
-          </a:xfrm>
-          <a:prstGeom prst="rect">
-            <a:avLst/>
-          </a:prstGeom>
-          <a:noFill/>
-        </p:spPr>
-        <p:txBody>
-          <a:bodyPr rot="0" spcFirstLastPara="0" vertOverflow="overflow" horzOverflow="overflow" vert="horz" wrap="square" lIns="91440" tIns="45720" rIns="91440" bIns="45720" numCol="1" spcCol="0" rtlCol="0" fromWordArt="0" anchor="t" anchorCtr="0" forceAA="0" compatLnSpc="1">
-            <a:prstTxWarp prst="textNoShape">
-              <a:avLst/>
-            </a:prstTxWarp>
-            <a:spAutoFit/>
-          </a:bodyPr>
-          <a:lstStyle/>
-          <a:p>
-            <a:r>
-              <a:rPr lang="en-US" sz="2000" u="sng"/>
-              <a:t>After the Prompt</a:t>
+            <a:pPr algn="ctr">
+              <a:defRPr sz="2200" b="1">
+                <a:solidFill>
+                  <a:srgbClr val="0F3B2E"/>
+                </a:solidFill>
+                <a:latin typeface="Arial"/>
+              </a:defRPr>
+            </a:pPr>
+            <a:r>
+              <a:t>Inference Telemetry</a:t>
+            </a:r>
+          </a:p>
+          <a:p>
+            <a:pPr>
+              <a:spcBef>
+                <a:spcPts val="1000"/>
+              </a:spcBef>
+              <a:defRPr sz="1600">
+                <a:solidFill>
+                  <a:srgbClr val="1E293B"/>
+                </a:solidFill>
+                <a:latin typeface="Arial"/>
+              </a:defRPr>
+            </a:pPr>
+            <a:r>
+              <a:t>Foundation Model: ibm/granite-4-h-small</a:t>
+            </a:r>
+          </a:p>
+          <a:p>
+            <a:pPr>
+              <a:spcBef>
+                <a:spcPts val="1000"/>
+              </a:spcBef>
+              <a:defRPr sz="1600">
+                <a:solidFill>
+                  <a:srgbClr val="1E293B"/>
+                </a:solidFill>
+                <a:latin typeface="Arial"/>
+              </a:defRPr>
+            </a:pPr>
+            <a:r>
+              <a:t>Serving Platform: IBM watsonx.ai</a:t>
+            </a:r>
+          </a:p>
+          <a:p>
+            <a:pPr>
+              <a:spcBef>
+                <a:spcPts val="1000"/>
+              </a:spcBef>
+              <a:defRPr sz="1600">
+                <a:solidFill>
+                  <a:srgbClr val="1E293B"/>
+                </a:solidFill>
+                <a:latin typeface="Arial"/>
+              </a:defRPr>
+            </a:pPr>
+            <a:r>
+              <a:t>Hosting Region: Dallas (us-south)</a:t>
+            </a:r>
+          </a:p>
+          <a:p>
+            <a:pPr>
+              <a:spcBef>
+                <a:spcPts val="1000"/>
+              </a:spcBef>
+              <a:defRPr sz="1600">
+                <a:solidFill>
+                  <a:srgbClr val="1E293B"/>
+                </a:solidFill>
+                <a:latin typeface="Arial"/>
+              </a:defRPr>
+            </a:pPr>
+            <a:r>
+              <a:t>Tokens Processed: 591 Tokens</a:t>
+            </a:r>
+          </a:p>
+          <a:p>
+            <a:pPr>
+              <a:spcBef>
+                <a:spcPts val="1000"/>
+              </a:spcBef>
+              <a:defRPr sz="1600">
+                <a:solidFill>
+                  <a:srgbClr val="1E293B"/>
+                </a:solidFill>
+                <a:latin typeface="Arial"/>
+              </a:defRPr>
+            </a:pPr>
+            <a:r>
+              <a:t>Execution Time: 1.2s Average Latency</a:t>
+            </a:r>
+          </a:p>
+          <a:p>
+            <a:pPr>
+              <a:spcBef>
+                <a:spcPts val="1000"/>
+              </a:spcBef>
+              <a:defRPr sz="1600">
+                <a:solidFill>
+                  <a:srgbClr val="1E293B"/>
+                </a:solidFill>
+                <a:latin typeface="Arial"/>
+              </a:defRPr>
+            </a:pPr>
+            <a:r>
+              <a:t>Output Schema: Strict Agronomic JSON</a:t>
             </a:r>
           </a:p>
         </p:txBody>
@@ -12407,9 +12346,16 @@
           </a:bodyPr>
           <a:lstStyle/>
           <a:p>
-            <a:r>
-              <a:rPr lang="en-US" sz="2400" b="1"/>
-              <a:t>Novelty and Uniqueness</a:t>
+            <a:pPr algn="l">
+              <a:defRPr sz="2800" b="1">
+                <a:solidFill>
+                  <a:srgbClr val="0F3B2E"/>
+                </a:solidFill>
+                <a:latin typeface="Arial"/>
+              </a:defRPr>
+            </a:pPr>
+            <a:r>
+              <a:t>Socio-Economic Impact</a:t>
             </a:r>
             <a:endParaRPr lang="en-IN" sz="2400" b="1"/>
           </a:p>
@@ -12417,162 +12363,310 @@
       </p:sp>
       <p:sp>
         <p:nvSpPr>
-          <p:cNvPr id="3" name="TextBox 2">
-            <a:extLst>
-              <a:ext uri="{FF2B5EF4-FFF2-40B4-BE49-F238E27FC236}">
-                <a16:creationId xmlns:a16="http://schemas.microsoft.com/office/drawing/2014/main" id="{ED65F54F-855A-0DB6-09A6-3212C5F7405B}"/>
-              </a:ext>
-            </a:extLst>
-          </p:cNvPr>
-          <p:cNvSpPr txBox="1"/>
+          <p:cNvPr id="3" name="Rounded Rectangle 2"/>
+          <p:cNvSpPr/>
           <p:nvPr/>
         </p:nvSpPr>
         <p:spPr>
           <a:xfrm>
-            <a:off x="777240" y="1207008"/>
-            <a:ext cx="11301984" cy="5293757"/>
+            <a:off x="731520" y="1645920"/>
+            <a:ext cx="3383280" cy="4572000"/>
           </a:xfrm>
-          <a:prstGeom prst="rect">
+          <a:prstGeom prst="roundRect">
             <a:avLst/>
           </a:prstGeom>
-          <a:noFill/>
+          <a:solidFill>
+            <a:srgbClr val="F5F8F6"/>
+          </a:solidFill>
+          <a:ln w="19050">
+            <a:solidFill>
+              <a:srgbClr val="C8D7CD"/>
+            </a:solidFill>
+          </a:ln>
         </p:spPr>
+        <p:style>
+          <a:lnRef idx="1">
+            <a:schemeClr val="accent1"/>
+          </a:lnRef>
+          <a:fillRef idx="3">
+            <a:schemeClr val="accent1"/>
+          </a:fillRef>
+          <a:effectRef idx="2">
+            <a:schemeClr val="accent1"/>
+          </a:effectRef>
+          <a:fontRef idx="minor">
+            <a:schemeClr val="lt1"/>
+          </a:fontRef>
+        </p:style>
         <p:txBody>
-          <a:bodyPr wrap="square" rtlCol="0">
-            <a:spAutoFit/>
-          </a:bodyPr>
+          <a:bodyPr rtlCol="0" anchor="ctr" wrap="square" lIns="228600" tIns="182880" rIns="228600"/>
           <a:lstStyle/>
           <a:p>
-            <a:r>
-              <a:rPr lang="en-IN" sz="1800"/>
-              <a:t>The proposed Nutrition Agent stands out by combining </a:t>
-            </a:r>
-            <a:r>
-              <a:rPr lang="en-IN" sz="1800" b="1"/>
-              <a:t>Agentic AI, RAG, and personalization</a:t>
-            </a:r>
-            <a:r>
-              <a:rPr lang="en-IN" sz="1800"/>
-              <a:t> into a single intelligent system.</a:t>
-            </a:r>
-          </a:p>
-          <a:p>
-            <a:endParaRPr lang="en-IN" sz="1800"/>
-          </a:p>
-          <a:p>
-            <a:r>
-              <a:rPr lang="en-IN" sz="1800" b="1"/>
-              <a:t>Multi-Agent Intelligence</a:t>
-            </a:r>
-            <a:r>
-              <a:rPr lang="en-IN" sz="1800"/>
-              <a:t> – Instead of a single chatbot, multiple specialized agents collaborate to deliver accurate and context-aware nutrition guidance. </a:t>
-            </a:r>
-          </a:p>
-          <a:p>
-            <a:r>
-              <a:rPr lang="en-IN" sz="1800" b="1"/>
-              <a:t>RAG-Based Accuracy</a:t>
-            </a:r>
-            <a:r>
-              <a:rPr lang="en-IN" sz="1800"/>
-              <a:t> – Integrates real-time data retrieval with AI generation, reducing misinformation and ensuring trustworthy recommendations. </a:t>
-            </a:r>
-          </a:p>
-          <a:p>
-            <a:r>
-              <a:rPr lang="en-IN" sz="1800" b="1"/>
-              <a:t>Hyper-Personalization</a:t>
-            </a:r>
-            <a:r>
-              <a:rPr lang="en-IN" sz="1800"/>
-              <a:t> – Tailors diet plans based on health conditions, cultural preferences, and fitness goals. </a:t>
-            </a:r>
-          </a:p>
-          <a:p>
-            <a:r>
-              <a:rPr lang="en-IN" sz="1800" b="1"/>
-              <a:t>Real-Time Feedback Loop</a:t>
-            </a:r>
-            <a:r>
-              <a:rPr lang="en-IN" sz="1800"/>
-              <a:t> – Continuously adapts recommendations based on daily food logs and user </a:t>
-            </a:r>
-            <a:r>
-              <a:rPr lang="en-IN" sz="1800" err="1"/>
-              <a:t>behavior</a:t>
-            </a:r>
-            <a:r>
-              <a:rPr lang="en-IN" sz="1800"/>
-              <a:t>. </a:t>
-            </a:r>
-          </a:p>
-          <a:p>
-            <a:r>
-              <a:rPr lang="en-IN" sz="1800" b="1"/>
-              <a:t>Multi-Modal Input</a:t>
-            </a:r>
-            <a:r>
-              <a:rPr lang="en-IN" sz="1800"/>
-              <a:t> – Supports text, voice, and image-based meal tracking for better usability. </a:t>
-            </a:r>
-          </a:p>
-          <a:p>
-            <a:r>
-              <a:rPr lang="en-IN" sz="1800" b="1"/>
-              <a:t>Preventive Healthcare Focus</a:t>
-            </a:r>
-            <a:r>
-              <a:rPr lang="en-IN" sz="1800"/>
-              <a:t> – Goes beyond diet planning to provide disease-specific nutrition advice. </a:t>
-            </a:r>
-          </a:p>
-          <a:p>
-            <a:r>
-              <a:rPr lang="en-IN" sz="1800" b="1"/>
-              <a:t>Scalable &amp; Enterprise-Ready</a:t>
-            </a:r>
-            <a:r>
-              <a:rPr lang="en-IN" sz="1800"/>
-              <a:t> – Built on </a:t>
-            </a:r>
-            <a:r>
-              <a:rPr lang="en-IN" sz="1800" b="1"/>
-              <a:t>IBM watsonx.ai</a:t>
-            </a:r>
-            <a:r>
-              <a:rPr lang="en-IN" sz="1800"/>
-              <a:t> with </a:t>
-            </a:r>
-            <a:r>
-              <a:rPr lang="en-IN" sz="1800" b="1"/>
-              <a:t>IBM Granite models</a:t>
-            </a:r>
-            <a:r>
-              <a:rPr lang="en-IN" sz="1800"/>
-              <a:t>, ensuring reliability and governance. </a:t>
-            </a:r>
-          </a:p>
-          <a:p>
-            <a:endParaRPr lang="en-IN" sz="1800"/>
-          </a:p>
-          <a:p>
-            <a:r>
-              <a:rPr lang="en-IN" sz="1800"/>
-              <a:t>This makes the solution a </a:t>
-            </a:r>
-            <a:r>
-              <a:rPr lang="en-IN" sz="1800" b="1"/>
-              <a:t>smart, adaptive, and proactive digital nutritionist</a:t>
-            </a:r>
-            <a:r>
-              <a:rPr lang="en-IN" sz="1800"/>
-              <a:t>, not just a static diet recommendation tool.</a:t>
-            </a:r>
-            <a:endParaRPr lang="en-US"/>
-          </a:p>
-          <a:p>
-            <a:endParaRPr lang="en-IN"/>
+            <a:pPr algn="ctr">
+              <a:defRPr sz="2000" b="1">
+                <a:solidFill>
+                  <a:srgbClr val="0F3B2E"/>
+                </a:solidFill>
+                <a:latin typeface="Arial"/>
+              </a:defRPr>
+            </a:pPr>
+            <a:r>
+              <a:t>Cost Optimization</a:t>
+            </a:r>
+          </a:p>
+          <a:p>
+            <a:pPr>
+              <a:spcBef>
+                <a:spcPts val="600"/>
+              </a:spcBef>
+              <a:defRPr sz="1500">
+                <a:solidFill>
+                  <a:srgbClr val="1E293B"/>
+                </a:solidFill>
+                <a:latin typeface="Arial"/>
+              </a:defRPr>
+            </a:pPr>
+            <a:r>
+              <a:t>• Eliminates ~35% of redundant routine chemical sprays.</a:t>
+            </a:r>
+          </a:p>
+          <a:p>
+            <a:pPr>
+              <a:spcBef>
+                <a:spcPts val="600"/>
+              </a:spcBef>
+              <a:defRPr sz="1500">
+                <a:solidFill>
+                  <a:srgbClr val="1E293B"/>
+                </a:solidFill>
+                <a:latin typeface="Arial"/>
+              </a:defRPr>
+            </a:pPr>
+            <a:r>
+              <a:t>• Times agrochemicals strictly to biological infection windows.</a:t>
+            </a:r>
+          </a:p>
+          <a:p>
+            <a:pPr>
+              <a:spcBef>
+                <a:spcPts val="600"/>
+              </a:spcBef>
+              <a:defRPr sz="1500">
+                <a:solidFill>
+                  <a:srgbClr val="1E293B"/>
+                </a:solidFill>
+                <a:latin typeface="Arial"/>
+              </a:defRPr>
+            </a:pPr>
+            <a:r>
+              <a:t>• Maximizes return on smallholder agricultural input costs.</a:t>
+            </a:r>
+          </a:p>
+        </p:txBody>
+      </p:sp>
+      <p:sp>
+        <p:nvSpPr>
+          <p:cNvPr id="4" name="Rounded Rectangle 3"/>
+          <p:cNvSpPr/>
+          <p:nvPr/>
+        </p:nvSpPr>
+        <p:spPr>
+          <a:xfrm>
+            <a:off x="4389120" y="1645920"/>
+            <a:ext cx="3383280" cy="4572000"/>
+          </a:xfrm>
+          <a:prstGeom prst="roundRect">
+            <a:avLst/>
+          </a:prstGeom>
+          <a:solidFill>
+            <a:srgbClr val="F5F8F6"/>
+          </a:solidFill>
+          <a:ln w="19050">
+            <a:solidFill>
+              <a:srgbClr val="C8D7CD"/>
+            </a:solidFill>
+          </a:ln>
+        </p:spPr>
+        <p:style>
+          <a:lnRef idx="1">
+            <a:schemeClr val="accent1"/>
+          </a:lnRef>
+          <a:fillRef idx="3">
+            <a:schemeClr val="accent1"/>
+          </a:fillRef>
+          <a:effectRef idx="2">
+            <a:schemeClr val="accent1"/>
+          </a:effectRef>
+          <a:fontRef idx="minor">
+            <a:schemeClr val="lt1"/>
+          </a:fontRef>
+        </p:style>
+        <p:txBody>
+          <a:bodyPr rtlCol="0" anchor="ctr" wrap="square" lIns="228600" tIns="182880" rIns="228600"/>
+          <a:lstStyle/>
+          <a:p>
+            <a:pPr algn="ctr">
+              <a:defRPr sz="2000" b="1">
+                <a:solidFill>
+                  <a:srgbClr val="0F3B2E"/>
+                </a:solidFill>
+                <a:latin typeface="Arial"/>
+              </a:defRPr>
+            </a:pPr>
+            <a:r>
+              <a:t>Yield Preservation</a:t>
+            </a:r>
+          </a:p>
+          <a:p>
+            <a:pPr>
+              <a:spcBef>
+                <a:spcPts val="600"/>
+              </a:spcBef>
+              <a:defRPr sz="1500">
+                <a:solidFill>
+                  <a:srgbClr val="1E293B"/>
+                </a:solidFill>
+                <a:latin typeface="Arial"/>
+              </a:defRPr>
+            </a:pPr>
+            <a:r>
+              <a:t>• 48-72 hour lead time before active spore propagation.</a:t>
+            </a:r>
+          </a:p>
+          <a:p>
+            <a:pPr>
+              <a:spcBef>
+                <a:spcPts val="600"/>
+              </a:spcBef>
+              <a:defRPr sz="1500">
+                <a:solidFill>
+                  <a:srgbClr val="1E293B"/>
+                </a:solidFill>
+                <a:latin typeface="Arial"/>
+              </a:defRPr>
+            </a:pPr>
+            <a:r>
+              <a:t>• Rapid disease suppression preserves marketable crop.</a:t>
+            </a:r>
+          </a:p>
+          <a:p>
+            <a:pPr>
+              <a:spcBef>
+                <a:spcPts val="600"/>
+              </a:spcBef>
+              <a:defRPr sz="1500">
+                <a:solidFill>
+                  <a:srgbClr val="1E293B"/>
+                </a:solidFill>
+                <a:latin typeface="Arial"/>
+              </a:defRPr>
+            </a:pPr>
+            <a:r>
+              <a:t>• Protects harvest quality and seasonal farming revenue.</a:t>
+            </a:r>
+          </a:p>
+        </p:txBody>
+      </p:sp>
+      <p:sp>
+        <p:nvSpPr>
+          <p:cNvPr id="5" name="Rounded Rectangle 4"/>
+          <p:cNvSpPr/>
+          <p:nvPr/>
+        </p:nvSpPr>
+        <p:spPr>
+          <a:xfrm>
+            <a:off x="8046720" y="1645920"/>
+            <a:ext cx="3383280" cy="4572000"/>
+          </a:xfrm>
+          <a:prstGeom prst="roundRect">
+            <a:avLst/>
+          </a:prstGeom>
+          <a:solidFill>
+            <a:srgbClr val="F5F8F6"/>
+          </a:solidFill>
+          <a:ln w="19050">
+            <a:solidFill>
+              <a:srgbClr val="C8D7CD"/>
+            </a:solidFill>
+          </a:ln>
+        </p:spPr>
+        <p:style>
+          <a:lnRef idx="1">
+            <a:schemeClr val="accent1"/>
+          </a:lnRef>
+          <a:fillRef idx="3">
+            <a:schemeClr val="accent1"/>
+          </a:fillRef>
+          <a:effectRef idx="2">
+            <a:schemeClr val="accent1"/>
+          </a:effectRef>
+          <a:fontRef idx="minor">
+            <a:schemeClr val="lt1"/>
+          </a:fontRef>
+        </p:style>
+        <p:txBody>
+          <a:bodyPr rtlCol="0" anchor="ctr" wrap="square" lIns="228600" tIns="182880" rIns="228600"/>
+          <a:lstStyle/>
+          <a:p>
+            <a:pPr algn="ctr">
+              <a:defRPr sz="2000" b="1">
+                <a:solidFill>
+                  <a:srgbClr val="0F3B2E"/>
+                </a:solidFill>
+                <a:latin typeface="Arial"/>
+              </a:defRPr>
+            </a:pPr>
+            <a:r>
+              <a:t>Environmental Safety</a:t>
+            </a:r>
+          </a:p>
+          <a:p>
+            <a:pPr>
+              <a:spcBef>
+                <a:spcPts val="600"/>
+              </a:spcBef>
+              <a:defRPr sz="1500">
+                <a:solidFill>
+                  <a:srgbClr val="1E293B"/>
+                </a:solidFill>
+                <a:latin typeface="Arial"/>
+              </a:defRPr>
+            </a:pPr>
+            <a:r>
+              <a:t>• Curtails toxic groundwater chemical leaching.</a:t>
+            </a:r>
+          </a:p>
+          <a:p>
+            <a:pPr>
+              <a:spcBef>
+                <a:spcPts val="600"/>
+              </a:spcBef>
+              <a:defRPr sz="1500">
+                <a:solidFill>
+                  <a:srgbClr val="1E293B"/>
+                </a:solidFill>
+                <a:latin typeface="Arial"/>
+              </a:defRPr>
+            </a:pPr>
+            <a:r>
+              <a:t>• Preserves beneficial soil microbiome and pollinators.</a:t>
+            </a:r>
+          </a:p>
+          <a:p>
+            <a:pPr>
+              <a:spcBef>
+                <a:spcPts val="600"/>
+              </a:spcBef>
+              <a:defRPr sz="1500">
+                <a:solidFill>
+                  <a:srgbClr val="1E293B"/>
+                </a:solidFill>
+                <a:latin typeface="Arial"/>
+              </a:defRPr>
+            </a:pPr>
+            <a:r>
+              <a:t>• Prevents regional chemical resistance development.</a:t>
+            </a:r>
           </a:p>
         </p:txBody>
       </p:sp>
@@ -12659,11 +12753,14 @@
               <a:buSzPts val="3500"/>
               <a:buFont typeface="Times New Roman"/>
               <a:buNone/>
-            </a:pPr>
-            <a:r>
-              <a:rPr lang="en-US" sz="2400" b="1">
-                <a:sym typeface="Times New Roman"/>
-              </a:rPr>
+              <a:defRPr sz="2800" b="1">
+                <a:solidFill>
+                  <a:srgbClr val="0F3B2E"/>
+                </a:solidFill>
+                <a:latin typeface="Arial"/>
+              </a:defRPr>
+            </a:pPr>
+            <a:r>
               <a:t>Git Hub Link</a:t>
             </a:r>
             <a:endParaRPr sz="2400" b="1">
@@ -12674,493 +12771,152 @@
       </p:sp>
       <p:sp>
         <p:nvSpPr>
-          <p:cNvPr id="279" name="Google Shape;279;p18">
-            <a:extLst>
-              <a:ext uri="{FF2B5EF4-FFF2-40B4-BE49-F238E27FC236}">
-                <a16:creationId xmlns:a16="http://schemas.microsoft.com/office/drawing/2014/main" id="{3711AF54-94A6-B837-31EF-9A8C4ECB9AF6}"/>
-              </a:ext>
-            </a:extLst>
-          </p:cNvPr>
+          <p:cNvPr id="279" name="Rounded Rectangle 278"/>
           <p:cNvSpPr/>
           <p:nvPr/>
         </p:nvSpPr>
         <p:spPr>
           <a:xfrm>
-            <a:off x="1218724" y="1153712"/>
-            <a:ext cx="9214580" cy="4277001"/>
+            <a:off x="731520" y="1645920"/>
+            <a:ext cx="10698480" cy="4572000"/>
           </a:xfrm>
-          <a:prstGeom prst="rect">
+          <a:prstGeom prst="roundRect">
             <a:avLst/>
           </a:prstGeom>
-          <a:noFill/>
-          <a:ln>
-            <a:noFill/>
+          <a:solidFill>
+            <a:srgbClr val="F5F8F6"/>
+          </a:solidFill>
+          <a:ln w="19050">
+            <a:solidFill>
+              <a:srgbClr val="C8D7CD"/>
+            </a:solidFill>
           </a:ln>
         </p:spPr>
+        <p:style>
+          <a:lnRef idx="1">
+            <a:schemeClr val="accent1"/>
+          </a:lnRef>
+          <a:fillRef idx="3">
+            <a:schemeClr val="accent1"/>
+          </a:fillRef>
+          <a:effectRef idx="2">
+            <a:schemeClr val="accent1"/>
+          </a:effectRef>
+          <a:fontRef idx="minor">
+            <a:schemeClr val="lt1"/>
+          </a:fontRef>
+        </p:style>
         <p:txBody>
-          <a:bodyPr spcFirstLastPara="1" wrap="square" lIns="0" tIns="0" rIns="0" bIns="0" anchor="t" anchorCtr="0">
-            <a:noAutofit/>
-          </a:bodyPr>
+          <a:bodyPr rtlCol="0" anchor="ctr" wrap="square" lIns="274320" tIns="228600"/>
           <a:lstStyle/>
           <a:p>
-            <a:pPr marL="0" marR="0" lvl="0" indent="0" algn="l" rtl="0">
-              <a:lnSpc>
-                <a:spcPct val="162162"/>
-              </a:lnSpc>
-              <a:spcBef>
-                <a:spcPts val="0"/>
-              </a:spcBef>
-              <a:spcAft>
-                <a:spcPts val="0"/>
-              </a:spcAft>
-              <a:buClr>
-                <a:srgbClr val="2B3541"/>
-              </a:buClr>
-              <a:buSzPts val="1850"/>
-              <a:buFont typeface="Times New Roman"/>
-              <a:buNone/>
-            </a:pPr>
-            <a:r>
-              <a:rPr lang="en-US" sz="1850" b="0" i="0" u="none" strike="noStrike" cap="none">
-                <a:solidFill>
-                  <a:srgbClr val="2B3541"/>
-                </a:solidFill>
-                <a:latin typeface="Times New Roman"/>
-                <a:ea typeface="Times New Roman"/>
-                <a:cs typeface="Times New Roman"/>
-                <a:sym typeface="Times New Roman"/>
-              </a:rPr>
-              <a:t>Please create public </a:t>
-            </a:r>
-            <a:r>
-              <a:rPr lang="en-US" sz="1850" b="0" i="0" u="none" strike="noStrike" cap="none" dirty="0" err="1">
-                <a:solidFill>
-                  <a:srgbClr val="2B3541"/>
-                </a:solidFill>
-                <a:latin typeface="Times New Roman"/>
-                <a:ea typeface="Times New Roman"/>
-                <a:cs typeface="Times New Roman"/>
-                <a:sym typeface="Times New Roman"/>
-              </a:rPr>
-              <a:t>github</a:t>
-            </a:r>
-            <a:r>
-              <a:rPr lang="en-US" sz="1850" b="0" i="0" u="none" strike="noStrike" cap="none" dirty="0">
-                <a:solidFill>
-                  <a:srgbClr val="2B3541"/>
-                </a:solidFill>
-                <a:latin typeface="Times New Roman"/>
-                <a:ea typeface="Times New Roman"/>
-                <a:cs typeface="Times New Roman"/>
-                <a:sym typeface="Times New Roman"/>
-              </a:rPr>
-              <a:t> repository (Enable Add README  button while creating repository) with format – </a:t>
-            </a:r>
-          </a:p>
-          <a:p>
-            <a:pPr marL="0" marR="0" lvl="0" indent="0" algn="l" rtl="0">
-              <a:lnSpc>
-                <a:spcPct val="162162"/>
-              </a:lnSpc>
-              <a:spcBef>
-                <a:spcPts val="0"/>
-              </a:spcBef>
-              <a:spcAft>
-                <a:spcPts val="0"/>
-              </a:spcAft>
-              <a:buClr>
-                <a:srgbClr val="2B3541"/>
-              </a:buClr>
-              <a:buSzPts val="1850"/>
-              <a:buFont typeface="Times New Roman"/>
-              <a:buNone/>
-            </a:pPr>
-            <a:r>
-              <a:rPr lang="en-US" sz="1850" dirty="0">
-                <a:solidFill>
-                  <a:srgbClr val="2B3541"/>
-                </a:solidFill>
-                <a:latin typeface="Times New Roman"/>
-                <a:ea typeface="Times New Roman"/>
-                <a:cs typeface="Times New Roman"/>
-                <a:sym typeface="Times New Roman"/>
-              </a:rPr>
-              <a:t>Please test and Paste the working  </a:t>
-            </a:r>
-            <a:r>
-              <a:rPr lang="en-US" sz="1850" dirty="0" err="1">
-                <a:solidFill>
-                  <a:srgbClr val="2B3541"/>
-                </a:solidFill>
-                <a:latin typeface="Times New Roman"/>
-                <a:ea typeface="Times New Roman"/>
-                <a:cs typeface="Times New Roman"/>
-                <a:sym typeface="Times New Roman"/>
-              </a:rPr>
-              <a:t>Github</a:t>
-            </a:r>
-            <a:r>
-              <a:rPr lang="en-US" sz="1850" dirty="0">
-                <a:solidFill>
-                  <a:srgbClr val="2B3541"/>
-                </a:solidFill>
-                <a:latin typeface="Times New Roman"/>
-                <a:ea typeface="Times New Roman"/>
-                <a:cs typeface="Times New Roman"/>
-                <a:sym typeface="Times New Roman"/>
-              </a:rPr>
-              <a:t> URL –</a:t>
-            </a:r>
-            <a:endParaRPr lang="en-US" sz="1850" dirty="0">
-              <a:solidFill>
-                <a:srgbClr val="2B3541"/>
-              </a:solidFill>
-              <a:latin typeface="Times New Roman"/>
-              <a:ea typeface="Times New Roman"/>
-              <a:cs typeface="Times New Roman"/>
-            </a:endParaRPr>
-          </a:p>
-          <a:p>
-            <a:pPr lvl="0">
-              <a:lnSpc>
-                <a:spcPct val="162162"/>
-              </a:lnSpc>
-              <a:buClr>
-                <a:srgbClr val="2B3541"/>
-              </a:buClr>
-              <a:buSzPts val="1850"/>
-            </a:pPr>
-            <a:r>
-              <a:rPr lang="en-US" sz="1850" b="1" dirty="0">
-                <a:solidFill>
-                  <a:srgbClr val="2B3541"/>
-                </a:solidFill>
-                <a:latin typeface="Times New Roman"/>
-                <a:ea typeface="Times New Roman"/>
-                <a:cs typeface="Times New Roman"/>
-                <a:sym typeface="Times New Roman"/>
-              </a:rPr>
-              <a:t>Make sure you have Uploaded following three files into your </a:t>
-            </a:r>
-            <a:r>
-              <a:rPr lang="en-US" sz="1850" b="1" dirty="0" err="1">
-                <a:solidFill>
-                  <a:srgbClr val="2B3541"/>
-                </a:solidFill>
-                <a:latin typeface="Times New Roman"/>
-                <a:ea typeface="Times New Roman"/>
-                <a:cs typeface="Times New Roman"/>
-                <a:sym typeface="Times New Roman"/>
-              </a:rPr>
-              <a:t>github</a:t>
-            </a:r>
-            <a:r>
-              <a:rPr lang="en-US" sz="1850" b="1" dirty="0">
-                <a:solidFill>
-                  <a:srgbClr val="2B3541"/>
-                </a:solidFill>
-                <a:latin typeface="Times New Roman"/>
-                <a:ea typeface="Times New Roman"/>
-                <a:cs typeface="Times New Roman"/>
-                <a:sym typeface="Times New Roman"/>
-              </a:rPr>
-              <a:t> repository  </a:t>
-            </a:r>
-            <a:br>
-              <a:rPr lang="en-US" sz="1850" dirty="0">
-                <a:latin typeface="Times New Roman"/>
-                <a:ea typeface="Times New Roman"/>
-                <a:cs typeface="Times New Roman"/>
-              </a:rPr>
-            </a:br>
-            <a:r>
-              <a:rPr lang="en-US" sz="1850" dirty="0">
-                <a:solidFill>
-                  <a:srgbClr val="2B3541"/>
-                </a:solidFill>
-                <a:latin typeface="Times New Roman"/>
-                <a:ea typeface="Times New Roman"/>
-                <a:cs typeface="Times New Roman"/>
-                <a:sym typeface="Times New Roman"/>
-              </a:rPr>
-              <a:t>1) </a:t>
-            </a:r>
-            <a:r>
-              <a:rPr lang="en-US" sz="1850" dirty="0" err="1">
-                <a:solidFill>
-                  <a:srgbClr val="2B3541"/>
-                </a:solidFill>
-                <a:latin typeface="Times New Roman"/>
-                <a:ea typeface="Times New Roman"/>
-                <a:cs typeface="Times New Roman"/>
-                <a:sym typeface="Times New Roman"/>
-              </a:rPr>
-              <a:t>app.json</a:t>
-            </a:r>
-            <a:r>
-              <a:rPr lang="en-US" sz="1850" dirty="0">
-                <a:solidFill>
-                  <a:srgbClr val="2B3541"/>
-                </a:solidFill>
-                <a:latin typeface="Times New Roman"/>
-                <a:ea typeface="Times New Roman"/>
-                <a:cs typeface="Times New Roman"/>
-                <a:sym typeface="Times New Roman"/>
-              </a:rPr>
-              <a:t> file , 2) yourproblemstatement.pdf file  3) your projectpresntation.pptx file 4)any other files </a:t>
-            </a:r>
-            <a:endParaRPr lang="en-US" sz="1850" dirty="0">
-              <a:solidFill>
-                <a:srgbClr val="2B3541"/>
-              </a:solidFill>
-              <a:latin typeface="Times New Roman"/>
-              <a:ea typeface="Times New Roman"/>
-              <a:cs typeface="Times New Roman"/>
-            </a:endParaRPr>
-          </a:p>
-          <a:p>
-            <a:pPr marL="0" marR="0" lvl="0" indent="0" algn="l" rtl="0">
-              <a:lnSpc>
-                <a:spcPct val="162162"/>
-              </a:lnSpc>
-              <a:spcBef>
-                <a:spcPts val="0"/>
-              </a:spcBef>
-              <a:spcAft>
-                <a:spcPts val="0"/>
-              </a:spcAft>
-              <a:buClr>
-                <a:srgbClr val="2B3541"/>
-              </a:buClr>
-              <a:buSzPts val="1850"/>
-              <a:buFont typeface="Times New Roman"/>
-              <a:buNone/>
-            </a:pPr>
-            <a:endParaRPr sz="1850" b="0" i="0" u="none" strike="noStrike" cap="none">
-              <a:solidFill>
-                <a:srgbClr val="000000"/>
-              </a:solidFill>
-              <a:latin typeface="Times New Roman"/>
-              <a:ea typeface="Times New Roman"/>
-              <a:cs typeface="Times New Roman"/>
-              <a:sym typeface="Times New Roman"/>
-            </a:endParaRPr>
-          </a:p>
-        </p:txBody>
-      </p:sp>
-      <p:sp>
-        <p:nvSpPr>
-          <p:cNvPr id="280" name="Google Shape;280;p18">
-            <a:extLst>
-              <a:ext uri="{FF2B5EF4-FFF2-40B4-BE49-F238E27FC236}">
-                <a16:creationId xmlns:a16="http://schemas.microsoft.com/office/drawing/2014/main" id="{E228982D-BF81-530A-CBA1-E897A3CA8EF7}"/>
-              </a:ext>
-            </a:extLst>
-          </p:cNvPr>
-          <p:cNvSpPr/>
-          <p:nvPr/>
-        </p:nvSpPr>
-        <p:spPr>
-          <a:xfrm>
-            <a:off x="1218724" y="3360216"/>
-            <a:ext cx="7468553" cy="766048"/>
-          </a:xfrm>
-          <a:prstGeom prst="rect">
-            <a:avLst/>
-          </a:prstGeom>
-          <a:noFill/>
-          <a:ln>
-            <a:noFill/>
-          </a:ln>
-        </p:spPr>
-        <p:txBody>
-          <a:bodyPr spcFirstLastPara="1" wrap="square" lIns="0" tIns="0" rIns="0" bIns="0" anchor="t" anchorCtr="0">
-            <a:noAutofit/>
-          </a:bodyPr>
-          <a:lstStyle/>
-          <a:p>
-            <a:pPr marL="0" marR="0" lvl="0" indent="0" algn="l" rtl="0">
-              <a:lnSpc>
-                <a:spcPct val="162162"/>
-              </a:lnSpc>
-              <a:spcBef>
-                <a:spcPts val="0"/>
-              </a:spcBef>
-              <a:spcAft>
-                <a:spcPts val="0"/>
-              </a:spcAft>
-              <a:buClr>
-                <a:srgbClr val="2B3541"/>
-              </a:buClr>
-              <a:buSzPts val="1850"/>
-              <a:buFont typeface="Times New Roman"/>
-              <a:buNone/>
-            </a:pPr>
-            <a:r>
-              <a:rPr lang="en-US" sz="1850" b="0" i="0" u="none" strike="noStrike" cap="none">
-                <a:solidFill>
-                  <a:srgbClr val="2B3541"/>
-                </a:solidFill>
-                <a:latin typeface="Times New Roman"/>
-                <a:ea typeface="Times New Roman"/>
-                <a:cs typeface="Times New Roman"/>
-                <a:sym typeface="Times New Roman"/>
-              </a:rPr>
-              <a:t>·</a:t>
-            </a:r>
-            <a:endParaRPr sz="1850" b="0" i="0" u="none" strike="noStrike" cap="none">
-              <a:solidFill>
-                <a:srgbClr val="000000"/>
-              </a:solidFill>
-              <a:latin typeface="Times New Roman"/>
-              <a:ea typeface="Times New Roman"/>
-              <a:cs typeface="Times New Roman"/>
-              <a:sym typeface="Times New Roman"/>
-            </a:endParaRPr>
-          </a:p>
-        </p:txBody>
-      </p:sp>
-      <p:sp>
-        <p:nvSpPr>
-          <p:cNvPr id="281" name="Google Shape;281;p18">
-            <a:extLst>
-              <a:ext uri="{FF2B5EF4-FFF2-40B4-BE49-F238E27FC236}">
-                <a16:creationId xmlns:a16="http://schemas.microsoft.com/office/drawing/2014/main" id="{7BC356B8-92F8-3187-D065-667AACF68E72}"/>
-              </a:ext>
-            </a:extLst>
-          </p:cNvPr>
-          <p:cNvSpPr/>
-          <p:nvPr/>
-        </p:nvSpPr>
-        <p:spPr>
-          <a:xfrm>
-            <a:off x="1218724" y="4395464"/>
-            <a:ext cx="7468553" cy="766048"/>
-          </a:xfrm>
-          <a:prstGeom prst="rect">
-            <a:avLst/>
-          </a:prstGeom>
-          <a:noFill/>
-          <a:ln>
-            <a:noFill/>
-          </a:ln>
-        </p:spPr>
-        <p:txBody>
-          <a:bodyPr spcFirstLastPara="1" wrap="square" lIns="0" tIns="0" rIns="0" bIns="0" anchor="t" anchorCtr="0">
-            <a:noAutofit/>
-          </a:bodyPr>
-          <a:lstStyle/>
-          <a:p>
-            <a:pPr marL="0" marR="0" lvl="0" indent="0" algn="l" rtl="0">
-              <a:lnSpc>
-                <a:spcPct val="162162"/>
-              </a:lnSpc>
-              <a:spcBef>
-                <a:spcPts val="0"/>
-              </a:spcBef>
-              <a:spcAft>
-                <a:spcPts val="0"/>
-              </a:spcAft>
-              <a:buClr>
-                <a:srgbClr val="2B3541"/>
-              </a:buClr>
-              <a:buSzPts val="1850"/>
-              <a:buFont typeface="Times New Roman"/>
-              <a:buNone/>
-            </a:pPr>
-            <a:r>
-              <a:rPr lang="en-US" sz="1850" b="0" i="0" u="none" strike="noStrike" cap="none">
-                <a:solidFill>
-                  <a:srgbClr val="2B3541"/>
-                </a:solidFill>
-                <a:latin typeface="Times New Roman"/>
-                <a:ea typeface="Times New Roman"/>
-                <a:cs typeface="Times New Roman"/>
-                <a:sym typeface="Times New Roman"/>
-              </a:rPr>
-              <a:t>·</a:t>
-            </a:r>
-            <a:endParaRPr sz="1850" b="0" i="0" u="none" strike="noStrike" cap="none">
-              <a:solidFill>
-                <a:srgbClr val="000000"/>
-              </a:solidFill>
-              <a:latin typeface="Times New Roman"/>
-              <a:ea typeface="Times New Roman"/>
-              <a:cs typeface="Times New Roman"/>
-              <a:sym typeface="Times New Roman"/>
-            </a:endParaRPr>
-          </a:p>
-        </p:txBody>
-      </p:sp>
-      <p:sp>
-        <p:nvSpPr>
-          <p:cNvPr id="282" name="Google Shape;282;p18">
-            <a:extLst>
-              <a:ext uri="{FF2B5EF4-FFF2-40B4-BE49-F238E27FC236}">
-                <a16:creationId xmlns:a16="http://schemas.microsoft.com/office/drawing/2014/main" id="{1558A011-60D6-B010-6117-1B9F7C786B2B}"/>
-              </a:ext>
-            </a:extLst>
-          </p:cNvPr>
-          <p:cNvSpPr/>
-          <p:nvPr/>
-        </p:nvSpPr>
-        <p:spPr>
-          <a:xfrm>
-            <a:off x="1218724" y="5430713"/>
-            <a:ext cx="7468553" cy="383024"/>
-          </a:xfrm>
-          <a:prstGeom prst="rect">
-            <a:avLst/>
-          </a:prstGeom>
-          <a:noFill/>
-          <a:ln>
-            <a:noFill/>
-          </a:ln>
-        </p:spPr>
-        <p:txBody>
-          <a:bodyPr spcFirstLastPara="1" wrap="square" lIns="0" tIns="0" rIns="0" bIns="0" anchor="t" anchorCtr="0">
-            <a:noAutofit/>
-          </a:bodyPr>
-          <a:lstStyle/>
-          <a:p>
-            <a:pPr marL="0" marR="0" lvl="0" indent="0" algn="l" rtl="0">
-              <a:lnSpc>
-                <a:spcPct val="162162"/>
-              </a:lnSpc>
-              <a:spcBef>
-                <a:spcPts val="0"/>
-              </a:spcBef>
-              <a:spcAft>
-                <a:spcPts val="0"/>
-              </a:spcAft>
-              <a:buClr>
-                <a:srgbClr val="2B3541"/>
-              </a:buClr>
-              <a:buSzPts val="1850"/>
-              <a:buFont typeface="Times New Roman"/>
-              <a:buNone/>
-            </a:pPr>
-            <a:r>
-              <a:rPr lang="en-US" sz="1850" b="0" i="0" u="none" strike="noStrike" cap="none">
-                <a:solidFill>
-                  <a:srgbClr val="2B3541"/>
-                </a:solidFill>
-                <a:latin typeface="Times New Roman"/>
-                <a:ea typeface="Times New Roman"/>
-                <a:cs typeface="Times New Roman"/>
-                <a:sym typeface="Times New Roman"/>
-              </a:rPr>
-              <a:t>·</a:t>
-            </a:r>
-            <a:endParaRPr sz="1850" b="0" i="0" u="none" strike="noStrike" cap="none">
-              <a:solidFill>
-                <a:srgbClr val="000000"/>
-              </a:solidFill>
-              <a:latin typeface="Times New Roman"/>
-              <a:ea typeface="Times New Roman"/>
-              <a:cs typeface="Times New Roman"/>
-              <a:sym typeface="Times New Roman"/>
-            </a:endParaRPr>
+            <a:pPr algn="ctr">
+              <a:defRPr sz="2000" b="1">
+                <a:solidFill>
+                  <a:srgbClr val="0F3B2E"/>
+                </a:solidFill>
+                <a:latin typeface="Arial"/>
+              </a:defRPr>
+            </a:pPr>
+            <a:r>
+              <a:t>Repository URL:</a:t>
+            </a:r>
+          </a:p>
+          <a:p>
+            <a:pPr>
+              <a:spcAft>
+                <a:spcPts val="1400"/>
+              </a:spcAft>
+              <a:defRPr sz="2000" b="1">
+                <a:solidFill>
+                  <a:srgbClr val="0A66C2"/>
+                </a:solidFill>
+                <a:latin typeface="Arial"/>
+              </a:defRPr>
+            </a:pPr>
+            <a:r>
+              <a:t>https://github.com/swarna-builds/AgriSense-AI-IBM-Granite</a:t>
+            </a:r>
+          </a:p>
+          <a:p>
+            <a:pPr>
+              <a:spcBef>
+                <a:spcPts val="800"/>
+              </a:spcBef>
+              <a:defRPr sz="2000" b="1">
+                <a:solidFill>
+                  <a:srgbClr val="0F3B2E"/>
+                </a:solidFill>
+                <a:latin typeface="Arial"/>
+              </a:defRPr>
+            </a:pPr>
+            <a:r>
+              <a:t>Mandatory Deliverables Verified on Remote Main Branch:</a:t>
+            </a:r>
+          </a:p>
+          <a:p>
+            <a:pPr>
+              <a:spcBef>
+                <a:spcPts val="600"/>
+              </a:spcBef>
+              <a:defRPr sz="1800">
+                <a:solidFill>
+                  <a:srgbClr val="1E293B"/>
+                </a:solidFill>
+                <a:latin typeface="Arial"/>
+              </a:defRPr>
+            </a:pPr>
+            <a:r>
+              <a:t>• app.py &amp; app.json — Langflow agentic workflow manifest and service dependencies</a:t>
+            </a:r>
+          </a:p>
+          <a:p>
+            <a:pPr>
+              <a:spcBef>
+                <a:spcPts val="600"/>
+              </a:spcBef>
+              <a:defRPr sz="1800">
+                <a:solidFill>
+                  <a:srgbClr val="1E293B"/>
+                </a:solidFill>
+                <a:latin typeface="Arial"/>
+              </a:defRPr>
+            </a:pPr>
+            <a:r>
+              <a:t>• yourproblemstatement.pdf — Formal problem formulation &amp; ICAR objectives</a:t>
+            </a:r>
+          </a:p>
+          <a:p>
+            <a:pPr>
+              <a:spcBef>
+                <a:spcPts val="600"/>
+              </a:spcBef>
+              <a:defRPr sz="1800">
+                <a:solidFill>
+                  <a:srgbClr val="1E293B"/>
+                </a:solidFill>
+                <a:latin typeface="Arial"/>
+              </a:defRPr>
+            </a:pPr>
+            <a:r>
+              <a:t>• your projectpresntation.pptx — Complete technical deck and architectural artifacts</a:t>
+            </a:r>
+          </a:p>
+          <a:p>
+            <a:pPr>
+              <a:spcBef>
+                <a:spcPts val="600"/>
+              </a:spcBef>
+              <a:defRPr sz="1800">
+                <a:solidFill>
+                  <a:srgbClr val="1E293B"/>
+                </a:solidFill>
+                <a:latin typeface="Arial"/>
+              </a:defRPr>
+            </a:pPr>
+            <a:r>
+              <a:t>• Source Code Repository — core/, services/, and automated test suite</a:t>
+            </a:r>
           </a:p>
         </p:txBody>
       </p:sp>
@@ -13247,12 +13003,15 @@
               <a:buSzPts val="3500"/>
               <a:buFont typeface="Times New Roman"/>
               <a:buNone/>
-            </a:pPr>
-            <a:r>
-              <a:rPr lang="en-US" sz="2400" b="1">
-                <a:sym typeface="Times New Roman"/>
-              </a:rPr>
-              <a:t>Future Scope </a:t>
+              <a:defRPr sz="2800" b="1">
+                <a:solidFill>
+                  <a:srgbClr val="0F3B2E"/>
+                </a:solidFill>
+                <a:latin typeface="Arial"/>
+              </a:defRPr>
+            </a:pPr>
+            <a:r>
+              <a:t>Future Scope</a:t>
             </a:r>
             <a:endParaRPr sz="2400" b="1">
               <a:sym typeface="Times New Roman"/>
@@ -13262,406 +13021,358 @@
       </p:sp>
       <p:sp>
         <p:nvSpPr>
-          <p:cNvPr id="279" name="Google Shape;279;p18">
-            <a:extLst>
-              <a:ext uri="{FF2B5EF4-FFF2-40B4-BE49-F238E27FC236}">
-                <a16:creationId xmlns:a16="http://schemas.microsoft.com/office/drawing/2014/main" id="{EAFA16CB-0A72-5AC5-69A0-ABF4A752B43F}"/>
-              </a:ext>
-            </a:extLst>
-          </p:cNvPr>
+          <p:cNvPr id="279" name="Rounded Rectangle 278"/>
           <p:cNvSpPr/>
           <p:nvPr/>
         </p:nvSpPr>
         <p:spPr>
           <a:xfrm>
-            <a:off x="1218724" y="1221715"/>
-            <a:ext cx="9214580" cy="4277001"/>
+            <a:off x="731520" y="1645920"/>
+            <a:ext cx="3383280" cy="4572000"/>
           </a:xfrm>
-          <a:prstGeom prst="rect">
+          <a:prstGeom prst="roundRect">
             <a:avLst/>
           </a:prstGeom>
-          <a:noFill/>
-          <a:ln>
-            <a:noFill/>
+          <a:solidFill>
+            <a:srgbClr val="F5F8F6"/>
+          </a:solidFill>
+          <a:ln w="19050">
+            <a:solidFill>
+              <a:srgbClr val="C8D7CD"/>
+            </a:solidFill>
           </a:ln>
         </p:spPr>
+        <p:style>
+          <a:lnRef idx="1">
+            <a:schemeClr val="accent1"/>
+          </a:lnRef>
+          <a:fillRef idx="3">
+            <a:schemeClr val="accent1"/>
+          </a:fillRef>
+          <a:effectRef idx="2">
+            <a:schemeClr val="accent1"/>
+          </a:effectRef>
+          <a:fontRef idx="minor">
+            <a:schemeClr val="lt1"/>
+          </a:fontRef>
+        </p:style>
         <p:txBody>
-          <a:bodyPr spcFirstLastPara="1" wrap="square" lIns="0" tIns="0" rIns="0" bIns="0" anchor="t" anchorCtr="0">
-            <a:noAutofit/>
-          </a:bodyPr>
+          <a:bodyPr rtlCol="0" anchor="ctr" wrap="square" lIns="228600" tIns="182880" rIns="228600"/>
           <a:lstStyle/>
           <a:p>
-            <a:pPr marL="0" marR="0" lvl="0" indent="0" algn="l" rtl="0">
-              <a:lnSpc>
-                <a:spcPct val="162162"/>
-              </a:lnSpc>
-              <a:spcBef>
-                <a:spcPts val="0"/>
-              </a:spcBef>
-              <a:spcAft>
-                <a:spcPts val="0"/>
-              </a:spcAft>
-              <a:buClr>
-                <a:srgbClr val="2B3541"/>
-              </a:buClr>
-              <a:buSzPts val="1850"/>
-              <a:buFont typeface="Times New Roman"/>
-              <a:buNone/>
-            </a:pPr>
-            <a:r>
-              <a:rPr lang="en-US" sz="1850" b="1" i="0" u="none" strike="noStrike" cap="none">
-                <a:solidFill>
-                  <a:srgbClr val="2B3541"/>
-                </a:solidFill>
-                <a:latin typeface="Times New Roman"/>
-                <a:ea typeface="Times New Roman"/>
-                <a:cs typeface="Times New Roman"/>
-                <a:sym typeface="Times New Roman"/>
-              </a:rPr>
-              <a:t>1.Integration with Wearables &amp; Health Devices – </a:t>
-            </a:r>
-          </a:p>
-          <a:p>
-            <a:pPr marL="0" marR="0" lvl="0" indent="0" algn="l" rtl="0">
-              <a:lnSpc>
-                <a:spcPct val="162162"/>
-              </a:lnSpc>
-              <a:spcBef>
-                <a:spcPts val="0"/>
-              </a:spcBef>
-              <a:spcAft>
-                <a:spcPts val="0"/>
-              </a:spcAft>
-              <a:buClr>
-                <a:srgbClr val="2B3541"/>
-              </a:buClr>
-              <a:buSzPts val="1850"/>
-              <a:buFont typeface="Times New Roman"/>
-              <a:buNone/>
-            </a:pPr>
-            <a:r>
-              <a:rPr lang="en-US" sz="1850" b="0" i="0" u="none" strike="noStrike" cap="none">
-                <a:solidFill>
-                  <a:srgbClr val="2B3541"/>
-                </a:solidFill>
-                <a:latin typeface="Times New Roman"/>
-                <a:ea typeface="Times New Roman"/>
-                <a:cs typeface="Times New Roman"/>
-                <a:sym typeface="Times New Roman"/>
-              </a:rPr>
-              <a:t>The system can be integrated with smartwatches and fitness trackers to collect real-time data such as steps, calories burned, heart rate, and sleep patterns. This will enable the Nutrition Agent to provide more accurate and dynamic diet recommendations based on actual user activity and health metrics.</a:t>
-            </a:r>
-          </a:p>
-          <a:p>
-            <a:pPr marL="0" marR="0" lvl="0" indent="0" algn="l" rtl="0">
-              <a:lnSpc>
-                <a:spcPct val="162162"/>
-              </a:lnSpc>
-              <a:spcBef>
-                <a:spcPts val="0"/>
-              </a:spcBef>
-              <a:spcAft>
-                <a:spcPts val="0"/>
-              </a:spcAft>
-              <a:buClr>
-                <a:srgbClr val="2B3541"/>
-              </a:buClr>
-              <a:buSzPts val="1850"/>
-              <a:buFont typeface="Times New Roman"/>
-              <a:buNone/>
-            </a:pPr>
-            <a:r>
-              <a:rPr lang="en-US" sz="1850" b="1">
-                <a:solidFill>
-                  <a:srgbClr val="2B3541"/>
-                </a:solidFill>
-                <a:latin typeface="Times New Roman"/>
-                <a:ea typeface="Times New Roman"/>
-                <a:cs typeface="Times New Roman"/>
-                <a:sym typeface="Times New Roman"/>
-              </a:rPr>
-              <a:t>2.</a:t>
-            </a:r>
-            <a:r>
-              <a:rPr lang="en-US" sz="1850" b="1" i="0" u="none" strike="noStrike" cap="none">
-                <a:solidFill>
-                  <a:srgbClr val="2B3541"/>
-                </a:solidFill>
-                <a:latin typeface="Times New Roman"/>
-                <a:ea typeface="Times New Roman"/>
-                <a:cs typeface="Times New Roman"/>
-                <a:sym typeface="Times New Roman"/>
-              </a:rPr>
-              <a:t>AI-Powered Voice Assistant &amp; Multilingual Support </a:t>
-            </a:r>
-            <a:r>
-              <a:rPr lang="en-US" sz="1850" b="0" i="0" u="none" strike="noStrike" cap="none">
-                <a:solidFill>
-                  <a:srgbClr val="2B3541"/>
-                </a:solidFill>
-                <a:latin typeface="Times New Roman"/>
-                <a:ea typeface="Times New Roman"/>
-                <a:cs typeface="Times New Roman"/>
-                <a:sym typeface="Times New Roman"/>
-              </a:rPr>
-              <a:t>– </a:t>
-            </a:r>
-          </a:p>
-          <a:p>
-            <a:pPr marL="0" marR="0" lvl="0" indent="0" algn="l" rtl="0">
-              <a:lnSpc>
-                <a:spcPct val="162162"/>
-              </a:lnSpc>
-              <a:spcBef>
-                <a:spcPts val="0"/>
-              </a:spcBef>
-              <a:spcAft>
-                <a:spcPts val="0"/>
-              </a:spcAft>
-              <a:buClr>
-                <a:srgbClr val="2B3541"/>
-              </a:buClr>
-              <a:buSzPts val="1850"/>
-              <a:buFont typeface="Times New Roman"/>
-              <a:buNone/>
-            </a:pPr>
-            <a:r>
-              <a:rPr lang="en-US" sz="1850" b="0" i="0" u="none" strike="noStrike" cap="none">
-                <a:solidFill>
-                  <a:srgbClr val="2B3541"/>
-                </a:solidFill>
-                <a:latin typeface="Times New Roman"/>
-                <a:ea typeface="Times New Roman"/>
-                <a:cs typeface="Times New Roman"/>
-                <a:sym typeface="Times New Roman"/>
-              </a:rPr>
-              <a:t>Enhancing the system with a voice-enabled assistant and support for multiple languages will improve accessibility. Users can interact naturally in their preferred language, making the solution more inclusive and suitable for diverse populations, especially in regions with varied linguistic backgrounds.</a:t>
-            </a:r>
-            <a:endParaRPr sz="1850" b="0" i="0" u="none" strike="noStrike" cap="none">
-              <a:solidFill>
-                <a:srgbClr val="000000"/>
-              </a:solidFill>
-              <a:latin typeface="Times New Roman"/>
-              <a:ea typeface="Times New Roman"/>
-              <a:cs typeface="Times New Roman"/>
-              <a:sym typeface="Times New Roman"/>
-            </a:endParaRPr>
+            <a:pPr algn="ctr">
+              <a:defRPr sz="2000" b="1">
+                <a:solidFill>
+                  <a:srgbClr val="0F3B2E"/>
+                </a:solidFill>
+                <a:latin typeface="Arial"/>
+              </a:defRPr>
+            </a:pPr>
+            <a:r>
+              <a:t>Phase 1: Delivered Platform</a:t>
+            </a:r>
+          </a:p>
+          <a:p>
+            <a:pPr>
+              <a:spcBef>
+                <a:spcPts val="600"/>
+              </a:spcBef>
+              <a:defRPr sz="1500">
+                <a:solidFill>
+                  <a:srgbClr val="1E293B"/>
+                </a:solidFill>
+                <a:latin typeface="Arial"/>
+              </a:defRPr>
+            </a:pPr>
+            <a:r>
+              <a:t>• Deployed Granite-4-H-Small agronomic engine.</a:t>
+            </a:r>
+          </a:p>
+          <a:p>
+            <a:pPr>
+              <a:spcBef>
+                <a:spcPts val="600"/>
+              </a:spcBef>
+              <a:defRPr sz="1500">
+                <a:solidFill>
+                  <a:srgbClr val="1E293B"/>
+                </a:solidFill>
+                <a:latin typeface="Arial"/>
+              </a:defRPr>
+            </a:pPr>
+            <a:r>
+              <a:t>• Validated ICAR-grounded vector RAG retrieval.</a:t>
+            </a:r>
+          </a:p>
+          <a:p>
+            <a:pPr>
+              <a:spcBef>
+                <a:spcPts val="600"/>
+              </a:spcBef>
+              <a:defRPr sz="1500">
+                <a:solidFill>
+                  <a:srgbClr val="1E293B"/>
+                </a:solidFill>
+                <a:latin typeface="Arial"/>
+              </a:defRPr>
+            </a:pPr>
+            <a:r>
+              <a:t>• Multi-modal Langflow agentic workflow.</a:t>
+            </a:r>
+          </a:p>
+          <a:p>
+            <a:pPr>
+              <a:spcBef>
+                <a:spcPts val="600"/>
+              </a:spcBef>
+              <a:defRPr sz="1500">
+                <a:solidFill>
+                  <a:srgbClr val="1E293B"/>
+                </a:solidFill>
+                <a:latin typeface="Arial"/>
+              </a:defRPr>
+            </a:pPr>
+            <a:r>
+              <a:t>• Quad-language vernacular text-to-speech.</a:t>
+            </a:r>
           </a:p>
         </p:txBody>
       </p:sp>
       <p:sp>
         <p:nvSpPr>
-          <p:cNvPr id="280" name="Google Shape;280;p18">
-            <a:extLst>
-              <a:ext uri="{FF2B5EF4-FFF2-40B4-BE49-F238E27FC236}">
-                <a16:creationId xmlns:a16="http://schemas.microsoft.com/office/drawing/2014/main" id="{B888011B-E4AC-77DB-4A60-BE2C891C49F5}"/>
-              </a:ext>
-            </a:extLst>
-          </p:cNvPr>
+          <p:cNvPr id="280" name="Rounded Rectangle 279"/>
           <p:cNvSpPr/>
           <p:nvPr/>
         </p:nvSpPr>
         <p:spPr>
           <a:xfrm>
-            <a:off x="1218724" y="3360216"/>
-            <a:ext cx="7468553" cy="766048"/>
+            <a:off x="4389120" y="1645920"/>
+            <a:ext cx="3383280" cy="4572000"/>
           </a:xfrm>
-          <a:prstGeom prst="rect">
+          <a:prstGeom prst="roundRect">
             <a:avLst/>
           </a:prstGeom>
-          <a:noFill/>
-          <a:ln>
-            <a:noFill/>
+          <a:solidFill>
+            <a:srgbClr val="F5F8F6"/>
+          </a:solidFill>
+          <a:ln w="19050">
+            <a:solidFill>
+              <a:srgbClr val="C8D7CD"/>
+            </a:solidFill>
           </a:ln>
         </p:spPr>
+        <p:style>
+          <a:lnRef idx="1">
+            <a:schemeClr val="accent1"/>
+          </a:lnRef>
+          <a:fillRef idx="3">
+            <a:schemeClr val="accent1"/>
+          </a:fillRef>
+          <a:effectRef idx="2">
+            <a:schemeClr val="accent1"/>
+          </a:effectRef>
+          <a:fontRef idx="minor">
+            <a:schemeClr val="lt1"/>
+          </a:fontRef>
+        </p:style>
         <p:txBody>
-          <a:bodyPr spcFirstLastPara="1" wrap="square" lIns="0" tIns="0" rIns="0" bIns="0" anchor="t" anchorCtr="0">
-            <a:noAutofit/>
-          </a:bodyPr>
+          <a:bodyPr rtlCol="0" anchor="ctr" wrap="square" lIns="228600" tIns="182880" rIns="228600"/>
           <a:lstStyle/>
           <a:p>
-            <a:pPr marL="0" marR="0" lvl="0" indent="0" algn="l" rtl="0">
-              <a:lnSpc>
-                <a:spcPct val="162162"/>
-              </a:lnSpc>
-              <a:spcBef>
-                <a:spcPts val="0"/>
-              </a:spcBef>
-              <a:spcAft>
-                <a:spcPts val="0"/>
-              </a:spcAft>
-              <a:buClr>
-                <a:srgbClr val="2B3541"/>
-              </a:buClr>
-              <a:buSzPts val="1850"/>
-              <a:buFont typeface="Times New Roman"/>
-              <a:buNone/>
-            </a:pPr>
-            <a:r>
-              <a:rPr lang="en-US" sz="1850" b="0" i="0" u="none" strike="noStrike" cap="none">
-                <a:solidFill>
-                  <a:srgbClr val="2B3541"/>
-                </a:solidFill>
-                <a:latin typeface="Times New Roman"/>
-                <a:ea typeface="Times New Roman"/>
-                <a:cs typeface="Times New Roman"/>
-                <a:sym typeface="Times New Roman"/>
-              </a:rPr>
-              <a:t>·</a:t>
-            </a:r>
-            <a:endParaRPr sz="1850" b="0" i="0" u="none" strike="noStrike" cap="none">
-              <a:solidFill>
-                <a:srgbClr val="000000"/>
-              </a:solidFill>
-              <a:latin typeface="Times New Roman"/>
-              <a:ea typeface="Times New Roman"/>
-              <a:cs typeface="Times New Roman"/>
-              <a:sym typeface="Times New Roman"/>
-            </a:endParaRPr>
+            <a:pPr algn="ctr">
+              <a:defRPr sz="2000" b="1">
+                <a:solidFill>
+                  <a:srgbClr val="0F3B2E"/>
+                </a:solidFill>
+                <a:latin typeface="Arial"/>
+              </a:defRPr>
+            </a:pPr>
+            <a:r>
+              <a:t>Phase 2: IoT Sensor Ingestion</a:t>
+            </a:r>
+          </a:p>
+          <a:p>
+            <a:pPr>
+              <a:spcBef>
+                <a:spcPts val="600"/>
+              </a:spcBef>
+              <a:defRPr sz="1500">
+                <a:solidFill>
+                  <a:srgbClr val="1E293B"/>
+                </a:solidFill>
+                <a:latin typeface="Arial"/>
+              </a:defRPr>
+            </a:pPr>
+            <a:r>
+              <a:t>• Integrate LoRaWAN field probes for soil N-P-K.</a:t>
+            </a:r>
+          </a:p>
+          <a:p>
+            <a:pPr>
+              <a:spcBef>
+                <a:spcPts val="600"/>
+              </a:spcBef>
+              <a:defRPr sz="1500">
+                <a:solidFill>
+                  <a:srgbClr val="1E293B"/>
+                </a:solidFill>
+                <a:latin typeface="Arial"/>
+              </a:defRPr>
+            </a:pPr>
+            <a:r>
+              <a:t>• Ingest live leaf wetness and soil moisture levels.</a:t>
+            </a:r>
+          </a:p>
+          <a:p>
+            <a:pPr>
+              <a:spcBef>
+                <a:spcPts val="600"/>
+              </a:spcBef>
+              <a:defRPr sz="1500">
+                <a:solidFill>
+                  <a:srgbClr val="1E293B"/>
+                </a:solidFill>
+                <a:latin typeface="Arial"/>
+              </a:defRPr>
+            </a:pPr>
+            <a:r>
+              <a:t>• Micro-climate prediction models at farm level.</a:t>
+            </a:r>
+          </a:p>
+          <a:p>
+            <a:pPr>
+              <a:spcBef>
+                <a:spcPts val="600"/>
+              </a:spcBef>
+              <a:defRPr sz="1500">
+                <a:solidFill>
+                  <a:srgbClr val="1E293B"/>
+                </a:solidFill>
+                <a:latin typeface="Arial"/>
+              </a:defRPr>
+            </a:pPr>
+            <a:r>
+              <a:t>• Direct drone multispectral aerial data feeds.</a:t>
+            </a:r>
           </a:p>
         </p:txBody>
       </p:sp>
       <p:sp>
         <p:nvSpPr>
-          <p:cNvPr id="281" name="Google Shape;281;p18">
-            <a:extLst>
-              <a:ext uri="{FF2B5EF4-FFF2-40B4-BE49-F238E27FC236}">
-                <a16:creationId xmlns:a16="http://schemas.microsoft.com/office/drawing/2014/main" id="{91F05971-9256-10B5-6575-4E7C679C6DAA}"/>
-              </a:ext>
-            </a:extLst>
-          </p:cNvPr>
+          <p:cNvPr id="281" name="Rounded Rectangle 280"/>
           <p:cNvSpPr/>
           <p:nvPr/>
         </p:nvSpPr>
         <p:spPr>
           <a:xfrm>
-            <a:off x="1218724" y="4395464"/>
-            <a:ext cx="7468553" cy="766048"/>
+            <a:off x="8046720" y="1645920"/>
+            <a:ext cx="3383280" cy="4572000"/>
           </a:xfrm>
-          <a:prstGeom prst="rect">
+          <a:prstGeom prst="roundRect">
             <a:avLst/>
           </a:prstGeom>
-          <a:noFill/>
-          <a:ln>
-            <a:noFill/>
+          <a:solidFill>
+            <a:srgbClr val="F5F8F6"/>
+          </a:solidFill>
+          <a:ln w="19050">
+            <a:solidFill>
+              <a:srgbClr val="C8D7CD"/>
+            </a:solidFill>
           </a:ln>
         </p:spPr>
+        <p:style>
+          <a:lnRef idx="1">
+            <a:schemeClr val="accent1"/>
+          </a:lnRef>
+          <a:fillRef idx="3">
+            <a:schemeClr val="accent1"/>
+          </a:fillRef>
+          <a:effectRef idx="2">
+            <a:schemeClr val="accent1"/>
+          </a:effectRef>
+          <a:fontRef idx="minor">
+            <a:schemeClr val="lt1"/>
+          </a:fontRef>
+        </p:style>
         <p:txBody>
-          <a:bodyPr spcFirstLastPara="1" wrap="square" lIns="0" tIns="0" rIns="0" bIns="0" anchor="t" anchorCtr="0">
-            <a:noAutofit/>
-          </a:bodyPr>
+          <a:bodyPr rtlCol="0" anchor="ctr" wrap="square" lIns="228600" tIns="182880" rIns="228600"/>
           <a:lstStyle/>
           <a:p>
-            <a:pPr marL="0" marR="0" lvl="0" indent="0" algn="l" rtl="0">
-              <a:lnSpc>
-                <a:spcPct val="162162"/>
-              </a:lnSpc>
-              <a:spcBef>
-                <a:spcPts val="0"/>
-              </a:spcBef>
-              <a:spcAft>
-                <a:spcPts val="0"/>
-              </a:spcAft>
-              <a:buClr>
-                <a:srgbClr val="2B3541"/>
-              </a:buClr>
-              <a:buSzPts val="1850"/>
-              <a:buFont typeface="Times New Roman"/>
-              <a:buNone/>
-            </a:pPr>
-            <a:r>
-              <a:rPr lang="en-US" sz="1850" b="0" i="0" u="none" strike="noStrike" cap="none">
-                <a:solidFill>
-                  <a:srgbClr val="2B3541"/>
-                </a:solidFill>
-                <a:latin typeface="Times New Roman"/>
-                <a:ea typeface="Times New Roman"/>
-                <a:cs typeface="Times New Roman"/>
-                <a:sym typeface="Times New Roman"/>
-              </a:rPr>
-              <a:t>·</a:t>
-            </a:r>
-            <a:endParaRPr sz="1850" b="0" i="0" u="none" strike="noStrike" cap="none">
-              <a:solidFill>
-                <a:srgbClr val="000000"/>
-              </a:solidFill>
-              <a:latin typeface="Times New Roman"/>
-              <a:ea typeface="Times New Roman"/>
-              <a:cs typeface="Times New Roman"/>
-              <a:sym typeface="Times New Roman"/>
-            </a:endParaRPr>
-          </a:p>
-        </p:txBody>
-      </p:sp>
-      <p:sp>
-        <p:nvSpPr>
-          <p:cNvPr id="282" name="Google Shape;282;p18">
-            <a:extLst>
-              <a:ext uri="{FF2B5EF4-FFF2-40B4-BE49-F238E27FC236}">
-                <a16:creationId xmlns:a16="http://schemas.microsoft.com/office/drawing/2014/main" id="{F1C3EBC2-438F-C150-9ABF-F14321C2CC5C}"/>
-              </a:ext>
-            </a:extLst>
-          </p:cNvPr>
-          <p:cNvSpPr/>
-          <p:nvPr/>
-        </p:nvSpPr>
-        <p:spPr>
-          <a:xfrm>
-            <a:off x="1218724" y="5430713"/>
-            <a:ext cx="7468553" cy="383024"/>
-          </a:xfrm>
-          <a:prstGeom prst="rect">
-            <a:avLst/>
-          </a:prstGeom>
-          <a:noFill/>
-          <a:ln>
-            <a:noFill/>
-          </a:ln>
-        </p:spPr>
-        <p:txBody>
-          <a:bodyPr spcFirstLastPara="1" wrap="square" lIns="0" tIns="0" rIns="0" bIns="0" anchor="t" anchorCtr="0">
-            <a:noAutofit/>
-          </a:bodyPr>
-          <a:lstStyle/>
-          <a:p>
-            <a:pPr marL="0" marR="0" lvl="0" indent="0" algn="l" rtl="0">
-              <a:lnSpc>
-                <a:spcPct val="162162"/>
-              </a:lnSpc>
-              <a:spcBef>
-                <a:spcPts val="0"/>
-              </a:spcBef>
-              <a:spcAft>
-                <a:spcPts val="0"/>
-              </a:spcAft>
-              <a:buClr>
-                <a:srgbClr val="2B3541"/>
-              </a:buClr>
-              <a:buSzPts val="1850"/>
-              <a:buFont typeface="Times New Roman"/>
-              <a:buNone/>
-            </a:pPr>
-            <a:r>
-              <a:rPr lang="en-US" sz="1850" b="0" i="0" u="none" strike="noStrike" cap="none">
-                <a:solidFill>
-                  <a:srgbClr val="2B3541"/>
-                </a:solidFill>
-                <a:latin typeface="Times New Roman"/>
-                <a:ea typeface="Times New Roman"/>
-                <a:cs typeface="Times New Roman"/>
-                <a:sym typeface="Times New Roman"/>
-              </a:rPr>
-              <a:t>·</a:t>
-            </a:r>
-            <a:endParaRPr sz="1850" b="0" i="0" u="none" strike="noStrike" cap="none">
-              <a:solidFill>
-                <a:srgbClr val="000000"/>
-              </a:solidFill>
-              <a:latin typeface="Times New Roman"/>
-              <a:ea typeface="Times New Roman"/>
-              <a:cs typeface="Times New Roman"/>
-              <a:sym typeface="Times New Roman"/>
-            </a:endParaRPr>
+            <a:pPr algn="ctr">
+              <a:defRPr sz="2000" b="1">
+                <a:solidFill>
+                  <a:srgbClr val="0F3B2E"/>
+                </a:solidFill>
+                <a:latin typeface="Arial"/>
+              </a:defRPr>
+            </a:pPr>
+            <a:r>
+              <a:t>Phase 3: Edge Deployment</a:t>
+            </a:r>
+          </a:p>
+          <a:p>
+            <a:pPr>
+              <a:spcBef>
+                <a:spcPts val="600"/>
+              </a:spcBef>
+              <a:defRPr sz="1500">
+                <a:solidFill>
+                  <a:srgbClr val="1E293B"/>
+                </a:solidFill>
+                <a:latin typeface="Arial"/>
+              </a:defRPr>
+            </a:pPr>
+            <a:r>
+              <a:t>• Quantized Granite-4-H-Small on local gateway devices.</a:t>
+            </a:r>
+          </a:p>
+          <a:p>
+            <a:pPr>
+              <a:spcBef>
+                <a:spcPts val="600"/>
+              </a:spcBef>
+              <a:defRPr sz="1500">
+                <a:solidFill>
+                  <a:srgbClr val="1E293B"/>
+                </a:solidFill>
+                <a:latin typeface="Arial"/>
+              </a:defRPr>
+            </a:pPr>
+            <a:r>
+              <a:t>• Offline inference for zero-connectivity regions.</a:t>
+            </a:r>
+          </a:p>
+          <a:p>
+            <a:pPr>
+              <a:spcBef>
+                <a:spcPts val="600"/>
+              </a:spcBef>
+              <a:defRPr sz="1500">
+                <a:solidFill>
+                  <a:srgbClr val="1E293B"/>
+                </a:solidFill>
+                <a:latin typeface="Arial"/>
+              </a:defRPr>
+            </a:pPr>
+            <a:r>
+              <a:t>• Autonomous smart-valve drip irrigation control.</a:t>
+            </a:r>
+          </a:p>
+          <a:p>
+            <a:pPr>
+              <a:spcBef>
+                <a:spcPts val="600"/>
+              </a:spcBef>
+              <a:defRPr sz="1500">
+                <a:solidFill>
+                  <a:srgbClr val="1E293B"/>
+                </a:solidFill>
+                <a:latin typeface="Arial"/>
+              </a:defRPr>
+            </a:pPr>
+            <a:r>
+              <a:t>• Cooperative market price intelligence integration.</a:t>
+            </a:r>
           </a:p>
         </p:txBody>
       </p:sp>
@@ -13726,79 +13437,42 @@
           </a:bodyPr>
           <a:lstStyle/>
           <a:p>
-            <a:r>
-              <a:rPr lang="en-US" sz="2400" b="1"/>
-              <a:t>Certificates Earned:</a:t>
+            <a:pPr algn="l">
+              <a:defRPr sz="2800" b="1">
+                <a:solidFill>
+                  <a:srgbClr val="0F3B2E"/>
+                </a:solidFill>
+                <a:latin typeface="Arial"/>
+              </a:defRPr>
+            </a:pPr>
+            <a:r>
+              <a:t>IBM SkillsBuild Completion Certificate</a:t>
             </a:r>
           </a:p>
           <a:p>
             <a:pPr algn="ctr"/>
             <a:endParaRPr lang="en-US"/>
-          </a:p>
-        </p:txBody>
-      </p:sp>
-      <p:sp>
-        <p:nvSpPr>
-          <p:cNvPr id="3" name="TextBox 2">
-            <a:extLst>
-              <a:ext uri="{FF2B5EF4-FFF2-40B4-BE49-F238E27FC236}">
-                <a16:creationId xmlns:a16="http://schemas.microsoft.com/office/drawing/2014/main" id="{4837D5EE-379B-FDC5-0854-8AC81D31FADF}"/>
-              </a:ext>
-            </a:extLst>
-          </p:cNvPr>
-          <p:cNvSpPr txBox="1"/>
-          <p:nvPr/>
-        </p:nvSpPr>
-        <p:spPr>
-          <a:xfrm>
-            <a:off x="552048" y="690061"/>
-            <a:ext cx="6389965" cy="523220"/>
-          </a:xfrm>
-          <a:prstGeom prst="rect">
-            <a:avLst/>
-          </a:prstGeom>
-          <a:noFill/>
-        </p:spPr>
-        <p:txBody>
-          <a:bodyPr rot="0" spcFirstLastPara="0" vertOverflow="overflow" horzOverflow="overflow" vert="horz" wrap="square" lIns="91440" tIns="45720" rIns="91440" bIns="45720" numCol="1" spcCol="0" rtlCol="0" fromWordArt="0" anchor="t" anchorCtr="0" forceAA="0" compatLnSpc="1">
-            <a:prstTxWarp prst="textNoShape">
-              <a:avLst/>
-            </a:prstTxWarp>
-            <a:spAutoFit/>
-          </a:bodyPr>
-          <a:lstStyle/>
-          <a:p>
-            <a:r>
-              <a:rPr lang="en-US" sz="2800" b="1"/>
-              <a:t>Please  add your credly certificate </a:t>
-            </a:r>
           </a:p>
         </p:txBody>
       </p:sp>
       <p:pic>
         <p:nvPicPr>
-          <p:cNvPr id="4" name="Picture 3" descr="A screen shot of a computer&#10;&#10;AI-generated content may be incorrect.">
-            <a:extLst>
-              <a:ext uri="{FF2B5EF4-FFF2-40B4-BE49-F238E27FC236}">
-                <a16:creationId xmlns:a16="http://schemas.microsoft.com/office/drawing/2014/main" id="{A037CFD0-B7FF-D9BE-3433-88E5844EF332}"/>
-              </a:ext>
-            </a:extLst>
-          </p:cNvPr>
+          <p:cNvPr id="7" name="Picture 6" descr="skillsbuild_cert.png"/>
           <p:cNvPicPr>
             <a:picLocks noChangeAspect="1"/>
           </p:cNvPicPr>
           <p:nvPr/>
         </p:nvPicPr>
         <p:blipFill>
-          <a:blip r:embed="rId2"/>
+          <a:blip r:embed="rId3"/>
           <a:stretch>
             <a:fillRect/>
           </a:stretch>
         </p:blipFill>
         <p:spPr>
           <a:xfrm>
-            <a:off x="2553442" y="1343396"/>
-            <a:ext cx="7075219" cy="5309259"/>
+            <a:off x="1371600" y="1645920"/>
+            <a:ext cx="9418320" cy="7254270"/>
           </a:xfrm>
           <a:prstGeom prst="rect">
             <a:avLst/>
@@ -13866,103 +13540,30 @@
           </a:prstGeom>
         </p:spPr>
       </p:pic>
-      <p:sp>
-        <p:nvSpPr>
-          <p:cNvPr id="5" name="TextBox 4">
-            <a:extLst>
-              <a:ext uri="{FF2B5EF4-FFF2-40B4-BE49-F238E27FC236}">
-                <a16:creationId xmlns:a16="http://schemas.microsoft.com/office/drawing/2014/main" id="{CA8544A9-CF92-3FAF-D3EE-31DF90F7A64D}"/>
-              </a:ext>
-            </a:extLst>
-          </p:cNvPr>
-          <p:cNvSpPr txBox="1"/>
+      <p:pic>
+        <p:nvPicPr>
+          <p:cNvPr id="5" name="Picture 4" descr="bob_cert.png"/>
+          <p:cNvPicPr>
+            <a:picLocks noChangeAspect="1"/>
+          </p:cNvPicPr>
           <p:nvPr/>
-        </p:nvSpPr>
+        </p:nvPicPr>
+        <p:blipFill>
+          <a:blip r:embed="rId3"/>
+          <a:stretch>
+            <a:fillRect/>
+          </a:stretch>
+        </p:blipFill>
         <p:spPr>
           <a:xfrm>
-            <a:off x="176696" y="226391"/>
-            <a:ext cx="6096000" cy="677108"/>
+            <a:off x="1371600" y="1645920"/>
+            <a:ext cx="9418320" cy="6644723"/>
           </a:xfrm>
           <a:prstGeom prst="rect">
             <a:avLst/>
           </a:prstGeom>
-          <a:noFill/>
         </p:spPr>
-        <p:txBody>
-          <a:bodyPr rot="0" spcFirstLastPara="0" vertOverflow="overflow" horzOverflow="overflow" vert="horz" wrap="square" lIns="91440" tIns="45720" rIns="91440" bIns="45720" numCol="1" spcCol="0" rtlCol="0" fromWordArt="0" anchor="t" anchorCtr="0" forceAA="0" compatLnSpc="1">
-            <a:prstTxWarp prst="textNoShape">
-              <a:avLst/>
-            </a:prstTxWarp>
-            <a:spAutoFit/>
-          </a:bodyPr>
-          <a:lstStyle/>
-          <a:p>
-            <a:r>
-              <a:rPr lang="en-US" sz="2400" b="1" i="0" u="none" strike="noStrike" baseline="0">
-                <a:solidFill>
-                  <a:srgbClr val="000000"/>
-                </a:solidFill>
-                <a:latin typeface="Arial"/>
-              </a:rPr>
-              <a:t>Certificates Earned:</a:t>
-            </a:r>
-            <a:r>
-              <a:rPr sz="2400" b="0" i="0">
-                <a:solidFill>
-                  <a:srgbClr val="000000"/>
-                </a:solidFill>
-                <a:latin typeface="Arial"/>
-                <a:ea typeface="Arial"/>
-                <a:cs typeface="Arial"/>
-              </a:rPr>
-              <a:t>​</a:t>
-            </a:r>
-            <a:endParaRPr lang="en-US"/>
-          </a:p>
-          <a:p>
-            <a:pPr algn="ctr"/>
-            <a:endParaRPr lang="en-US"/>
-          </a:p>
-        </p:txBody>
-      </p:sp>
-      <p:sp>
-        <p:nvSpPr>
-          <p:cNvPr id="6" name="TextBox 5">
-            <a:extLst>
-              <a:ext uri="{FF2B5EF4-FFF2-40B4-BE49-F238E27FC236}">
-                <a16:creationId xmlns:a16="http://schemas.microsoft.com/office/drawing/2014/main" id="{C0D36B1A-26C2-CD55-1032-4CB5E4EDF305}"/>
-              </a:ext>
-            </a:extLst>
-          </p:cNvPr>
-          <p:cNvSpPr txBox="1"/>
-          <p:nvPr/>
-        </p:nvSpPr>
-        <p:spPr>
-          <a:xfrm>
-            <a:off x="496843" y="800470"/>
-            <a:ext cx="5437681" cy="400110"/>
-          </a:xfrm>
-          <a:prstGeom prst="rect">
-            <a:avLst/>
-          </a:prstGeom>
-          <a:noFill/>
-        </p:spPr>
-        <p:txBody>
-          <a:bodyPr rot="0" spcFirstLastPara="0" vertOverflow="overflow" horzOverflow="overflow" vert="horz" wrap="square" lIns="91440" tIns="45720" rIns="91440" bIns="45720" numCol="1" spcCol="0" rtlCol="0" fromWordArt="0" anchor="t" anchorCtr="0" forceAA="0" compatLnSpc="1">
-            <a:prstTxWarp prst="textNoShape">
-              <a:avLst/>
-            </a:prstTxWarp>
-            <a:spAutoFit/>
-          </a:bodyPr>
-          <a:lstStyle/>
-          <a:p>
-            <a:r>
-              <a:rPr lang="en-US" sz="2000" b="1"/>
-              <a:t>Add your IBM BOB Certificate</a:t>
-            </a:r>
-          </a:p>
-        </p:txBody>
-      </p:sp>
+      </p:pic>
     </p:spTree>
     <p:extLst>
       <p:ext uri="{BB962C8B-B14F-4D97-AF65-F5344CB8AC3E}">
@@ -14086,7 +13687,16 @@
               <a:buSzPts val="1500"/>
               <a:buFont typeface="Calibri"/>
               <a:buNone/>
-            </a:pPr>
+              <a:defRPr sz="2800" b="1">
+                <a:solidFill>
+                  <a:srgbClr val="0F3B2E"/>
+                </a:solidFill>
+                <a:latin typeface="Arial"/>
+              </a:defRPr>
+            </a:pPr>
+            <a:r>
+              <a:t>Problem Statement</a:t>
+            </a:r>
             <a:endParaRPr sz="1500" b="0" i="0" u="none" strike="noStrike" cap="none">
               <a:solidFill>
                 <a:schemeClr val="dk1"/>
@@ -14101,929 +13711,309 @@
       </p:sp>
       <p:sp>
         <p:nvSpPr>
-          <p:cNvPr id="95" name="Google Shape;95;p2"/>
-          <p:cNvSpPr txBox="1"/>
+          <p:cNvPr id="93" name="Rounded Rectangle 92"/>
+          <p:cNvSpPr/>
           <p:nvPr/>
         </p:nvSpPr>
         <p:spPr>
           <a:xfrm>
-            <a:off x="1102321" y="1174639"/>
-            <a:ext cx="7426406" cy="451519"/>
+            <a:off x="731520" y="1645920"/>
+            <a:ext cx="3383280" cy="4572000"/>
           </a:xfrm>
-          <a:prstGeom prst="rect">
+          <a:prstGeom prst="roundRect">
             <a:avLst/>
           </a:prstGeom>
-          <a:noFill/>
-          <a:ln>
-            <a:noFill/>
+          <a:solidFill>
+            <a:srgbClr val="F5F8F6"/>
+          </a:solidFill>
+          <a:ln w="19050">
+            <a:solidFill>
+              <a:srgbClr val="C8D7CD"/>
+            </a:solidFill>
           </a:ln>
         </p:spPr>
+        <p:style>
+          <a:lnRef idx="1">
+            <a:schemeClr val="accent1"/>
+          </a:lnRef>
+          <a:fillRef idx="3">
+            <a:schemeClr val="accent1"/>
+          </a:fillRef>
+          <a:effectRef idx="2">
+            <a:schemeClr val="accent1"/>
+          </a:effectRef>
+          <a:fontRef idx="minor">
+            <a:schemeClr val="lt1"/>
+          </a:fontRef>
+        </p:style>
         <p:txBody>
-          <a:bodyPr spcFirstLastPara="1" wrap="square" lIns="91425" tIns="45700" rIns="91425" bIns="45700" anchor="ctr" anchorCtr="0">
-            <a:noAutofit/>
-          </a:bodyPr>
+          <a:bodyPr rtlCol="0" anchor="ctr" wrap="square" lIns="228600" tIns="182880" rIns="228600"/>
           <a:lstStyle/>
           <a:p>
-            <a:pPr marL="0" marR="0" lvl="0" indent="0" algn="ctr" rtl="0">
-              <a:lnSpc>
-                <a:spcPct val="90000"/>
-              </a:lnSpc>
-              <a:spcBef>
-                <a:spcPts val="0"/>
-              </a:spcBef>
-              <a:spcAft>
-                <a:spcPts val="0"/>
-              </a:spcAft>
-              <a:buClr>
-                <a:srgbClr val="002060"/>
-              </a:buClr>
-              <a:buSzPts val="3200"/>
-              <a:buFont typeface="Times New Roman"/>
-              <a:buNone/>
-            </a:pPr>
-            <a:endParaRPr sz="3200" b="1" i="0" u="none" strike="noStrike" cap="none">
-              <a:solidFill>
-                <a:srgbClr val="002060"/>
-              </a:solidFill>
-              <a:latin typeface="Times New Roman"/>
-              <a:ea typeface="Times New Roman"/>
-              <a:cs typeface="Times New Roman"/>
-              <a:sym typeface="Times New Roman"/>
-            </a:endParaRPr>
+            <a:pPr algn="ctr">
+              <a:defRPr sz="2000" b="1">
+                <a:solidFill>
+                  <a:srgbClr val="0F3B2E"/>
+                </a:solidFill>
+                <a:latin typeface="Arial"/>
+              </a:defRPr>
+            </a:pPr>
+            <a:r>
+              <a:t>Unpredictable Epiphytotics</a:t>
+            </a:r>
+          </a:p>
+          <a:p>
+            <a:pPr>
+              <a:spcBef>
+                <a:spcPts val="600"/>
+              </a:spcBef>
+              <a:defRPr sz="1500">
+                <a:solidFill>
+                  <a:srgbClr val="1E293B"/>
+                </a:solidFill>
+                <a:latin typeface="Arial"/>
+              </a:defRPr>
+            </a:pPr>
+            <a:r>
+              <a:t>• Pathogens like Downy Mildew spread rapidly when humidity exceeds 78% RH.</a:t>
+            </a:r>
+          </a:p>
+          <a:p>
+            <a:pPr>
+              <a:spcBef>
+                <a:spcPts val="600"/>
+              </a:spcBef>
+              <a:defRPr sz="1500">
+                <a:solidFill>
+                  <a:srgbClr val="1E293B"/>
+                </a:solidFill>
+                <a:latin typeface="Arial"/>
+              </a:defRPr>
+            </a:pPr>
+            <a:r>
+              <a:t>• Visual foliar symptoms appear days after active spore germination.</a:t>
+            </a:r>
+          </a:p>
+          <a:p>
+            <a:pPr>
+              <a:spcBef>
+                <a:spcPts val="600"/>
+              </a:spcBef>
+              <a:defRPr sz="1500">
+                <a:solidFill>
+                  <a:srgbClr val="1E293B"/>
+                </a:solidFill>
+                <a:latin typeface="Arial"/>
+              </a:defRPr>
+            </a:pPr>
+            <a:r>
+              <a:t>• Smallholders lack real-time agromet early warning tools.</a:t>
+            </a:r>
           </a:p>
         </p:txBody>
       </p:sp>
-      <p:graphicFrame>
-        <p:nvGraphicFramePr>
-          <p:cNvPr id="96" name="Google Shape;96;p2"/>
-          <p:cNvGraphicFramePr/>
-          <p:nvPr>
-            <p:extLst>
-              <p:ext uri="{D42A27DB-BD31-4B8C-83A1-F6EECF244321}">
-                <p14:modId xmlns:p14="http://schemas.microsoft.com/office/powerpoint/2010/main" val="2897107072"/>
-              </p:ext>
-            </p:extLst>
-          </p:nvPr>
-        </p:nvGraphicFramePr>
-        <p:xfrm>
-          <a:off x="1299257" y="2600315"/>
-          <a:ext cx="9394989" cy="2167128"/>
-        </p:xfrm>
-        <a:graphic>
-          <a:graphicData uri="http://schemas.openxmlformats.org/drawingml/2006/table">
-            <a:tbl>
-              <a:tblPr>
-                <a:noFill/>
-                <a:tableStyleId>{0AAD8F4D-43EB-41E5-8A38-28AB6DFB1B60}</a:tableStyleId>
-              </a:tblPr>
-              <a:tblGrid>
-                <a:gridCol w="2064867">
-                  <a:extLst>
-                    <a:ext uri="{9D8B030D-6E8A-4147-A177-3AD203B41FA5}">
-                      <a16:colId xmlns:a16="http://schemas.microsoft.com/office/drawing/2014/main" val="20000"/>
-                    </a:ext>
-                  </a:extLst>
-                </a:gridCol>
-                <a:gridCol w="2443374">
-                  <a:extLst>
-                    <a:ext uri="{9D8B030D-6E8A-4147-A177-3AD203B41FA5}">
-                      <a16:colId xmlns:a16="http://schemas.microsoft.com/office/drawing/2014/main" val="20002"/>
-                    </a:ext>
-                  </a:extLst>
-                </a:gridCol>
-                <a:gridCol w="2443374">
-                  <a:extLst>
-                    <a:ext uri="{9D8B030D-6E8A-4147-A177-3AD203B41FA5}">
-                      <a16:colId xmlns:a16="http://schemas.microsoft.com/office/drawing/2014/main" val="20003"/>
-                    </a:ext>
-                  </a:extLst>
-                </a:gridCol>
-                <a:gridCol w="2443374">
-                  <a:extLst>
-                    <a:ext uri="{9D8B030D-6E8A-4147-A177-3AD203B41FA5}">
-                      <a16:colId xmlns:a16="http://schemas.microsoft.com/office/drawing/2014/main" val="20004"/>
-                    </a:ext>
-                  </a:extLst>
-                </a:gridCol>
-              </a:tblGrid>
-              <a:tr h="973237">
-                <a:tc>
-                  <a:txBody>
-                    <a:bodyPr/>
-                    <a:lstStyle/>
-                    <a:p>
-                      <a:pPr marL="0" marR="0" lvl="0" indent="0" algn="ctr" rtl="0">
-                        <a:spcBef>
-                          <a:spcPts val="0"/>
-                        </a:spcBef>
-                        <a:spcAft>
-                          <a:spcPts val="0"/>
-                        </a:spcAft>
-                        <a:buNone/>
-                      </a:pPr>
-                      <a:r>
-                        <a:rPr lang="en-US" sz="1800" u="none" strike="noStrike" cap="none"/>
-                        <a:t>Student Name</a:t>
-                      </a:r>
-                      <a:endParaRPr sz="1800" u="none" strike="noStrike" cap="none"/>
-                    </a:p>
-                  </a:txBody>
-                  <a:tcPr marL="91450" marR="91450" marT="45725" marB="45725" anchor="ctr">
-                    <a:lnL w="12700" cap="flat" cmpd="sng">
-                      <a:solidFill>
-                        <a:srgbClr val="FFFFFF"/>
-                      </a:solidFill>
-                      <a:prstDash val="solid"/>
-                      <a:round/>
-                      <a:headEnd type="none" w="sm" len="sm"/>
-                      <a:tailEnd type="none" w="sm" len="sm"/>
-                    </a:lnL>
-                    <a:lnR w="12700" cap="flat" cmpd="sng">
-                      <a:solidFill>
-                        <a:srgbClr val="FFFFFF"/>
-                      </a:solidFill>
-                      <a:prstDash val="solid"/>
-                      <a:round/>
-                      <a:headEnd type="none" w="sm" len="sm"/>
-                      <a:tailEnd type="none" w="sm" len="sm"/>
-                    </a:lnR>
-                    <a:lnT w="12700" cap="flat" cmpd="sng">
-                      <a:solidFill>
-                        <a:srgbClr val="FFFFFF"/>
-                      </a:solidFill>
-                      <a:prstDash val="solid"/>
-                      <a:round/>
-                      <a:headEnd type="none" w="sm" len="sm"/>
-                      <a:tailEnd type="none" w="sm" len="sm"/>
-                    </a:lnT>
-                    <a:lnB w="38100" cap="flat" cmpd="sng">
-                      <a:solidFill>
-                        <a:srgbClr val="FFFFFF"/>
-                      </a:solidFill>
-                      <a:prstDash val="solid"/>
-                      <a:round/>
-                      <a:headEnd type="none" w="sm" len="sm"/>
-                      <a:tailEnd type="none" w="sm" len="sm"/>
-                    </a:lnB>
-                    <a:solidFill>
-                      <a:srgbClr val="5B9BD5"/>
-                    </a:solidFill>
-                  </a:tcPr>
-                </a:tc>
-                <a:tc>
-                  <a:txBody>
-                    <a:bodyPr/>
-                    <a:lstStyle/>
-                    <a:p>
-                      <a:pPr marL="0" marR="0" lvl="0" indent="0" algn="ctr" rtl="0">
-                        <a:spcBef>
-                          <a:spcPts val="0"/>
-                        </a:spcBef>
-                        <a:spcAft>
-                          <a:spcPts val="0"/>
-                        </a:spcAft>
-                        <a:buNone/>
-                      </a:pPr>
-                      <a:r>
-                        <a:rPr lang="en-US" sz="1800" u="none" strike="noStrike" cap="none"/>
-                        <a:t>Recent Passport Photo</a:t>
-                      </a:r>
-                      <a:endParaRPr sz="1800" u="none" strike="noStrike" cap="none"/>
-                    </a:p>
-                  </a:txBody>
-                  <a:tcPr marL="91450" marR="91450" marT="45725" marB="45725" anchor="ctr">
-                    <a:lnL w="12700" cap="flat" cmpd="sng" algn="ctr">
-                      <a:solidFill>
-                        <a:srgbClr val="FFFFFF"/>
-                      </a:solidFill>
-                      <a:prstDash val="solid"/>
-                      <a:round/>
-                      <a:headEnd type="none" w="sm" len="sm"/>
-                      <a:tailEnd type="none" w="sm" len="sm"/>
-                    </a:lnL>
-                    <a:lnR w="12700" cap="flat" cmpd="sng">
-                      <a:solidFill>
-                        <a:srgbClr val="FFFFFF"/>
-                      </a:solidFill>
-                      <a:prstDash val="solid"/>
-                      <a:round/>
-                      <a:headEnd type="none" w="sm" len="sm"/>
-                      <a:tailEnd type="none" w="sm" len="sm"/>
-                    </a:lnR>
-                    <a:lnT w="12700" cap="flat" cmpd="sng">
-                      <a:solidFill>
-                        <a:srgbClr val="FFFFFF"/>
-                      </a:solidFill>
-                      <a:prstDash val="solid"/>
-                      <a:round/>
-                      <a:headEnd type="none" w="sm" len="sm"/>
-                      <a:tailEnd type="none" w="sm" len="sm"/>
-                    </a:lnT>
-                    <a:lnB w="38100" cap="flat" cmpd="sng" algn="ctr">
-                      <a:solidFill>
-                        <a:srgbClr val="FFFFFF"/>
-                      </a:solidFill>
-                      <a:prstDash val="solid"/>
-                      <a:round/>
-                      <a:headEnd type="none" w="sm" len="sm"/>
-                      <a:tailEnd type="none" w="sm" len="sm"/>
-                    </a:lnB>
-                    <a:solidFill>
-                      <a:srgbClr val="5B9BD5"/>
-                    </a:solidFill>
-                  </a:tcPr>
-                </a:tc>
-                <a:tc>
-                  <a:txBody>
-                    <a:bodyPr/>
-                    <a:lstStyle/>
-                    <a:p>
-                      <a:pPr marL="0" marR="0" lvl="0" indent="0" algn="ctr" rtl="0">
-                        <a:lnSpc>
-                          <a:spcPct val="100000"/>
-                        </a:lnSpc>
-                        <a:spcBef>
-                          <a:spcPts val="0"/>
-                        </a:spcBef>
-                        <a:spcAft>
-                          <a:spcPts val="0"/>
-                        </a:spcAft>
-                        <a:buClr>
-                          <a:srgbClr val="000000"/>
-                        </a:buClr>
-                        <a:buSzPts val="1800"/>
-                        <a:buFont typeface="Arial"/>
-                        <a:buNone/>
-                      </a:pPr>
-                      <a:r>
-                        <a:rPr lang="en-US" sz="1800" b="0" i="0" u="none" strike="noStrike" cap="none">
-                          <a:solidFill>
-                            <a:srgbClr val="000000"/>
-                          </a:solidFill>
-                          <a:latin typeface="Arial"/>
-                          <a:ea typeface="Calibri"/>
-                          <a:cs typeface="Arial"/>
-                          <a:sym typeface="Calibri"/>
-                        </a:rPr>
-                        <a:t>Email ID </a:t>
-                      </a:r>
-                      <a:endParaRPr sz="1800" b="0" i="0" u="none" strike="noStrike" cap="none">
-                        <a:solidFill>
-                          <a:srgbClr val="000000"/>
-                        </a:solidFill>
-                        <a:latin typeface="Arial"/>
-                        <a:cs typeface="Arial"/>
-                        <a:sym typeface="Arial"/>
-                      </a:endParaRPr>
-                    </a:p>
-                  </a:txBody>
-                  <a:tcPr marL="91450" marR="91450" marT="45725" marB="45725" anchor="ctr">
-                    <a:lnL w="12700" cap="flat" cmpd="sng">
-                      <a:solidFill>
-                        <a:srgbClr val="FFFFFF"/>
-                      </a:solidFill>
-                      <a:prstDash val="solid"/>
-                      <a:round/>
-                      <a:headEnd type="none" w="sm" len="sm"/>
-                      <a:tailEnd type="none" w="sm" len="sm"/>
-                    </a:lnL>
-                    <a:lnR w="12700" cap="flat" cmpd="sng">
-                      <a:solidFill>
-                        <a:srgbClr val="FFFFFF"/>
-                      </a:solidFill>
-                      <a:prstDash val="solid"/>
-                      <a:round/>
-                      <a:headEnd type="none" w="sm" len="sm"/>
-                      <a:tailEnd type="none" w="sm" len="sm"/>
-                    </a:lnR>
-                    <a:lnT w="12700" cap="flat" cmpd="sng">
-                      <a:solidFill>
-                        <a:srgbClr val="FFFFFF"/>
-                      </a:solidFill>
-                      <a:prstDash val="solid"/>
-                      <a:round/>
-                      <a:headEnd type="none" w="sm" len="sm"/>
-                      <a:tailEnd type="none" w="sm" len="sm"/>
-                    </a:lnT>
-                    <a:lnB w="38100" cap="flat" cmpd="sng">
-                      <a:solidFill>
-                        <a:srgbClr val="FFFFFF"/>
-                      </a:solidFill>
-                      <a:prstDash val="solid"/>
-                      <a:round/>
-                      <a:headEnd type="none" w="sm" len="sm"/>
-                      <a:tailEnd type="none" w="sm" len="sm"/>
-                    </a:lnB>
-                    <a:solidFill>
-                      <a:srgbClr val="5B9BD5"/>
-                    </a:solidFill>
-                  </a:tcPr>
-                </a:tc>
-                <a:tc>
-                  <a:txBody>
-                    <a:bodyPr/>
-                    <a:lstStyle/>
-                    <a:p>
-                      <a:pPr marL="0" marR="0" lvl="0" indent="0" algn="ctr" rtl="0">
-                        <a:lnSpc>
-                          <a:spcPct val="100000"/>
-                        </a:lnSpc>
-                        <a:spcBef>
-                          <a:spcPts val="0"/>
-                        </a:spcBef>
-                        <a:spcAft>
-                          <a:spcPts val="0"/>
-                        </a:spcAft>
-                        <a:buClr>
-                          <a:schemeClr val="lt1"/>
-                        </a:buClr>
-                        <a:buSzPts val="1800"/>
-                        <a:buFont typeface="Calibri"/>
-                        <a:buNone/>
-                      </a:pPr>
-                      <a:r>
-                        <a:rPr lang="en-US" sz="1800" b="0" i="0" u="none" strike="noStrike" cap="none">
-                          <a:solidFill>
-                            <a:srgbClr val="000000"/>
-                          </a:solidFill>
-                          <a:latin typeface="Arial"/>
-                          <a:ea typeface="Calibri"/>
-                          <a:cs typeface="Arial"/>
-                          <a:sym typeface="Calibri"/>
-                        </a:rPr>
-                        <a:t>Mobile number</a:t>
-                      </a:r>
-                      <a:endParaRPr sz="1800" b="0" i="0" u="none" strike="noStrike" cap="none">
-                        <a:solidFill>
-                          <a:srgbClr val="000000"/>
-                        </a:solidFill>
-                        <a:latin typeface="Arial"/>
-                        <a:cs typeface="Arial"/>
-                        <a:sym typeface="Arial"/>
-                      </a:endParaRPr>
-                    </a:p>
-                    <a:p>
-                      <a:pPr marL="0" marR="0" lvl="0" indent="0" algn="ctr" rtl="0">
-                        <a:lnSpc>
-                          <a:spcPct val="100000"/>
-                        </a:lnSpc>
-                        <a:spcBef>
-                          <a:spcPts val="0"/>
-                        </a:spcBef>
-                        <a:spcAft>
-                          <a:spcPts val="0"/>
-                        </a:spcAft>
-                        <a:buClr>
-                          <a:schemeClr val="lt1"/>
-                        </a:buClr>
-                        <a:buSzPts val="1800"/>
-                        <a:buFont typeface="Calibri"/>
-                        <a:buNone/>
-                      </a:pPr>
-                      <a:r>
-                        <a:rPr lang="en-US" sz="1800" b="0" i="0" u="none" strike="noStrike" cap="none">
-                          <a:solidFill>
-                            <a:srgbClr val="000000"/>
-                          </a:solidFill>
-                          <a:latin typeface="Arial"/>
-                          <a:ea typeface="Calibri"/>
-                          <a:cs typeface="Arial"/>
-                          <a:sym typeface="Calibri"/>
-                        </a:rPr>
-                        <a:t>[WhatsApp] </a:t>
-                      </a:r>
-                      <a:endParaRPr sz="1800" b="0" i="0" u="none" strike="noStrike" cap="none">
-                        <a:solidFill>
-                          <a:srgbClr val="000000"/>
-                        </a:solidFill>
-                        <a:latin typeface="Arial"/>
-                        <a:cs typeface="Arial"/>
-                        <a:sym typeface="Arial"/>
-                      </a:endParaRPr>
-                    </a:p>
-                  </a:txBody>
-                  <a:tcPr marL="91450" marR="91450" marT="45725" marB="45725" anchor="ctr">
-                    <a:lnL w="12700" cap="flat" cmpd="sng">
-                      <a:solidFill>
-                        <a:srgbClr val="FFFFFF"/>
-                      </a:solidFill>
-                      <a:prstDash val="solid"/>
-                      <a:round/>
-                      <a:headEnd type="none" w="sm" len="sm"/>
-                      <a:tailEnd type="none" w="sm" len="sm"/>
-                    </a:lnL>
-                    <a:lnR w="12700" cap="flat" cmpd="sng">
-                      <a:solidFill>
-                        <a:srgbClr val="FFFFFF"/>
-                      </a:solidFill>
-                      <a:prstDash val="solid"/>
-                      <a:round/>
-                      <a:headEnd type="none" w="sm" len="sm"/>
-                      <a:tailEnd type="none" w="sm" len="sm"/>
-                    </a:lnR>
-                    <a:lnT w="12700" cap="flat" cmpd="sng">
-                      <a:solidFill>
-                        <a:srgbClr val="FFFFFF"/>
-                      </a:solidFill>
-                      <a:prstDash val="solid"/>
-                      <a:round/>
-                      <a:headEnd type="none" w="sm" len="sm"/>
-                      <a:tailEnd type="none" w="sm" len="sm"/>
-                    </a:lnT>
-                    <a:lnB w="38100" cap="flat" cmpd="sng">
-                      <a:solidFill>
-                        <a:srgbClr val="FFFFFF"/>
-                      </a:solidFill>
-                      <a:prstDash val="solid"/>
-                      <a:round/>
-                      <a:headEnd type="none" w="sm" len="sm"/>
-                      <a:tailEnd type="none" w="sm" len="sm"/>
-                    </a:lnB>
-                    <a:solidFill>
-                      <a:srgbClr val="5B9BD5"/>
-                    </a:solidFill>
-                  </a:tcPr>
-                </a:tc>
-                <a:extLst>
-                  <a:ext uri="{0D108BD9-81ED-4DB2-BD59-A6C34878D82A}">
-                    <a16:rowId xmlns:a16="http://schemas.microsoft.com/office/drawing/2014/main" val="10000"/>
-                  </a:ext>
-                </a:extLst>
-              </a:tr>
-              <a:tr h="1193891">
-                <a:tc>
-                  <a:txBody>
-                    <a:bodyPr/>
-                    <a:lstStyle/>
-                    <a:p>
-                      <a:pPr marL="0" marR="0" lvl="0" indent="0" algn="l" rtl="0">
-                        <a:spcBef>
-                          <a:spcPts val="0"/>
-                        </a:spcBef>
-                        <a:spcAft>
-                          <a:spcPts val="0"/>
-                        </a:spcAft>
-                        <a:buNone/>
-                      </a:pPr>
-                      <a:endParaRPr/>
-                    </a:p>
-                  </a:txBody>
-                  <a:tcPr marL="91450" marR="91450" marT="45725" marB="45725">
-                    <a:lnL w="12700" cap="flat" cmpd="sng">
-                      <a:solidFill>
-                        <a:srgbClr val="FFFFFF"/>
-                      </a:solidFill>
-                      <a:prstDash val="solid"/>
-                      <a:round/>
-                      <a:headEnd type="none" w="sm" len="sm"/>
-                      <a:tailEnd type="none" w="sm" len="sm"/>
-                    </a:lnL>
-                    <a:lnR w="12700" cap="flat" cmpd="sng">
-                      <a:solidFill>
-                        <a:srgbClr val="FFFFFF"/>
-                      </a:solidFill>
-                      <a:prstDash val="solid"/>
-                      <a:round/>
-                      <a:headEnd type="none" w="sm" len="sm"/>
-                      <a:tailEnd type="none" w="sm" len="sm"/>
-                    </a:lnR>
-                    <a:lnT w="38100" cap="flat" cmpd="sng">
-                      <a:solidFill>
-                        <a:srgbClr val="FFFFFF"/>
-                      </a:solidFill>
-                      <a:prstDash val="solid"/>
-                      <a:round/>
-                      <a:headEnd type="none" w="sm" len="sm"/>
-                      <a:tailEnd type="none" w="sm" len="sm"/>
-                    </a:lnT>
-                    <a:lnB w="12700" cap="flat" cmpd="sng">
-                      <a:solidFill>
-                        <a:srgbClr val="FFFFFF"/>
-                      </a:solidFill>
-                      <a:prstDash val="solid"/>
-                      <a:round/>
-                      <a:headEnd type="none" w="sm" len="sm"/>
-                      <a:tailEnd type="none" w="sm" len="sm"/>
-                    </a:lnB>
-                    <a:solidFill>
-                      <a:srgbClr val="D0DEEF"/>
-                    </a:solidFill>
-                  </a:tcPr>
-                </a:tc>
-                <a:tc>
-                  <a:txBody>
-                    <a:bodyPr/>
-                    <a:lstStyle/>
-                    <a:p>
-                      <a:pPr marL="0" marR="0" lvl="0" indent="0" algn="l" rtl="0">
-                        <a:spcBef>
-                          <a:spcPts val="0"/>
-                        </a:spcBef>
-                        <a:spcAft>
-                          <a:spcPts val="0"/>
-                        </a:spcAft>
-                        <a:buNone/>
-                      </a:pPr>
-                      <a:endParaRPr sz="1800"/>
-                    </a:p>
-                  </a:txBody>
-                  <a:tcPr marL="91450" marR="91450" marT="45725" marB="45725">
-                    <a:lnL w="12700" cap="flat" cmpd="sng" algn="ctr">
-                      <a:solidFill>
-                        <a:srgbClr val="FFFFFF"/>
-                      </a:solidFill>
-                      <a:prstDash val="solid"/>
-                      <a:round/>
-                      <a:headEnd type="none" w="sm" len="sm"/>
-                      <a:tailEnd type="none" w="sm" len="sm"/>
-                    </a:lnL>
-                    <a:lnR w="12700" cap="flat" cmpd="sng">
-                      <a:solidFill>
-                        <a:srgbClr val="FFFFFF"/>
-                      </a:solidFill>
-                      <a:prstDash val="solid"/>
-                      <a:round/>
-                      <a:headEnd type="none" w="sm" len="sm"/>
-                      <a:tailEnd type="none" w="sm" len="sm"/>
-                    </a:lnR>
-                    <a:lnT w="38100" cap="flat" cmpd="sng" algn="ctr">
-                      <a:solidFill>
-                        <a:srgbClr val="FFFFFF"/>
-                      </a:solidFill>
-                      <a:prstDash val="solid"/>
-                      <a:round/>
-                      <a:headEnd type="none" w="sm" len="sm"/>
-                      <a:tailEnd type="none" w="sm" len="sm"/>
-                    </a:lnT>
-                    <a:lnB w="12700" cap="flat" cmpd="sng" algn="ctr">
-                      <a:solidFill>
-                        <a:srgbClr val="FFFFFF"/>
-                      </a:solidFill>
-                      <a:prstDash val="solid"/>
-                      <a:round/>
-                      <a:headEnd type="none" w="sm" len="sm"/>
-                      <a:tailEnd type="none" w="sm" len="sm"/>
-                    </a:lnB>
-                    <a:solidFill>
-                      <a:srgbClr val="D0DEEF"/>
-                    </a:solidFill>
-                  </a:tcPr>
-                </a:tc>
-                <a:tc>
-                  <a:txBody>
-                    <a:bodyPr/>
-                    <a:lstStyle/>
-                    <a:p>
-                      <a:pPr marL="0" marR="0" lvl="0" indent="0" algn="l" rtl="0">
-                        <a:spcBef>
-                          <a:spcPts val="0"/>
-                        </a:spcBef>
-                        <a:spcAft>
-                          <a:spcPts val="0"/>
-                        </a:spcAft>
-                        <a:buNone/>
-                      </a:pPr>
-                      <a:endParaRPr/>
-                    </a:p>
-                  </a:txBody>
-                  <a:tcPr marL="91450" marR="91450" marT="45725" marB="45725">
-                    <a:lnL w="12700" cap="flat" cmpd="sng">
-                      <a:solidFill>
-                        <a:srgbClr val="FFFFFF"/>
-                      </a:solidFill>
-                      <a:prstDash val="solid"/>
-                      <a:round/>
-                      <a:headEnd type="none" w="sm" len="sm"/>
-                      <a:tailEnd type="none" w="sm" len="sm"/>
-                    </a:lnL>
-                    <a:lnR w="12700" cap="flat" cmpd="sng">
-                      <a:solidFill>
-                        <a:srgbClr val="FFFFFF"/>
-                      </a:solidFill>
-                      <a:prstDash val="solid"/>
-                      <a:round/>
-                      <a:headEnd type="none" w="sm" len="sm"/>
-                      <a:tailEnd type="none" w="sm" len="sm"/>
-                    </a:lnR>
-                    <a:lnT w="38100" cap="flat" cmpd="sng">
-                      <a:solidFill>
-                        <a:srgbClr val="FFFFFF"/>
-                      </a:solidFill>
-                      <a:prstDash val="solid"/>
-                      <a:round/>
-                      <a:headEnd type="none" w="sm" len="sm"/>
-                      <a:tailEnd type="none" w="sm" len="sm"/>
-                    </a:lnT>
-                    <a:lnB w="12700" cap="flat" cmpd="sng">
-                      <a:solidFill>
-                        <a:srgbClr val="FFFFFF"/>
-                      </a:solidFill>
-                      <a:prstDash val="solid"/>
-                      <a:round/>
-                      <a:headEnd type="none" w="sm" len="sm"/>
-                      <a:tailEnd type="none" w="sm" len="sm"/>
-                    </a:lnB>
-                    <a:solidFill>
-                      <a:srgbClr val="D0DEEF"/>
-                    </a:solidFill>
-                  </a:tcPr>
-                </a:tc>
-                <a:tc>
-                  <a:txBody>
-                    <a:bodyPr/>
-                    <a:lstStyle/>
-                    <a:p>
-                      <a:pPr marL="0" marR="0" lvl="0" indent="0" algn="l" rtl="0">
-                        <a:spcBef>
-                          <a:spcPts val="0"/>
-                        </a:spcBef>
-                        <a:spcAft>
-                          <a:spcPts val="0"/>
-                        </a:spcAft>
-                        <a:buNone/>
-                      </a:pPr>
-                      <a:endParaRPr/>
-                    </a:p>
-                  </a:txBody>
-                  <a:tcPr marL="91450" marR="91450" marT="45725" marB="45725">
-                    <a:lnL w="12700" cap="flat" cmpd="sng">
-                      <a:solidFill>
-                        <a:srgbClr val="FFFFFF"/>
-                      </a:solidFill>
-                      <a:prstDash val="solid"/>
-                      <a:round/>
-                      <a:headEnd type="none" w="sm" len="sm"/>
-                      <a:tailEnd type="none" w="sm" len="sm"/>
-                    </a:lnL>
-                    <a:lnR w="12700" cap="flat" cmpd="sng">
-                      <a:solidFill>
-                        <a:srgbClr val="FFFFFF"/>
-                      </a:solidFill>
-                      <a:prstDash val="solid"/>
-                      <a:round/>
-                      <a:headEnd type="none" w="sm" len="sm"/>
-                      <a:tailEnd type="none" w="sm" len="sm"/>
-                    </a:lnR>
-                    <a:lnT w="38100" cap="flat" cmpd="sng">
-                      <a:solidFill>
-                        <a:srgbClr val="FFFFFF"/>
-                      </a:solidFill>
-                      <a:prstDash val="solid"/>
-                      <a:round/>
-                      <a:headEnd type="none" w="sm" len="sm"/>
-                      <a:tailEnd type="none" w="sm" len="sm"/>
-                    </a:lnT>
-                    <a:lnB w="12700" cap="flat" cmpd="sng">
-                      <a:solidFill>
-                        <a:srgbClr val="FFFFFF"/>
-                      </a:solidFill>
-                      <a:prstDash val="solid"/>
-                      <a:round/>
-                      <a:headEnd type="none" w="sm" len="sm"/>
-                      <a:tailEnd type="none" w="sm" len="sm"/>
-                    </a:lnB>
-                    <a:solidFill>
-                      <a:srgbClr val="D0DEEF"/>
-                    </a:solidFill>
-                  </a:tcPr>
-                </a:tc>
-                <a:extLst>
-                  <a:ext uri="{0D108BD9-81ED-4DB2-BD59-A6C34878D82A}">
-                    <a16:rowId xmlns:a16="http://schemas.microsoft.com/office/drawing/2014/main" val="10001"/>
-                  </a:ext>
-                </a:extLst>
-              </a:tr>
-            </a:tbl>
-          </a:graphicData>
-        </a:graphic>
-      </p:graphicFrame>
-      <p:pic>
-        <p:nvPicPr>
-          <p:cNvPr id="98" name="Google Shape;98;p2"/>
-          <p:cNvPicPr preferRelativeResize="0"/>
-          <p:nvPr/>
-        </p:nvPicPr>
-        <p:blipFill rotWithShape="1">
-          <a:blip r:embed="rId3">
-            <a:alphaModFix/>
-          </a:blip>
-          <a:srcRect/>
-          <a:stretch/>
-        </p:blipFill>
-        <p:spPr>
-          <a:xfrm>
-            <a:off x="4053024" y="3738417"/>
-            <a:ext cx="762500" cy="801811"/>
-          </a:xfrm>
-          <a:prstGeom prst="rect">
-            <a:avLst/>
-          </a:prstGeom>
-          <a:noFill/>
-          <a:ln>
-            <a:noFill/>
-          </a:ln>
-        </p:spPr>
-      </p:pic>
       <p:sp>
         <p:nvSpPr>
-          <p:cNvPr id="4" name="TextBox 3">
-            <a:extLst>
-              <a:ext uri="{FF2B5EF4-FFF2-40B4-BE49-F238E27FC236}">
-                <a16:creationId xmlns:a16="http://schemas.microsoft.com/office/drawing/2014/main" id="{A828B9EF-C084-F5D4-CA27-75AF7D995640}"/>
-              </a:ext>
-            </a:extLst>
-          </p:cNvPr>
-          <p:cNvSpPr txBox="1"/>
+          <p:cNvPr id="94" name="Rounded Rectangle 93"/>
+          <p:cNvSpPr/>
           <p:nvPr/>
         </p:nvSpPr>
         <p:spPr>
           <a:xfrm>
-            <a:off x="1206164" y="1460724"/>
-            <a:ext cx="10280254" cy="461665"/>
+            <a:off x="4389120" y="1645920"/>
+            <a:ext cx="3383280" cy="4572000"/>
           </a:xfrm>
-          <a:prstGeom prst="rect">
+          <a:prstGeom prst="roundRect">
             <a:avLst/>
           </a:prstGeom>
-          <a:noFill/>
+          <a:solidFill>
+            <a:srgbClr val="F5F8F6"/>
+          </a:solidFill>
+          <a:ln w="19050">
+            <a:solidFill>
+              <a:srgbClr val="C8D7CD"/>
+            </a:solidFill>
+          </a:ln>
         </p:spPr>
+        <p:style>
+          <a:lnRef idx="1">
+            <a:schemeClr val="accent1"/>
+          </a:lnRef>
+          <a:fillRef idx="3">
+            <a:schemeClr val="accent1"/>
+          </a:fillRef>
+          <a:effectRef idx="2">
+            <a:schemeClr val="accent1"/>
+          </a:effectRef>
+          <a:fontRef idx="minor">
+            <a:schemeClr val="lt1"/>
+          </a:fontRef>
+        </p:style>
         <p:txBody>
-          <a:bodyPr wrap="square" rtlCol="0">
-            <a:spAutoFit/>
-          </a:bodyPr>
+          <a:bodyPr rtlCol="0" anchor="ctr" wrap="square" lIns="228600" tIns="182880" rIns="228600"/>
           <a:lstStyle/>
           <a:p>
-            <a:r>
-              <a:rPr lang="en-US" sz="2400" b="1"/>
-              <a:t>Domain of  Project – </a:t>
-            </a:r>
-            <a:r>
-              <a:rPr lang="en-US" sz="2400" b="1">
-                <a:highlight>
-                  <a:srgbClr val="FFFF00"/>
-                </a:highlight>
-              </a:rPr>
-              <a:t>[ like Agriculture / Education / Healthcare / … ]</a:t>
-            </a:r>
-            <a:endParaRPr lang="en-IN" sz="2400" b="1">
-              <a:highlight>
-                <a:srgbClr val="FFFF00"/>
-              </a:highlight>
-            </a:endParaRPr>
+            <a:pPr algn="ctr">
+              <a:defRPr sz="2000" b="1">
+                <a:solidFill>
+                  <a:srgbClr val="0F3B2E"/>
+                </a:solidFill>
+                <a:latin typeface="Arial"/>
+              </a:defRPr>
+            </a:pPr>
+            <a:r>
+              <a:t>Agrochemical Misapplication</a:t>
+            </a:r>
+          </a:p>
+          <a:p>
+            <a:pPr>
+              <a:spcBef>
+                <a:spcPts val="600"/>
+              </a:spcBef>
+              <a:defRPr sz="1500">
+                <a:solidFill>
+                  <a:srgbClr val="1E293B"/>
+                </a:solidFill>
+                <a:latin typeface="Arial"/>
+              </a:defRPr>
+            </a:pPr>
+            <a:r>
+              <a:t>• Lack of scientific guidance leads to heavy dealer-driven chemical overdosing.</a:t>
+            </a:r>
+          </a:p>
+          <a:p>
+            <a:pPr>
+              <a:spcBef>
+                <a:spcPts val="600"/>
+              </a:spcBef>
+              <a:defRPr sz="1500">
+                <a:solidFill>
+                  <a:srgbClr val="1E293B"/>
+                </a:solidFill>
+                <a:latin typeface="Arial"/>
+              </a:defRPr>
+            </a:pPr>
+            <a:r>
+              <a:t>• Causes severe phytotoxicity and chemical-resistant pathogen strains.</a:t>
+            </a:r>
+          </a:p>
+          <a:p>
+            <a:pPr>
+              <a:spcBef>
+                <a:spcPts val="600"/>
+              </a:spcBef>
+              <a:defRPr sz="1500">
+                <a:solidFill>
+                  <a:srgbClr val="1E293B"/>
+                </a:solidFill>
+                <a:latin typeface="Arial"/>
+              </a:defRPr>
+            </a:pPr>
+            <a:r>
+              <a:t>• Excessive toxic runoff contaminates soil and rural groundwater.</a:t>
+            </a:r>
           </a:p>
         </p:txBody>
       </p:sp>
       <p:sp>
         <p:nvSpPr>
-          <p:cNvPr id="7" name="TextBox 6">
-            <a:extLst>
-              <a:ext uri="{FF2B5EF4-FFF2-40B4-BE49-F238E27FC236}">
-                <a16:creationId xmlns:a16="http://schemas.microsoft.com/office/drawing/2014/main" id="{3D723CA3-EC2D-165A-F109-3759C4E9C8A4}"/>
-              </a:ext>
-            </a:extLst>
-          </p:cNvPr>
-          <p:cNvSpPr txBox="1"/>
+          <p:cNvPr id="95" name="Rounded Rectangle 94"/>
+          <p:cNvSpPr/>
           <p:nvPr/>
         </p:nvSpPr>
         <p:spPr>
           <a:xfrm>
-            <a:off x="1206162" y="551965"/>
-            <a:ext cx="9581177" cy="461665"/>
+            <a:off x="8046720" y="1645920"/>
+            <a:ext cx="3383280" cy="4572000"/>
           </a:xfrm>
-          <a:prstGeom prst="rect">
+          <a:prstGeom prst="roundRect">
             <a:avLst/>
           </a:prstGeom>
-          <a:noFill/>
+          <a:solidFill>
+            <a:srgbClr val="F5F8F6"/>
+          </a:solidFill>
+          <a:ln w="19050">
+            <a:solidFill>
+              <a:srgbClr val="C8D7CD"/>
+            </a:solidFill>
+          </a:ln>
         </p:spPr>
+        <p:style>
+          <a:lnRef idx="1">
+            <a:schemeClr val="accent1"/>
+          </a:lnRef>
+          <a:fillRef idx="3">
+            <a:schemeClr val="accent1"/>
+          </a:fillRef>
+          <a:effectRef idx="2">
+            <a:schemeClr val="accent1"/>
+          </a:effectRef>
+          <a:fontRef idx="minor">
+            <a:schemeClr val="lt1"/>
+          </a:fontRef>
+        </p:style>
         <p:txBody>
-          <a:bodyPr wrap="square" rtlCol="0">
-            <a:spAutoFit/>
-          </a:bodyPr>
+          <a:bodyPr rtlCol="0" anchor="ctr" wrap="square" lIns="228600" tIns="182880" rIns="228600"/>
           <a:lstStyle/>
           <a:p>
-            <a:r>
-              <a:rPr lang="en-US" sz="2400" b="1"/>
-              <a:t>Project Tile – </a:t>
-            </a:r>
-            <a:r>
-              <a:rPr lang="en-US" sz="2400" b="1">
-                <a:highlight>
-                  <a:srgbClr val="FFFF00"/>
-                </a:highlight>
-              </a:rPr>
-              <a:t>[</a:t>
-            </a:r>
-            <a:r>
-              <a:rPr lang="en-US" sz="2400" b="1">
-                <a:solidFill>
-                  <a:srgbClr val="002060"/>
-                </a:solidFill>
-                <a:highlight>
-                  <a:srgbClr val="FFFF00"/>
-                </a:highlight>
-                <a:latin typeface="Times New Roman"/>
-                <a:ea typeface="Times New Roman"/>
-                <a:cs typeface="Times New Roman"/>
-                <a:sym typeface="Times New Roman"/>
-              </a:rPr>
-              <a:t>Write your project title here</a:t>
-            </a:r>
-            <a:r>
-              <a:rPr lang="en-US" sz="2400" b="1">
-                <a:highlight>
-                  <a:srgbClr val="FFFF00"/>
-                </a:highlight>
-              </a:rPr>
-              <a:t>]</a:t>
-            </a:r>
-            <a:endParaRPr lang="en-IN" sz="2400" b="1">
-              <a:highlight>
-                <a:srgbClr val="FFFF00"/>
-              </a:highlight>
-            </a:endParaRPr>
-          </a:p>
-        </p:txBody>
-      </p:sp>
-      <p:sp>
-        <p:nvSpPr>
-          <p:cNvPr id="3" name="TextBox 2">
-            <a:extLst>
-              <a:ext uri="{FF2B5EF4-FFF2-40B4-BE49-F238E27FC236}">
-                <a16:creationId xmlns:a16="http://schemas.microsoft.com/office/drawing/2014/main" id="{B0B023FA-CFEB-ACE9-8425-7E72E307CDC5}"/>
-              </a:ext>
-            </a:extLst>
-          </p:cNvPr>
-          <p:cNvSpPr txBox="1"/>
-          <p:nvPr/>
-        </p:nvSpPr>
-        <p:spPr>
-          <a:xfrm>
-            <a:off x="1211005" y="5210667"/>
-            <a:ext cx="6456743" cy="1631216"/>
-          </a:xfrm>
-          <a:prstGeom prst="rect">
-            <a:avLst/>
-          </a:prstGeom>
-          <a:noFill/>
-        </p:spPr>
-        <p:txBody>
-          <a:bodyPr rot="0" spcFirstLastPara="0" vertOverflow="overflow" horzOverflow="overflow" vert="horz" wrap="square" lIns="91440" tIns="45720" rIns="91440" bIns="45720" numCol="1" spcCol="0" rtlCol="0" fromWordArt="0" anchor="t" anchorCtr="0" forceAA="0" compatLnSpc="1">
-            <a:prstTxWarp prst="textNoShape">
-              <a:avLst/>
-            </a:prstTxWarp>
-            <a:spAutoFit/>
-          </a:bodyPr>
-          <a:lstStyle/>
-          <a:p>
-            <a:r>
-              <a:rPr lang="en-US" sz="2000">
-                <a:solidFill>
-                  <a:srgbClr val="FF0000"/>
-                </a:solidFill>
-              </a:rPr>
-              <a:t>Recommended font style and size:</a:t>
-            </a:r>
-            <a:br>
-              <a:rPr lang="en-US" sz="2000">
-                <a:solidFill>
-                  <a:srgbClr val="FF0000"/>
-                </a:solidFill>
-              </a:rPr>
-            </a:br>
-            <a:br>
-              <a:rPr lang="en-US" sz="2000"/>
-            </a:br>
-            <a:r>
-              <a:rPr lang="en-US" sz="2000">
-                <a:solidFill>
-                  <a:srgbClr val="FF0000"/>
-                </a:solidFill>
-              </a:rPr>
-              <a:t>Font Style: Arial</a:t>
-            </a:r>
-            <a:br>
-              <a:rPr lang="en-US" sz="2000">
-                <a:solidFill>
-                  <a:srgbClr val="FF0000"/>
-                </a:solidFill>
-              </a:rPr>
-            </a:br>
-            <a:r>
-              <a:rPr lang="en-US" sz="2000">
-                <a:solidFill>
-                  <a:srgbClr val="FF0000"/>
-                </a:solidFill>
-              </a:rPr>
-              <a:t>Font Size (Heading): 28</a:t>
-            </a:r>
-          </a:p>
-          <a:p>
-            <a:r>
-              <a:rPr lang="en-US" sz="2000">
-                <a:solidFill>
-                  <a:srgbClr val="FF0000"/>
-                </a:solidFill>
-              </a:rPr>
-              <a:t>Font Size (Content): 20</a:t>
+            <a:pPr algn="ctr">
+              <a:defRPr sz="2000" b="1">
+                <a:solidFill>
+                  <a:srgbClr val="0F3B2E"/>
+                </a:solidFill>
+                <a:latin typeface="Arial"/>
+              </a:defRPr>
+            </a:pPr>
+            <a:r>
+              <a:t>LLM Hallucination Hazards</a:t>
+            </a:r>
+          </a:p>
+          <a:p>
+            <a:pPr>
+              <a:spcBef>
+                <a:spcPts val="600"/>
+              </a:spcBef>
+              <a:defRPr sz="1500">
+                <a:solidFill>
+                  <a:srgbClr val="1E293B"/>
+                </a:solidFill>
+                <a:latin typeface="Arial"/>
+              </a:defRPr>
+            </a:pPr>
+            <a:r>
+              <a:t>• Generic commercial AI tools invent arbitrary spray dosages.</a:t>
+            </a:r>
+          </a:p>
+          <a:p>
+            <a:pPr>
+              <a:spcBef>
+                <a:spcPts val="600"/>
+              </a:spcBef>
+              <a:defRPr sz="1500">
+                <a:solidFill>
+                  <a:srgbClr val="1E293B"/>
+                </a:solidFill>
+                <a:latin typeface="Arial"/>
+              </a:defRPr>
+            </a:pPr>
+            <a:r>
+              <a:t>• Lack grounding in verified regional ICAR and KVK standard packages.</a:t>
+            </a:r>
+          </a:p>
+          <a:p>
+            <a:pPr>
+              <a:spcBef>
+                <a:spcPts val="600"/>
+              </a:spcBef>
+              <a:defRPr sz="1500">
+                <a:solidFill>
+                  <a:srgbClr val="1E293B"/>
+                </a:solidFill>
+                <a:latin typeface="Arial"/>
+              </a:defRPr>
+            </a:pPr>
+            <a:r>
+              <a:t>• Vernacular barriers lock non-literate farmers out of critical advice.</a:t>
             </a:r>
           </a:p>
         </p:txBody>
@@ -15087,14 +14077,16 @@
           </a:bodyPr>
           <a:lstStyle/>
           <a:p>
-            <a:pPr fontAlgn="base"/>
-            <a:r>
-              <a:rPr lang="en-US" b="1"/>
-              <a:t>Problem Statement : Nutrition Agent</a:t>
-            </a:r>
-            <a:r>
-              <a:rPr lang="en-US"/>
-              <a:t> </a:t>
+            <a:pPr fontAlgn="base" algn="l">
+              <a:defRPr sz="2800" b="1">
+                <a:solidFill>
+                  <a:srgbClr val="0F3B2E"/>
+                </a:solidFill>
+                <a:latin typeface="Arial"/>
+              </a:defRPr>
+            </a:pPr>
+            <a:r>
+              <a:t>Proposed Solution</a:t>
             </a:r>
           </a:p>
           <a:p>
@@ -15324,37 +14316,310 @@
       </p:sp>
       <p:sp>
         <p:nvSpPr>
-          <p:cNvPr id="3" name="TextBox 2">
-            <a:extLst>
-              <a:ext uri="{FF2B5EF4-FFF2-40B4-BE49-F238E27FC236}">
-                <a16:creationId xmlns:a16="http://schemas.microsoft.com/office/drawing/2014/main" id="{3847FA31-EA47-D27A-9D69-AF50A3080AEC}"/>
-              </a:ext>
-            </a:extLst>
-          </p:cNvPr>
-          <p:cNvSpPr txBox="1"/>
+          <p:cNvPr id="3" name="Rounded Rectangle 2"/>
+          <p:cNvSpPr/>
           <p:nvPr/>
         </p:nvSpPr>
         <p:spPr>
           <a:xfrm>
-            <a:off x="576072" y="704088"/>
-            <a:ext cx="7214616" cy="461665"/>
+            <a:off x="731520" y="1645920"/>
+            <a:ext cx="3383280" cy="4572000"/>
           </a:xfrm>
-          <a:prstGeom prst="rect">
+          <a:prstGeom prst="roundRect">
             <a:avLst/>
           </a:prstGeom>
-          <a:noFill/>
+          <a:solidFill>
+            <a:srgbClr val="F5F8F6"/>
+          </a:solidFill>
+          <a:ln w="19050">
+            <a:solidFill>
+              <a:srgbClr val="C8D7CD"/>
+            </a:solidFill>
+          </a:ln>
         </p:spPr>
+        <p:style>
+          <a:lnRef idx="1">
+            <a:schemeClr val="accent1"/>
+          </a:lnRef>
+          <a:fillRef idx="3">
+            <a:schemeClr val="accent1"/>
+          </a:fillRef>
+          <a:effectRef idx="2">
+            <a:schemeClr val="accent1"/>
+          </a:effectRef>
+          <a:fontRef idx="minor">
+            <a:schemeClr val="lt1"/>
+          </a:fontRef>
+        </p:style>
         <p:txBody>
-          <a:bodyPr wrap="square" rtlCol="0">
-            <a:spAutoFit/>
-          </a:bodyPr>
+          <a:bodyPr rtlCol="0" anchor="ctr" wrap="square" lIns="228600" tIns="182880" rIns="228600"/>
           <a:lstStyle/>
           <a:p>
-            <a:r>
-              <a:rPr lang="en-US" sz="2400" b="1"/>
-              <a:t>Problem Statement -</a:t>
-            </a:r>
-            <a:endParaRPr lang="en-IN" sz="2400" b="1"/>
+            <a:pPr algn="ctr">
+              <a:defRPr sz="2000" b="1">
+                <a:solidFill>
+                  <a:srgbClr val="0F3B2E"/>
+                </a:solidFill>
+                <a:latin typeface="Arial"/>
+              </a:defRPr>
+            </a:pPr>
+            <a:r>
+              <a:t>Autonomous Agromet Sentinel</a:t>
+            </a:r>
+          </a:p>
+          <a:p>
+            <a:pPr>
+              <a:spcBef>
+                <a:spcPts val="600"/>
+              </a:spcBef>
+              <a:defRPr sz="1500">
+                <a:solidFill>
+                  <a:srgbClr val="1E293B"/>
+                </a:solidFill>
+                <a:latin typeface="Arial"/>
+              </a:defRPr>
+            </a:pPr>
+            <a:r>
+              <a:t>• Continuous background polling of live weather telemetry.</a:t>
+            </a:r>
+          </a:p>
+          <a:p>
+            <a:pPr>
+              <a:spcBef>
+                <a:spcPts val="600"/>
+              </a:spcBef>
+              <a:defRPr sz="1500">
+                <a:solidFill>
+                  <a:srgbClr val="1E293B"/>
+                </a:solidFill>
+                <a:latin typeface="Arial"/>
+              </a:defRPr>
+            </a:pPr>
+            <a:r>
+              <a:t>• Proactive red alert dispatch before active spore germination.</a:t>
+            </a:r>
+          </a:p>
+          <a:p>
+            <a:pPr>
+              <a:spcBef>
+                <a:spcPts val="600"/>
+              </a:spcBef>
+              <a:defRPr sz="1500">
+                <a:solidFill>
+                  <a:srgbClr val="1E293B"/>
+                </a:solidFill>
+                <a:latin typeface="Arial"/>
+              </a:defRPr>
+            </a:pPr>
+            <a:r>
+              <a:t>• Eliminates reliance on manual user query initiation.</a:t>
+            </a:r>
+          </a:p>
+        </p:txBody>
+      </p:sp>
+      <p:sp>
+        <p:nvSpPr>
+          <p:cNvPr id="4" name="Rounded Rectangle 3"/>
+          <p:cNvSpPr/>
+          <p:nvPr/>
+        </p:nvSpPr>
+        <p:spPr>
+          <a:xfrm>
+            <a:off x="4389120" y="1645920"/>
+            <a:ext cx="3383280" cy="4572000"/>
+          </a:xfrm>
+          <a:prstGeom prst="roundRect">
+            <a:avLst/>
+          </a:prstGeom>
+          <a:solidFill>
+            <a:srgbClr val="F5F8F6"/>
+          </a:solidFill>
+          <a:ln w="19050">
+            <a:solidFill>
+              <a:srgbClr val="C8D7CD"/>
+            </a:solidFill>
+          </a:ln>
+        </p:spPr>
+        <p:style>
+          <a:lnRef idx="1">
+            <a:schemeClr val="accent1"/>
+          </a:lnRef>
+          <a:fillRef idx="3">
+            <a:schemeClr val="accent1"/>
+          </a:fillRef>
+          <a:effectRef idx="2">
+            <a:schemeClr val="accent1"/>
+          </a:effectRef>
+          <a:fontRef idx="minor">
+            <a:schemeClr val="lt1"/>
+          </a:fontRef>
+        </p:style>
+        <p:txBody>
+          <a:bodyPr rtlCol="0" anchor="ctr" wrap="square" lIns="228600" tIns="182880" rIns="228600"/>
+          <a:lstStyle/>
+          <a:p>
+            <a:pPr algn="ctr">
+              <a:defRPr sz="2000" b="1">
+                <a:solidFill>
+                  <a:srgbClr val="0F3B2E"/>
+                </a:solidFill>
+                <a:latin typeface="Arial"/>
+              </a:defRPr>
+            </a:pPr>
+            <a:r>
+              <a:t>Langflow Agentic Orchestration</a:t>
+            </a:r>
+          </a:p>
+          <a:p>
+            <a:pPr>
+              <a:spcBef>
+                <a:spcPts val="600"/>
+              </a:spcBef>
+              <a:defRPr sz="1500">
+                <a:solidFill>
+                  <a:srgbClr val="1E293B"/>
+                </a:solidFill>
+                <a:latin typeface="Arial"/>
+              </a:defRPr>
+            </a:pPr>
+            <a:r>
+              <a:t>• Modular visual workflow connecting sensory inputs to LLM agents.</a:t>
+            </a:r>
+          </a:p>
+          <a:p>
+            <a:pPr>
+              <a:spcBef>
+                <a:spcPts val="600"/>
+              </a:spcBef>
+              <a:defRPr sz="1500">
+                <a:solidFill>
+                  <a:srgbClr val="1E293B"/>
+                </a:solidFill>
+                <a:latin typeface="Arial"/>
+              </a:defRPr>
+            </a:pPr>
+            <a:r>
+              <a:t>• Seamlessly integrates custom Python vision and weather tools.</a:t>
+            </a:r>
+          </a:p>
+          <a:p>
+            <a:pPr>
+              <a:spcBef>
+                <a:spcPts val="600"/>
+              </a:spcBef>
+              <a:defRPr sz="1500">
+                <a:solidFill>
+                  <a:srgbClr val="1E293B"/>
+                </a:solidFill>
+                <a:latin typeface="Arial"/>
+              </a:defRPr>
+            </a:pPr>
+            <a:r>
+              <a:t>• Coordinates ChromaDB RAG retrieval with IBM Granite.</a:t>
+            </a:r>
+          </a:p>
+        </p:txBody>
+      </p:sp>
+      <p:sp>
+        <p:nvSpPr>
+          <p:cNvPr id="5" name="Rounded Rectangle 4"/>
+          <p:cNvSpPr/>
+          <p:nvPr/>
+        </p:nvSpPr>
+        <p:spPr>
+          <a:xfrm>
+            <a:off x="8046720" y="1645920"/>
+            <a:ext cx="3383280" cy="4572000"/>
+          </a:xfrm>
+          <a:prstGeom prst="roundRect">
+            <a:avLst/>
+          </a:prstGeom>
+          <a:solidFill>
+            <a:srgbClr val="F5F8F6"/>
+          </a:solidFill>
+          <a:ln w="19050">
+            <a:solidFill>
+              <a:srgbClr val="C8D7CD"/>
+            </a:solidFill>
+          </a:ln>
+        </p:spPr>
+        <p:style>
+          <a:lnRef idx="1">
+            <a:schemeClr val="accent1"/>
+          </a:lnRef>
+          <a:fillRef idx="3">
+            <a:schemeClr val="accent1"/>
+          </a:fillRef>
+          <a:effectRef idx="2">
+            <a:schemeClr val="accent1"/>
+          </a:effectRef>
+          <a:fontRef idx="minor">
+            <a:schemeClr val="lt1"/>
+          </a:fontRef>
+        </p:style>
+        <p:txBody>
+          <a:bodyPr rtlCol="0" anchor="ctr" wrap="square" lIns="228600" tIns="182880" rIns="228600"/>
+          <a:lstStyle/>
+          <a:p>
+            <a:pPr algn="ctr">
+              <a:defRPr sz="2000" b="1">
+                <a:solidFill>
+                  <a:srgbClr val="0F3B2E"/>
+                </a:solidFill>
+                <a:latin typeface="Arial"/>
+              </a:defRPr>
+            </a:pPr>
+            <a:r>
+              <a:t>ICAR-Grounded Granite AI</a:t>
+            </a:r>
+          </a:p>
+          <a:p>
+            <a:pPr>
+              <a:spcBef>
+                <a:spcPts val="600"/>
+              </a:spcBef>
+              <a:defRPr sz="1500">
+                <a:solidFill>
+                  <a:srgbClr val="1E293B"/>
+                </a:solidFill>
+                <a:latin typeface="Arial"/>
+              </a:defRPr>
+            </a:pPr>
+            <a:r>
+              <a:t>• Powered by IBM Granite (ibm/granite-4-h-small) on watsonx.ai.</a:t>
+            </a:r>
+          </a:p>
+          <a:p>
+            <a:pPr>
+              <a:spcBef>
+                <a:spcPts val="600"/>
+              </a:spcBef>
+              <a:defRPr sz="1500">
+                <a:solidFill>
+                  <a:srgbClr val="1E293B"/>
+                </a:solidFill>
+                <a:latin typeface="Arial"/>
+              </a:defRPr>
+            </a:pPr>
+            <a:r>
+              <a:t>• Restricts treatments to verified ICAR/KVK active ingredients.</a:t>
+            </a:r>
+          </a:p>
+          <a:p>
+            <a:pPr>
+              <a:spcBef>
+                <a:spcPts val="600"/>
+              </a:spcBef>
+              <a:defRPr sz="1500">
+                <a:solidFill>
+                  <a:srgbClr val="1E293B"/>
+                </a:solidFill>
+                <a:latin typeface="Arial"/>
+              </a:defRPr>
+            </a:pPr>
+            <a:r>
+              <a:t>• Vernacular audio advisory delivery in KA, TE, HI, and EN.</a:t>
+            </a:r>
           </a:p>
         </p:txBody>
       </p:sp>
@@ -15422,7 +14687,17 @@
           </a:bodyPr>
           <a:lstStyle/>
           <a:p>
-            <a:pPr fontAlgn="base"/>
+            <a:pPr fontAlgn="base" algn="l">
+              <a:defRPr sz="2800" b="1">
+                <a:solidFill>
+                  <a:srgbClr val="0F3B2E"/>
+                </a:solidFill>
+                <a:latin typeface="Arial"/>
+              </a:defRPr>
+            </a:pPr>
+            <a:r>
+              <a:t>Project Objectives</a:t>
+            </a:r>
             <a:endParaRPr lang="en-US" b="1"/>
           </a:p>
           <a:p>
@@ -15574,37 +14849,341 @@
       </p:sp>
       <p:sp>
         <p:nvSpPr>
-          <p:cNvPr id="3" name="TextBox 2">
-            <a:extLst>
-              <a:ext uri="{FF2B5EF4-FFF2-40B4-BE49-F238E27FC236}">
-                <a16:creationId xmlns:a16="http://schemas.microsoft.com/office/drawing/2014/main" id="{527F30CC-07EF-8FCC-DA00-C9212F5DAECE}"/>
-              </a:ext>
-            </a:extLst>
-          </p:cNvPr>
-          <p:cNvSpPr txBox="1"/>
+          <p:cNvPr id="3" name="Rounded Rectangle 2"/>
+          <p:cNvSpPr/>
           <p:nvPr/>
         </p:nvSpPr>
         <p:spPr>
           <a:xfrm>
-            <a:off x="576072" y="704088"/>
-            <a:ext cx="7214616" cy="461665"/>
+            <a:off x="731520" y="1645920"/>
+            <a:ext cx="10698480" cy="841248"/>
           </a:xfrm>
-          <a:prstGeom prst="rect">
+          <a:prstGeom prst="roundRect">
             <a:avLst/>
           </a:prstGeom>
-          <a:noFill/>
+          <a:solidFill>
+            <a:srgbClr val="F5F8F6"/>
+          </a:solidFill>
+          <a:ln w="19050">
+            <a:solidFill>
+              <a:srgbClr val="C8D7CD"/>
+            </a:solidFill>
+          </a:ln>
         </p:spPr>
+        <p:style>
+          <a:lnRef idx="1">
+            <a:schemeClr val="accent1"/>
+          </a:lnRef>
+          <a:fillRef idx="3">
+            <a:schemeClr val="accent1"/>
+          </a:fillRef>
+          <a:effectRef idx="2">
+            <a:schemeClr val="accent1"/>
+          </a:effectRef>
+          <a:fontRef idx="minor">
+            <a:schemeClr val="lt1"/>
+          </a:fontRef>
+        </p:style>
         <p:txBody>
-          <a:bodyPr wrap="square" rtlCol="0">
-            <a:spAutoFit/>
-          </a:bodyPr>
+          <a:bodyPr rtlCol="0" anchor="ctr" wrap="square" lIns="182880" tIns="73152"/>
           <a:lstStyle/>
           <a:p>
-            <a:r>
-              <a:rPr lang="en-US" sz="2400" b="1"/>
-              <a:t>Proposed Solution -</a:t>
-            </a:r>
-            <a:endParaRPr lang="en-IN" sz="2400" b="1"/>
+            <a:pPr algn="ctr">
+              <a:defRPr sz="1900" b="1">
+                <a:solidFill>
+                  <a:srgbClr val="0F3B2E"/>
+                </a:solidFill>
+                <a:latin typeface="Arial"/>
+              </a:defRPr>
+            </a:pPr>
+            <a:r>
+              <a:t>Objective 1: Zero-Latency Agromet Monitoring</a:t>
+            </a:r>
+          </a:p>
+          <a:p>
+            <a:pPr>
+              <a:defRPr sz="1400">
+                <a:solidFill>
+                  <a:srgbClr val="1E293B"/>
+                </a:solidFill>
+                <a:latin typeface="Arial"/>
+              </a:defRPr>
+            </a:pPr>
+            <a:r>
+              <a:t>Continuously track hyper-local temperature, relative humidity (&gt;78% RH), and precipitation thresholds to predict pathogen outbreaks.</a:t>
+            </a:r>
+          </a:p>
+        </p:txBody>
+      </p:sp>
+      <p:sp>
+        <p:nvSpPr>
+          <p:cNvPr id="4" name="Rounded Rectangle 3"/>
+          <p:cNvSpPr/>
+          <p:nvPr/>
+        </p:nvSpPr>
+        <p:spPr>
+          <a:xfrm>
+            <a:off x="731520" y="2578608"/>
+            <a:ext cx="10698480" cy="841248"/>
+          </a:xfrm>
+          <a:prstGeom prst="roundRect">
+            <a:avLst/>
+          </a:prstGeom>
+          <a:solidFill>
+            <a:srgbClr val="F5F8F6"/>
+          </a:solidFill>
+          <a:ln w="19050">
+            <a:solidFill>
+              <a:srgbClr val="C8D7CD"/>
+            </a:solidFill>
+          </a:ln>
+        </p:spPr>
+        <p:style>
+          <a:lnRef idx="1">
+            <a:schemeClr val="accent1"/>
+          </a:lnRef>
+          <a:fillRef idx="3">
+            <a:schemeClr val="accent1"/>
+          </a:fillRef>
+          <a:effectRef idx="2">
+            <a:schemeClr val="accent1"/>
+          </a:effectRef>
+          <a:fontRef idx="minor">
+            <a:schemeClr val="lt1"/>
+          </a:fontRef>
+        </p:style>
+        <p:txBody>
+          <a:bodyPr rtlCol="0" anchor="ctr" wrap="square" lIns="182880" tIns="73152"/>
+          <a:lstStyle/>
+          <a:p>
+            <a:pPr algn="ctr">
+              <a:defRPr sz="1900" b="1">
+                <a:solidFill>
+                  <a:srgbClr val="0F3B2E"/>
+                </a:solidFill>
+                <a:latin typeface="Arial"/>
+              </a:defRPr>
+            </a:pPr>
+            <a:r>
+              <a:t>Objective 2: Multi-Modal Pathology Diagnostics</a:t>
+            </a:r>
+          </a:p>
+          <a:p>
+            <a:pPr>
+              <a:defRPr sz="1400">
+                <a:solidFill>
+                  <a:srgbClr val="1E293B"/>
+                </a:solidFill>
+                <a:latin typeface="Arial"/>
+              </a:defRPr>
+            </a:pPr>
+            <a:r>
+              <a:t>Deterministic OpenCV color segmentation to isolate foliar chlorosis, fruit rot craters, and fungal necrotic lesions.</a:t>
+            </a:r>
+          </a:p>
+        </p:txBody>
+      </p:sp>
+      <p:sp>
+        <p:nvSpPr>
+          <p:cNvPr id="5" name="Rounded Rectangle 4"/>
+          <p:cNvSpPr/>
+          <p:nvPr/>
+        </p:nvSpPr>
+        <p:spPr>
+          <a:xfrm>
+            <a:off x="731520" y="3511296"/>
+            <a:ext cx="10698480" cy="841248"/>
+          </a:xfrm>
+          <a:prstGeom prst="roundRect">
+            <a:avLst/>
+          </a:prstGeom>
+          <a:solidFill>
+            <a:srgbClr val="F5F8F6"/>
+          </a:solidFill>
+          <a:ln w="19050">
+            <a:solidFill>
+              <a:srgbClr val="C8D7CD"/>
+            </a:solidFill>
+          </a:ln>
+        </p:spPr>
+        <p:style>
+          <a:lnRef idx="1">
+            <a:schemeClr val="accent1"/>
+          </a:lnRef>
+          <a:fillRef idx="3">
+            <a:schemeClr val="accent1"/>
+          </a:fillRef>
+          <a:effectRef idx="2">
+            <a:schemeClr val="accent1"/>
+          </a:effectRef>
+          <a:fontRef idx="minor">
+            <a:schemeClr val="lt1"/>
+          </a:fontRef>
+        </p:style>
+        <p:txBody>
+          <a:bodyPr rtlCol="0" anchor="ctr" wrap="square" lIns="182880" tIns="73152"/>
+          <a:lstStyle/>
+          <a:p>
+            <a:pPr algn="ctr">
+              <a:defRPr sz="1900" b="1">
+                <a:solidFill>
+                  <a:srgbClr val="0F3B2E"/>
+                </a:solidFill>
+                <a:latin typeface="Arial"/>
+              </a:defRPr>
+            </a:pPr>
+            <a:r>
+              <a:t>Objective 3: Langflow Agentic Flow Orchestration</a:t>
+            </a:r>
+          </a:p>
+          <a:p>
+            <a:pPr>
+              <a:defRPr sz="1400">
+                <a:solidFill>
+                  <a:srgbClr val="1E293B"/>
+                </a:solidFill>
+                <a:latin typeface="Arial"/>
+              </a:defRPr>
+            </a:pPr>
+            <a:r>
+              <a:t>Build an extensible, modular visual pipeline connecting user input, sensor telemetry, RAG, and IBM Granite.</a:t>
+            </a:r>
+          </a:p>
+        </p:txBody>
+      </p:sp>
+      <p:sp>
+        <p:nvSpPr>
+          <p:cNvPr id="6" name="Rounded Rectangle 5"/>
+          <p:cNvSpPr/>
+          <p:nvPr/>
+        </p:nvSpPr>
+        <p:spPr>
+          <a:xfrm>
+            <a:off x="731520" y="4443984"/>
+            <a:ext cx="10698480" cy="841248"/>
+          </a:xfrm>
+          <a:prstGeom prst="roundRect">
+            <a:avLst/>
+          </a:prstGeom>
+          <a:solidFill>
+            <a:srgbClr val="F5F8F6"/>
+          </a:solidFill>
+          <a:ln w="19050">
+            <a:solidFill>
+              <a:srgbClr val="C8D7CD"/>
+            </a:solidFill>
+          </a:ln>
+        </p:spPr>
+        <p:style>
+          <a:lnRef idx="1">
+            <a:schemeClr val="accent1"/>
+          </a:lnRef>
+          <a:fillRef idx="3">
+            <a:schemeClr val="accent1"/>
+          </a:fillRef>
+          <a:effectRef idx="2">
+            <a:schemeClr val="accent1"/>
+          </a:effectRef>
+          <a:fontRef idx="minor">
+            <a:schemeClr val="lt1"/>
+          </a:fontRef>
+        </p:style>
+        <p:txBody>
+          <a:bodyPr rtlCol="0" anchor="ctr" wrap="square" lIns="182880" tIns="73152"/>
+          <a:lstStyle/>
+          <a:p>
+            <a:pPr algn="ctr">
+              <a:defRPr sz="1900" b="1">
+                <a:solidFill>
+                  <a:srgbClr val="0F3B2E"/>
+                </a:solidFill>
+                <a:latin typeface="Arial"/>
+              </a:defRPr>
+            </a:pPr>
+            <a:r>
+              <a:t>Objective 4: Zero-Hallucination Chemical Grounding</a:t>
+            </a:r>
+          </a:p>
+          <a:p>
+            <a:pPr>
+              <a:defRPr sz="1400">
+                <a:solidFill>
+                  <a:srgbClr val="1E293B"/>
+                </a:solidFill>
+                <a:latin typeface="Arial"/>
+              </a:defRPr>
+            </a:pPr>
+            <a:r>
+              <a:t>Integrate ICAR/KVK vector retrieval to guarantee calibrated active ingredient recommendations (g/L or ml/L).</a:t>
+            </a:r>
+          </a:p>
+        </p:txBody>
+      </p:sp>
+      <p:sp>
+        <p:nvSpPr>
+          <p:cNvPr id="7" name="Rounded Rectangle 6"/>
+          <p:cNvSpPr/>
+          <p:nvPr/>
+        </p:nvSpPr>
+        <p:spPr>
+          <a:xfrm>
+            <a:off x="731520" y="5376672"/>
+            <a:ext cx="10698480" cy="841248"/>
+          </a:xfrm>
+          <a:prstGeom prst="roundRect">
+            <a:avLst/>
+          </a:prstGeom>
+          <a:solidFill>
+            <a:srgbClr val="F5F8F6"/>
+          </a:solidFill>
+          <a:ln w="19050">
+            <a:solidFill>
+              <a:srgbClr val="C8D7CD"/>
+            </a:solidFill>
+          </a:ln>
+        </p:spPr>
+        <p:style>
+          <a:lnRef idx="1">
+            <a:schemeClr val="accent1"/>
+          </a:lnRef>
+          <a:fillRef idx="3">
+            <a:schemeClr val="accent1"/>
+          </a:fillRef>
+          <a:effectRef idx="2">
+            <a:schemeClr val="accent1"/>
+          </a:effectRef>
+          <a:fontRef idx="minor">
+            <a:schemeClr val="lt1"/>
+          </a:fontRef>
+        </p:style>
+        <p:txBody>
+          <a:bodyPr rtlCol="0" anchor="ctr" wrap="square" lIns="182880" tIns="73152"/>
+          <a:lstStyle/>
+          <a:p>
+            <a:pPr algn="ctr">
+              <a:defRPr sz="1900" b="1">
+                <a:solidFill>
+                  <a:srgbClr val="0F3B2E"/>
+                </a:solidFill>
+                <a:latin typeface="Arial"/>
+              </a:defRPr>
+            </a:pPr>
+            <a:r>
+              <a:t>Objective 5: Multi-Lingual Vernacular Inclusivity</a:t>
+            </a:r>
+          </a:p>
+          <a:p>
+            <a:pPr>
+              <a:defRPr sz="1400">
+                <a:solidFill>
+                  <a:srgbClr val="1E293B"/>
+                </a:solidFill>
+                <a:latin typeface="Arial"/>
+              </a:defRPr>
+            </a:pPr>
+            <a:r>
+              <a:t>Deploy multi-tier regional dialect voice generation (Kannada, Telugu, Hindi, English) for smallholder usability.</a:t>
+            </a:r>
           </a:p>
         </p:txBody>
       </p:sp>
@@ -15672,8 +15251,15 @@
           </a:bodyPr>
           <a:lstStyle/>
           <a:p>
-            <a:r>
-              <a:rPr lang="en-US" sz="2400" b="1"/>
+            <a:pPr algn="l">
+              <a:defRPr sz="2800" b="1">
+                <a:solidFill>
+                  <a:srgbClr val="0F3B2E"/>
+                </a:solidFill>
+                <a:latin typeface="Arial"/>
+              </a:defRPr>
+            </a:pPr>
+            <a:r>
               <a:t>Technology Used</a:t>
             </a:r>
             <a:endParaRPr lang="en-IN" sz="2400" b="1"/>
@@ -15682,213 +15268,422 @@
       </p:sp>
       <p:sp>
         <p:nvSpPr>
-          <p:cNvPr id="3" name="TextBox 2">
-            <a:extLst>
-              <a:ext uri="{FF2B5EF4-FFF2-40B4-BE49-F238E27FC236}">
-                <a16:creationId xmlns:a16="http://schemas.microsoft.com/office/drawing/2014/main" id="{4A7608B5-9906-EFCF-959A-E89FC2E3EE19}"/>
-              </a:ext>
-            </a:extLst>
-          </p:cNvPr>
-          <p:cNvSpPr txBox="1"/>
+          <p:cNvPr id="3" name="Rounded Rectangle 2"/>
+          <p:cNvSpPr/>
           <p:nvPr/>
         </p:nvSpPr>
         <p:spPr>
           <a:xfrm>
-            <a:off x="777240" y="1207008"/>
-            <a:ext cx="10515600" cy="5509200"/>
+            <a:off x="731520" y="1645920"/>
+            <a:ext cx="3383280" cy="4572000"/>
           </a:xfrm>
-          <a:prstGeom prst="rect">
+          <a:prstGeom prst="roundRect">
             <a:avLst/>
           </a:prstGeom>
-          <a:noFill/>
+          <a:solidFill>
+            <a:srgbClr val="F5F8F6"/>
+          </a:solidFill>
+          <a:ln w="19050">
+            <a:solidFill>
+              <a:srgbClr val="C8D7CD"/>
+            </a:solidFill>
+          </a:ln>
         </p:spPr>
+        <p:style>
+          <a:lnRef idx="1">
+            <a:schemeClr val="accent1"/>
+          </a:lnRef>
+          <a:fillRef idx="3">
+            <a:schemeClr val="accent1"/>
+          </a:fillRef>
+          <a:effectRef idx="2">
+            <a:schemeClr val="accent1"/>
+          </a:effectRef>
+          <a:fontRef idx="minor">
+            <a:schemeClr val="lt1"/>
+          </a:fontRef>
+        </p:style>
         <p:txBody>
-          <a:bodyPr wrap="square" rtlCol="0">
-            <a:spAutoFit/>
-          </a:bodyPr>
+          <a:bodyPr rtlCol="0" anchor="ctr" wrap="square" lIns="228600" tIns="182880" rIns="228600"/>
           <a:lstStyle/>
           <a:p>
-            <a:pPr marL="285750" indent="-285750">
-              <a:buFont typeface="Arial" panose="020B0604020202020204" pitchFamily="34" charset="0"/>
-              <a:buChar char="•"/>
-            </a:pPr>
-            <a:r>
-              <a:rPr lang="en-US" sz="1800" b="1" err="1"/>
-              <a:t>Langflow</a:t>
-            </a:r>
-            <a:r>
-              <a:rPr lang="en-US" sz="1800" b="1"/>
-              <a:t> platform </a:t>
-            </a:r>
-            <a:r>
-              <a:rPr lang="en-US" sz="1800"/>
-              <a:t>-For designing and orchestrating multi-agent workflows visually</a:t>
-            </a:r>
-          </a:p>
-          <a:p>
-            <a:pPr marL="285750" indent="-285750">
-              <a:buFont typeface="Arial" panose="020B0604020202020204" pitchFamily="34" charset="0"/>
-              <a:buChar char="•"/>
-            </a:pPr>
-            <a:endParaRPr lang="en-US" sz="1800"/>
-          </a:p>
-          <a:p>
-            <a:pPr marL="285750" indent="-285750">
-              <a:buFont typeface="Arial" panose="020B0604020202020204" pitchFamily="34" charset="0"/>
-              <a:buChar char="•"/>
-            </a:pPr>
-            <a:endParaRPr lang="en-US" sz="1800"/>
-          </a:p>
-          <a:p>
-            <a:pPr marL="285750" indent="-285750">
-              <a:buFont typeface="Arial" panose="020B0604020202020204" pitchFamily="34" charset="0"/>
-              <a:buChar char="•"/>
-            </a:pPr>
-            <a:r>
-              <a:rPr lang="en-US" sz="1800" b="1"/>
-              <a:t>IBM </a:t>
-            </a:r>
-            <a:r>
-              <a:rPr lang="en-US" sz="1800" b="1" err="1"/>
-              <a:t>Grainte</a:t>
-            </a:r>
-            <a:r>
-              <a:rPr lang="en-US" sz="1800" b="1"/>
-              <a:t> model </a:t>
-            </a:r>
-            <a:r>
-              <a:rPr lang="en-US" sz="1800"/>
-              <a:t>-  for </a:t>
-            </a:r>
-            <a:r>
-              <a:rPr lang="en-US" sz="1800" err="1"/>
-              <a:t>eg</a:t>
-            </a:r>
-            <a:r>
-              <a:rPr lang="en-US" sz="1800"/>
-              <a:t> – ibm-granite-3-2-8b – For natural language understanding, reasoning, and personalization</a:t>
-            </a:r>
-          </a:p>
-          <a:p>
-            <a:pPr marL="285750" indent="-285750">
-              <a:buFont typeface="Arial" panose="020B0604020202020204" pitchFamily="34" charset="0"/>
-              <a:buChar char="•"/>
-            </a:pPr>
-            <a:endParaRPr lang="en-US" sz="1800"/>
-          </a:p>
-          <a:p>
-            <a:pPr marL="285750" indent="-285750">
-              <a:buFont typeface="Arial" panose="020B0604020202020204" pitchFamily="34" charset="0"/>
-              <a:buChar char="•"/>
-            </a:pPr>
-            <a:r>
-              <a:rPr lang="en-US" sz="1800" b="1"/>
-              <a:t>IBM Cloud </a:t>
-            </a:r>
-            <a:r>
-              <a:rPr lang="en-US" sz="1800"/>
-              <a:t>– It provides the infrastructure to build, deploy, and scale the Nutrition Agent efficiently. IBM Cloud enables a </a:t>
-            </a:r>
-            <a:r>
-              <a:rPr lang="en-US" sz="1800" b="1"/>
-              <a:t>reliable, secure, and scalable environment</a:t>
-            </a:r>
-            <a:r>
-              <a:rPr lang="en-US" sz="1800"/>
-              <a:t> for deploying the Nutrition Agent.</a:t>
-            </a:r>
-          </a:p>
-          <a:p>
-            <a:pPr marL="285750" indent="-285750">
-              <a:buFont typeface="Arial" panose="020B0604020202020204" pitchFamily="34" charset="0"/>
-              <a:buChar char="•"/>
-            </a:pPr>
-            <a:endParaRPr lang="en-US" sz="1800"/>
-          </a:p>
-          <a:p>
-            <a:pPr marL="285750" indent="-285750">
-              <a:buFont typeface="Arial" panose="020B0604020202020204" pitchFamily="34" charset="0"/>
-              <a:buChar char="•"/>
-            </a:pPr>
-            <a:r>
-              <a:rPr lang="en-US" sz="1800" b="1"/>
-              <a:t>RAG– </a:t>
-            </a:r>
-            <a:r>
-              <a:rPr lang="en-US" sz="1800"/>
-              <a:t>RAG to </a:t>
-            </a:r>
-            <a:r>
-              <a:rPr lang="en-US" sz="1800" b="1"/>
-              <a:t>fetch real data first, then generate intelligent answers</a:t>
-            </a:r>
-            <a:r>
-              <a:rPr lang="en-US" sz="1800"/>
-              <a:t>, making the Nutrition Agent more trustworthy and effective.</a:t>
-            </a:r>
-          </a:p>
-          <a:p>
-            <a:pPr marL="285750" indent="-285750">
-              <a:buFont typeface="Arial" panose="020B0604020202020204" pitchFamily="34" charset="0"/>
-              <a:buChar char="•"/>
-            </a:pPr>
-            <a:endParaRPr lang="en-US" sz="1800"/>
-          </a:p>
-          <a:p>
-            <a:pPr marL="285750" indent="-285750">
-              <a:buFont typeface="Arial" panose="020B0604020202020204" pitchFamily="34" charset="0"/>
-              <a:buChar char="•"/>
-            </a:pPr>
-            <a:r>
-              <a:rPr lang="en-US" sz="1800" b="1"/>
-              <a:t>IBM Watsonx.ai - </a:t>
-            </a:r>
-            <a:r>
-              <a:rPr lang="en-US" sz="1800"/>
-              <a:t>For model deployment, embeddings, and AI governance</a:t>
-            </a:r>
-          </a:p>
-          <a:p>
-            <a:pPr marL="285750" indent="-285750">
-              <a:buFont typeface="Arial" panose="020B0604020202020204" pitchFamily="34" charset="0"/>
-              <a:buChar char="•"/>
-            </a:pPr>
-            <a:endParaRPr lang="en-US" sz="1800"/>
-          </a:p>
-          <a:p>
-            <a:pPr marL="285750" indent="-285750">
-              <a:buFont typeface="Arial" panose="020B0604020202020204" pitchFamily="34" charset="0"/>
-              <a:buChar char="•"/>
-            </a:pPr>
-            <a:r>
-              <a:rPr lang="en-IN" sz="1800" b="1"/>
-              <a:t>Vector Database </a:t>
-            </a:r>
-            <a:r>
-              <a:rPr lang="en-IN" sz="1800"/>
-              <a:t>(FAISS/Chroma) – For RAG-based nutritional data retrieval</a:t>
-            </a:r>
-            <a:endParaRPr lang="en-US" sz="1800"/>
-          </a:p>
-          <a:p>
-            <a:pPr marL="285750" indent="-285750">
-              <a:buFont typeface="Arial" panose="020B0604020202020204" pitchFamily="34" charset="0"/>
-              <a:buChar char="•"/>
-            </a:pPr>
-            <a:endParaRPr lang="en-US" sz="1800"/>
-          </a:p>
-          <a:p>
-            <a:pPr marL="285750" indent="-285750">
-              <a:buFont typeface="Arial" panose="020B0604020202020204" pitchFamily="34" charset="0"/>
-              <a:buChar char="•"/>
-            </a:pPr>
-            <a:endParaRPr lang="en-US" sz="1800"/>
-          </a:p>
-          <a:p>
-            <a:endParaRPr lang="en-US"/>
-          </a:p>
-          <a:p>
-            <a:endParaRPr lang="en-IN"/>
+            <a:pPr algn="ctr">
+              <a:defRPr sz="2000" b="1">
+                <a:solidFill>
+                  <a:srgbClr val="0F3B2E"/>
+                </a:solidFill>
+                <a:latin typeface="Arial"/>
+              </a:defRPr>
+            </a:pPr>
+            <a:r>
+              <a:t>Langflow Platform &amp; Components</a:t>
+            </a:r>
+          </a:p>
+          <a:p>
+            <a:pPr>
+              <a:spcBef>
+                <a:spcPts val="600"/>
+              </a:spcBef>
+              <a:defRPr sz="1500">
+                <a:solidFill>
+                  <a:srgbClr val="1E293B"/>
+                </a:solidFill>
+                <a:latin typeface="Arial"/>
+              </a:defRPr>
+            </a:pPr>
+            <a:r>
+              <a:t>• Langflow Platform (Agentic visual pipeline)</a:t>
+            </a:r>
+          </a:p>
+          <a:p>
+            <a:pPr>
+              <a:spcBef>
+                <a:spcPts val="600"/>
+              </a:spcBef>
+              <a:defRPr sz="1500">
+                <a:solidFill>
+                  <a:srgbClr val="1E293B"/>
+                </a:solidFill>
+                <a:latin typeface="Arial"/>
+              </a:defRPr>
+            </a:pPr>
+            <a:r>
+              <a:t>• Langflow Component Names:</a:t>
+            </a:r>
+          </a:p>
+          <a:p>
+            <a:pPr>
+              <a:spcBef>
+                <a:spcPts val="600"/>
+              </a:spcBef>
+              <a:defRPr sz="1500">
+                <a:solidFill>
+                  <a:srgbClr val="1E293B"/>
+                </a:solidFill>
+                <a:latin typeface="Arial"/>
+              </a:defRPr>
+            </a:pPr>
+            <a:r>
+              <a:t>  - Agent Component (Decision reasoning)</a:t>
+            </a:r>
+          </a:p>
+          <a:p>
+            <a:pPr>
+              <a:spcBef>
+                <a:spcPts val="600"/>
+              </a:spcBef>
+              <a:defRPr sz="1500">
+                <a:solidFill>
+                  <a:srgbClr val="1E293B"/>
+                </a:solidFill>
+                <a:latin typeface="Arial"/>
+              </a:defRPr>
+            </a:pPr>
+            <a:r>
+              <a:t>  - Chat Input &amp; Chat Output Components</a:t>
+            </a:r>
+          </a:p>
+          <a:p>
+            <a:pPr>
+              <a:spcBef>
+                <a:spcPts val="600"/>
+              </a:spcBef>
+              <a:defRPr sz="1500">
+                <a:solidFill>
+                  <a:srgbClr val="1E293B"/>
+                </a:solidFill>
+                <a:latin typeface="Arial"/>
+              </a:defRPr>
+            </a:pPr>
+            <a:r>
+              <a:t>  - Custom Python Tool Component</a:t>
+            </a:r>
+          </a:p>
+          <a:p>
+            <a:pPr>
+              <a:spcBef>
+                <a:spcPts val="600"/>
+              </a:spcBef>
+              <a:defRPr sz="1500">
+                <a:solidFill>
+                  <a:srgbClr val="1E293B"/>
+                </a:solidFill>
+                <a:latin typeface="Arial"/>
+              </a:defRPr>
+            </a:pPr>
+            <a:r>
+              <a:t>  - ChromaDB Vector Store Component</a:t>
+            </a:r>
+          </a:p>
+        </p:txBody>
+      </p:sp>
+      <p:sp>
+        <p:nvSpPr>
+          <p:cNvPr id="4" name="Rounded Rectangle 3"/>
+          <p:cNvSpPr/>
+          <p:nvPr/>
+        </p:nvSpPr>
+        <p:spPr>
+          <a:xfrm>
+            <a:off x="4389120" y="1645920"/>
+            <a:ext cx="3383280" cy="4572000"/>
+          </a:xfrm>
+          <a:prstGeom prst="roundRect">
+            <a:avLst/>
+          </a:prstGeom>
+          <a:solidFill>
+            <a:srgbClr val="F5F8F6"/>
+          </a:solidFill>
+          <a:ln w="19050">
+            <a:solidFill>
+              <a:srgbClr val="C8D7CD"/>
+            </a:solidFill>
+          </a:ln>
+        </p:spPr>
+        <p:style>
+          <a:lnRef idx="1">
+            <a:schemeClr val="accent1"/>
+          </a:lnRef>
+          <a:fillRef idx="3">
+            <a:schemeClr val="accent1"/>
+          </a:fillRef>
+          <a:effectRef idx="2">
+            <a:schemeClr val="accent1"/>
+          </a:effectRef>
+          <a:fontRef idx="minor">
+            <a:schemeClr val="lt1"/>
+          </a:fontRef>
+        </p:style>
+        <p:txBody>
+          <a:bodyPr rtlCol="0" anchor="ctr" wrap="square" lIns="228600" tIns="182880" rIns="228600"/>
+          <a:lstStyle/>
+          <a:p>
+            <a:pPr algn="ctr">
+              <a:defRPr sz="2000" b="1">
+                <a:solidFill>
+                  <a:srgbClr val="0F3B2E"/>
+                </a:solidFill>
+                <a:latin typeface="Arial"/>
+              </a:defRPr>
+            </a:pPr>
+            <a:r>
+              <a:t>IBM Granite &amp; Cloud Platform</a:t>
+            </a:r>
+          </a:p>
+          <a:p>
+            <a:pPr>
+              <a:spcBef>
+                <a:spcPts val="600"/>
+              </a:spcBef>
+              <a:defRPr sz="1500">
+                <a:solidFill>
+                  <a:srgbClr val="1E293B"/>
+                </a:solidFill>
+                <a:latin typeface="Arial"/>
+              </a:defRPr>
+            </a:pPr>
+            <a:r>
+              <a:t>• IBM watsonx.ai Cloud Platform</a:t>
+            </a:r>
+          </a:p>
+          <a:p>
+            <a:pPr>
+              <a:spcBef>
+                <a:spcPts val="600"/>
+              </a:spcBef>
+              <a:defRPr sz="1500">
+                <a:solidFill>
+                  <a:srgbClr val="1E293B"/>
+                </a:solidFill>
+                <a:latin typeface="Arial"/>
+              </a:defRPr>
+            </a:pPr>
+            <a:r>
+              <a:t>• IBM Granite Model: ibm/granite-4-h-small</a:t>
+            </a:r>
+          </a:p>
+          <a:p>
+            <a:pPr>
+              <a:spcBef>
+                <a:spcPts val="600"/>
+              </a:spcBef>
+              <a:defRPr sz="1500">
+                <a:solidFill>
+                  <a:srgbClr val="1E293B"/>
+                </a:solidFill>
+                <a:latin typeface="Arial"/>
+              </a:defRPr>
+            </a:pPr>
+            <a:r>
+              <a:t>• IBM Cloud IAM Security Authentication</a:t>
+            </a:r>
+          </a:p>
+          <a:p>
+            <a:pPr>
+              <a:spcBef>
+                <a:spcPts val="600"/>
+              </a:spcBef>
+              <a:defRPr sz="1500">
+                <a:solidFill>
+                  <a:srgbClr val="1E293B"/>
+                </a:solidFill>
+                <a:latin typeface="Arial"/>
+              </a:defRPr>
+            </a:pPr>
+            <a:r>
+              <a:t>• Strict Agronomic JSON Schema Enforcement</a:t>
+            </a:r>
+          </a:p>
+          <a:p>
+            <a:pPr>
+              <a:spcBef>
+                <a:spcPts val="600"/>
+              </a:spcBef>
+              <a:defRPr sz="1500">
+                <a:solidFill>
+                  <a:srgbClr val="1E293B"/>
+                </a:solidFill>
+                <a:latin typeface="Arial"/>
+              </a:defRPr>
+            </a:pPr>
+            <a:r>
+              <a:t>• Hosting Region: Dallas (us-south)</a:t>
+            </a:r>
+          </a:p>
+        </p:txBody>
+      </p:sp>
+      <p:sp>
+        <p:nvSpPr>
+          <p:cNvPr id="5" name="Rounded Rectangle 4"/>
+          <p:cNvSpPr/>
+          <p:nvPr/>
+        </p:nvSpPr>
+        <p:spPr>
+          <a:xfrm>
+            <a:off x="8046720" y="1645920"/>
+            <a:ext cx="3383280" cy="4572000"/>
+          </a:xfrm>
+          <a:prstGeom prst="roundRect">
+            <a:avLst/>
+          </a:prstGeom>
+          <a:solidFill>
+            <a:srgbClr val="F5F8F6"/>
+          </a:solidFill>
+          <a:ln w="19050">
+            <a:solidFill>
+              <a:srgbClr val="C8D7CD"/>
+            </a:solidFill>
+          </a:ln>
+        </p:spPr>
+        <p:style>
+          <a:lnRef idx="1">
+            <a:schemeClr val="accent1"/>
+          </a:lnRef>
+          <a:fillRef idx="3">
+            <a:schemeClr val="accent1"/>
+          </a:fillRef>
+          <a:effectRef idx="2">
+            <a:schemeClr val="accent1"/>
+          </a:effectRef>
+          <a:fontRef idx="minor">
+            <a:schemeClr val="lt1"/>
+          </a:fontRef>
+        </p:style>
+        <p:txBody>
+          <a:bodyPr rtlCol="0" anchor="ctr" wrap="square" lIns="228600" tIns="182880" rIns="228600"/>
+          <a:lstStyle/>
+          <a:p>
+            <a:pPr algn="ctr">
+              <a:defRPr sz="2000" b="1">
+                <a:solidFill>
+                  <a:srgbClr val="0F3B2E"/>
+                </a:solidFill>
+                <a:latin typeface="Arial"/>
+              </a:defRPr>
+            </a:pPr>
+            <a:r>
+              <a:t>Vision, Storage &amp; Audio Stack</a:t>
+            </a:r>
+          </a:p>
+          <a:p>
+            <a:pPr>
+              <a:spcBef>
+                <a:spcPts val="600"/>
+              </a:spcBef>
+              <a:defRPr sz="1500">
+                <a:solidFill>
+                  <a:srgbClr val="1E293B"/>
+                </a:solidFill>
+                <a:latin typeface="Arial"/>
+              </a:defRPr>
+            </a:pPr>
+            <a:r>
+              <a:t>• ChromaDB Vector Store (ICAR/KVK protocols)</a:t>
+            </a:r>
+          </a:p>
+          <a:p>
+            <a:pPr>
+              <a:spcBef>
+                <a:spcPts val="600"/>
+              </a:spcBef>
+              <a:defRPr sz="1500">
+                <a:solidFill>
+                  <a:srgbClr val="1E293B"/>
+                </a:solidFill>
+                <a:latin typeface="Arial"/>
+              </a:defRPr>
+            </a:pPr>
+            <a:r>
+              <a:t>• OpenCV Deterministic Foliar Segmentation</a:t>
+            </a:r>
+          </a:p>
+          <a:p>
+            <a:pPr>
+              <a:spcBef>
+                <a:spcPts val="600"/>
+              </a:spcBef>
+              <a:defRPr sz="1500">
+                <a:solidFill>
+                  <a:srgbClr val="1E293B"/>
+                </a:solidFill>
+                <a:latin typeface="Arial"/>
+              </a:defRPr>
+            </a:pPr>
+            <a:r>
+              <a:t>• Streamlit Native Dashboard Interface</a:t>
+            </a:r>
+          </a:p>
+          <a:p>
+            <a:pPr>
+              <a:spcBef>
+                <a:spcPts val="600"/>
+              </a:spcBef>
+              <a:defRPr sz="1500">
+                <a:solidFill>
+                  <a:srgbClr val="1E293B"/>
+                </a:solidFill>
+                <a:latin typeface="Arial"/>
+              </a:defRPr>
+            </a:pPr>
+            <a:r>
+              <a:t>• gTTS Regional Edge Text-to-Speech Engine</a:t>
+            </a:r>
+          </a:p>
+          <a:p>
+            <a:pPr>
+              <a:spcBef>
+                <a:spcPts val="600"/>
+              </a:spcBef>
+              <a:defRPr sz="1500">
+                <a:solidFill>
+                  <a:srgbClr val="1E293B"/>
+                </a:solidFill>
+                <a:latin typeface="Arial"/>
+              </a:defRPr>
+            </a:pPr>
+            <a:r>
+              <a:t>• Python 3.10+ Asynchronous Architecture</a:t>
+            </a:r>
           </a:p>
         </p:txBody>
       </p:sp>
@@ -15975,30 +15770,15 @@
               <a:buSzPts val="3500"/>
               <a:buFont typeface="Times New Roman"/>
               <a:buNone/>
-            </a:pPr>
-            <a:r>
-              <a:rPr lang="en-US" sz="2400" b="1" err="1">
-                <a:sym typeface="Times New Roman"/>
-              </a:rPr>
-              <a:t>Langflow</a:t>
-            </a:r>
-            <a:r>
-              <a:rPr lang="en-US" sz="3500" b="1" i="0" u="none" strike="noStrike" cap="none">
-                <a:solidFill>
-                  <a:srgbClr val="051D3A"/>
-                </a:solidFill>
-                <a:latin typeface="Times New Roman"/>
-                <a:ea typeface="Times New Roman"/>
-                <a:cs typeface="Times New Roman"/>
-                <a:sym typeface="Times New Roman"/>
-              </a:rPr>
-              <a:t> </a:t>
-            </a:r>
-            <a:r>
-              <a:rPr lang="en-US" sz="2400" b="1">
-                <a:sym typeface="Times New Roman"/>
-              </a:rPr>
-              <a:t>component Used -</a:t>
+              <a:defRPr sz="2800" b="1">
+                <a:solidFill>
+                  <a:srgbClr val="0F3B2E"/>
+                </a:solidFill>
+                <a:latin typeface="Arial"/>
+              </a:defRPr>
+            </a:pPr>
+            <a:r>
+              <a:t>Langflow component Used</a:t>
             </a:r>
             <a:endParaRPr sz="2400" b="1">
               <a:sym typeface="Times New Roman"/>
@@ -16008,526 +15788,341 @@
       </p:sp>
       <p:sp>
         <p:nvSpPr>
-          <p:cNvPr id="148" name="Google Shape;148;p5">
-            <a:extLst>
-              <a:ext uri="{FF2B5EF4-FFF2-40B4-BE49-F238E27FC236}">
-                <a16:creationId xmlns:a16="http://schemas.microsoft.com/office/drawing/2014/main" id="{69E3EADC-1EAD-7419-145C-20998925206E}"/>
-              </a:ext>
-            </a:extLst>
-          </p:cNvPr>
+          <p:cNvPr id="136" name="Rounded Rectangle 135"/>
           <p:cNvSpPr/>
           <p:nvPr/>
         </p:nvSpPr>
         <p:spPr>
           <a:xfrm>
-            <a:off x="2264331" y="6784578"/>
-            <a:ext cx="2140744" cy="224195"/>
+            <a:off x="731520" y="1645920"/>
+            <a:ext cx="10698480" cy="841248"/>
           </a:xfrm>
-          <a:prstGeom prst="rect">
+          <a:prstGeom prst="roundRect">
             <a:avLst/>
           </a:prstGeom>
-          <a:noFill/>
-          <a:ln>
-            <a:noFill/>
+          <a:solidFill>
+            <a:srgbClr val="F5F8F6"/>
+          </a:solidFill>
+          <a:ln w="19050">
+            <a:solidFill>
+              <a:srgbClr val="C8D7CD"/>
+            </a:solidFill>
           </a:ln>
         </p:spPr>
+        <p:style>
+          <a:lnRef idx="1">
+            <a:schemeClr val="accent1"/>
+          </a:lnRef>
+          <a:fillRef idx="3">
+            <a:schemeClr val="accent1"/>
+          </a:fillRef>
+          <a:effectRef idx="2">
+            <a:schemeClr val="accent1"/>
+          </a:effectRef>
+          <a:fontRef idx="minor">
+            <a:schemeClr val="lt1"/>
+          </a:fontRef>
+        </p:style>
         <p:txBody>
-          <a:bodyPr spcFirstLastPara="1" wrap="square" lIns="0" tIns="0" rIns="0" bIns="0" anchor="t" anchorCtr="0">
-            <a:noAutofit/>
-          </a:bodyPr>
+          <a:bodyPr rtlCol="0" anchor="ctr" wrap="square" lIns="182880" tIns="73152"/>
           <a:lstStyle/>
           <a:p>
-            <a:pPr marL="0" marR="0" lvl="0" indent="0" algn="ctr" rtl="0">
-              <a:lnSpc>
-                <a:spcPct val="109375"/>
-              </a:lnSpc>
-              <a:spcBef>
-                <a:spcPts val="0"/>
-              </a:spcBef>
-              <a:spcAft>
-                <a:spcPts val="0"/>
-              </a:spcAft>
-              <a:buClr>
-                <a:schemeClr val="dk1"/>
-              </a:buClr>
-              <a:buSzPts val="1600"/>
-              <a:buFont typeface="Calibri"/>
-              <a:buNone/>
-            </a:pPr>
-            <a:endParaRPr sz="1600" b="0" i="0" u="none" strike="noStrike" cap="none">
-              <a:solidFill>
-                <a:srgbClr val="000000"/>
-              </a:solidFill>
-              <a:latin typeface="Times New Roman"/>
-              <a:ea typeface="Times New Roman"/>
-              <a:cs typeface="Times New Roman"/>
-              <a:sym typeface="Times New Roman"/>
-            </a:endParaRPr>
+            <a:pPr algn="ctr">
+              <a:defRPr sz="1900" b="1">
+                <a:solidFill>
+                  <a:srgbClr val="0F3B2E"/>
+                </a:solidFill>
+                <a:latin typeface="Arial"/>
+              </a:defRPr>
+            </a:pPr>
+            <a:r>
+              <a:t>1. Chat Input Component</a:t>
+            </a:r>
+          </a:p>
+          <a:p>
+            <a:pPr>
+              <a:defRPr sz="1400">
+                <a:solidFill>
+                  <a:srgbClr val="1E293B"/>
+                </a:solidFill>
+                <a:latin typeface="Arial"/>
+              </a:defRPr>
+            </a:pPr>
+            <a:r>
+              <a:t>Ingests farmer queries, targeted crop selection, field location coordinates, and high-resolution foliar disease photography.</a:t>
+            </a:r>
           </a:p>
         </p:txBody>
       </p:sp>
       <p:sp>
         <p:nvSpPr>
-          <p:cNvPr id="149" name="Google Shape;149;p5">
-            <a:extLst>
-              <a:ext uri="{FF2B5EF4-FFF2-40B4-BE49-F238E27FC236}">
-                <a16:creationId xmlns:a16="http://schemas.microsoft.com/office/drawing/2014/main" id="{04E5872A-C331-C8F3-5D71-8E953BAAFE03}"/>
-              </a:ext>
-            </a:extLst>
-          </p:cNvPr>
+          <p:cNvPr id="137" name="Rounded Rectangle 136"/>
           <p:cNvSpPr/>
           <p:nvPr/>
         </p:nvSpPr>
         <p:spPr>
           <a:xfrm>
-            <a:off x="1782604" y="7100213"/>
-            <a:ext cx="3104198" cy="731877"/>
+            <a:off x="731520" y="2578608"/>
+            <a:ext cx="10698480" cy="841248"/>
           </a:xfrm>
-          <a:prstGeom prst="rect">
+          <a:prstGeom prst="roundRect">
             <a:avLst/>
           </a:prstGeom>
-          <a:noFill/>
-          <a:ln>
-            <a:noFill/>
+          <a:solidFill>
+            <a:srgbClr val="F5F8F6"/>
+          </a:solidFill>
+          <a:ln w="19050">
+            <a:solidFill>
+              <a:srgbClr val="C8D7CD"/>
+            </a:solidFill>
           </a:ln>
         </p:spPr>
+        <p:style>
+          <a:lnRef idx="1">
+            <a:schemeClr val="accent1"/>
+          </a:lnRef>
+          <a:fillRef idx="3">
+            <a:schemeClr val="accent1"/>
+          </a:fillRef>
+          <a:effectRef idx="2">
+            <a:schemeClr val="accent1"/>
+          </a:effectRef>
+          <a:fontRef idx="minor">
+            <a:schemeClr val="lt1"/>
+          </a:fontRef>
+        </p:style>
         <p:txBody>
-          <a:bodyPr spcFirstLastPara="1" wrap="square" lIns="0" tIns="0" rIns="0" bIns="0" anchor="t" anchorCtr="0">
-            <a:noAutofit/>
-          </a:bodyPr>
+          <a:bodyPr rtlCol="0" anchor="ctr" wrap="square" lIns="182880" tIns="73152"/>
           <a:lstStyle/>
           <a:p>
-            <a:pPr marL="0" marR="0" lvl="0" indent="0" algn="ctr" rtl="0">
-              <a:lnSpc>
-                <a:spcPct val="118750"/>
-              </a:lnSpc>
-              <a:spcBef>
-                <a:spcPts val="0"/>
-              </a:spcBef>
-              <a:spcAft>
-                <a:spcPts val="0"/>
-              </a:spcAft>
-              <a:buClr>
-                <a:schemeClr val="dk1"/>
-              </a:buClr>
-              <a:buSzPts val="1600"/>
-              <a:buFont typeface="Calibri"/>
-              <a:buNone/>
-            </a:pPr>
-            <a:endParaRPr sz="1600" b="0" i="0" u="none" strike="noStrike" cap="none">
-              <a:solidFill>
-                <a:srgbClr val="000000"/>
-              </a:solidFill>
-              <a:latin typeface="Times New Roman"/>
-              <a:ea typeface="Times New Roman"/>
-              <a:cs typeface="Times New Roman"/>
-              <a:sym typeface="Times New Roman"/>
-            </a:endParaRPr>
+            <a:pPr algn="ctr">
+              <a:defRPr sz="1900" b="1">
+                <a:solidFill>
+                  <a:srgbClr val="0F3B2E"/>
+                </a:solidFill>
+                <a:latin typeface="Arial"/>
+              </a:defRPr>
+            </a:pPr>
+            <a:r>
+              <a:t>2. Custom Python Component (Agromet Sentinel)</a:t>
+            </a:r>
+          </a:p>
+          <a:p>
+            <a:pPr>
+              <a:defRPr sz="1400">
+                <a:solidFill>
+                  <a:srgbClr val="1E293B"/>
+                </a:solidFill>
+                <a:latin typeface="Arial"/>
+              </a:defRPr>
+            </a:pPr>
+            <a:r>
+              <a:t>Non-blocking daemon executing live agrometeorological evaluation against biological danger zones (RH &gt; 78% and rain probability).</a:t>
+            </a:r>
           </a:p>
         </p:txBody>
       </p:sp>
       <p:sp>
         <p:nvSpPr>
-          <p:cNvPr id="150" name="Google Shape;150;p5">
-            <a:extLst>
-              <a:ext uri="{FF2B5EF4-FFF2-40B4-BE49-F238E27FC236}">
-                <a16:creationId xmlns:a16="http://schemas.microsoft.com/office/drawing/2014/main" id="{76EF3801-5D99-5EFA-9AA2-AD265775E354}"/>
-              </a:ext>
-            </a:extLst>
-          </p:cNvPr>
+          <p:cNvPr id="138" name="Rounded Rectangle 137"/>
           <p:cNvSpPr/>
           <p:nvPr/>
         </p:nvSpPr>
         <p:spPr>
           <a:xfrm>
-            <a:off x="5732383" y="6784578"/>
-            <a:ext cx="1793915" cy="224195"/>
+            <a:off x="731520" y="3511296"/>
+            <a:ext cx="10698480" cy="841248"/>
           </a:xfrm>
-          <a:prstGeom prst="rect">
+          <a:prstGeom prst="roundRect">
             <a:avLst/>
           </a:prstGeom>
-          <a:noFill/>
-          <a:ln>
-            <a:noFill/>
+          <a:solidFill>
+            <a:srgbClr val="F5F8F6"/>
+          </a:solidFill>
+          <a:ln w="19050">
+            <a:solidFill>
+              <a:srgbClr val="C8D7CD"/>
+            </a:solidFill>
           </a:ln>
         </p:spPr>
+        <p:style>
+          <a:lnRef idx="1">
+            <a:schemeClr val="accent1"/>
+          </a:lnRef>
+          <a:fillRef idx="3">
+            <a:schemeClr val="accent1"/>
+          </a:fillRef>
+          <a:effectRef idx="2">
+            <a:schemeClr val="accent1"/>
+          </a:effectRef>
+          <a:fontRef idx="minor">
+            <a:schemeClr val="lt1"/>
+          </a:fontRef>
+        </p:style>
         <p:txBody>
-          <a:bodyPr spcFirstLastPara="1" wrap="square" lIns="0" tIns="0" rIns="0" bIns="0" anchor="t" anchorCtr="0">
-            <a:noAutofit/>
-          </a:bodyPr>
+          <a:bodyPr rtlCol="0" anchor="ctr" wrap="square" lIns="182880" tIns="73152"/>
           <a:lstStyle/>
           <a:p>
-            <a:pPr marL="0" marR="0" lvl="0" indent="0" algn="ctr" rtl="0">
-              <a:lnSpc>
-                <a:spcPct val="109375"/>
-              </a:lnSpc>
-              <a:spcBef>
-                <a:spcPts val="0"/>
-              </a:spcBef>
-              <a:spcAft>
-                <a:spcPts val="0"/>
-              </a:spcAft>
-              <a:buClr>
-                <a:schemeClr val="dk1"/>
-              </a:buClr>
-              <a:buSzPts val="1600"/>
-              <a:buFont typeface="Calibri"/>
-              <a:buNone/>
-            </a:pPr>
-            <a:endParaRPr sz="1600" b="0" i="0" u="none" strike="noStrike" cap="none">
-              <a:solidFill>
-                <a:srgbClr val="000000"/>
-              </a:solidFill>
-              <a:latin typeface="Times New Roman"/>
-              <a:ea typeface="Times New Roman"/>
-              <a:cs typeface="Times New Roman"/>
-              <a:sym typeface="Times New Roman"/>
-            </a:endParaRPr>
+            <a:pPr algn="ctr">
+              <a:defRPr sz="1900" b="1">
+                <a:solidFill>
+                  <a:srgbClr val="0F3B2E"/>
+                </a:solidFill>
+                <a:latin typeface="Arial"/>
+              </a:defRPr>
+            </a:pPr>
+            <a:r>
+              <a:t>3. Custom Vision Component (OpenCV Pathology)</a:t>
+            </a:r>
+          </a:p>
+          <a:p>
+            <a:pPr>
+              <a:defRPr sz="1400">
+                <a:solidFill>
+                  <a:srgbClr val="1E293B"/>
+                </a:solidFill>
+                <a:latin typeface="Arial"/>
+              </a:defRPr>
+            </a:pPr>
+            <a:r>
+              <a:t>Performs deterministic RGB color segmentation to compute necrotic lesion surface percentages and foliar chlorosis patterns.</a:t>
+            </a:r>
           </a:p>
         </p:txBody>
       </p:sp>
       <p:sp>
         <p:nvSpPr>
-          <p:cNvPr id="151" name="Google Shape;151;p5">
-            <a:extLst>
-              <a:ext uri="{FF2B5EF4-FFF2-40B4-BE49-F238E27FC236}">
-                <a16:creationId xmlns:a16="http://schemas.microsoft.com/office/drawing/2014/main" id="{DAD76A8A-9F2C-9EA9-25E9-40CD0FFAA869}"/>
-              </a:ext>
-            </a:extLst>
-          </p:cNvPr>
+          <p:cNvPr id="139" name="Rounded Rectangle 138"/>
           <p:cNvSpPr/>
           <p:nvPr/>
         </p:nvSpPr>
         <p:spPr>
           <a:xfrm>
-            <a:off x="5077301" y="7100213"/>
-            <a:ext cx="3104198" cy="731877"/>
+            <a:off x="731520" y="4443984"/>
+            <a:ext cx="10698480" cy="841248"/>
           </a:xfrm>
-          <a:prstGeom prst="rect">
+          <a:prstGeom prst="roundRect">
             <a:avLst/>
           </a:prstGeom>
-          <a:noFill/>
-          <a:ln>
-            <a:noFill/>
+          <a:solidFill>
+            <a:srgbClr val="F5F8F6"/>
+          </a:solidFill>
+          <a:ln w="19050">
+            <a:solidFill>
+              <a:srgbClr val="C8D7CD"/>
+            </a:solidFill>
           </a:ln>
         </p:spPr>
+        <p:style>
+          <a:lnRef idx="1">
+            <a:schemeClr val="accent1"/>
+          </a:lnRef>
+          <a:fillRef idx="3">
+            <a:schemeClr val="accent1"/>
+          </a:fillRef>
+          <a:effectRef idx="2">
+            <a:schemeClr val="accent1"/>
+          </a:effectRef>
+          <a:fontRef idx="minor">
+            <a:schemeClr val="lt1"/>
+          </a:fontRef>
+        </p:style>
         <p:txBody>
-          <a:bodyPr spcFirstLastPara="1" wrap="square" lIns="0" tIns="0" rIns="0" bIns="0" anchor="t" anchorCtr="0">
-            <a:noAutofit/>
-          </a:bodyPr>
+          <a:bodyPr rtlCol="0" anchor="ctr" wrap="square" lIns="182880" tIns="73152"/>
           <a:lstStyle/>
           <a:p>
-            <a:pPr marL="0" marR="0" lvl="0" indent="0" algn="ctr" rtl="0">
-              <a:lnSpc>
-                <a:spcPct val="118750"/>
-              </a:lnSpc>
-              <a:spcBef>
-                <a:spcPts val="0"/>
-              </a:spcBef>
-              <a:spcAft>
-                <a:spcPts val="0"/>
-              </a:spcAft>
-              <a:buClr>
-                <a:schemeClr val="dk1"/>
-              </a:buClr>
-              <a:buSzPts val="1600"/>
-              <a:buFont typeface="Calibri"/>
-              <a:buNone/>
-            </a:pPr>
-            <a:endParaRPr sz="1600" b="0" i="0" u="none" strike="noStrike" cap="none">
-              <a:solidFill>
-                <a:srgbClr val="000000"/>
-              </a:solidFill>
-              <a:latin typeface="Times New Roman"/>
-              <a:ea typeface="Times New Roman"/>
-              <a:cs typeface="Times New Roman"/>
-              <a:sym typeface="Times New Roman"/>
-            </a:endParaRPr>
+            <a:pPr algn="ctr">
+              <a:defRPr sz="1900" b="1">
+                <a:solidFill>
+                  <a:srgbClr val="0F3B2E"/>
+                </a:solidFill>
+                <a:latin typeface="Arial"/>
+              </a:defRPr>
+            </a:pPr>
+            <a:r>
+              <a:t>4. Vector Store Component (ChromaDB RAG)</a:t>
+            </a:r>
+          </a:p>
+          <a:p>
+            <a:pPr>
+              <a:defRPr sz="1400">
+                <a:solidFill>
+                  <a:srgbClr val="1E293B"/>
+                </a:solidFill>
+                <a:latin typeface="Arial"/>
+              </a:defRPr>
+            </a:pPr>
+            <a:r>
+              <a:t>Retrieves verified ICAR and KVK agronomic protocols to inject calibrated active ingredients, dilution ratios, and safety intervals.</a:t>
+            </a:r>
           </a:p>
         </p:txBody>
       </p:sp>
       <p:sp>
         <p:nvSpPr>
-          <p:cNvPr id="152" name="Google Shape;152;p5">
-            <a:extLst>
-              <a:ext uri="{FF2B5EF4-FFF2-40B4-BE49-F238E27FC236}">
-                <a16:creationId xmlns:a16="http://schemas.microsoft.com/office/drawing/2014/main" id="{8D9C4260-2673-337C-C898-4C22E0F8FD65}"/>
-              </a:ext>
-            </a:extLst>
-          </p:cNvPr>
+          <p:cNvPr id="140" name="Rounded Rectangle 139"/>
           <p:cNvSpPr/>
           <p:nvPr/>
         </p:nvSpPr>
         <p:spPr>
           <a:xfrm>
-            <a:off x="9027081" y="6784578"/>
-            <a:ext cx="1793915" cy="224195"/>
+            <a:off x="731520" y="5376672"/>
+            <a:ext cx="10698480" cy="841248"/>
           </a:xfrm>
-          <a:prstGeom prst="rect">
+          <a:prstGeom prst="roundRect">
             <a:avLst/>
           </a:prstGeom>
-          <a:noFill/>
-          <a:ln>
-            <a:noFill/>
+          <a:solidFill>
+            <a:srgbClr val="F5F8F6"/>
+          </a:solidFill>
+          <a:ln w="19050">
+            <a:solidFill>
+              <a:srgbClr val="C8D7CD"/>
+            </a:solidFill>
           </a:ln>
         </p:spPr>
+        <p:style>
+          <a:lnRef idx="1">
+            <a:schemeClr val="accent1"/>
+          </a:lnRef>
+          <a:fillRef idx="3">
+            <a:schemeClr val="accent1"/>
+          </a:fillRef>
+          <a:effectRef idx="2">
+            <a:schemeClr val="accent1"/>
+          </a:effectRef>
+          <a:fontRef idx="minor">
+            <a:schemeClr val="lt1"/>
+          </a:fontRef>
+        </p:style>
         <p:txBody>
-          <a:bodyPr spcFirstLastPara="1" wrap="square" lIns="0" tIns="0" rIns="0" bIns="0" anchor="t" anchorCtr="0">
-            <a:noAutofit/>
-          </a:bodyPr>
+          <a:bodyPr rtlCol="0" anchor="ctr" wrap="square" lIns="182880" tIns="73152"/>
           <a:lstStyle/>
           <a:p>
-            <a:pPr marL="0" marR="0" lvl="0" indent="0" algn="ctr" rtl="0">
-              <a:lnSpc>
-                <a:spcPct val="109375"/>
-              </a:lnSpc>
-              <a:spcBef>
-                <a:spcPts val="0"/>
-              </a:spcBef>
-              <a:spcAft>
-                <a:spcPts val="0"/>
-              </a:spcAft>
-              <a:buClr>
-                <a:schemeClr val="dk1"/>
-              </a:buClr>
-              <a:buSzPts val="1600"/>
-              <a:buFont typeface="Calibri"/>
-              <a:buNone/>
-            </a:pPr>
-            <a:endParaRPr sz="1600" b="0" i="0" u="none" strike="noStrike" cap="none">
-              <a:solidFill>
-                <a:srgbClr val="000000"/>
-              </a:solidFill>
-              <a:latin typeface="Times New Roman"/>
-              <a:ea typeface="Times New Roman"/>
-              <a:cs typeface="Times New Roman"/>
-              <a:sym typeface="Times New Roman"/>
-            </a:endParaRPr>
-          </a:p>
-        </p:txBody>
-      </p:sp>
-      <p:sp>
-        <p:nvSpPr>
-          <p:cNvPr id="153" name="Google Shape;153;p5">
-            <a:extLst>
-              <a:ext uri="{FF2B5EF4-FFF2-40B4-BE49-F238E27FC236}">
-                <a16:creationId xmlns:a16="http://schemas.microsoft.com/office/drawing/2014/main" id="{6167C3C6-3747-E373-84C3-3927C443B067}"/>
-              </a:ext>
-            </a:extLst>
-          </p:cNvPr>
-          <p:cNvSpPr/>
-          <p:nvPr/>
-        </p:nvSpPr>
-        <p:spPr>
-          <a:xfrm>
-            <a:off x="8371999" y="7100213"/>
-            <a:ext cx="3104198" cy="731877"/>
-          </a:xfrm>
-          <a:prstGeom prst="rect">
-            <a:avLst/>
-          </a:prstGeom>
-          <a:noFill/>
-          <a:ln>
-            <a:noFill/>
-          </a:ln>
-        </p:spPr>
-        <p:txBody>
-          <a:bodyPr spcFirstLastPara="1" wrap="square" lIns="0" tIns="0" rIns="0" bIns="0" anchor="t" anchorCtr="0">
-            <a:noAutofit/>
-          </a:bodyPr>
-          <a:lstStyle/>
-          <a:p>
-            <a:pPr marL="0" marR="0" lvl="0" indent="0" algn="ctr" rtl="0">
-              <a:lnSpc>
-                <a:spcPct val="118750"/>
-              </a:lnSpc>
-              <a:spcBef>
-                <a:spcPts val="0"/>
-              </a:spcBef>
-              <a:spcAft>
-                <a:spcPts val="0"/>
-              </a:spcAft>
-              <a:buClr>
-                <a:schemeClr val="dk1"/>
-              </a:buClr>
-              <a:buSzPts val="1600"/>
-              <a:buFont typeface="Calibri"/>
-              <a:buNone/>
-            </a:pPr>
-            <a:endParaRPr sz="1600" b="0" i="0" u="none" strike="noStrike" cap="none">
-              <a:solidFill>
-                <a:srgbClr val="000000"/>
-              </a:solidFill>
-              <a:latin typeface="Times New Roman"/>
-              <a:ea typeface="Times New Roman"/>
-              <a:cs typeface="Times New Roman"/>
-              <a:sym typeface="Times New Roman"/>
-            </a:endParaRPr>
-          </a:p>
-        </p:txBody>
-      </p:sp>
-      <p:sp>
-        <p:nvSpPr>
-          <p:cNvPr id="2" name="TextBox 1">
-            <a:extLst>
-              <a:ext uri="{FF2B5EF4-FFF2-40B4-BE49-F238E27FC236}">
-                <a16:creationId xmlns:a16="http://schemas.microsoft.com/office/drawing/2014/main" id="{9BB86949-7ED1-C43B-B1E3-5122BB67A596}"/>
-              </a:ext>
-            </a:extLst>
-          </p:cNvPr>
-          <p:cNvSpPr txBox="1"/>
-          <p:nvPr/>
-        </p:nvSpPr>
-        <p:spPr>
-          <a:xfrm>
-            <a:off x="474822" y="863187"/>
-            <a:ext cx="8823960" cy="5262979"/>
-          </a:xfrm>
-          <a:prstGeom prst="rect">
-            <a:avLst/>
-          </a:prstGeom>
-          <a:noFill/>
-        </p:spPr>
-        <p:txBody>
-          <a:bodyPr wrap="square" rtlCol="0">
-            <a:spAutoFit/>
-          </a:bodyPr>
-          <a:lstStyle/>
-          <a:p>
-            <a:endParaRPr lang="en-US"/>
-          </a:p>
-          <a:p>
-            <a:r>
-              <a:rPr lang="en-US" b="1"/>
-              <a:t>1) Chat Input </a:t>
-            </a:r>
-            <a:r>
-              <a:rPr lang="en-US"/>
-              <a:t>– Interface where users enter their queries, preferences, or meal details (text/voice/image).</a:t>
-            </a:r>
-          </a:p>
-          <a:p>
-            <a:endParaRPr lang="en-US"/>
-          </a:p>
-          <a:p>
-            <a:r>
-              <a:rPr lang="en-US" b="1"/>
-              <a:t>2) IBM </a:t>
-            </a:r>
-            <a:r>
-              <a:rPr lang="en-US" b="1" err="1"/>
-              <a:t>watsonx</a:t>
-            </a:r>
-            <a:r>
-              <a:rPr lang="en-US" b="1"/>
-              <a:t> AI Agent </a:t>
-            </a:r>
-            <a:r>
-              <a:rPr lang="en-US"/>
-              <a:t>- Processes user input using Granite models to generate personalized nutrition insights and recommendations. </a:t>
-            </a:r>
-          </a:p>
-          <a:p>
-            <a:endParaRPr lang="en-US"/>
-          </a:p>
-          <a:p>
-            <a:r>
-              <a:rPr lang="en-US" b="1"/>
-              <a:t>3) Name of IBM Granite model - </a:t>
-            </a:r>
-            <a:r>
-              <a:rPr lang="en-US"/>
-              <a:t>Granite-4.0-8B-Instruct → Fast, efficient for real-time diet recommendations</a:t>
-            </a:r>
-          </a:p>
-          <a:p>
-            <a:endParaRPr lang="en-US"/>
-          </a:p>
-          <a:p>
-            <a:r>
-              <a:rPr lang="en-US" b="1"/>
-              <a:t>4) Chat output -</a:t>
-            </a:r>
-            <a:r>
-              <a:rPr lang="en-US"/>
-              <a:t>Displays AI-generated responses such as diet plans, nutritional analysis, and health suggestions. </a:t>
-            </a:r>
-          </a:p>
-          <a:p>
-            <a:endParaRPr lang="en-US"/>
-          </a:p>
-          <a:p>
-            <a:r>
-              <a:rPr lang="en-US" b="1"/>
-              <a:t>5) </a:t>
-            </a:r>
-            <a:r>
-              <a:rPr lang="en-US" b="1">
-                <a:highlight>
-                  <a:srgbClr val="FFFF00"/>
-                </a:highlight>
-              </a:rPr>
-              <a:t>File component - </a:t>
-            </a:r>
-            <a:r>
-              <a:rPr lang="en-US">
-                <a:highlight>
-                  <a:srgbClr val="FFFF00"/>
-                </a:highlight>
-              </a:rPr>
-              <a:t>Stores and retrieves user data, meal logs, and nutritional datasets for analysis and tracking.</a:t>
-            </a:r>
-          </a:p>
-          <a:p>
-            <a:endParaRPr lang="en-US"/>
-          </a:p>
-          <a:p>
-            <a:endParaRPr lang="en-US"/>
-          </a:p>
-          <a:p>
-            <a:r>
-              <a:rPr lang="en-US"/>
-              <a:t>6) </a:t>
-            </a:r>
-            <a:r>
-              <a:rPr lang="en-US">
-                <a:highlight>
-                  <a:srgbClr val="FFFF00"/>
-                </a:highlight>
-              </a:rPr>
-              <a:t>Add name of any other component used.</a:t>
-            </a:r>
-          </a:p>
-          <a:p>
-            <a:pPr marL="342900" indent="-342900">
-              <a:buAutoNum type="arabicParenR" startAt="3"/>
-            </a:pPr>
-            <a:endParaRPr lang="en-US"/>
-          </a:p>
-          <a:p>
-            <a:endParaRPr lang="en-US"/>
-          </a:p>
-          <a:p>
-            <a:endParaRPr lang="en-US"/>
-          </a:p>
-          <a:p>
-            <a:endParaRPr lang="en-US"/>
-          </a:p>
-          <a:p>
-            <a:endParaRPr lang="en-US"/>
-          </a:p>
-          <a:p>
-            <a:endParaRPr lang="en-US"/>
-          </a:p>
-          <a:p>
-            <a:endParaRPr lang="en-US"/>
-          </a:p>
-          <a:p>
-            <a:r>
-              <a:rPr lang="en-US"/>
-              <a:t> </a:t>
-            </a:r>
-            <a:endParaRPr lang="en-IN"/>
+            <a:pPr algn="ctr">
+              <a:defRPr sz="1900" b="1">
+                <a:solidFill>
+                  <a:srgbClr val="0F3B2E"/>
+                </a:solidFill>
+                <a:latin typeface="Arial"/>
+              </a:defRPr>
+            </a:pPr>
+            <a:r>
+              <a:t>5. Agent &amp; Chat Output Component (IBM Granite)</a:t>
+            </a:r>
+          </a:p>
+          <a:p>
+            <a:pPr>
+              <a:defRPr sz="1400">
+                <a:solidFill>
+                  <a:srgbClr val="1E293B"/>
+                </a:solidFill>
+                <a:latin typeface="Arial"/>
+              </a:defRPr>
+            </a:pPr>
+            <a:r>
+              <a:t>Orchestrates ibm/granite-4-h-small to synthesize inputs into a 4-tab structured advisory and triggers edge vernacular audio playback.</a:t>
+            </a:r>
           </a:p>
         </p:txBody>
       </p:sp>
@@ -16614,30 +16209,15 @@
               <a:buSzPts val="3500"/>
               <a:buFont typeface="Times New Roman"/>
               <a:buNone/>
-            </a:pPr>
-            <a:r>
-              <a:rPr lang="en-US" sz="2400" b="1" err="1">
-                <a:sym typeface="Times New Roman"/>
-              </a:rPr>
-              <a:t>Langflow</a:t>
-            </a:r>
-            <a:r>
-              <a:rPr lang="en-US" sz="3500" b="1" i="0" u="none" strike="noStrike" cap="none">
-                <a:solidFill>
-                  <a:srgbClr val="051D3A"/>
-                </a:solidFill>
-                <a:latin typeface="Times New Roman"/>
-                <a:ea typeface="Times New Roman"/>
-                <a:cs typeface="Times New Roman"/>
-                <a:sym typeface="Times New Roman"/>
-              </a:rPr>
-              <a:t> </a:t>
-            </a:r>
-            <a:r>
-              <a:rPr lang="en-US" sz="2400" b="1">
-                <a:sym typeface="Times New Roman"/>
-              </a:rPr>
-              <a:t>workflow -</a:t>
+              <a:defRPr sz="2800" b="1">
+                <a:solidFill>
+                  <a:srgbClr val="0F3B2E"/>
+                </a:solidFill>
+                <a:latin typeface="Arial"/>
+              </a:defRPr>
+            </a:pPr>
+            <a:r>
+              <a:t>Technical flow diagram- Architecture blueprint</a:t>
             </a:r>
             <a:endParaRPr sz="2400" b="1">
               <a:sym typeface="Times New Roman"/>
@@ -16645,36 +16225,411 @@
           </a:p>
         </p:txBody>
       </p:sp>
-      <p:pic>
-        <p:nvPicPr>
-          <p:cNvPr id="4" name="Picture 3" descr="A screenshot of a computer&#10;&#10;AI-generated content may be incorrect.">
-            <a:extLst>
-              <a:ext uri="{FF2B5EF4-FFF2-40B4-BE49-F238E27FC236}">
-                <a16:creationId xmlns:a16="http://schemas.microsoft.com/office/drawing/2014/main" id="{C597681A-DF93-B190-DD21-CBAEDA4E3CBF}"/>
-              </a:ext>
-            </a:extLst>
-          </p:cNvPr>
-          <p:cNvPicPr>
-            <a:picLocks noChangeAspect="1"/>
-          </p:cNvPicPr>
+      <p:sp>
+        <p:nvSpPr>
+          <p:cNvPr id="3" name="Rounded Rectangle 2"/>
+          <p:cNvSpPr/>
           <p:nvPr/>
-        </p:nvPicPr>
-        <p:blipFill>
-          <a:blip r:embed="rId3"/>
-          <a:stretch>
-            <a:fillRect/>
-          </a:stretch>
-        </p:blipFill>
+        </p:nvSpPr>
         <p:spPr>
           <a:xfrm>
-            <a:off x="535570" y="1139263"/>
-            <a:ext cx="11468100" cy="5505450"/>
+            <a:off x="731520" y="1645920"/>
+            <a:ext cx="3383280" cy="4572000"/>
           </a:xfrm>
-          <a:prstGeom prst="rect">
+          <a:prstGeom prst="roundRect">
             <a:avLst/>
           </a:prstGeom>
+          <a:solidFill>
+            <a:srgbClr val="F5F8F6"/>
+          </a:solidFill>
+          <a:ln w="19050">
+            <a:solidFill>
+              <a:srgbClr val="C8D7CD"/>
+            </a:solidFill>
+          </a:ln>
         </p:spPr>
-      </p:pic>
+        <p:style>
+          <a:lnRef idx="1">
+            <a:schemeClr val="accent1"/>
+          </a:lnRef>
+          <a:fillRef idx="3">
+            <a:schemeClr val="accent1"/>
+          </a:fillRef>
+          <a:effectRef idx="2">
+            <a:schemeClr val="accent1"/>
+          </a:effectRef>
+          <a:fontRef idx="minor">
+            <a:schemeClr val="lt1"/>
+          </a:fontRef>
+        </p:style>
+        <p:txBody>
+          <a:bodyPr rtlCol="0" anchor="ctr" wrap="square" lIns="228600" tIns="182880" rIns="228600"/>
+          <a:lstStyle/>
+          <a:p>
+            <a:pPr algn="ctr">
+              <a:defRPr sz="2000" b="1">
+                <a:solidFill>
+                  <a:srgbClr val="0F3B2E"/>
+                </a:solidFill>
+                <a:latin typeface="Arial"/>
+              </a:defRPr>
+            </a:pPr>
+            <a:r>
+              <a:t>Tier 1: Presentation &amp; Vernacular UI</a:t>
+            </a:r>
+          </a:p>
+          <a:p>
+            <a:pPr>
+              <a:spcBef>
+                <a:spcPts val="600"/>
+              </a:spcBef>
+              <a:defRPr sz="1500">
+                <a:solidFill>
+                  <a:srgbClr val="1E293B"/>
+                </a:solidFill>
+                <a:latin typeface="Arial"/>
+              </a:defRPr>
+            </a:pPr>
+            <a:r>
+              <a:t>• Responsive Streamlit Dashboard Interface</a:t>
+            </a:r>
+          </a:p>
+          <a:p>
+            <a:pPr>
+              <a:spcBef>
+                <a:spcPts val="600"/>
+              </a:spcBef>
+              <a:defRPr sz="1500">
+                <a:solidFill>
+                  <a:srgbClr val="1E293B"/>
+                </a:solidFill>
+                <a:latin typeface="Arial"/>
+              </a:defRPr>
+            </a:pPr>
+            <a:r>
+              <a:t>• Langflow Chat Interface &amp; Flow Runner</a:t>
+            </a:r>
+          </a:p>
+          <a:p>
+            <a:pPr>
+              <a:spcBef>
+                <a:spcPts val="600"/>
+              </a:spcBef>
+              <a:defRPr sz="1500">
+                <a:solidFill>
+                  <a:srgbClr val="1E293B"/>
+                </a:solidFill>
+                <a:latin typeface="Arial"/>
+              </a:defRPr>
+            </a:pPr>
+            <a:r>
+              <a:t>• Vernacular Localization (KA / TE / HI / EN)</a:t>
+            </a:r>
+          </a:p>
+          <a:p>
+            <a:pPr>
+              <a:spcBef>
+                <a:spcPts val="600"/>
+              </a:spcBef>
+              <a:defRPr sz="1500">
+                <a:solidFill>
+                  <a:srgbClr val="1E293B"/>
+                </a:solidFill>
+                <a:latin typeface="Arial"/>
+              </a:defRPr>
+            </a:pPr>
+            <a:r>
+              <a:t>• Edge Audio Playback (gTTS Synthesis)</a:t>
+            </a:r>
+          </a:p>
+          <a:p>
+            <a:pPr>
+              <a:spcBef>
+                <a:spcPts val="600"/>
+              </a:spcBef>
+              <a:defRPr sz="1500">
+                <a:solidFill>
+                  <a:srgbClr val="1E293B"/>
+                </a:solidFill>
+                <a:latin typeface="Arial"/>
+              </a:defRPr>
+            </a:pPr>
+            <a:r>
+              <a:t>• High-Resolution Foliar Image Uploader</a:t>
+            </a:r>
+          </a:p>
+        </p:txBody>
+      </p:sp>
+      <p:sp>
+        <p:nvSpPr>
+          <p:cNvPr id="4" name="Rounded Rectangle 3"/>
+          <p:cNvSpPr/>
+          <p:nvPr/>
+        </p:nvSpPr>
+        <p:spPr>
+          <a:xfrm>
+            <a:off x="4389120" y="1645920"/>
+            <a:ext cx="3383280" cy="4572000"/>
+          </a:xfrm>
+          <a:prstGeom prst="roundRect">
+            <a:avLst/>
+          </a:prstGeom>
+          <a:solidFill>
+            <a:srgbClr val="F5F8F6"/>
+          </a:solidFill>
+          <a:ln w="19050">
+            <a:solidFill>
+              <a:srgbClr val="C8D7CD"/>
+            </a:solidFill>
+          </a:ln>
+        </p:spPr>
+        <p:style>
+          <a:lnRef idx="1">
+            <a:schemeClr val="accent1"/>
+          </a:lnRef>
+          <a:fillRef idx="3">
+            <a:schemeClr val="accent1"/>
+          </a:fillRef>
+          <a:effectRef idx="2">
+            <a:schemeClr val="accent1"/>
+          </a:effectRef>
+          <a:fontRef idx="minor">
+            <a:schemeClr val="lt1"/>
+          </a:fontRef>
+        </p:style>
+        <p:txBody>
+          <a:bodyPr rtlCol="0" anchor="ctr" wrap="square" lIns="228600" tIns="182880" rIns="228600"/>
+          <a:lstStyle/>
+          <a:p>
+            <a:pPr algn="ctr">
+              <a:defRPr sz="2000" b="1">
+                <a:solidFill>
+                  <a:srgbClr val="0F3B2E"/>
+                </a:solidFill>
+                <a:latin typeface="Arial"/>
+              </a:defRPr>
+            </a:pPr>
+            <a:r>
+              <a:t>Tier 2: Langflow Orchestration &amp; RAG</a:t>
+            </a:r>
+          </a:p>
+          <a:p>
+            <a:pPr>
+              <a:spcBef>
+                <a:spcPts val="600"/>
+              </a:spcBef>
+              <a:defRPr sz="1500">
+                <a:solidFill>
+                  <a:srgbClr val="1E293B"/>
+                </a:solidFill>
+                <a:latin typeface="Arial"/>
+              </a:defRPr>
+            </a:pPr>
+            <a:r>
+              <a:t>• Modular Langflow Agentic Flow Pipeline</a:t>
+            </a:r>
+          </a:p>
+          <a:p>
+            <a:pPr>
+              <a:spcBef>
+                <a:spcPts val="600"/>
+              </a:spcBef>
+              <a:defRPr sz="1500">
+                <a:solidFill>
+                  <a:srgbClr val="1E293B"/>
+                </a:solidFill>
+                <a:latin typeface="Arial"/>
+              </a:defRPr>
+            </a:pPr>
+            <a:r>
+              <a:t>• SentinelDaemon: Async Agromet Poll (RH &gt; 78%)</a:t>
+            </a:r>
+          </a:p>
+          <a:p>
+            <a:pPr>
+              <a:spcBef>
+                <a:spcPts val="600"/>
+              </a:spcBef>
+              <a:defRPr sz="1500">
+                <a:solidFill>
+                  <a:srgbClr val="1E293B"/>
+                </a:solidFill>
+                <a:latin typeface="Arial"/>
+              </a:defRPr>
+            </a:pPr>
+            <a:r>
+              <a:t>• VisionService: Deterministic OpenCV Masking</a:t>
+            </a:r>
+          </a:p>
+          <a:p>
+            <a:pPr>
+              <a:spcBef>
+                <a:spcPts val="600"/>
+              </a:spcBef>
+              <a:defRPr sz="1500">
+                <a:solidFill>
+                  <a:srgbClr val="1E293B"/>
+                </a:solidFill>
+                <a:latin typeface="Arial"/>
+              </a:defRPr>
+            </a:pPr>
+            <a:r>
+              <a:t>• ChromaDB Vector Store: ICAR/KVK Protocols</a:t>
+            </a:r>
+          </a:p>
+          <a:p>
+            <a:pPr>
+              <a:spcBef>
+                <a:spcPts val="600"/>
+              </a:spcBef>
+              <a:defRPr sz="1500">
+                <a:solidFill>
+                  <a:srgbClr val="1E293B"/>
+                </a:solidFill>
+                <a:latin typeface="Arial"/>
+              </a:defRPr>
+            </a:pPr>
+            <a:r>
+              <a:t>• Multi-Variable Agronomic Context Fusion</a:t>
+            </a:r>
+          </a:p>
+        </p:txBody>
+      </p:sp>
+      <p:sp>
+        <p:nvSpPr>
+          <p:cNvPr id="5" name="Rounded Rectangle 4"/>
+          <p:cNvSpPr/>
+          <p:nvPr/>
+        </p:nvSpPr>
+        <p:spPr>
+          <a:xfrm>
+            <a:off x="8046720" y="1645920"/>
+            <a:ext cx="3383280" cy="4572000"/>
+          </a:xfrm>
+          <a:prstGeom prst="roundRect">
+            <a:avLst/>
+          </a:prstGeom>
+          <a:solidFill>
+            <a:srgbClr val="F5F8F6"/>
+          </a:solidFill>
+          <a:ln w="19050">
+            <a:solidFill>
+              <a:srgbClr val="C8D7CD"/>
+            </a:solidFill>
+          </a:ln>
+        </p:spPr>
+        <p:style>
+          <a:lnRef idx="1">
+            <a:schemeClr val="accent1"/>
+          </a:lnRef>
+          <a:fillRef idx="3">
+            <a:schemeClr val="accent1"/>
+          </a:fillRef>
+          <a:effectRef idx="2">
+            <a:schemeClr val="accent1"/>
+          </a:effectRef>
+          <a:fontRef idx="minor">
+            <a:schemeClr val="lt1"/>
+          </a:fontRef>
+        </p:style>
+        <p:txBody>
+          <a:bodyPr rtlCol="0" anchor="ctr" wrap="square" lIns="228600" tIns="182880" rIns="228600"/>
+          <a:lstStyle/>
+          <a:p>
+            <a:pPr algn="ctr">
+              <a:defRPr sz="2000" b="1">
+                <a:solidFill>
+                  <a:srgbClr val="0F3B2E"/>
+                </a:solidFill>
+                <a:latin typeface="Arial"/>
+              </a:defRPr>
+            </a:pPr>
+            <a:r>
+              <a:t>Tier 3: Foundation Model &amp; Cloud</a:t>
+            </a:r>
+          </a:p>
+          <a:p>
+            <a:pPr>
+              <a:spcBef>
+                <a:spcPts val="600"/>
+              </a:spcBef>
+              <a:defRPr sz="1500">
+                <a:solidFill>
+                  <a:srgbClr val="1E293B"/>
+                </a:solidFill>
+                <a:latin typeface="Arial"/>
+              </a:defRPr>
+            </a:pPr>
+            <a:r>
+              <a:t>• IBM watsonx.ai Platform (Dallas Region)</a:t>
+            </a:r>
+          </a:p>
+          <a:p>
+            <a:pPr>
+              <a:spcBef>
+                <a:spcPts val="600"/>
+              </a:spcBef>
+              <a:defRPr sz="1500">
+                <a:solidFill>
+                  <a:srgbClr val="1E293B"/>
+                </a:solidFill>
+                <a:latin typeface="Arial"/>
+              </a:defRPr>
+            </a:pPr>
+            <a:r>
+              <a:t>• Foundation Model: ibm/granite-4-h-small</a:t>
+            </a:r>
+          </a:p>
+          <a:p>
+            <a:pPr>
+              <a:spcBef>
+                <a:spcPts val="600"/>
+              </a:spcBef>
+              <a:defRPr sz="1500">
+                <a:solidFill>
+                  <a:srgbClr val="1E293B"/>
+                </a:solidFill>
+                <a:latin typeface="Arial"/>
+              </a:defRPr>
+            </a:pPr>
+            <a:r>
+              <a:t>• Strict Agronomic JSON Schema Enforcement</a:t>
+            </a:r>
+          </a:p>
+          <a:p>
+            <a:pPr>
+              <a:spcBef>
+                <a:spcPts val="600"/>
+              </a:spcBef>
+              <a:defRPr sz="1500">
+                <a:solidFill>
+                  <a:srgbClr val="1E293B"/>
+                </a:solidFill>
+                <a:latin typeface="Arial"/>
+              </a:defRPr>
+            </a:pPr>
+            <a:r>
+              <a:t>• IBM Cloud IAM Security Token Authentication</a:t>
+            </a:r>
+          </a:p>
+          <a:p>
+            <a:pPr>
+              <a:spcBef>
+                <a:spcPts val="600"/>
+              </a:spcBef>
+              <a:defRPr sz="1500">
+                <a:solidFill>
+                  <a:srgbClr val="1E293B"/>
+                </a:solidFill>
+                <a:latin typeface="Arial"/>
+              </a:defRPr>
+            </a:pPr>
+            <a:r>
+              <a:t>• Autonomous Self-Healing Fallback Daemon</a:t>
+            </a:r>
+          </a:p>
+        </p:txBody>
+      </p:sp>
     </p:spTree>
     <p:extLst>
       <p:ext uri="{BB962C8B-B14F-4D97-AF65-F5344CB8AC3E}">
@@ -16736,53 +16691,378 @@
           </a:bodyPr>
           <a:lstStyle/>
           <a:p>
-            <a:pPr lvl="0"/>
-            <a:r>
-              <a:rPr lang="en-US" sz="2400" b="1">
-                <a:solidFill>
-                  <a:schemeClr val="dk1"/>
-                </a:solidFill>
-                <a:latin typeface="Calibri"/>
-                <a:ea typeface="Calibri"/>
-                <a:cs typeface="Calibri"/>
-                <a:sym typeface="Calibri"/>
-              </a:rPr>
-              <a:t>Architecture blueprint</a:t>
+            <a:pPr lvl="0" algn="l">
+              <a:defRPr sz="2800" b="1">
+                <a:solidFill>
+                  <a:srgbClr val="0F3B2E"/>
+                </a:solidFill>
+                <a:latin typeface="Arial"/>
+              </a:defRPr>
+            </a:pPr>
+            <a:r>
+              <a:t>Core Implementation &amp; Functional Modules</a:t>
             </a:r>
             <a:endParaRPr lang="en-US" sz="2400"/>
           </a:p>
         </p:txBody>
       </p:sp>
-      <p:pic>
-        <p:nvPicPr>
-          <p:cNvPr id="3" name="Picture 2">
-            <a:extLst>
-              <a:ext uri="{FF2B5EF4-FFF2-40B4-BE49-F238E27FC236}">
-                <a16:creationId xmlns:a16="http://schemas.microsoft.com/office/drawing/2014/main" id="{81932CE2-F219-0CA8-0102-55B8C682B8A2}"/>
-              </a:ext>
-            </a:extLst>
-          </p:cNvPr>
-          <p:cNvPicPr>
-            <a:picLocks noChangeAspect="1"/>
-          </p:cNvPicPr>
+      <p:sp>
+        <p:nvSpPr>
+          <p:cNvPr id="3" name="Rounded Rectangle 2"/>
+          <p:cNvSpPr/>
           <p:nvPr/>
-        </p:nvPicPr>
-        <p:blipFill>
-          <a:blip r:embed="rId3"/>
-          <a:stretch>
-            <a:fillRect/>
-          </a:stretch>
-        </p:blipFill>
+        </p:nvSpPr>
         <p:spPr>
           <a:xfrm>
-            <a:off x="535570" y="675732"/>
-            <a:ext cx="11468100" cy="6181725"/>
+            <a:off x="731520" y="1645920"/>
+            <a:ext cx="3383280" cy="4572000"/>
           </a:xfrm>
-          <a:prstGeom prst="rect">
+          <a:prstGeom prst="roundRect">
             <a:avLst/>
           </a:prstGeom>
+          <a:solidFill>
+            <a:srgbClr val="F5F8F6"/>
+          </a:solidFill>
+          <a:ln w="19050">
+            <a:solidFill>
+              <a:srgbClr val="C8D7CD"/>
+            </a:solidFill>
+          </a:ln>
         </p:spPr>
-      </p:pic>
+        <p:style>
+          <a:lnRef idx="1">
+            <a:schemeClr val="accent1"/>
+          </a:lnRef>
+          <a:fillRef idx="3">
+            <a:schemeClr val="accent1"/>
+          </a:fillRef>
+          <a:effectRef idx="2">
+            <a:schemeClr val="accent1"/>
+          </a:effectRef>
+          <a:fontRef idx="minor">
+            <a:schemeClr val="lt1"/>
+          </a:fontRef>
+        </p:style>
+        <p:txBody>
+          <a:bodyPr rtlCol="0" anchor="ctr" wrap="square" lIns="228600" tIns="182880" rIns="228600"/>
+          <a:lstStyle/>
+          <a:p>
+            <a:pPr algn="ctr">
+              <a:defRPr sz="2000" b="1">
+                <a:solidFill>
+                  <a:srgbClr val="0F3B2E"/>
+                </a:solidFill>
+                <a:latin typeface="Arial"/>
+              </a:defRPr>
+            </a:pPr>
+            <a:r>
+              <a:t>SentinelDaemon Module</a:t>
+            </a:r>
+          </a:p>
+          <a:p>
+            <a:pPr>
+              <a:spcBef>
+                <a:spcPts val="600"/>
+              </a:spcBef>
+              <a:defRPr sz="1500">
+                <a:solidFill>
+                  <a:srgbClr val="1E293B"/>
+                </a:solidFill>
+                <a:latin typeface="Arial"/>
+              </a:defRPr>
+            </a:pPr>
+            <a:r>
+              <a:t>• Asynchronous agromet polling daemon.</a:t>
+            </a:r>
+          </a:p>
+          <a:p>
+            <a:pPr>
+              <a:spcBef>
+                <a:spcPts val="600"/>
+              </a:spcBef>
+              <a:defRPr sz="1500">
+                <a:solidFill>
+                  <a:srgbClr val="1E293B"/>
+                </a:solidFill>
+                <a:latin typeface="Arial"/>
+              </a:defRPr>
+            </a:pPr>
+            <a:r>
+              <a:t>• Evaluates RH &gt; 78% and rainfall probability.</a:t>
+            </a:r>
+          </a:p>
+          <a:p>
+            <a:pPr>
+              <a:spcBef>
+                <a:spcPts val="600"/>
+              </a:spcBef>
+              <a:defRPr sz="1500">
+                <a:solidFill>
+                  <a:srgbClr val="1E293B"/>
+                </a:solidFill>
+                <a:latin typeface="Arial"/>
+              </a:defRPr>
+            </a:pPr>
+            <a:r>
+              <a:t>• Computes composite biological threat levels.</a:t>
+            </a:r>
+          </a:p>
+          <a:p>
+            <a:pPr>
+              <a:spcBef>
+                <a:spcPts val="600"/>
+              </a:spcBef>
+              <a:defRPr sz="1500">
+                <a:solidFill>
+                  <a:srgbClr val="1E293B"/>
+                </a:solidFill>
+                <a:latin typeface="Arial"/>
+              </a:defRPr>
+            </a:pPr>
+            <a:r>
+              <a:t>• Dispatches proactive hazard alerts.</a:t>
+            </a:r>
+          </a:p>
+        </p:txBody>
+      </p:sp>
+      <p:sp>
+        <p:nvSpPr>
+          <p:cNvPr id="4" name="Rounded Rectangle 3"/>
+          <p:cNvSpPr/>
+          <p:nvPr/>
+        </p:nvSpPr>
+        <p:spPr>
+          <a:xfrm>
+            <a:off x="4389120" y="1645920"/>
+            <a:ext cx="3383280" cy="4572000"/>
+          </a:xfrm>
+          <a:prstGeom prst="roundRect">
+            <a:avLst/>
+          </a:prstGeom>
+          <a:solidFill>
+            <a:srgbClr val="F5F8F6"/>
+          </a:solidFill>
+          <a:ln w="19050">
+            <a:solidFill>
+              <a:srgbClr val="C8D7CD"/>
+            </a:solidFill>
+          </a:ln>
+        </p:spPr>
+        <p:style>
+          <a:lnRef idx="1">
+            <a:schemeClr val="accent1"/>
+          </a:lnRef>
+          <a:fillRef idx="3">
+            <a:schemeClr val="accent1"/>
+          </a:fillRef>
+          <a:effectRef idx="2">
+            <a:schemeClr val="accent1"/>
+          </a:effectRef>
+          <a:fontRef idx="minor">
+            <a:schemeClr val="lt1"/>
+          </a:fontRef>
+        </p:style>
+        <p:txBody>
+          <a:bodyPr rtlCol="0" anchor="ctr" wrap="square" lIns="228600" tIns="182880" rIns="228600"/>
+          <a:lstStyle/>
+          <a:p>
+            <a:pPr algn="ctr">
+              <a:defRPr sz="2000" b="1">
+                <a:solidFill>
+                  <a:srgbClr val="0F3B2E"/>
+                </a:solidFill>
+                <a:latin typeface="Arial"/>
+              </a:defRPr>
+            </a:pPr>
+            <a:r>
+              <a:t>AgriRAG Vector Service</a:t>
+            </a:r>
+          </a:p>
+          <a:p>
+            <a:pPr>
+              <a:spcBef>
+                <a:spcPts val="600"/>
+              </a:spcBef>
+              <a:defRPr sz="1500">
+                <a:solidFill>
+                  <a:srgbClr val="1E293B"/>
+                </a:solidFill>
+                <a:latin typeface="Arial"/>
+              </a:defRPr>
+            </a:pPr>
+            <a:r>
+              <a:t>• Segmented ICAR agronomic publications.</a:t>
+            </a:r>
+          </a:p>
+          <a:p>
+            <a:pPr>
+              <a:spcBef>
+                <a:spcPts val="600"/>
+              </a:spcBef>
+              <a:defRPr sz="1500">
+                <a:solidFill>
+                  <a:srgbClr val="1E293B"/>
+                </a:solidFill>
+                <a:latin typeface="Arial"/>
+              </a:defRPr>
+            </a:pPr>
+            <a:r>
+              <a:t>• Dense semantic vector similarity search.</a:t>
+            </a:r>
+          </a:p>
+          <a:p>
+            <a:pPr>
+              <a:spcBef>
+                <a:spcPts val="600"/>
+              </a:spcBef>
+              <a:defRPr sz="1500">
+                <a:solidFill>
+                  <a:srgbClr val="1E293B"/>
+                </a:solidFill>
+                <a:latin typeface="Arial"/>
+              </a:defRPr>
+            </a:pPr>
+            <a:r>
+              <a:t>• Restricts chemicals to vetted active ingredients.</a:t>
+            </a:r>
+          </a:p>
+          <a:p>
+            <a:pPr>
+              <a:spcBef>
+                <a:spcPts val="600"/>
+              </a:spcBef>
+              <a:defRPr sz="1500">
+                <a:solidFill>
+                  <a:srgbClr val="1E293B"/>
+                </a:solidFill>
+                <a:latin typeface="Arial"/>
+              </a:defRPr>
+            </a:pPr>
+            <a:r>
+              <a:t>• Injects exact dilution ratios (g/L or ml/L).</a:t>
+            </a:r>
+          </a:p>
+        </p:txBody>
+      </p:sp>
+      <p:sp>
+        <p:nvSpPr>
+          <p:cNvPr id="5" name="Rounded Rectangle 4"/>
+          <p:cNvSpPr/>
+          <p:nvPr/>
+        </p:nvSpPr>
+        <p:spPr>
+          <a:xfrm>
+            <a:off x="8046720" y="1645920"/>
+            <a:ext cx="3383280" cy="4572000"/>
+          </a:xfrm>
+          <a:prstGeom prst="roundRect">
+            <a:avLst/>
+          </a:prstGeom>
+          <a:solidFill>
+            <a:srgbClr val="F5F8F6"/>
+          </a:solidFill>
+          <a:ln w="19050">
+            <a:solidFill>
+              <a:srgbClr val="C8D7CD"/>
+            </a:solidFill>
+          </a:ln>
+        </p:spPr>
+        <p:style>
+          <a:lnRef idx="1">
+            <a:schemeClr val="accent1"/>
+          </a:lnRef>
+          <a:fillRef idx="3">
+            <a:schemeClr val="accent1"/>
+          </a:fillRef>
+          <a:effectRef idx="2">
+            <a:schemeClr val="accent1"/>
+          </a:effectRef>
+          <a:fontRef idx="minor">
+            <a:schemeClr val="lt1"/>
+          </a:fontRef>
+        </p:style>
+        <p:txBody>
+          <a:bodyPr rtlCol="0" anchor="ctr" wrap="square" lIns="228600" tIns="182880" rIns="228600"/>
+          <a:lstStyle/>
+          <a:p>
+            <a:pPr algn="ctr">
+              <a:defRPr sz="2000" b="1">
+                <a:solidFill>
+                  <a:srgbClr val="0F3B2E"/>
+                </a:solidFill>
+                <a:latin typeface="Arial"/>
+              </a:defRPr>
+            </a:pPr>
+            <a:r>
+              <a:t>Granite Inference Engine</a:t>
+            </a:r>
+          </a:p>
+          <a:p>
+            <a:pPr>
+              <a:spcBef>
+                <a:spcPts val="600"/>
+              </a:spcBef>
+              <a:defRPr sz="1500">
+                <a:solidFill>
+                  <a:srgbClr val="1E293B"/>
+                </a:solidFill>
+                <a:latin typeface="Arial"/>
+              </a:defRPr>
+            </a:pPr>
+            <a:r>
+              <a:t>• watsonx.ai REST client integration.</a:t>
+            </a:r>
+          </a:p>
+          <a:p>
+            <a:pPr>
+              <a:spcBef>
+                <a:spcPts val="600"/>
+              </a:spcBef>
+              <a:defRPr sz="1500">
+                <a:solidFill>
+                  <a:srgbClr val="1E293B"/>
+                </a:solidFill>
+                <a:latin typeface="Arial"/>
+              </a:defRPr>
+            </a:pPr>
+            <a:r>
+              <a:t>• Prompts ibm/granite-4-h-small with JSON schema.</a:t>
+            </a:r>
+          </a:p>
+          <a:p>
+            <a:pPr>
+              <a:spcBef>
+                <a:spcPts val="600"/>
+              </a:spcBef>
+              <a:defRPr sz="1500">
+                <a:solidFill>
+                  <a:srgbClr val="1E293B"/>
+                </a:solidFill>
+                <a:latin typeface="Arial"/>
+              </a:defRPr>
+            </a:pPr>
+            <a:r>
+              <a:t>• Generates 4-tab structured clinical guidance.</a:t>
+            </a:r>
+          </a:p>
+          <a:p>
+            <a:pPr>
+              <a:spcBef>
+                <a:spcPts val="600"/>
+              </a:spcBef>
+              <a:defRPr sz="1500">
+                <a:solidFill>
+                  <a:srgbClr val="1E293B"/>
+                </a:solidFill>
+                <a:latin typeface="Arial"/>
+              </a:defRPr>
+            </a:pPr>
+            <a:r>
+              <a:t>• Handles fallback parsing gracefully.</a:t>
+            </a:r>
+          </a:p>
+        </p:txBody>
+      </p:sp>
     </p:spTree>
   </p:cSld>
   <p:clrMapOvr>
@@ -16837,153 +17117,412 @@
       </p:pic>
       <p:sp>
         <p:nvSpPr>
-          <p:cNvPr id="2" name="TextBox 1">
-            <a:extLst>
-              <a:ext uri="{FF2B5EF4-FFF2-40B4-BE49-F238E27FC236}">
-                <a16:creationId xmlns:a16="http://schemas.microsoft.com/office/drawing/2014/main" id="{B84A7B44-8B20-5A39-ED43-DA98D0FC7976}"/>
-              </a:ext>
-            </a:extLst>
-          </p:cNvPr>
-          <p:cNvSpPr txBox="1"/>
+          <p:cNvPr id="197" name="Rounded Rectangle 196"/>
+          <p:cNvSpPr/>
           <p:nvPr/>
         </p:nvSpPr>
         <p:spPr>
           <a:xfrm>
-            <a:off x="475488" y="283464"/>
-            <a:ext cx="9317736" cy="584775"/>
+            <a:off x="731520" y="1645920"/>
+            <a:ext cx="5212080" cy="2148840"/>
           </a:xfrm>
-          <a:prstGeom prst="rect">
+          <a:prstGeom prst="roundRect">
             <a:avLst/>
           </a:prstGeom>
-          <a:noFill/>
+          <a:solidFill>
+            <a:srgbClr val="F5F8F6"/>
+          </a:solidFill>
+          <a:ln w="19050">
+            <a:solidFill>
+              <a:srgbClr val="C8D7CD"/>
+            </a:solidFill>
+          </a:ln>
         </p:spPr>
+        <p:style>
+          <a:lnRef idx="1">
+            <a:schemeClr val="accent1"/>
+          </a:lnRef>
+          <a:fillRef idx="3">
+            <a:schemeClr val="accent1"/>
+          </a:fillRef>
+          <a:effectRef idx="2">
+            <a:schemeClr val="accent1"/>
+          </a:effectRef>
+          <a:fontRef idx="minor">
+            <a:schemeClr val="lt1"/>
+          </a:fontRef>
+        </p:style>
         <p:txBody>
-          <a:bodyPr wrap="square" rtlCol="0">
-            <a:spAutoFit/>
-          </a:bodyPr>
+          <a:bodyPr rtlCol="0" anchor="ctr" wrap="square" lIns="228600" tIns="182880" rIns="228600"/>
           <a:lstStyle/>
           <a:p>
-            <a:r>
-              <a:rPr lang="en-US" sz="3200" b="1"/>
-              <a:t>Role of Agentic AI in the solution </a:t>
-            </a:r>
-            <a:endParaRPr lang="en-IN" sz="3200" b="1"/>
+            <a:pPr algn="ctr">
+              <a:defRPr sz="2000" b="1">
+                <a:solidFill>
+                  <a:srgbClr val="0F3B2E"/>
+                </a:solidFill>
+                <a:latin typeface="Arial"/>
+              </a:defRPr>
+            </a:pPr>
+            <a:r>
+              <a:t>Tab 1: Agromet Risk Sentinel</a:t>
+            </a:r>
+          </a:p>
+          <a:p>
+            <a:pPr>
+              <a:spcBef>
+                <a:spcPts val="600"/>
+              </a:spcBef>
+              <a:defRPr sz="1500">
+                <a:solidFill>
+                  <a:srgbClr val="1E293B"/>
+                </a:solidFill>
+                <a:latin typeface="Arial"/>
+              </a:defRPr>
+            </a:pPr>
+            <a:r>
+              <a:t>• Real-time temperature, humidity, and rain telemetry gauges.</a:t>
+            </a:r>
+          </a:p>
+          <a:p>
+            <a:pPr>
+              <a:spcBef>
+                <a:spcPts val="600"/>
+              </a:spcBef>
+              <a:defRPr sz="1500">
+                <a:solidFill>
+                  <a:srgbClr val="1E293B"/>
+                </a:solidFill>
+                <a:latin typeface="Arial"/>
+              </a:defRPr>
+            </a:pPr>
+            <a:r>
+              <a:t>• Color-coded biological hazard alert banners (Red/Yellow/Green).</a:t>
+            </a:r>
+          </a:p>
+          <a:p>
+            <a:pPr>
+              <a:spcBef>
+                <a:spcPts val="600"/>
+              </a:spcBef>
+              <a:defRPr sz="1500">
+                <a:solidFill>
+                  <a:srgbClr val="1E293B"/>
+                </a:solidFill>
+                <a:latin typeface="Arial"/>
+              </a:defRPr>
+            </a:pPr>
+            <a:r>
+              <a:t>• Instant vernacular text-to-speech advisory audio playback.</a:t>
+            </a:r>
           </a:p>
         </p:txBody>
       </p:sp>
       <p:sp>
         <p:nvSpPr>
-          <p:cNvPr id="3" name="TextBox 2">
-            <a:extLst>
-              <a:ext uri="{FF2B5EF4-FFF2-40B4-BE49-F238E27FC236}">
-                <a16:creationId xmlns:a16="http://schemas.microsoft.com/office/drawing/2014/main" id="{322462E8-EB3A-DA7D-44CB-4E757803A755}"/>
-              </a:ext>
-            </a:extLst>
-          </p:cNvPr>
-          <p:cNvSpPr txBox="1"/>
+          <p:cNvPr id="198" name="Rounded Rectangle 197"/>
+          <p:cNvSpPr/>
           <p:nvPr/>
         </p:nvSpPr>
         <p:spPr>
           <a:xfrm>
-            <a:off x="621792" y="1167493"/>
-            <a:ext cx="7406640" cy="3108543"/>
+            <a:off x="6217920" y="1645920"/>
+            <a:ext cx="5212080" cy="2148840"/>
           </a:xfrm>
-          <a:prstGeom prst="rect">
+          <a:prstGeom prst="roundRect">
             <a:avLst/>
           </a:prstGeom>
-          <a:noFill/>
+          <a:solidFill>
+            <a:srgbClr val="F5F8F6"/>
+          </a:solidFill>
+          <a:ln w="19050">
+            <a:solidFill>
+              <a:srgbClr val="C8D7CD"/>
+            </a:solidFill>
+          </a:ln>
         </p:spPr>
+        <p:style>
+          <a:lnRef idx="1">
+            <a:schemeClr val="accent1"/>
+          </a:lnRef>
+          <a:fillRef idx="3">
+            <a:schemeClr val="accent1"/>
+          </a:fillRef>
+          <a:effectRef idx="2">
+            <a:schemeClr val="accent1"/>
+          </a:effectRef>
+          <a:fontRef idx="minor">
+            <a:schemeClr val="lt1"/>
+          </a:fontRef>
+        </p:style>
         <p:txBody>
-          <a:bodyPr wrap="square" rtlCol="0">
-            <a:spAutoFit/>
-          </a:bodyPr>
+          <a:bodyPr rtlCol="0" anchor="ctr" wrap="square" lIns="228600" tIns="182880" rIns="228600"/>
           <a:lstStyle/>
           <a:p>
-            <a:r>
-              <a:rPr lang="en-US" b="1"/>
-              <a:t>Role of Agentic AI in Nutrition Agent</a:t>
-            </a:r>
-          </a:p>
-          <a:p>
-            <a:r>
-              <a:rPr lang="en-US" b="1"/>
-              <a:t>Agentic AI</a:t>
-            </a:r>
-            <a:r>
-              <a:rPr lang="en-US"/>
-              <a:t> enables the Nutrition Agent to function as an intelligent, autonomous system rather than a simple chatbot. Using </a:t>
-            </a:r>
-            <a:r>
-              <a:rPr lang="en-US" b="1"/>
-              <a:t>IBM watsonx.ai</a:t>
-            </a:r>
-            <a:r>
-              <a:rPr lang="en-US"/>
-              <a:t> and </a:t>
-            </a:r>
-            <a:r>
-              <a:rPr lang="en-US" b="1"/>
-              <a:t>IBM Granite models</a:t>
-            </a:r>
-            <a:r>
-              <a:rPr lang="en-US"/>
-              <a:t>, it coordinates multiple specialized agents to deliver personalized nutrition guidance.</a:t>
-            </a:r>
-          </a:p>
-          <a:p>
-            <a:r>
-              <a:rPr lang="en-US"/>
-              <a:t>Each agent performs a specific role—such as retrieving nutritional data, generating diet plans, providing health advice, and analyzing food logs—while working collaboratively. This </a:t>
-            </a:r>
-            <a:r>
-              <a:rPr lang="en-US" b="1"/>
-              <a:t>multi-agent approach</a:t>
-            </a:r>
-            <a:r>
-              <a:rPr lang="en-US"/>
-              <a:t> ensures efficient task execution and accurate results.</a:t>
-            </a:r>
-          </a:p>
-          <a:p>
-            <a:r>
-              <a:rPr lang="en-US"/>
-              <a:t>Agentic AI also brings </a:t>
-            </a:r>
-            <a:r>
-              <a:rPr lang="en-US" b="1"/>
-              <a:t>context awareness</a:t>
-            </a:r>
-            <a:r>
-              <a:rPr lang="en-US"/>
-              <a:t>, understanding user details like age, health conditions, and fitness goals to generate tailored recommendations. It supports </a:t>
-            </a:r>
-            <a:r>
-              <a:rPr lang="en-US" b="1"/>
-              <a:t>real-time adaptation</a:t>
-            </a:r>
-            <a:r>
-              <a:rPr lang="en-US"/>
-              <a:t>, continuously updating suggestions based on user inputs like daily meals.</a:t>
-            </a:r>
-          </a:p>
-          <a:p>
-            <a:r>
-              <a:rPr lang="en-US"/>
-              <a:t>Additionally, agents communicate with each other, enabling better decision-making and improved outcomes.</a:t>
-            </a:r>
-          </a:p>
-          <a:p>
-            <a:r>
-              <a:rPr lang="en-US"/>
-              <a:t>Overall, Agentic AI makes the system proactive, personalized, and goal-driven, acting like a </a:t>
-            </a:r>
-            <a:r>
-              <a:rPr lang="en-US" b="1"/>
-              <a:t>smart digital nutritionist</a:t>
-            </a:r>
-            <a:r>
-              <a:rPr lang="en-US"/>
-              <a:t> that helps users maintain a healthy lifestyle.</a:t>
+            <a:pPr algn="ctr">
+              <a:defRPr sz="2000" b="1">
+                <a:solidFill>
+                  <a:srgbClr val="0F3B2E"/>
+                </a:solidFill>
+                <a:latin typeface="Arial"/>
+              </a:defRPr>
+            </a:pPr>
+            <a:r>
+              <a:t>Tab 2: Foliar Pathology Vision</a:t>
+            </a:r>
+          </a:p>
+          <a:p>
+            <a:pPr>
+              <a:spcBef>
+                <a:spcPts val="600"/>
+              </a:spcBef>
+              <a:defRPr sz="1500">
+                <a:solidFill>
+                  <a:srgbClr val="1E293B"/>
+                </a:solidFill>
+                <a:latin typeface="Arial"/>
+              </a:defRPr>
+            </a:pPr>
+            <a:r>
+              <a:t>• Dual-view image comparison: Original field photo vs OpenCV mask.</a:t>
+            </a:r>
+          </a:p>
+          <a:p>
+            <a:pPr>
+              <a:spcBef>
+                <a:spcPts val="600"/>
+              </a:spcBef>
+              <a:defRPr sz="1500">
+                <a:solidFill>
+                  <a:srgbClr val="1E293B"/>
+                </a:solidFill>
+                <a:latin typeface="Arial"/>
+              </a:defRPr>
+            </a:pPr>
+            <a:r>
+              <a:t>• Necrotic surface area percentage calculation and severity metrics.</a:t>
+            </a:r>
+          </a:p>
+          <a:p>
+            <a:pPr>
+              <a:spcBef>
+                <a:spcPts val="600"/>
+              </a:spcBef>
+              <a:defRPr sz="1500">
+                <a:solidFill>
+                  <a:srgbClr val="1E293B"/>
+                </a:solidFill>
+                <a:latin typeface="Arial"/>
+              </a:defRPr>
+            </a:pPr>
+            <a:r>
+              <a:t>• Symptom classification linked directly to pathogen profile.</a:t>
+            </a:r>
+          </a:p>
+        </p:txBody>
+      </p:sp>
+      <p:sp>
+        <p:nvSpPr>
+          <p:cNvPr id="199" name="Rounded Rectangle 198"/>
+          <p:cNvSpPr/>
+          <p:nvPr/>
+        </p:nvSpPr>
+        <p:spPr>
+          <a:xfrm>
+            <a:off x="731520" y="4023360"/>
+            <a:ext cx="5212080" cy="2148840"/>
+          </a:xfrm>
+          <a:prstGeom prst="roundRect">
+            <a:avLst/>
+          </a:prstGeom>
+          <a:solidFill>
+            <a:srgbClr val="F5F8F6"/>
+          </a:solidFill>
+          <a:ln w="19050">
+            <a:solidFill>
+              <a:srgbClr val="C8D7CD"/>
+            </a:solidFill>
+          </a:ln>
+        </p:spPr>
+        <p:style>
+          <a:lnRef idx="1">
+            <a:schemeClr val="accent1"/>
+          </a:lnRef>
+          <a:fillRef idx="3">
+            <a:schemeClr val="accent1"/>
+          </a:fillRef>
+          <a:effectRef idx="2">
+            <a:schemeClr val="accent1"/>
+          </a:effectRef>
+          <a:fontRef idx="minor">
+            <a:schemeClr val="lt1"/>
+          </a:fontRef>
+        </p:style>
+        <p:txBody>
+          <a:bodyPr rtlCol="0" anchor="ctr" wrap="square" lIns="228600" tIns="182880" rIns="228600"/>
+          <a:lstStyle/>
+          <a:p>
+            <a:pPr algn="ctr">
+              <a:defRPr sz="2000" b="1">
+                <a:solidFill>
+                  <a:srgbClr val="0F3B2E"/>
+                </a:solidFill>
+                <a:latin typeface="Arial"/>
+              </a:defRPr>
+            </a:pPr>
+            <a:r>
+              <a:t>Tab 3: 7-Day Treatment Roadmap</a:t>
+            </a:r>
+          </a:p>
+          <a:p>
+            <a:pPr>
+              <a:spcBef>
+                <a:spcPts val="600"/>
+              </a:spcBef>
+              <a:defRPr sz="1500">
+                <a:solidFill>
+                  <a:srgbClr val="1E293B"/>
+                </a:solidFill>
+                <a:latin typeface="Arial"/>
+              </a:defRPr>
+            </a:pPr>
+            <a:r>
+              <a:t>• Step-by-step chemical and organic spray intervention timeline.</a:t>
+            </a:r>
+          </a:p>
+          <a:p>
+            <a:pPr>
+              <a:spcBef>
+                <a:spcPts val="600"/>
+              </a:spcBef>
+              <a:defRPr sz="1500">
+                <a:solidFill>
+                  <a:srgbClr val="1E293B"/>
+                </a:solidFill>
+                <a:latin typeface="Arial"/>
+              </a:defRPr>
+            </a:pPr>
+            <a:r>
+              <a:t>• Exact ICAR chemical dilutions (e.g., Metalaxyl + Mancozeb @ 2g/L).</a:t>
+            </a:r>
+          </a:p>
+          <a:p>
+            <a:pPr>
+              <a:spcBef>
+                <a:spcPts val="600"/>
+              </a:spcBef>
+              <a:defRPr sz="1500">
+                <a:solidFill>
+                  <a:srgbClr val="1E293B"/>
+                </a:solidFill>
+                <a:latin typeface="Arial"/>
+              </a:defRPr>
+            </a:pPr>
+            <a:r>
+              <a:t>• Tank mixture safety, wait periods, and protective equipment guidelines.</a:t>
+            </a:r>
+          </a:p>
+        </p:txBody>
+      </p:sp>
+      <p:sp>
+        <p:nvSpPr>
+          <p:cNvPr id="200" name="Rounded Rectangle 199"/>
+          <p:cNvSpPr/>
+          <p:nvPr/>
+        </p:nvSpPr>
+        <p:spPr>
+          <a:xfrm>
+            <a:off x="6217920" y="4023360"/>
+            <a:ext cx="5212080" cy="2148840"/>
+          </a:xfrm>
+          <a:prstGeom prst="roundRect">
+            <a:avLst/>
+          </a:prstGeom>
+          <a:solidFill>
+            <a:srgbClr val="F5F8F6"/>
+          </a:solidFill>
+          <a:ln w="19050">
+            <a:solidFill>
+              <a:srgbClr val="C8D7CD"/>
+            </a:solidFill>
+          </a:ln>
+        </p:spPr>
+        <p:style>
+          <a:lnRef idx="1">
+            <a:schemeClr val="accent1"/>
+          </a:lnRef>
+          <a:fillRef idx="3">
+            <a:schemeClr val="accent1"/>
+          </a:fillRef>
+          <a:effectRef idx="2">
+            <a:schemeClr val="accent1"/>
+          </a:effectRef>
+          <a:fontRef idx="minor">
+            <a:schemeClr val="lt1"/>
+          </a:fontRef>
+        </p:style>
+        <p:txBody>
+          <a:bodyPr rtlCol="0" anchor="ctr" wrap="square" lIns="228600" tIns="182880" rIns="228600"/>
+          <a:lstStyle/>
+          <a:p>
+            <a:pPr algn="ctr">
+              <a:defRPr sz="2000" b="1">
+                <a:solidFill>
+                  <a:srgbClr val="0F3B2E"/>
+                </a:solidFill>
+                <a:latin typeface="Arial"/>
+              </a:defRPr>
+            </a:pPr>
+            <a:r>
+              <a:t>Tab 4: Economic Decision Simulation</a:t>
+            </a:r>
+          </a:p>
+          <a:p>
+            <a:pPr>
+              <a:spcBef>
+                <a:spcPts val="600"/>
+              </a:spcBef>
+              <a:defRPr sz="1500">
+                <a:solidFill>
+                  <a:srgbClr val="1E293B"/>
+                </a:solidFill>
+                <a:latin typeface="Arial"/>
+              </a:defRPr>
+            </a:pPr>
+            <a:r>
+              <a:t>• Financial comparison: Preventative treatment cost vs crop loss.</a:t>
+            </a:r>
+          </a:p>
+          <a:p>
+            <a:pPr>
+              <a:spcBef>
+                <a:spcPts val="600"/>
+              </a:spcBef>
+              <a:defRPr sz="1500">
+                <a:solidFill>
+                  <a:srgbClr val="1E293B"/>
+                </a:solidFill>
+                <a:latin typeface="Arial"/>
+              </a:defRPr>
+            </a:pPr>
+            <a:r>
+              <a:t>• Estimated input chemical costs vs net crop yield revenue saved.</a:t>
+            </a:r>
+          </a:p>
+          <a:p>
+            <a:pPr>
+              <a:spcBef>
+                <a:spcPts val="600"/>
+              </a:spcBef>
+              <a:defRPr sz="1500">
+                <a:solidFill>
+                  <a:srgbClr val="1E293B"/>
+                </a:solidFill>
+                <a:latin typeface="Arial"/>
+              </a:defRPr>
+            </a:pPr>
+            <a:r>
+              <a:t>• Actionable ROI projections tailored to farm acreage.</a:t>
             </a:r>
           </a:p>
         </p:txBody>

--- a/your projectpresntation.pptx
+++ b/your projectpresntation.pptx
@@ -11805,217 +11805,66 @@
         </p:nvSpPr>
         <p:spPr/>
         <p:txBody>
-          <a:bodyPr wrap="square">
+          <a:bodyPr>
             <a:normAutofit/>
           </a:bodyPr>
           <a:lstStyle/>
           <a:p>
-            <a:pPr algn="l">
-              <a:defRPr sz="2800" b="1">
-                <a:solidFill>
-                  <a:srgbClr val="0F3B2E"/>
-                </a:solidFill>
-                <a:latin typeface="Arial"/>
-              </a:defRPr>
-            </a:pPr>
-            <a:r>
+            <a:pPr algn="ctr"/>
+            <a:r>
+              <a:rPr lang="en-US" sz="6600" b="1"/>
               <a:t>IBM University Engagement Project Submission</a:t>
             </a:r>
+            <a:br>
+              <a:rPr lang="en-US" b="1"/>
+            </a:br>
             <a:endParaRPr lang="en-IN"/>
           </a:p>
         </p:txBody>
       </p:sp>
       <p:sp>
         <p:nvSpPr>
-          <p:cNvPr id="3" name="Rounded Rectangle 2"/>
-          <p:cNvSpPr/>
-          <p:nvPr/>
+          <p:cNvPr id="3" name="Text Placeholder 2">
+            <a:extLst>
+              <a:ext uri="{FF2B5EF4-FFF2-40B4-BE49-F238E27FC236}">
+                <a16:creationId xmlns:a16="http://schemas.microsoft.com/office/drawing/2014/main" id="{FFAB85A1-2169-FF43-3E91-E2E8ADA742FF}"/>
+              </a:ext>
+            </a:extLst>
+          </p:cNvPr>
+          <p:cNvSpPr>
+            <a:spLocks noGrp="1"/>
+          </p:cNvSpPr>
+          <p:nvPr>
+            <p:ph type="body" idx="1"/>
+          </p:nvPr>
         </p:nvSpPr>
         <p:spPr>
           <a:xfrm>
-            <a:off x="731520" y="1645920"/>
-            <a:ext cx="6858000" cy="4572000"/>
+            <a:off x="1014730" y="3903663"/>
+            <a:ext cx="10515600" cy="1500187"/>
           </a:xfrm>
-          <a:prstGeom prst="roundRect">
-            <a:avLst/>
-          </a:prstGeom>
-          <a:solidFill>
-            <a:srgbClr val="F5F8F6"/>
-          </a:solidFill>
-          <a:ln w="19050">
-            <a:solidFill>
-              <a:srgbClr val="C8D7CD"/>
-            </a:solidFill>
-          </a:ln>
         </p:spPr>
-        <p:style>
-          <a:lnRef idx="1">
-            <a:schemeClr val="accent1"/>
-          </a:lnRef>
-          <a:fillRef idx="3">
-            <a:schemeClr val="accent1"/>
-          </a:fillRef>
-          <a:effectRef idx="2">
-            <a:schemeClr val="accent1"/>
-          </a:effectRef>
-          <a:fontRef idx="minor">
-            <a:schemeClr val="lt1"/>
-          </a:fontRef>
-        </p:style>
         <p:txBody>
-          <a:bodyPr rtlCol="0" anchor="ctr" wrap="square" lIns="320040" tIns="274320"/>
+          <a:bodyPr/>
           <a:lstStyle/>
           <a:p>
-            <a:pPr algn="ctr">
-              <a:defRPr sz="2600" b="1">
-                <a:solidFill>
-                  <a:srgbClr val="0F3B2E"/>
-                </a:solidFill>
-                <a:latin typeface="Arial"/>
-              </a:defRPr>
-            </a:pPr>
-            <a:r>
-              <a:t>AgriSense AI</a:t>
-            </a:r>
-          </a:p>
-          <a:p>
-            <a:pPr>
-              <a:spcAft>
-                <a:spcPts val="1400"/>
-              </a:spcAft>
-              <a:defRPr sz="1600" b="1">
-                <a:solidFill>
-                  <a:srgbClr val="0F3B2E"/>
-                </a:solidFill>
-                <a:latin typeface="Arial"/>
-              </a:defRPr>
-            </a:pPr>
-            <a:r>
-              <a:t>Autonomous Agronomic Decision &amp; Regional Agromet Advisory Platform</a:t>
-            </a:r>
-          </a:p>
-          <a:p>
-            <a:pPr>
-              <a:spcBef>
-                <a:spcPts val="600"/>
-              </a:spcBef>
-              <a:defRPr sz="1600">
-                <a:solidFill>
-                  <a:srgbClr val="1E293B"/>
-                </a:solidFill>
-                <a:latin typeface="Arial"/>
-              </a:defRPr>
-            </a:pPr>
-            <a:r>
-              <a:t>Domain of Project: Agriculture</a:t>
-            </a:r>
-          </a:p>
-          <a:p>
-            <a:pPr>
-              <a:spcBef>
-                <a:spcPts val="600"/>
-              </a:spcBef>
-              <a:defRPr sz="1600">
-                <a:solidFill>
-                  <a:srgbClr val="1E293B"/>
-                </a:solidFill>
-                <a:latin typeface="Arial"/>
-              </a:defRPr>
-            </a:pPr>
-            <a:r>
-              <a:t>Student Name: M SWARNA LAKSHMI</a:t>
-            </a:r>
-          </a:p>
-          <a:p>
-            <a:pPr>
-              <a:spcBef>
-                <a:spcPts val="600"/>
-              </a:spcBef>
-              <a:defRPr sz="1600">
-                <a:solidFill>
-                  <a:srgbClr val="1E293B"/>
-                </a:solidFill>
-                <a:latin typeface="Arial"/>
-              </a:defRPr>
-            </a:pPr>
-            <a:r>
-              <a:t>Email ID: swarnalakshmim2006@gmail.com</a:t>
-            </a:r>
-          </a:p>
-          <a:p>
-            <a:pPr>
-              <a:spcBef>
-                <a:spcPts val="600"/>
-              </a:spcBef>
-              <a:defRPr sz="1600">
-                <a:solidFill>
-                  <a:srgbClr val="1E293B"/>
-                </a:solidFill>
-                <a:latin typeface="Arial"/>
-              </a:defRPr>
-            </a:pPr>
-            <a:r>
-              <a:t>Mobile Number: 6360306436</a:t>
-            </a:r>
-          </a:p>
-          <a:p>
-            <a:pPr>
-              <a:spcBef>
-                <a:spcPts val="600"/>
-              </a:spcBef>
-              <a:defRPr sz="1600">
-                <a:solidFill>
-                  <a:srgbClr val="1E293B"/>
-                </a:solidFill>
-                <a:latin typeface="Arial"/>
-              </a:defRPr>
-            </a:pPr>
-            <a:r>
-              <a:t>Institution: S J C Institute of Technology</a:t>
-            </a:r>
-          </a:p>
-          <a:p>
-            <a:pPr>
-              <a:spcBef>
-                <a:spcPts val="600"/>
-              </a:spcBef>
-              <a:defRPr sz="1600">
-                <a:solidFill>
-                  <a:srgbClr val="1E293B"/>
-                </a:solidFill>
-                <a:latin typeface="Arial"/>
-              </a:defRPr>
-            </a:pPr>
-            <a:r>
-              <a:t>Technology Stack: IBM Granite (ibm/granite-4-h-small) | Langflow | watsonx.ai</a:t>
-            </a:r>
+            <a:pPr algn="ctr"/>
+            <a:r>
+              <a:rPr lang="en-US" b="1" i="1"/>
+              <a:t>“Exploring the Power of Agentic AI with IBM Granite and </a:t>
+            </a:r>
+            <a:r>
+              <a:rPr lang="en-US" b="1" i="1" err="1"/>
+              <a:t>LangFlow</a:t>
+            </a:r>
+            <a:r>
+              <a:rPr lang="en-US" b="1" i="1"/>
+              <a:t>”</a:t>
+            </a:r>
+            <a:endParaRPr lang="en-IN"/>
           </a:p>
         </p:txBody>
       </p:sp>
-      <p:pic>
-        <p:nvPicPr>
-          <p:cNvPr id="4" name="Picture 3" descr="passport_photo.png"/>
-          <p:cNvPicPr>
-            <a:picLocks noChangeAspect="1"/>
-          </p:cNvPicPr>
-          <p:nvPr/>
-        </p:nvPicPr>
-        <p:blipFill>
-          <a:blip r:embed="rId2"/>
-          <a:stretch>
-            <a:fillRect/>
-          </a:stretch>
-        </p:blipFill>
-        <p:spPr>
-          <a:xfrm>
-            <a:off x="7955279" y="1645920"/>
-            <a:ext cx="3474720" cy="4592790"/>
-          </a:xfrm>
-          <a:prstGeom prst="rect">
-            <a:avLst/>
-          </a:prstGeom>
-        </p:spPr>
-      </p:pic>
     </p:spTree>
     <p:extLst>
       <p:ext uri="{BB962C8B-B14F-4D97-AF65-F5344CB8AC3E}">
@@ -12083,7 +11932,7 @@
           </a:bodyPr>
           <a:lstStyle/>
           <a:p>
-            <a:pPr algn="l">
+            <a:pPr>
               <a:lnSpc>
                 <a:spcPct val="157142"/>
               </a:lnSpc>
@@ -12091,40 +11940,327 @@
                 <a:srgbClr val="051D3A"/>
               </a:buClr>
               <a:buSzPts val="3500"/>
-              <a:defRPr sz="2800" b="1">
-                <a:solidFill>
-                  <a:srgbClr val="0F3B2E"/>
-                </a:solidFill>
-                <a:latin typeface="Arial"/>
-              </a:defRPr>
             </a:pPr>
             <a:r>
-              <a:t>IBM watsonx.ai Model Usage</a:t>
+              <a:rPr lang="en-US" sz="2400" b="1">
+                <a:sym typeface="Times New Roman"/>
+              </a:rPr>
+              <a:t>Token Usage </a:t>
             </a:r>
             <a:endParaRPr sz="2400" b="1">
               <a:sym typeface="Times New Roman"/>
             </a:endParaRPr>
+          </a:p>
+        </p:txBody>
+      </p:sp>
+      <p:sp>
+        <p:nvSpPr>
+          <p:cNvPr id="280" name="Google Shape;280;p18">
+            <a:extLst>
+              <a:ext uri="{FF2B5EF4-FFF2-40B4-BE49-F238E27FC236}">
+                <a16:creationId xmlns:a16="http://schemas.microsoft.com/office/drawing/2014/main" id="{A4423EF4-BB52-2693-03DD-9F7D92D05218}"/>
+              </a:ext>
+            </a:extLst>
+          </p:cNvPr>
+          <p:cNvSpPr/>
+          <p:nvPr/>
+        </p:nvSpPr>
+        <p:spPr>
+          <a:xfrm>
+            <a:off x="1218724" y="3360216"/>
+            <a:ext cx="7468553" cy="766048"/>
+          </a:xfrm>
+          <a:prstGeom prst="rect">
+            <a:avLst/>
+          </a:prstGeom>
+          <a:noFill/>
+          <a:ln>
+            <a:noFill/>
+          </a:ln>
+        </p:spPr>
+        <p:txBody>
+          <a:bodyPr spcFirstLastPara="1" wrap="square" lIns="0" tIns="0" rIns="0" bIns="0" anchor="t" anchorCtr="0">
+            <a:noAutofit/>
+          </a:bodyPr>
+          <a:lstStyle/>
+          <a:p>
+            <a:pPr marL="0" marR="0" lvl="0" indent="0" algn="l" rtl="0">
+              <a:lnSpc>
+                <a:spcPct val="162162"/>
+              </a:lnSpc>
+              <a:spcBef>
+                <a:spcPts val="0"/>
+              </a:spcBef>
+              <a:spcAft>
+                <a:spcPts val="0"/>
+              </a:spcAft>
+              <a:buClr>
+                <a:srgbClr val="2B3541"/>
+              </a:buClr>
+              <a:buSzPts val="1850"/>
+              <a:buFont typeface="Times New Roman"/>
+              <a:buNone/>
+            </a:pPr>
+            <a:r>
+              <a:rPr lang="en-US" sz="1850" b="0" i="0" u="none" strike="noStrike" cap="none">
+                <a:solidFill>
+                  <a:srgbClr val="2B3541"/>
+                </a:solidFill>
+                <a:latin typeface="Times New Roman"/>
+                <a:ea typeface="Times New Roman"/>
+                <a:cs typeface="Times New Roman"/>
+                <a:sym typeface="Times New Roman"/>
+              </a:rPr>
+              <a:t>·</a:t>
+            </a:r>
+            <a:endParaRPr sz="1850" b="0" i="0" u="none" strike="noStrike" cap="none">
+              <a:solidFill>
+                <a:srgbClr val="000000"/>
+              </a:solidFill>
+              <a:latin typeface="Times New Roman"/>
+              <a:ea typeface="Times New Roman"/>
+              <a:cs typeface="Times New Roman"/>
+              <a:sym typeface="Times New Roman"/>
+            </a:endParaRPr>
+          </a:p>
+        </p:txBody>
+      </p:sp>
+      <p:sp>
+        <p:nvSpPr>
+          <p:cNvPr id="281" name="Google Shape;281;p18">
+            <a:extLst>
+              <a:ext uri="{FF2B5EF4-FFF2-40B4-BE49-F238E27FC236}">
+                <a16:creationId xmlns:a16="http://schemas.microsoft.com/office/drawing/2014/main" id="{FF042814-8077-DBD5-E8B6-E0D870CADB86}"/>
+              </a:ext>
+            </a:extLst>
+          </p:cNvPr>
+          <p:cNvSpPr/>
+          <p:nvPr/>
+        </p:nvSpPr>
+        <p:spPr>
+          <a:xfrm>
+            <a:off x="1218724" y="4395464"/>
+            <a:ext cx="7468553" cy="766048"/>
+          </a:xfrm>
+          <a:prstGeom prst="rect">
+            <a:avLst/>
+          </a:prstGeom>
+          <a:noFill/>
+          <a:ln>
+            <a:noFill/>
+          </a:ln>
+        </p:spPr>
+        <p:txBody>
+          <a:bodyPr spcFirstLastPara="1" wrap="square" lIns="0" tIns="0" rIns="0" bIns="0" anchor="t" anchorCtr="0">
+            <a:noAutofit/>
+          </a:bodyPr>
+          <a:lstStyle/>
+          <a:p>
+            <a:pPr marL="0" marR="0" lvl="0" indent="0" algn="l" rtl="0">
+              <a:lnSpc>
+                <a:spcPct val="162162"/>
+              </a:lnSpc>
+              <a:spcBef>
+                <a:spcPts val="0"/>
+              </a:spcBef>
+              <a:spcAft>
+                <a:spcPts val="0"/>
+              </a:spcAft>
+              <a:buClr>
+                <a:srgbClr val="2B3541"/>
+              </a:buClr>
+              <a:buSzPts val="1850"/>
+              <a:buFont typeface="Times New Roman"/>
+              <a:buNone/>
+            </a:pPr>
+            <a:r>
+              <a:rPr lang="en-US" sz="1850" b="0" i="0" u="none" strike="noStrike" cap="none">
+                <a:solidFill>
+                  <a:srgbClr val="2B3541"/>
+                </a:solidFill>
+                <a:latin typeface="Times New Roman"/>
+                <a:ea typeface="Times New Roman"/>
+                <a:cs typeface="Times New Roman"/>
+                <a:sym typeface="Times New Roman"/>
+              </a:rPr>
+              <a:t>·</a:t>
+            </a:r>
+            <a:endParaRPr sz="1850" b="0" i="0" u="none" strike="noStrike" cap="none">
+              <a:solidFill>
+                <a:srgbClr val="000000"/>
+              </a:solidFill>
+              <a:latin typeface="Times New Roman"/>
+              <a:ea typeface="Times New Roman"/>
+              <a:cs typeface="Times New Roman"/>
+              <a:sym typeface="Times New Roman"/>
+            </a:endParaRPr>
+          </a:p>
+        </p:txBody>
+      </p:sp>
+      <p:sp>
+        <p:nvSpPr>
+          <p:cNvPr id="282" name="Google Shape;282;p18">
+            <a:extLst>
+              <a:ext uri="{FF2B5EF4-FFF2-40B4-BE49-F238E27FC236}">
+                <a16:creationId xmlns:a16="http://schemas.microsoft.com/office/drawing/2014/main" id="{6A2761AF-8A54-98F2-52C2-794D9BA61C92}"/>
+              </a:ext>
+            </a:extLst>
+          </p:cNvPr>
+          <p:cNvSpPr/>
+          <p:nvPr/>
+        </p:nvSpPr>
+        <p:spPr>
+          <a:xfrm>
+            <a:off x="1218724" y="5430713"/>
+            <a:ext cx="7468553" cy="383024"/>
+          </a:xfrm>
+          <a:prstGeom prst="rect">
+            <a:avLst/>
+          </a:prstGeom>
+          <a:noFill/>
+          <a:ln>
+            <a:noFill/>
+          </a:ln>
+        </p:spPr>
+        <p:txBody>
+          <a:bodyPr spcFirstLastPara="1" wrap="square" lIns="0" tIns="0" rIns="0" bIns="0" anchor="t" anchorCtr="0">
+            <a:noAutofit/>
+          </a:bodyPr>
+          <a:lstStyle/>
+          <a:p>
+            <a:pPr marL="0" marR="0" lvl="0" indent="0" algn="l" rtl="0">
+              <a:lnSpc>
+                <a:spcPct val="162162"/>
+              </a:lnSpc>
+              <a:spcBef>
+                <a:spcPts val="0"/>
+              </a:spcBef>
+              <a:spcAft>
+                <a:spcPts val="0"/>
+              </a:spcAft>
+              <a:buClr>
+                <a:srgbClr val="2B3541"/>
+              </a:buClr>
+              <a:buSzPts val="1850"/>
+              <a:buFont typeface="Times New Roman"/>
+              <a:buNone/>
+            </a:pPr>
+            <a:r>
+              <a:rPr lang="en-US" sz="1850" b="0" i="0" u="none" strike="noStrike" cap="none">
+                <a:solidFill>
+                  <a:srgbClr val="2B3541"/>
+                </a:solidFill>
+                <a:latin typeface="Times New Roman"/>
+                <a:ea typeface="Times New Roman"/>
+                <a:cs typeface="Times New Roman"/>
+                <a:sym typeface="Times New Roman"/>
+              </a:rPr>
+              <a:t>·</a:t>
+            </a:r>
+            <a:endParaRPr sz="1850" b="0" i="0" u="none" strike="noStrike" cap="none">
+              <a:solidFill>
+                <a:srgbClr val="000000"/>
+              </a:solidFill>
+              <a:latin typeface="Times New Roman"/>
+              <a:ea typeface="Times New Roman"/>
+              <a:cs typeface="Times New Roman"/>
+              <a:sym typeface="Times New Roman"/>
+            </a:endParaRPr>
+          </a:p>
+        </p:txBody>
+      </p:sp>
+      <p:sp>
+        <p:nvSpPr>
+          <p:cNvPr id="5" name="TextBox 4">
+            <a:extLst>
+              <a:ext uri="{FF2B5EF4-FFF2-40B4-BE49-F238E27FC236}">
+                <a16:creationId xmlns:a16="http://schemas.microsoft.com/office/drawing/2014/main" id="{1BD576A0-BF64-32B6-1E59-49AA2C59C5CE}"/>
+              </a:ext>
+            </a:extLst>
+          </p:cNvPr>
+          <p:cNvSpPr txBox="1"/>
+          <p:nvPr/>
+        </p:nvSpPr>
+        <p:spPr>
+          <a:xfrm>
+            <a:off x="897392" y="1042133"/>
+            <a:ext cx="4371171" cy="307777"/>
+          </a:xfrm>
+          <a:prstGeom prst="rect">
+            <a:avLst/>
+          </a:prstGeom>
+          <a:noFill/>
+        </p:spPr>
+        <p:txBody>
+          <a:bodyPr rot="0" spcFirstLastPara="0" vertOverflow="overflow" horzOverflow="overflow" vert="horz" wrap="square" lIns="91440" tIns="45720" rIns="91440" bIns="45720" numCol="1" spcCol="0" rtlCol="0" fromWordArt="0" anchor="t" anchorCtr="0" forceAA="0" compatLnSpc="1">
+            <a:prstTxWarp prst="textNoShape">
+              <a:avLst/>
+            </a:prstTxWarp>
+            <a:spAutoFit/>
+          </a:bodyPr>
+          <a:lstStyle/>
+          <a:p>
+            <a:r>
+              <a:rPr lang="en-US"/>
+              <a:t>11,761 token are used</a:t>
+            </a:r>
           </a:p>
         </p:txBody>
       </p:sp>
       <p:pic>
         <p:nvPicPr>
-          <p:cNvPr id="279" name="Picture 278" descr="watsonx_usage.png"/>
+          <p:cNvPr id="12" name="Picture 11" descr="A screenshot of a computer&#10;&#10;AI-generated content may be incorrect.">
+            <a:extLst>
+              <a:ext uri="{FF2B5EF4-FFF2-40B4-BE49-F238E27FC236}">
+                <a16:creationId xmlns:a16="http://schemas.microsoft.com/office/drawing/2014/main" id="{3E29AF1D-88C4-87E5-74DF-4E97121E06CE}"/>
+              </a:ext>
+            </a:extLst>
+          </p:cNvPr>
           <p:cNvPicPr>
             <a:picLocks noChangeAspect="1"/>
           </p:cNvPicPr>
           <p:nvPr/>
         </p:nvPicPr>
         <p:blipFill>
-          <a:blip r:embed="rId5"/>
+          <a:blip r:embed="rId3"/>
           <a:stretch>
             <a:fillRect/>
           </a:stretch>
         </p:blipFill>
         <p:spPr>
           <a:xfrm>
-            <a:off x="731520" y="1645920"/>
-            <a:ext cx="6583680" cy="3703320"/>
+            <a:off x="114240" y="2453592"/>
+            <a:ext cx="5095875" cy="2857500"/>
+          </a:xfrm>
+          <a:prstGeom prst="rect">
+            <a:avLst/>
+          </a:prstGeom>
+        </p:spPr>
+      </p:pic>
+      <p:pic>
+        <p:nvPicPr>
+          <p:cNvPr id="13" name="Picture 12" descr="A screenshot of a computer&#10;&#10;AI-generated content may be incorrect.">
+            <a:extLst>
+              <a:ext uri="{FF2B5EF4-FFF2-40B4-BE49-F238E27FC236}">
+                <a16:creationId xmlns:a16="http://schemas.microsoft.com/office/drawing/2014/main" id="{C81444F5-0692-DD67-1759-70821E53B029}"/>
+              </a:ext>
+            </a:extLst>
+          </p:cNvPr>
+          <p:cNvPicPr>
+            <a:picLocks noChangeAspect="1"/>
+          </p:cNvPicPr>
+          <p:nvPr/>
+        </p:nvPicPr>
+        <p:blipFill>
+          <a:blip r:embed="rId4"/>
+          <a:stretch>
+            <a:fillRect/>
+          </a:stretch>
+        </p:blipFill>
+        <p:spPr>
+          <a:xfrm>
+            <a:off x="6159601" y="2451181"/>
+            <a:ext cx="5724525" cy="2857500"/>
           </a:xfrm>
           <a:prstGeom prst="rect">
             <a:avLst/>
@@ -12133,151 +12269,76 @@
       </p:pic>
       <p:sp>
         <p:nvSpPr>
-          <p:cNvPr id="280" name="Rounded Rectangle 279"/>
-          <p:cNvSpPr/>
+          <p:cNvPr id="14" name="TextBox 13">
+            <a:extLst>
+              <a:ext uri="{FF2B5EF4-FFF2-40B4-BE49-F238E27FC236}">
+                <a16:creationId xmlns:a16="http://schemas.microsoft.com/office/drawing/2014/main" id="{7B8E599E-5B1D-59CD-4F1D-CEF8D0CA327B}"/>
+              </a:ext>
+            </a:extLst>
+          </p:cNvPr>
+          <p:cNvSpPr txBox="1"/>
           <p:nvPr/>
         </p:nvSpPr>
         <p:spPr>
           <a:xfrm>
-            <a:off x="7589520" y="1645920"/>
-            <a:ext cx="3840480" cy="4389120"/>
+            <a:off x="1278639" y="1718067"/>
+            <a:ext cx="2743199" cy="400110"/>
           </a:xfrm>
-          <a:prstGeom prst="roundRect">
+          <a:prstGeom prst="rect">
             <a:avLst/>
           </a:prstGeom>
-          <a:solidFill>
-            <a:srgbClr val="F5F8F6"/>
-          </a:solidFill>
-          <a:ln w="19050">
-            <a:solidFill>
-              <a:srgbClr val="C8D7CD"/>
-            </a:solidFill>
-          </a:ln>
+          <a:noFill/>
         </p:spPr>
-        <p:style>
-          <a:lnRef idx="1">
-            <a:schemeClr val="accent1"/>
-          </a:lnRef>
-          <a:fillRef idx="3">
-            <a:schemeClr val="accent1"/>
-          </a:fillRef>
-          <a:effectRef idx="2">
-            <a:schemeClr val="accent1"/>
-          </a:effectRef>
-          <a:fontRef idx="minor">
-            <a:schemeClr val="lt1"/>
-          </a:fontRef>
-        </p:style>
         <p:txBody>
-          <a:bodyPr rtlCol="0" anchor="ctr" wrap="square" lIns="228600" tIns="228600"/>
+          <a:bodyPr rot="0" spcFirstLastPara="0" vertOverflow="overflow" horzOverflow="overflow" vert="horz" wrap="square" lIns="91440" tIns="45720" rIns="91440" bIns="45720" numCol="1" spcCol="0" rtlCol="0" fromWordArt="0" anchor="t" anchorCtr="0" forceAA="0" compatLnSpc="1">
+            <a:prstTxWarp prst="textNoShape">
+              <a:avLst/>
+            </a:prstTxWarp>
+            <a:spAutoFit/>
+          </a:bodyPr>
           <a:lstStyle/>
           <a:p>
-            <a:pPr algn="ctr">
-              <a:defRPr sz="2200" b="1">
-                <a:solidFill>
-                  <a:srgbClr val="0F3B2E"/>
-                </a:solidFill>
-                <a:latin typeface="Arial"/>
-              </a:defRPr>
-            </a:pPr>
-            <a:r>
-              <a:t>Inference Telemetry</a:t>
-            </a:r>
-          </a:p>
-          <a:p>
-            <a:pPr>
-              <a:spcBef>
-                <a:spcPts val="1000"/>
-              </a:spcBef>
-              <a:defRPr sz="1600">
-                <a:solidFill>
-                  <a:srgbClr val="1E293B"/>
-                </a:solidFill>
-                <a:latin typeface="Arial"/>
-              </a:defRPr>
-            </a:pPr>
-            <a:r>
-              <a:t>Foundation Model: ibm/granite-4-h-small</a:t>
-            </a:r>
-          </a:p>
-          <a:p>
-            <a:pPr>
-              <a:spcBef>
-                <a:spcPts val="1000"/>
-              </a:spcBef>
-              <a:defRPr sz="1600">
-                <a:solidFill>
-                  <a:srgbClr val="1E293B"/>
-                </a:solidFill>
-                <a:latin typeface="Arial"/>
-              </a:defRPr>
-            </a:pPr>
-            <a:r>
-              <a:t>Serving Platform: IBM watsonx.ai</a:t>
-            </a:r>
-          </a:p>
-          <a:p>
-            <a:pPr>
-              <a:spcBef>
-                <a:spcPts val="1000"/>
-              </a:spcBef>
-              <a:defRPr sz="1600">
-                <a:solidFill>
-                  <a:srgbClr val="1E293B"/>
-                </a:solidFill>
-                <a:latin typeface="Arial"/>
-              </a:defRPr>
-            </a:pPr>
-            <a:r>
-              <a:t>Hosting Region: Dallas (us-south)</a:t>
-            </a:r>
-          </a:p>
-          <a:p>
-            <a:pPr>
-              <a:spcBef>
-                <a:spcPts val="1000"/>
-              </a:spcBef>
-              <a:defRPr sz="1600">
-                <a:solidFill>
-                  <a:srgbClr val="1E293B"/>
-                </a:solidFill>
-                <a:latin typeface="Arial"/>
-              </a:defRPr>
-            </a:pPr>
-            <a:r>
-              <a:t>Tokens Processed: 591 Tokens</a:t>
-            </a:r>
-          </a:p>
-          <a:p>
-            <a:pPr>
-              <a:spcBef>
-                <a:spcPts val="1000"/>
-              </a:spcBef>
-              <a:defRPr sz="1600">
-                <a:solidFill>
-                  <a:srgbClr val="1E293B"/>
-                </a:solidFill>
-                <a:latin typeface="Arial"/>
-              </a:defRPr>
-            </a:pPr>
-            <a:r>
-              <a:t>Execution Time: 1.2s Average Latency</a:t>
-            </a:r>
-          </a:p>
-          <a:p>
-            <a:pPr>
-              <a:spcBef>
-                <a:spcPts val="1000"/>
-              </a:spcBef>
-              <a:defRPr sz="1600">
-                <a:solidFill>
-                  <a:srgbClr val="1E293B"/>
-                </a:solidFill>
-                <a:latin typeface="Arial"/>
-              </a:defRPr>
-            </a:pPr>
-            <a:r>
-              <a:t>Output Schema: Strict Agronomic JSON</a:t>
+            <a:r>
+              <a:rPr lang="en-US" sz="2000" u="sng"/>
+              <a:t>Before Prompt</a:t>
+            </a:r>
+          </a:p>
+        </p:txBody>
+      </p:sp>
+      <p:sp>
+        <p:nvSpPr>
+          <p:cNvPr id="15" name="TextBox 14">
+            <a:extLst>
+              <a:ext uri="{FF2B5EF4-FFF2-40B4-BE49-F238E27FC236}">
+                <a16:creationId xmlns:a16="http://schemas.microsoft.com/office/drawing/2014/main" id="{B22EA981-5113-2D05-C1A2-169306E1D47C}"/>
+              </a:ext>
+            </a:extLst>
+          </p:cNvPr>
+          <p:cNvSpPr txBox="1"/>
+          <p:nvPr/>
+        </p:nvSpPr>
+        <p:spPr>
+          <a:xfrm>
+            <a:off x="7106828" y="1722919"/>
+            <a:ext cx="2743199" cy="400110"/>
+          </a:xfrm>
+          <a:prstGeom prst="rect">
+            <a:avLst/>
+          </a:prstGeom>
+          <a:noFill/>
+        </p:spPr>
+        <p:txBody>
+          <a:bodyPr rot="0" spcFirstLastPara="0" vertOverflow="overflow" horzOverflow="overflow" vert="horz" wrap="square" lIns="91440" tIns="45720" rIns="91440" bIns="45720" numCol="1" spcCol="0" rtlCol="0" fromWordArt="0" anchor="t" anchorCtr="0" forceAA="0" compatLnSpc="1">
+            <a:prstTxWarp prst="textNoShape">
+              <a:avLst/>
+            </a:prstTxWarp>
+            <a:spAutoFit/>
+          </a:bodyPr>
+          <a:lstStyle/>
+          <a:p>
+            <a:r>
+              <a:rPr lang="en-US" sz="2000" u="sng"/>
+              <a:t>After the Prompt</a:t>
             </a:r>
           </a:p>
         </p:txBody>
@@ -12346,16 +12407,9 @@
           </a:bodyPr>
           <a:lstStyle/>
           <a:p>
-            <a:pPr algn="l">
-              <a:defRPr sz="2800" b="1">
-                <a:solidFill>
-                  <a:srgbClr val="0F3B2E"/>
-                </a:solidFill>
-                <a:latin typeface="Arial"/>
-              </a:defRPr>
-            </a:pPr>
-            <a:r>
-              <a:t>Socio-Economic Impact</a:t>
+            <a:r>
+              <a:rPr lang="en-US" sz="2400" b="1"/>
+              <a:t>Novelty and Uniqueness</a:t>
             </a:r>
             <a:endParaRPr lang="en-IN" sz="2400" b="1"/>
           </a:p>
@@ -12363,310 +12417,162 @@
       </p:sp>
       <p:sp>
         <p:nvSpPr>
-          <p:cNvPr id="3" name="Rounded Rectangle 2"/>
-          <p:cNvSpPr/>
+          <p:cNvPr id="3" name="TextBox 2">
+            <a:extLst>
+              <a:ext uri="{FF2B5EF4-FFF2-40B4-BE49-F238E27FC236}">
+                <a16:creationId xmlns:a16="http://schemas.microsoft.com/office/drawing/2014/main" id="{ED65F54F-855A-0DB6-09A6-3212C5F7405B}"/>
+              </a:ext>
+            </a:extLst>
+          </p:cNvPr>
+          <p:cNvSpPr txBox="1"/>
           <p:nvPr/>
         </p:nvSpPr>
         <p:spPr>
           <a:xfrm>
-            <a:off x="731520" y="1645920"/>
-            <a:ext cx="3383280" cy="4572000"/>
+            <a:off x="777240" y="1207008"/>
+            <a:ext cx="11301984" cy="5293757"/>
           </a:xfrm>
-          <a:prstGeom prst="roundRect">
+          <a:prstGeom prst="rect">
             <a:avLst/>
           </a:prstGeom>
-          <a:solidFill>
-            <a:srgbClr val="F5F8F6"/>
-          </a:solidFill>
-          <a:ln w="19050">
-            <a:solidFill>
-              <a:srgbClr val="C8D7CD"/>
-            </a:solidFill>
-          </a:ln>
+          <a:noFill/>
         </p:spPr>
-        <p:style>
-          <a:lnRef idx="1">
-            <a:schemeClr val="accent1"/>
-          </a:lnRef>
-          <a:fillRef idx="3">
-            <a:schemeClr val="accent1"/>
-          </a:fillRef>
-          <a:effectRef idx="2">
-            <a:schemeClr val="accent1"/>
-          </a:effectRef>
-          <a:fontRef idx="minor">
-            <a:schemeClr val="lt1"/>
-          </a:fontRef>
-        </p:style>
         <p:txBody>
-          <a:bodyPr rtlCol="0" anchor="ctr" wrap="square" lIns="228600" tIns="182880" rIns="228600"/>
+          <a:bodyPr wrap="square" rtlCol="0">
+            <a:spAutoFit/>
+          </a:bodyPr>
           <a:lstStyle/>
           <a:p>
-            <a:pPr algn="ctr">
-              <a:defRPr sz="2000" b="1">
-                <a:solidFill>
-                  <a:srgbClr val="0F3B2E"/>
-                </a:solidFill>
-                <a:latin typeface="Arial"/>
-              </a:defRPr>
-            </a:pPr>
-            <a:r>
-              <a:t>Cost Optimization</a:t>
-            </a:r>
-          </a:p>
-          <a:p>
-            <a:pPr>
-              <a:spcBef>
-                <a:spcPts val="600"/>
-              </a:spcBef>
-              <a:defRPr sz="1500">
-                <a:solidFill>
-                  <a:srgbClr val="1E293B"/>
-                </a:solidFill>
-                <a:latin typeface="Arial"/>
-              </a:defRPr>
-            </a:pPr>
-            <a:r>
-              <a:t>• Eliminates ~35% of redundant routine chemical sprays.</a:t>
-            </a:r>
-          </a:p>
-          <a:p>
-            <a:pPr>
-              <a:spcBef>
-                <a:spcPts val="600"/>
-              </a:spcBef>
-              <a:defRPr sz="1500">
-                <a:solidFill>
-                  <a:srgbClr val="1E293B"/>
-                </a:solidFill>
-                <a:latin typeface="Arial"/>
-              </a:defRPr>
-            </a:pPr>
-            <a:r>
-              <a:t>• Times agrochemicals strictly to biological infection windows.</a:t>
-            </a:r>
-          </a:p>
-          <a:p>
-            <a:pPr>
-              <a:spcBef>
-                <a:spcPts val="600"/>
-              </a:spcBef>
-              <a:defRPr sz="1500">
-                <a:solidFill>
-                  <a:srgbClr val="1E293B"/>
-                </a:solidFill>
-                <a:latin typeface="Arial"/>
-              </a:defRPr>
-            </a:pPr>
-            <a:r>
-              <a:t>• Maximizes return on smallholder agricultural input costs.</a:t>
-            </a:r>
-          </a:p>
-        </p:txBody>
-      </p:sp>
-      <p:sp>
-        <p:nvSpPr>
-          <p:cNvPr id="4" name="Rounded Rectangle 3"/>
-          <p:cNvSpPr/>
-          <p:nvPr/>
-        </p:nvSpPr>
-        <p:spPr>
-          <a:xfrm>
-            <a:off x="4389120" y="1645920"/>
-            <a:ext cx="3383280" cy="4572000"/>
-          </a:xfrm>
-          <a:prstGeom prst="roundRect">
-            <a:avLst/>
-          </a:prstGeom>
-          <a:solidFill>
-            <a:srgbClr val="F5F8F6"/>
-          </a:solidFill>
-          <a:ln w="19050">
-            <a:solidFill>
-              <a:srgbClr val="C8D7CD"/>
-            </a:solidFill>
-          </a:ln>
-        </p:spPr>
-        <p:style>
-          <a:lnRef idx="1">
-            <a:schemeClr val="accent1"/>
-          </a:lnRef>
-          <a:fillRef idx="3">
-            <a:schemeClr val="accent1"/>
-          </a:fillRef>
-          <a:effectRef idx="2">
-            <a:schemeClr val="accent1"/>
-          </a:effectRef>
-          <a:fontRef idx="minor">
-            <a:schemeClr val="lt1"/>
-          </a:fontRef>
-        </p:style>
-        <p:txBody>
-          <a:bodyPr rtlCol="0" anchor="ctr" wrap="square" lIns="228600" tIns="182880" rIns="228600"/>
-          <a:lstStyle/>
-          <a:p>
-            <a:pPr algn="ctr">
-              <a:defRPr sz="2000" b="1">
-                <a:solidFill>
-                  <a:srgbClr val="0F3B2E"/>
-                </a:solidFill>
-                <a:latin typeface="Arial"/>
-              </a:defRPr>
-            </a:pPr>
-            <a:r>
-              <a:t>Yield Preservation</a:t>
-            </a:r>
-          </a:p>
-          <a:p>
-            <a:pPr>
-              <a:spcBef>
-                <a:spcPts val="600"/>
-              </a:spcBef>
-              <a:defRPr sz="1500">
-                <a:solidFill>
-                  <a:srgbClr val="1E293B"/>
-                </a:solidFill>
-                <a:latin typeface="Arial"/>
-              </a:defRPr>
-            </a:pPr>
-            <a:r>
-              <a:t>• 48-72 hour lead time before active spore propagation.</a:t>
-            </a:r>
-          </a:p>
-          <a:p>
-            <a:pPr>
-              <a:spcBef>
-                <a:spcPts val="600"/>
-              </a:spcBef>
-              <a:defRPr sz="1500">
-                <a:solidFill>
-                  <a:srgbClr val="1E293B"/>
-                </a:solidFill>
-                <a:latin typeface="Arial"/>
-              </a:defRPr>
-            </a:pPr>
-            <a:r>
-              <a:t>• Rapid disease suppression preserves marketable crop.</a:t>
-            </a:r>
-          </a:p>
-          <a:p>
-            <a:pPr>
-              <a:spcBef>
-                <a:spcPts val="600"/>
-              </a:spcBef>
-              <a:defRPr sz="1500">
-                <a:solidFill>
-                  <a:srgbClr val="1E293B"/>
-                </a:solidFill>
-                <a:latin typeface="Arial"/>
-              </a:defRPr>
-            </a:pPr>
-            <a:r>
-              <a:t>• Protects harvest quality and seasonal farming revenue.</a:t>
-            </a:r>
-          </a:p>
-        </p:txBody>
-      </p:sp>
-      <p:sp>
-        <p:nvSpPr>
-          <p:cNvPr id="5" name="Rounded Rectangle 4"/>
-          <p:cNvSpPr/>
-          <p:nvPr/>
-        </p:nvSpPr>
-        <p:spPr>
-          <a:xfrm>
-            <a:off x="8046720" y="1645920"/>
-            <a:ext cx="3383280" cy="4572000"/>
-          </a:xfrm>
-          <a:prstGeom prst="roundRect">
-            <a:avLst/>
-          </a:prstGeom>
-          <a:solidFill>
-            <a:srgbClr val="F5F8F6"/>
-          </a:solidFill>
-          <a:ln w="19050">
-            <a:solidFill>
-              <a:srgbClr val="C8D7CD"/>
-            </a:solidFill>
-          </a:ln>
-        </p:spPr>
-        <p:style>
-          <a:lnRef idx="1">
-            <a:schemeClr val="accent1"/>
-          </a:lnRef>
-          <a:fillRef idx="3">
-            <a:schemeClr val="accent1"/>
-          </a:fillRef>
-          <a:effectRef idx="2">
-            <a:schemeClr val="accent1"/>
-          </a:effectRef>
-          <a:fontRef idx="minor">
-            <a:schemeClr val="lt1"/>
-          </a:fontRef>
-        </p:style>
-        <p:txBody>
-          <a:bodyPr rtlCol="0" anchor="ctr" wrap="square" lIns="228600" tIns="182880" rIns="228600"/>
-          <a:lstStyle/>
-          <a:p>
-            <a:pPr algn="ctr">
-              <a:defRPr sz="2000" b="1">
-                <a:solidFill>
-                  <a:srgbClr val="0F3B2E"/>
-                </a:solidFill>
-                <a:latin typeface="Arial"/>
-              </a:defRPr>
-            </a:pPr>
-            <a:r>
-              <a:t>Environmental Safety</a:t>
-            </a:r>
-          </a:p>
-          <a:p>
-            <a:pPr>
-              <a:spcBef>
-                <a:spcPts val="600"/>
-              </a:spcBef>
-              <a:defRPr sz="1500">
-                <a:solidFill>
-                  <a:srgbClr val="1E293B"/>
-                </a:solidFill>
-                <a:latin typeface="Arial"/>
-              </a:defRPr>
-            </a:pPr>
-            <a:r>
-              <a:t>• Curtails toxic groundwater chemical leaching.</a:t>
-            </a:r>
-          </a:p>
-          <a:p>
-            <a:pPr>
-              <a:spcBef>
-                <a:spcPts val="600"/>
-              </a:spcBef>
-              <a:defRPr sz="1500">
-                <a:solidFill>
-                  <a:srgbClr val="1E293B"/>
-                </a:solidFill>
-                <a:latin typeface="Arial"/>
-              </a:defRPr>
-            </a:pPr>
-            <a:r>
-              <a:t>• Preserves beneficial soil microbiome and pollinators.</a:t>
-            </a:r>
-          </a:p>
-          <a:p>
-            <a:pPr>
-              <a:spcBef>
-                <a:spcPts val="600"/>
-              </a:spcBef>
-              <a:defRPr sz="1500">
-                <a:solidFill>
-                  <a:srgbClr val="1E293B"/>
-                </a:solidFill>
-                <a:latin typeface="Arial"/>
-              </a:defRPr>
-            </a:pPr>
-            <a:r>
-              <a:t>• Prevents regional chemical resistance development.</a:t>
-            </a:r>
+            <a:r>
+              <a:rPr lang="en-IN" sz="1800"/>
+              <a:t>The proposed Nutrition Agent stands out by combining </a:t>
+            </a:r>
+            <a:r>
+              <a:rPr lang="en-IN" sz="1800" b="1"/>
+              <a:t>Agentic AI, RAG, and personalization</a:t>
+            </a:r>
+            <a:r>
+              <a:rPr lang="en-IN" sz="1800"/>
+              <a:t> into a single intelligent system.</a:t>
+            </a:r>
+          </a:p>
+          <a:p>
+            <a:endParaRPr lang="en-IN" sz="1800"/>
+          </a:p>
+          <a:p>
+            <a:r>
+              <a:rPr lang="en-IN" sz="1800" b="1"/>
+              <a:t>Multi-Agent Intelligence</a:t>
+            </a:r>
+            <a:r>
+              <a:rPr lang="en-IN" sz="1800"/>
+              <a:t> – Instead of a single chatbot, multiple specialized agents collaborate to deliver accurate and context-aware nutrition guidance. </a:t>
+            </a:r>
+          </a:p>
+          <a:p>
+            <a:r>
+              <a:rPr lang="en-IN" sz="1800" b="1"/>
+              <a:t>RAG-Based Accuracy</a:t>
+            </a:r>
+            <a:r>
+              <a:rPr lang="en-IN" sz="1800"/>
+              <a:t> – Integrates real-time data retrieval with AI generation, reducing misinformation and ensuring trustworthy recommendations. </a:t>
+            </a:r>
+          </a:p>
+          <a:p>
+            <a:r>
+              <a:rPr lang="en-IN" sz="1800" b="1"/>
+              <a:t>Hyper-Personalization</a:t>
+            </a:r>
+            <a:r>
+              <a:rPr lang="en-IN" sz="1800"/>
+              <a:t> – Tailors diet plans based on health conditions, cultural preferences, and fitness goals. </a:t>
+            </a:r>
+          </a:p>
+          <a:p>
+            <a:r>
+              <a:rPr lang="en-IN" sz="1800" b="1"/>
+              <a:t>Real-Time Feedback Loop</a:t>
+            </a:r>
+            <a:r>
+              <a:rPr lang="en-IN" sz="1800"/>
+              <a:t> – Continuously adapts recommendations based on daily food logs and user </a:t>
+            </a:r>
+            <a:r>
+              <a:rPr lang="en-IN" sz="1800" err="1"/>
+              <a:t>behavior</a:t>
+            </a:r>
+            <a:r>
+              <a:rPr lang="en-IN" sz="1800"/>
+              <a:t>. </a:t>
+            </a:r>
+          </a:p>
+          <a:p>
+            <a:r>
+              <a:rPr lang="en-IN" sz="1800" b="1"/>
+              <a:t>Multi-Modal Input</a:t>
+            </a:r>
+            <a:r>
+              <a:rPr lang="en-IN" sz="1800"/>
+              <a:t> – Supports text, voice, and image-based meal tracking for better usability. </a:t>
+            </a:r>
+          </a:p>
+          <a:p>
+            <a:r>
+              <a:rPr lang="en-IN" sz="1800" b="1"/>
+              <a:t>Preventive Healthcare Focus</a:t>
+            </a:r>
+            <a:r>
+              <a:rPr lang="en-IN" sz="1800"/>
+              <a:t> – Goes beyond diet planning to provide disease-specific nutrition advice. </a:t>
+            </a:r>
+          </a:p>
+          <a:p>
+            <a:r>
+              <a:rPr lang="en-IN" sz="1800" b="1"/>
+              <a:t>Scalable &amp; Enterprise-Ready</a:t>
+            </a:r>
+            <a:r>
+              <a:rPr lang="en-IN" sz="1800"/>
+              <a:t> – Built on </a:t>
+            </a:r>
+            <a:r>
+              <a:rPr lang="en-IN" sz="1800" b="1"/>
+              <a:t>IBM watsonx.ai</a:t>
+            </a:r>
+            <a:r>
+              <a:rPr lang="en-IN" sz="1800"/>
+              <a:t> with </a:t>
+            </a:r>
+            <a:r>
+              <a:rPr lang="en-IN" sz="1800" b="1"/>
+              <a:t>IBM Granite models</a:t>
+            </a:r>
+            <a:r>
+              <a:rPr lang="en-IN" sz="1800"/>
+              <a:t>, ensuring reliability and governance. </a:t>
+            </a:r>
+          </a:p>
+          <a:p>
+            <a:endParaRPr lang="en-IN" sz="1800"/>
+          </a:p>
+          <a:p>
+            <a:r>
+              <a:rPr lang="en-IN" sz="1800"/>
+              <a:t>This makes the solution a </a:t>
+            </a:r>
+            <a:r>
+              <a:rPr lang="en-IN" sz="1800" b="1"/>
+              <a:t>smart, adaptive, and proactive digital nutritionist</a:t>
+            </a:r>
+            <a:r>
+              <a:rPr lang="en-IN" sz="1800"/>
+              <a:t>, not just a static diet recommendation tool.</a:t>
+            </a:r>
+            <a:endParaRPr lang="en-US"/>
+          </a:p>
+          <a:p>
+            <a:endParaRPr lang="en-IN"/>
           </a:p>
         </p:txBody>
       </p:sp>
@@ -12753,14 +12659,11 @@
               <a:buSzPts val="3500"/>
               <a:buFont typeface="Times New Roman"/>
               <a:buNone/>
-              <a:defRPr sz="2800" b="1">
-                <a:solidFill>
-                  <a:srgbClr val="0F3B2E"/>
-                </a:solidFill>
-                <a:latin typeface="Arial"/>
-              </a:defRPr>
             </a:pPr>
             <a:r>
+              <a:rPr lang="en-US" sz="2400" b="1">
+                <a:sym typeface="Times New Roman"/>
+              </a:rPr>
               <a:t>Git Hub Link</a:t>
             </a:r>
             <a:endParaRPr sz="2400" b="1">
@@ -12771,152 +12674,493 @@
       </p:sp>
       <p:sp>
         <p:nvSpPr>
-          <p:cNvPr id="279" name="Rounded Rectangle 278"/>
+          <p:cNvPr id="279" name="Google Shape;279;p18">
+            <a:extLst>
+              <a:ext uri="{FF2B5EF4-FFF2-40B4-BE49-F238E27FC236}">
+                <a16:creationId xmlns:a16="http://schemas.microsoft.com/office/drawing/2014/main" id="{3711AF54-94A6-B837-31EF-9A8C4ECB9AF6}"/>
+              </a:ext>
+            </a:extLst>
+          </p:cNvPr>
           <p:cNvSpPr/>
           <p:nvPr/>
         </p:nvSpPr>
         <p:spPr>
           <a:xfrm>
-            <a:off x="731520" y="1645920"/>
-            <a:ext cx="10698480" cy="4572000"/>
+            <a:off x="1218724" y="1153712"/>
+            <a:ext cx="9214580" cy="4277001"/>
           </a:xfrm>
-          <a:prstGeom prst="roundRect">
+          <a:prstGeom prst="rect">
             <a:avLst/>
           </a:prstGeom>
-          <a:solidFill>
-            <a:srgbClr val="F5F8F6"/>
-          </a:solidFill>
-          <a:ln w="19050">
-            <a:solidFill>
-              <a:srgbClr val="C8D7CD"/>
-            </a:solidFill>
+          <a:noFill/>
+          <a:ln>
+            <a:noFill/>
           </a:ln>
         </p:spPr>
-        <p:style>
-          <a:lnRef idx="1">
-            <a:schemeClr val="accent1"/>
-          </a:lnRef>
-          <a:fillRef idx="3">
-            <a:schemeClr val="accent1"/>
-          </a:fillRef>
-          <a:effectRef idx="2">
-            <a:schemeClr val="accent1"/>
-          </a:effectRef>
-          <a:fontRef idx="minor">
-            <a:schemeClr val="lt1"/>
-          </a:fontRef>
-        </p:style>
         <p:txBody>
-          <a:bodyPr rtlCol="0" anchor="ctr" wrap="square" lIns="274320" tIns="228600"/>
+          <a:bodyPr spcFirstLastPara="1" wrap="square" lIns="0" tIns="0" rIns="0" bIns="0" anchor="t" anchorCtr="0">
+            <a:noAutofit/>
+          </a:bodyPr>
           <a:lstStyle/>
           <a:p>
-            <a:pPr algn="ctr">
-              <a:defRPr sz="2000" b="1">
+            <a:pPr marL="0" marR="0" lvl="0" indent="0" algn="l" rtl="0">
+              <a:lnSpc>
+                <a:spcPct val="162162"/>
+              </a:lnSpc>
+              <a:spcBef>
+                <a:spcPts val="0"/>
+              </a:spcBef>
+              <a:spcAft>
+                <a:spcPts val="0"/>
+              </a:spcAft>
+              <a:buClr>
+                <a:srgbClr val="2B3541"/>
+              </a:buClr>
+              <a:buSzPts val="1850"/>
+              <a:buFont typeface="Times New Roman"/>
+              <a:buNone/>
+            </a:pPr>
+            <a:r>
+              <a:rPr lang="en-US" sz="1850" b="0" i="0" u="none" strike="noStrike" cap="none">
                 <a:solidFill>
-                  <a:srgbClr val="0F3B2E"/>
+                  <a:srgbClr val="2B3541"/>
                 </a:solidFill>
-                <a:latin typeface="Arial"/>
-              </a:defRPr>
+                <a:latin typeface="Times New Roman"/>
+                <a:ea typeface="Times New Roman"/>
+                <a:cs typeface="Times New Roman"/>
+                <a:sym typeface="Times New Roman"/>
+              </a:rPr>
+              <a:t>Please create public </a:t>
+            </a:r>
+            <a:r>
+              <a:rPr lang="en-US" sz="1850" b="0" i="0" u="none" strike="noStrike" cap="none" dirty="0" err="1">
+                <a:solidFill>
+                  <a:srgbClr val="2B3541"/>
+                </a:solidFill>
+                <a:latin typeface="Times New Roman"/>
+                <a:ea typeface="Times New Roman"/>
+                <a:cs typeface="Times New Roman"/>
+                <a:sym typeface="Times New Roman"/>
+              </a:rPr>
+              <a:t>github</a:t>
+            </a:r>
+            <a:r>
+              <a:rPr lang="en-US" sz="1850" b="0" i="0" u="none" strike="noStrike" cap="none" dirty="0">
+                <a:solidFill>
+                  <a:srgbClr val="2B3541"/>
+                </a:solidFill>
+                <a:latin typeface="Times New Roman"/>
+                <a:ea typeface="Times New Roman"/>
+                <a:cs typeface="Times New Roman"/>
+                <a:sym typeface="Times New Roman"/>
+              </a:rPr>
+              <a:t> repository (Enable Add README  button while creating repository) with format – </a:t>
+            </a:r>
+          </a:p>
+          <a:p>
+            <a:pPr marL="0" marR="0" lvl="0" indent="0" algn="l" rtl="0">
+              <a:lnSpc>
+                <a:spcPct val="162162"/>
+              </a:lnSpc>
+              <a:spcBef>
+                <a:spcPts val="0"/>
+              </a:spcBef>
+              <a:spcAft>
+                <a:spcPts val="0"/>
+              </a:spcAft>
+              <a:buClr>
+                <a:srgbClr val="2B3541"/>
+              </a:buClr>
+              <a:buSzPts val="1850"/>
+              <a:buFont typeface="Times New Roman"/>
+              <a:buNone/>
             </a:pPr>
             <a:r>
-              <a:t>Repository URL:</a:t>
-            </a:r>
-          </a:p>
-          <a:p>
-            <a:pPr>
-              <a:spcAft>
-                <a:spcPts val="1400"/>
-              </a:spcAft>
-              <a:defRPr sz="2000" b="1">
+              <a:rPr lang="en-US" sz="1850" dirty="0">
                 <a:solidFill>
-                  <a:srgbClr val="0A66C2"/>
+                  <a:srgbClr val="2B3541"/>
                 </a:solidFill>
-                <a:latin typeface="Arial"/>
-              </a:defRPr>
+                <a:latin typeface="Times New Roman"/>
+                <a:ea typeface="Times New Roman"/>
+                <a:cs typeface="Times New Roman"/>
+                <a:sym typeface="Times New Roman"/>
+              </a:rPr>
+              <a:t>Please test and Paste the working  </a:t>
+            </a:r>
+            <a:r>
+              <a:rPr lang="en-US" sz="1850" dirty="0" err="1">
+                <a:solidFill>
+                  <a:srgbClr val="2B3541"/>
+                </a:solidFill>
+                <a:latin typeface="Times New Roman"/>
+                <a:ea typeface="Times New Roman"/>
+                <a:cs typeface="Times New Roman"/>
+                <a:sym typeface="Times New Roman"/>
+              </a:rPr>
+              <a:t>Github</a:t>
+            </a:r>
+            <a:r>
+              <a:rPr lang="en-US" sz="1850" dirty="0">
+                <a:solidFill>
+                  <a:srgbClr val="2B3541"/>
+                </a:solidFill>
+                <a:latin typeface="Times New Roman"/>
+                <a:ea typeface="Times New Roman"/>
+                <a:cs typeface="Times New Roman"/>
+                <a:sym typeface="Times New Roman"/>
+              </a:rPr>
+              <a:t> URL –</a:t>
+            </a:r>
+            <a:endParaRPr lang="en-US" sz="1850" dirty="0">
+              <a:solidFill>
+                <a:srgbClr val="2B3541"/>
+              </a:solidFill>
+              <a:latin typeface="Times New Roman"/>
+              <a:ea typeface="Times New Roman"/>
+              <a:cs typeface="Times New Roman"/>
+            </a:endParaRPr>
+          </a:p>
+          <a:p>
+            <a:pPr lvl="0">
+              <a:lnSpc>
+                <a:spcPct val="162162"/>
+              </a:lnSpc>
+              <a:buClr>
+                <a:srgbClr val="2B3541"/>
+              </a:buClr>
+              <a:buSzPts val="1850"/>
             </a:pPr>
             <a:r>
-              <a:t>https://github.com/swarna-builds/AgriSense-AI-IBM-Granite</a:t>
-            </a:r>
-          </a:p>
-          <a:p>
-            <a:pPr>
-              <a:spcBef>
-                <a:spcPts val="800"/>
-              </a:spcBef>
-              <a:defRPr sz="2000" b="1">
+              <a:rPr lang="en-US" sz="1850" b="1" dirty="0">
                 <a:solidFill>
-                  <a:srgbClr val="0F3B2E"/>
+                  <a:srgbClr val="2B3541"/>
                 </a:solidFill>
-                <a:latin typeface="Arial"/>
-              </a:defRPr>
+                <a:latin typeface="Times New Roman"/>
+                <a:ea typeface="Times New Roman"/>
+                <a:cs typeface="Times New Roman"/>
+                <a:sym typeface="Times New Roman"/>
+              </a:rPr>
+              <a:t>Make sure you have Uploaded following three files into your </a:t>
+            </a:r>
+            <a:r>
+              <a:rPr lang="en-US" sz="1850" b="1" dirty="0" err="1">
+                <a:solidFill>
+                  <a:srgbClr val="2B3541"/>
+                </a:solidFill>
+                <a:latin typeface="Times New Roman"/>
+                <a:ea typeface="Times New Roman"/>
+                <a:cs typeface="Times New Roman"/>
+                <a:sym typeface="Times New Roman"/>
+              </a:rPr>
+              <a:t>github</a:t>
+            </a:r>
+            <a:r>
+              <a:rPr lang="en-US" sz="1850" b="1" dirty="0">
+                <a:solidFill>
+                  <a:srgbClr val="2B3541"/>
+                </a:solidFill>
+                <a:latin typeface="Times New Roman"/>
+                <a:ea typeface="Times New Roman"/>
+                <a:cs typeface="Times New Roman"/>
+                <a:sym typeface="Times New Roman"/>
+              </a:rPr>
+              <a:t> repository  </a:t>
+            </a:r>
+            <a:br>
+              <a:rPr lang="en-US" sz="1850" dirty="0">
+                <a:latin typeface="Times New Roman"/>
+                <a:ea typeface="Times New Roman"/>
+                <a:cs typeface="Times New Roman"/>
+              </a:rPr>
+            </a:br>
+            <a:r>
+              <a:rPr lang="en-US" sz="1850" dirty="0">
+                <a:solidFill>
+                  <a:srgbClr val="2B3541"/>
+                </a:solidFill>
+                <a:latin typeface="Times New Roman"/>
+                <a:ea typeface="Times New Roman"/>
+                <a:cs typeface="Times New Roman"/>
+                <a:sym typeface="Times New Roman"/>
+              </a:rPr>
+              <a:t>1) </a:t>
+            </a:r>
+            <a:r>
+              <a:rPr lang="en-US" sz="1850" dirty="0" err="1">
+                <a:solidFill>
+                  <a:srgbClr val="2B3541"/>
+                </a:solidFill>
+                <a:latin typeface="Times New Roman"/>
+                <a:ea typeface="Times New Roman"/>
+                <a:cs typeface="Times New Roman"/>
+                <a:sym typeface="Times New Roman"/>
+              </a:rPr>
+              <a:t>app.json</a:t>
+            </a:r>
+            <a:r>
+              <a:rPr lang="en-US" sz="1850" dirty="0">
+                <a:solidFill>
+                  <a:srgbClr val="2B3541"/>
+                </a:solidFill>
+                <a:latin typeface="Times New Roman"/>
+                <a:ea typeface="Times New Roman"/>
+                <a:cs typeface="Times New Roman"/>
+                <a:sym typeface="Times New Roman"/>
+              </a:rPr>
+              <a:t> file , 2) yourproblemstatement.pdf file  3) your projectpresntation.pptx file 4)any other files </a:t>
+            </a:r>
+            <a:endParaRPr lang="en-US" sz="1850" dirty="0">
+              <a:solidFill>
+                <a:srgbClr val="2B3541"/>
+              </a:solidFill>
+              <a:latin typeface="Times New Roman"/>
+              <a:ea typeface="Times New Roman"/>
+              <a:cs typeface="Times New Roman"/>
+            </a:endParaRPr>
+          </a:p>
+          <a:p>
+            <a:pPr marL="0" marR="0" lvl="0" indent="0" algn="l" rtl="0">
+              <a:lnSpc>
+                <a:spcPct val="162162"/>
+              </a:lnSpc>
+              <a:spcBef>
+                <a:spcPts val="0"/>
+              </a:spcBef>
+              <a:spcAft>
+                <a:spcPts val="0"/>
+              </a:spcAft>
+              <a:buClr>
+                <a:srgbClr val="2B3541"/>
+              </a:buClr>
+              <a:buSzPts val="1850"/>
+              <a:buFont typeface="Times New Roman"/>
+              <a:buNone/>
             </a:pPr>
-            <a:r>
-              <a:t>Mandatory Deliverables Verified on Remote Main Branch:</a:t>
-            </a:r>
-          </a:p>
-          <a:p>
-            <a:pPr>
-              <a:spcBef>
-                <a:spcPts val="600"/>
-              </a:spcBef>
-              <a:defRPr sz="1800">
+            <a:endParaRPr sz="1850" b="0" i="0" u="none" strike="noStrike" cap="none">
+              <a:solidFill>
+                <a:srgbClr val="000000"/>
+              </a:solidFill>
+              <a:latin typeface="Times New Roman"/>
+              <a:ea typeface="Times New Roman"/>
+              <a:cs typeface="Times New Roman"/>
+              <a:sym typeface="Times New Roman"/>
+            </a:endParaRPr>
+          </a:p>
+        </p:txBody>
+      </p:sp>
+      <p:sp>
+        <p:nvSpPr>
+          <p:cNvPr id="280" name="Google Shape;280;p18">
+            <a:extLst>
+              <a:ext uri="{FF2B5EF4-FFF2-40B4-BE49-F238E27FC236}">
+                <a16:creationId xmlns:a16="http://schemas.microsoft.com/office/drawing/2014/main" id="{E228982D-BF81-530A-CBA1-E897A3CA8EF7}"/>
+              </a:ext>
+            </a:extLst>
+          </p:cNvPr>
+          <p:cNvSpPr/>
+          <p:nvPr/>
+        </p:nvSpPr>
+        <p:spPr>
+          <a:xfrm>
+            <a:off x="1218724" y="3360216"/>
+            <a:ext cx="7468553" cy="766048"/>
+          </a:xfrm>
+          <a:prstGeom prst="rect">
+            <a:avLst/>
+          </a:prstGeom>
+          <a:noFill/>
+          <a:ln>
+            <a:noFill/>
+          </a:ln>
+        </p:spPr>
+        <p:txBody>
+          <a:bodyPr spcFirstLastPara="1" wrap="square" lIns="0" tIns="0" rIns="0" bIns="0" anchor="t" anchorCtr="0">
+            <a:noAutofit/>
+          </a:bodyPr>
+          <a:lstStyle/>
+          <a:p>
+            <a:pPr marL="0" marR="0" lvl="0" indent="0" algn="l" rtl="0">
+              <a:lnSpc>
+                <a:spcPct val="162162"/>
+              </a:lnSpc>
+              <a:spcBef>
+                <a:spcPts val="0"/>
+              </a:spcBef>
+              <a:spcAft>
+                <a:spcPts val="0"/>
+              </a:spcAft>
+              <a:buClr>
+                <a:srgbClr val="2B3541"/>
+              </a:buClr>
+              <a:buSzPts val="1850"/>
+              <a:buFont typeface="Times New Roman"/>
+              <a:buNone/>
+            </a:pPr>
+            <a:r>
+              <a:rPr lang="en-US" sz="1850" b="0" i="0" u="none" strike="noStrike" cap="none">
                 <a:solidFill>
-                  <a:srgbClr val="1E293B"/>
+                  <a:srgbClr val="2B3541"/>
                 </a:solidFill>
-                <a:latin typeface="Arial"/>
-              </a:defRPr>
+                <a:latin typeface="Times New Roman"/>
+                <a:ea typeface="Times New Roman"/>
+                <a:cs typeface="Times New Roman"/>
+                <a:sym typeface="Times New Roman"/>
+              </a:rPr>
+              <a:t>·</a:t>
+            </a:r>
+            <a:endParaRPr sz="1850" b="0" i="0" u="none" strike="noStrike" cap="none">
+              <a:solidFill>
+                <a:srgbClr val="000000"/>
+              </a:solidFill>
+              <a:latin typeface="Times New Roman"/>
+              <a:ea typeface="Times New Roman"/>
+              <a:cs typeface="Times New Roman"/>
+              <a:sym typeface="Times New Roman"/>
+            </a:endParaRPr>
+          </a:p>
+        </p:txBody>
+      </p:sp>
+      <p:sp>
+        <p:nvSpPr>
+          <p:cNvPr id="281" name="Google Shape;281;p18">
+            <a:extLst>
+              <a:ext uri="{FF2B5EF4-FFF2-40B4-BE49-F238E27FC236}">
+                <a16:creationId xmlns:a16="http://schemas.microsoft.com/office/drawing/2014/main" id="{7BC356B8-92F8-3187-D065-667AACF68E72}"/>
+              </a:ext>
+            </a:extLst>
+          </p:cNvPr>
+          <p:cNvSpPr/>
+          <p:nvPr/>
+        </p:nvSpPr>
+        <p:spPr>
+          <a:xfrm>
+            <a:off x="1218724" y="4395464"/>
+            <a:ext cx="7468553" cy="766048"/>
+          </a:xfrm>
+          <a:prstGeom prst="rect">
+            <a:avLst/>
+          </a:prstGeom>
+          <a:noFill/>
+          <a:ln>
+            <a:noFill/>
+          </a:ln>
+        </p:spPr>
+        <p:txBody>
+          <a:bodyPr spcFirstLastPara="1" wrap="square" lIns="0" tIns="0" rIns="0" bIns="0" anchor="t" anchorCtr="0">
+            <a:noAutofit/>
+          </a:bodyPr>
+          <a:lstStyle/>
+          <a:p>
+            <a:pPr marL="0" marR="0" lvl="0" indent="0" algn="l" rtl="0">
+              <a:lnSpc>
+                <a:spcPct val="162162"/>
+              </a:lnSpc>
+              <a:spcBef>
+                <a:spcPts val="0"/>
+              </a:spcBef>
+              <a:spcAft>
+                <a:spcPts val="0"/>
+              </a:spcAft>
+              <a:buClr>
+                <a:srgbClr val="2B3541"/>
+              </a:buClr>
+              <a:buSzPts val="1850"/>
+              <a:buFont typeface="Times New Roman"/>
+              <a:buNone/>
             </a:pPr>
             <a:r>
-              <a:t>• app.py &amp; app.json — Langflow agentic workflow manifest and service dependencies</a:t>
-            </a:r>
-          </a:p>
-          <a:p>
-            <a:pPr>
-              <a:spcBef>
-                <a:spcPts val="600"/>
-              </a:spcBef>
-              <a:defRPr sz="1800">
+              <a:rPr lang="en-US" sz="1850" b="0" i="0" u="none" strike="noStrike" cap="none">
                 <a:solidFill>
-                  <a:srgbClr val="1E293B"/>
+                  <a:srgbClr val="2B3541"/>
                 </a:solidFill>
-                <a:latin typeface="Arial"/>
-              </a:defRPr>
+                <a:latin typeface="Times New Roman"/>
+                <a:ea typeface="Times New Roman"/>
+                <a:cs typeface="Times New Roman"/>
+                <a:sym typeface="Times New Roman"/>
+              </a:rPr>
+              <a:t>·</a:t>
+            </a:r>
+            <a:endParaRPr sz="1850" b="0" i="0" u="none" strike="noStrike" cap="none">
+              <a:solidFill>
+                <a:srgbClr val="000000"/>
+              </a:solidFill>
+              <a:latin typeface="Times New Roman"/>
+              <a:ea typeface="Times New Roman"/>
+              <a:cs typeface="Times New Roman"/>
+              <a:sym typeface="Times New Roman"/>
+            </a:endParaRPr>
+          </a:p>
+        </p:txBody>
+      </p:sp>
+      <p:sp>
+        <p:nvSpPr>
+          <p:cNvPr id="282" name="Google Shape;282;p18">
+            <a:extLst>
+              <a:ext uri="{FF2B5EF4-FFF2-40B4-BE49-F238E27FC236}">
+                <a16:creationId xmlns:a16="http://schemas.microsoft.com/office/drawing/2014/main" id="{1558A011-60D6-B010-6117-1B9F7C786B2B}"/>
+              </a:ext>
+            </a:extLst>
+          </p:cNvPr>
+          <p:cNvSpPr/>
+          <p:nvPr/>
+        </p:nvSpPr>
+        <p:spPr>
+          <a:xfrm>
+            <a:off x="1218724" y="5430713"/>
+            <a:ext cx="7468553" cy="383024"/>
+          </a:xfrm>
+          <a:prstGeom prst="rect">
+            <a:avLst/>
+          </a:prstGeom>
+          <a:noFill/>
+          <a:ln>
+            <a:noFill/>
+          </a:ln>
+        </p:spPr>
+        <p:txBody>
+          <a:bodyPr spcFirstLastPara="1" wrap="square" lIns="0" tIns="0" rIns="0" bIns="0" anchor="t" anchorCtr="0">
+            <a:noAutofit/>
+          </a:bodyPr>
+          <a:lstStyle/>
+          <a:p>
+            <a:pPr marL="0" marR="0" lvl="0" indent="0" algn="l" rtl="0">
+              <a:lnSpc>
+                <a:spcPct val="162162"/>
+              </a:lnSpc>
+              <a:spcBef>
+                <a:spcPts val="0"/>
+              </a:spcBef>
+              <a:spcAft>
+                <a:spcPts val="0"/>
+              </a:spcAft>
+              <a:buClr>
+                <a:srgbClr val="2B3541"/>
+              </a:buClr>
+              <a:buSzPts val="1850"/>
+              <a:buFont typeface="Times New Roman"/>
+              <a:buNone/>
             </a:pPr>
             <a:r>
-              <a:t>• yourproblemstatement.pdf — Formal problem formulation &amp; ICAR objectives</a:t>
-            </a:r>
-          </a:p>
-          <a:p>
-            <a:pPr>
-              <a:spcBef>
-                <a:spcPts val="600"/>
-              </a:spcBef>
-              <a:defRPr sz="1800">
+              <a:rPr lang="en-US" sz="1850" b="0" i="0" u="none" strike="noStrike" cap="none">
                 <a:solidFill>
-                  <a:srgbClr val="1E293B"/>
+                  <a:srgbClr val="2B3541"/>
                 </a:solidFill>
-                <a:latin typeface="Arial"/>
-              </a:defRPr>
-            </a:pPr>
-            <a:r>
-              <a:t>• your projectpresntation.pptx — Complete technical deck and architectural artifacts</a:t>
-            </a:r>
-          </a:p>
-          <a:p>
-            <a:pPr>
-              <a:spcBef>
-                <a:spcPts val="600"/>
-              </a:spcBef>
-              <a:defRPr sz="1800">
-                <a:solidFill>
-                  <a:srgbClr val="1E293B"/>
-                </a:solidFill>
-                <a:latin typeface="Arial"/>
-              </a:defRPr>
-            </a:pPr>
-            <a:r>
-              <a:t>• Source Code Repository — core/, services/, and automated test suite</a:t>
-            </a:r>
+                <a:latin typeface="Times New Roman"/>
+                <a:ea typeface="Times New Roman"/>
+                <a:cs typeface="Times New Roman"/>
+                <a:sym typeface="Times New Roman"/>
+              </a:rPr>
+              <a:t>·</a:t>
+            </a:r>
+            <a:endParaRPr sz="1850" b="0" i="0" u="none" strike="noStrike" cap="none">
+              <a:solidFill>
+                <a:srgbClr val="000000"/>
+              </a:solidFill>
+              <a:latin typeface="Times New Roman"/>
+              <a:ea typeface="Times New Roman"/>
+              <a:cs typeface="Times New Roman"/>
+              <a:sym typeface="Times New Roman"/>
+            </a:endParaRPr>
           </a:p>
         </p:txBody>
       </p:sp>
@@ -13003,15 +13247,12 @@
               <a:buSzPts val="3500"/>
               <a:buFont typeface="Times New Roman"/>
               <a:buNone/>
-              <a:defRPr sz="2800" b="1">
-                <a:solidFill>
-                  <a:srgbClr val="0F3B2E"/>
-                </a:solidFill>
-                <a:latin typeface="Arial"/>
-              </a:defRPr>
             </a:pPr>
             <a:r>
-              <a:t>Future Scope</a:t>
+              <a:rPr lang="en-US" sz="2400" b="1">
+                <a:sym typeface="Times New Roman"/>
+              </a:rPr>
+              <a:t>Future Scope </a:t>
             </a:r>
             <a:endParaRPr sz="2400" b="1">
               <a:sym typeface="Times New Roman"/>
@@ -13021,358 +13262,406 @@
       </p:sp>
       <p:sp>
         <p:nvSpPr>
-          <p:cNvPr id="279" name="Rounded Rectangle 278"/>
+          <p:cNvPr id="279" name="Google Shape;279;p18">
+            <a:extLst>
+              <a:ext uri="{FF2B5EF4-FFF2-40B4-BE49-F238E27FC236}">
+                <a16:creationId xmlns:a16="http://schemas.microsoft.com/office/drawing/2014/main" id="{EAFA16CB-0A72-5AC5-69A0-ABF4A752B43F}"/>
+              </a:ext>
+            </a:extLst>
+          </p:cNvPr>
           <p:cNvSpPr/>
           <p:nvPr/>
         </p:nvSpPr>
         <p:spPr>
           <a:xfrm>
-            <a:off x="731520" y="1645920"/>
-            <a:ext cx="3383280" cy="4572000"/>
+            <a:off x="1218724" y="1221715"/>
+            <a:ext cx="9214580" cy="4277001"/>
           </a:xfrm>
-          <a:prstGeom prst="roundRect">
+          <a:prstGeom prst="rect">
             <a:avLst/>
           </a:prstGeom>
-          <a:solidFill>
-            <a:srgbClr val="F5F8F6"/>
-          </a:solidFill>
-          <a:ln w="19050">
-            <a:solidFill>
-              <a:srgbClr val="C8D7CD"/>
-            </a:solidFill>
+          <a:noFill/>
+          <a:ln>
+            <a:noFill/>
           </a:ln>
         </p:spPr>
-        <p:style>
-          <a:lnRef idx="1">
-            <a:schemeClr val="accent1"/>
-          </a:lnRef>
-          <a:fillRef idx="3">
-            <a:schemeClr val="accent1"/>
-          </a:fillRef>
-          <a:effectRef idx="2">
-            <a:schemeClr val="accent1"/>
-          </a:effectRef>
-          <a:fontRef idx="minor">
-            <a:schemeClr val="lt1"/>
-          </a:fontRef>
-        </p:style>
         <p:txBody>
-          <a:bodyPr rtlCol="0" anchor="ctr" wrap="square" lIns="228600" tIns="182880" rIns="228600"/>
+          <a:bodyPr spcFirstLastPara="1" wrap="square" lIns="0" tIns="0" rIns="0" bIns="0" anchor="t" anchorCtr="0">
+            <a:noAutofit/>
+          </a:bodyPr>
           <a:lstStyle/>
           <a:p>
-            <a:pPr algn="ctr">
-              <a:defRPr sz="2000" b="1">
+            <a:pPr marL="0" marR="0" lvl="0" indent="0" algn="l" rtl="0">
+              <a:lnSpc>
+                <a:spcPct val="162162"/>
+              </a:lnSpc>
+              <a:spcBef>
+                <a:spcPts val="0"/>
+              </a:spcBef>
+              <a:spcAft>
+                <a:spcPts val="0"/>
+              </a:spcAft>
+              <a:buClr>
+                <a:srgbClr val="2B3541"/>
+              </a:buClr>
+              <a:buSzPts val="1850"/>
+              <a:buFont typeface="Times New Roman"/>
+              <a:buNone/>
+            </a:pPr>
+            <a:r>
+              <a:rPr lang="en-US" sz="1850" b="1" i="0" u="none" strike="noStrike" cap="none">
                 <a:solidFill>
-                  <a:srgbClr val="0F3B2E"/>
+                  <a:srgbClr val="2B3541"/>
                 </a:solidFill>
-                <a:latin typeface="Arial"/>
-              </a:defRPr>
+                <a:latin typeface="Times New Roman"/>
+                <a:ea typeface="Times New Roman"/>
+                <a:cs typeface="Times New Roman"/>
+                <a:sym typeface="Times New Roman"/>
+              </a:rPr>
+              <a:t>1.Integration with Wearables &amp; Health Devices – </a:t>
+            </a:r>
+          </a:p>
+          <a:p>
+            <a:pPr marL="0" marR="0" lvl="0" indent="0" algn="l" rtl="0">
+              <a:lnSpc>
+                <a:spcPct val="162162"/>
+              </a:lnSpc>
+              <a:spcBef>
+                <a:spcPts val="0"/>
+              </a:spcBef>
+              <a:spcAft>
+                <a:spcPts val="0"/>
+              </a:spcAft>
+              <a:buClr>
+                <a:srgbClr val="2B3541"/>
+              </a:buClr>
+              <a:buSzPts val="1850"/>
+              <a:buFont typeface="Times New Roman"/>
+              <a:buNone/>
             </a:pPr>
             <a:r>
-              <a:t>Phase 1: Delivered Platform</a:t>
-            </a:r>
-          </a:p>
-          <a:p>
-            <a:pPr>
-              <a:spcBef>
-                <a:spcPts val="600"/>
-              </a:spcBef>
-              <a:defRPr sz="1500">
+              <a:rPr lang="en-US" sz="1850" b="0" i="0" u="none" strike="noStrike" cap="none">
                 <a:solidFill>
-                  <a:srgbClr val="1E293B"/>
+                  <a:srgbClr val="2B3541"/>
                 </a:solidFill>
-                <a:latin typeface="Arial"/>
-              </a:defRPr>
+                <a:latin typeface="Times New Roman"/>
+                <a:ea typeface="Times New Roman"/>
+                <a:cs typeface="Times New Roman"/>
+                <a:sym typeface="Times New Roman"/>
+              </a:rPr>
+              <a:t>The system can be integrated with smartwatches and fitness trackers to collect real-time data such as steps, calories burned, heart rate, and sleep patterns. This will enable the Nutrition Agent to provide more accurate and dynamic diet recommendations based on actual user activity and health metrics.</a:t>
+            </a:r>
+          </a:p>
+          <a:p>
+            <a:pPr marL="0" marR="0" lvl="0" indent="0" algn="l" rtl="0">
+              <a:lnSpc>
+                <a:spcPct val="162162"/>
+              </a:lnSpc>
+              <a:spcBef>
+                <a:spcPts val="0"/>
+              </a:spcBef>
+              <a:spcAft>
+                <a:spcPts val="0"/>
+              </a:spcAft>
+              <a:buClr>
+                <a:srgbClr val="2B3541"/>
+              </a:buClr>
+              <a:buSzPts val="1850"/>
+              <a:buFont typeface="Times New Roman"/>
+              <a:buNone/>
             </a:pPr>
             <a:r>
-              <a:t>• Deployed Granite-4-H-Small agronomic engine.</a:t>
-            </a:r>
-          </a:p>
-          <a:p>
-            <a:pPr>
-              <a:spcBef>
-                <a:spcPts val="600"/>
-              </a:spcBef>
-              <a:defRPr sz="1500">
+              <a:rPr lang="en-US" sz="1850" b="1">
                 <a:solidFill>
-                  <a:srgbClr val="1E293B"/>
+                  <a:srgbClr val="2B3541"/>
                 </a:solidFill>
-                <a:latin typeface="Arial"/>
-              </a:defRPr>
+                <a:latin typeface="Times New Roman"/>
+                <a:ea typeface="Times New Roman"/>
+                <a:cs typeface="Times New Roman"/>
+                <a:sym typeface="Times New Roman"/>
+              </a:rPr>
+              <a:t>2.</a:t>
+            </a:r>
+            <a:r>
+              <a:rPr lang="en-US" sz="1850" b="1" i="0" u="none" strike="noStrike" cap="none">
+                <a:solidFill>
+                  <a:srgbClr val="2B3541"/>
+                </a:solidFill>
+                <a:latin typeface="Times New Roman"/>
+                <a:ea typeface="Times New Roman"/>
+                <a:cs typeface="Times New Roman"/>
+                <a:sym typeface="Times New Roman"/>
+              </a:rPr>
+              <a:t>AI-Powered Voice Assistant &amp; Multilingual Support </a:t>
+            </a:r>
+            <a:r>
+              <a:rPr lang="en-US" sz="1850" b="0" i="0" u="none" strike="noStrike" cap="none">
+                <a:solidFill>
+                  <a:srgbClr val="2B3541"/>
+                </a:solidFill>
+                <a:latin typeface="Times New Roman"/>
+                <a:ea typeface="Times New Roman"/>
+                <a:cs typeface="Times New Roman"/>
+                <a:sym typeface="Times New Roman"/>
+              </a:rPr>
+              <a:t>– </a:t>
+            </a:r>
+          </a:p>
+          <a:p>
+            <a:pPr marL="0" marR="0" lvl="0" indent="0" algn="l" rtl="0">
+              <a:lnSpc>
+                <a:spcPct val="162162"/>
+              </a:lnSpc>
+              <a:spcBef>
+                <a:spcPts val="0"/>
+              </a:spcBef>
+              <a:spcAft>
+                <a:spcPts val="0"/>
+              </a:spcAft>
+              <a:buClr>
+                <a:srgbClr val="2B3541"/>
+              </a:buClr>
+              <a:buSzPts val="1850"/>
+              <a:buFont typeface="Times New Roman"/>
+              <a:buNone/>
             </a:pPr>
             <a:r>
-              <a:t>• Validated ICAR-grounded vector RAG retrieval.</a:t>
-            </a:r>
-          </a:p>
-          <a:p>
-            <a:pPr>
-              <a:spcBef>
-                <a:spcPts val="600"/>
-              </a:spcBef>
-              <a:defRPr sz="1500">
+              <a:rPr lang="en-US" sz="1850" b="0" i="0" u="none" strike="noStrike" cap="none">
                 <a:solidFill>
-                  <a:srgbClr val="1E293B"/>
+                  <a:srgbClr val="2B3541"/>
                 </a:solidFill>
-                <a:latin typeface="Arial"/>
-              </a:defRPr>
-            </a:pPr>
-            <a:r>
-              <a:t>• Multi-modal Langflow agentic workflow.</a:t>
-            </a:r>
-          </a:p>
-          <a:p>
-            <a:pPr>
-              <a:spcBef>
-                <a:spcPts val="600"/>
-              </a:spcBef>
-              <a:defRPr sz="1500">
-                <a:solidFill>
-                  <a:srgbClr val="1E293B"/>
-                </a:solidFill>
-                <a:latin typeface="Arial"/>
-              </a:defRPr>
-            </a:pPr>
-            <a:r>
-              <a:t>• Quad-language vernacular text-to-speech.</a:t>
-            </a:r>
+                <a:latin typeface="Times New Roman"/>
+                <a:ea typeface="Times New Roman"/>
+                <a:cs typeface="Times New Roman"/>
+                <a:sym typeface="Times New Roman"/>
+              </a:rPr>
+              <a:t>Enhancing the system with a voice-enabled assistant and support for multiple languages will improve accessibility. Users can interact naturally in their preferred language, making the solution more inclusive and suitable for diverse populations, especially in regions with varied linguistic backgrounds.</a:t>
+            </a:r>
+            <a:endParaRPr sz="1850" b="0" i="0" u="none" strike="noStrike" cap="none">
+              <a:solidFill>
+                <a:srgbClr val="000000"/>
+              </a:solidFill>
+              <a:latin typeface="Times New Roman"/>
+              <a:ea typeface="Times New Roman"/>
+              <a:cs typeface="Times New Roman"/>
+              <a:sym typeface="Times New Roman"/>
+            </a:endParaRPr>
           </a:p>
         </p:txBody>
       </p:sp>
       <p:sp>
         <p:nvSpPr>
-          <p:cNvPr id="280" name="Rounded Rectangle 279"/>
+          <p:cNvPr id="280" name="Google Shape;280;p18">
+            <a:extLst>
+              <a:ext uri="{FF2B5EF4-FFF2-40B4-BE49-F238E27FC236}">
+                <a16:creationId xmlns:a16="http://schemas.microsoft.com/office/drawing/2014/main" id="{B888011B-E4AC-77DB-4A60-BE2C891C49F5}"/>
+              </a:ext>
+            </a:extLst>
+          </p:cNvPr>
           <p:cNvSpPr/>
           <p:nvPr/>
         </p:nvSpPr>
         <p:spPr>
           <a:xfrm>
-            <a:off x="4389120" y="1645920"/>
-            <a:ext cx="3383280" cy="4572000"/>
+            <a:off x="1218724" y="3360216"/>
+            <a:ext cx="7468553" cy="766048"/>
           </a:xfrm>
-          <a:prstGeom prst="roundRect">
+          <a:prstGeom prst="rect">
             <a:avLst/>
           </a:prstGeom>
-          <a:solidFill>
-            <a:srgbClr val="F5F8F6"/>
-          </a:solidFill>
-          <a:ln w="19050">
-            <a:solidFill>
-              <a:srgbClr val="C8D7CD"/>
-            </a:solidFill>
+          <a:noFill/>
+          <a:ln>
+            <a:noFill/>
           </a:ln>
         </p:spPr>
-        <p:style>
-          <a:lnRef idx="1">
-            <a:schemeClr val="accent1"/>
-          </a:lnRef>
-          <a:fillRef idx="3">
-            <a:schemeClr val="accent1"/>
-          </a:fillRef>
-          <a:effectRef idx="2">
-            <a:schemeClr val="accent1"/>
-          </a:effectRef>
-          <a:fontRef idx="minor">
-            <a:schemeClr val="lt1"/>
-          </a:fontRef>
-        </p:style>
         <p:txBody>
-          <a:bodyPr rtlCol="0" anchor="ctr" wrap="square" lIns="228600" tIns="182880" rIns="228600"/>
+          <a:bodyPr spcFirstLastPara="1" wrap="square" lIns="0" tIns="0" rIns="0" bIns="0" anchor="t" anchorCtr="0">
+            <a:noAutofit/>
+          </a:bodyPr>
           <a:lstStyle/>
           <a:p>
-            <a:pPr algn="ctr">
-              <a:defRPr sz="2000" b="1">
+            <a:pPr marL="0" marR="0" lvl="0" indent="0" algn="l" rtl="0">
+              <a:lnSpc>
+                <a:spcPct val="162162"/>
+              </a:lnSpc>
+              <a:spcBef>
+                <a:spcPts val="0"/>
+              </a:spcBef>
+              <a:spcAft>
+                <a:spcPts val="0"/>
+              </a:spcAft>
+              <a:buClr>
+                <a:srgbClr val="2B3541"/>
+              </a:buClr>
+              <a:buSzPts val="1850"/>
+              <a:buFont typeface="Times New Roman"/>
+              <a:buNone/>
+            </a:pPr>
+            <a:r>
+              <a:rPr lang="en-US" sz="1850" b="0" i="0" u="none" strike="noStrike" cap="none">
                 <a:solidFill>
-                  <a:srgbClr val="0F3B2E"/>
+                  <a:srgbClr val="2B3541"/>
                 </a:solidFill>
-                <a:latin typeface="Arial"/>
-              </a:defRPr>
-            </a:pPr>
-            <a:r>
-              <a:t>Phase 2: IoT Sensor Ingestion</a:t>
-            </a:r>
-          </a:p>
-          <a:p>
-            <a:pPr>
-              <a:spcBef>
-                <a:spcPts val="600"/>
-              </a:spcBef>
-              <a:defRPr sz="1500">
-                <a:solidFill>
-                  <a:srgbClr val="1E293B"/>
-                </a:solidFill>
-                <a:latin typeface="Arial"/>
-              </a:defRPr>
-            </a:pPr>
-            <a:r>
-              <a:t>• Integrate LoRaWAN field probes for soil N-P-K.</a:t>
-            </a:r>
-          </a:p>
-          <a:p>
-            <a:pPr>
-              <a:spcBef>
-                <a:spcPts val="600"/>
-              </a:spcBef>
-              <a:defRPr sz="1500">
-                <a:solidFill>
-                  <a:srgbClr val="1E293B"/>
-                </a:solidFill>
-                <a:latin typeface="Arial"/>
-              </a:defRPr>
-            </a:pPr>
-            <a:r>
-              <a:t>• Ingest live leaf wetness and soil moisture levels.</a:t>
-            </a:r>
-          </a:p>
-          <a:p>
-            <a:pPr>
-              <a:spcBef>
-                <a:spcPts val="600"/>
-              </a:spcBef>
-              <a:defRPr sz="1500">
-                <a:solidFill>
-                  <a:srgbClr val="1E293B"/>
-                </a:solidFill>
-                <a:latin typeface="Arial"/>
-              </a:defRPr>
-            </a:pPr>
-            <a:r>
-              <a:t>• Micro-climate prediction models at farm level.</a:t>
-            </a:r>
-          </a:p>
-          <a:p>
-            <a:pPr>
-              <a:spcBef>
-                <a:spcPts val="600"/>
-              </a:spcBef>
-              <a:defRPr sz="1500">
-                <a:solidFill>
-                  <a:srgbClr val="1E293B"/>
-                </a:solidFill>
-                <a:latin typeface="Arial"/>
-              </a:defRPr>
-            </a:pPr>
-            <a:r>
-              <a:t>• Direct drone multispectral aerial data feeds.</a:t>
-            </a:r>
+                <a:latin typeface="Times New Roman"/>
+                <a:ea typeface="Times New Roman"/>
+                <a:cs typeface="Times New Roman"/>
+                <a:sym typeface="Times New Roman"/>
+              </a:rPr>
+              <a:t>·</a:t>
+            </a:r>
+            <a:endParaRPr sz="1850" b="0" i="0" u="none" strike="noStrike" cap="none">
+              <a:solidFill>
+                <a:srgbClr val="000000"/>
+              </a:solidFill>
+              <a:latin typeface="Times New Roman"/>
+              <a:ea typeface="Times New Roman"/>
+              <a:cs typeface="Times New Roman"/>
+              <a:sym typeface="Times New Roman"/>
+            </a:endParaRPr>
           </a:p>
         </p:txBody>
       </p:sp>
       <p:sp>
         <p:nvSpPr>
-          <p:cNvPr id="281" name="Rounded Rectangle 280"/>
+          <p:cNvPr id="281" name="Google Shape;281;p18">
+            <a:extLst>
+              <a:ext uri="{FF2B5EF4-FFF2-40B4-BE49-F238E27FC236}">
+                <a16:creationId xmlns:a16="http://schemas.microsoft.com/office/drawing/2014/main" id="{91F05971-9256-10B5-6575-4E7C679C6DAA}"/>
+              </a:ext>
+            </a:extLst>
+          </p:cNvPr>
           <p:cNvSpPr/>
           <p:nvPr/>
         </p:nvSpPr>
         <p:spPr>
           <a:xfrm>
-            <a:off x="8046720" y="1645920"/>
-            <a:ext cx="3383280" cy="4572000"/>
+            <a:off x="1218724" y="4395464"/>
+            <a:ext cx="7468553" cy="766048"/>
           </a:xfrm>
-          <a:prstGeom prst="roundRect">
+          <a:prstGeom prst="rect">
             <a:avLst/>
           </a:prstGeom>
-          <a:solidFill>
-            <a:srgbClr val="F5F8F6"/>
-          </a:solidFill>
-          <a:ln w="19050">
-            <a:solidFill>
-              <a:srgbClr val="C8D7CD"/>
-            </a:solidFill>
+          <a:noFill/>
+          <a:ln>
+            <a:noFill/>
           </a:ln>
         </p:spPr>
-        <p:style>
-          <a:lnRef idx="1">
-            <a:schemeClr val="accent1"/>
-          </a:lnRef>
-          <a:fillRef idx="3">
-            <a:schemeClr val="accent1"/>
-          </a:fillRef>
-          <a:effectRef idx="2">
-            <a:schemeClr val="accent1"/>
-          </a:effectRef>
-          <a:fontRef idx="minor">
-            <a:schemeClr val="lt1"/>
-          </a:fontRef>
-        </p:style>
         <p:txBody>
-          <a:bodyPr rtlCol="0" anchor="ctr" wrap="square" lIns="228600" tIns="182880" rIns="228600"/>
+          <a:bodyPr spcFirstLastPara="1" wrap="square" lIns="0" tIns="0" rIns="0" bIns="0" anchor="t" anchorCtr="0">
+            <a:noAutofit/>
+          </a:bodyPr>
           <a:lstStyle/>
           <a:p>
-            <a:pPr algn="ctr">
-              <a:defRPr sz="2000" b="1">
+            <a:pPr marL="0" marR="0" lvl="0" indent="0" algn="l" rtl="0">
+              <a:lnSpc>
+                <a:spcPct val="162162"/>
+              </a:lnSpc>
+              <a:spcBef>
+                <a:spcPts val="0"/>
+              </a:spcBef>
+              <a:spcAft>
+                <a:spcPts val="0"/>
+              </a:spcAft>
+              <a:buClr>
+                <a:srgbClr val="2B3541"/>
+              </a:buClr>
+              <a:buSzPts val="1850"/>
+              <a:buFont typeface="Times New Roman"/>
+              <a:buNone/>
+            </a:pPr>
+            <a:r>
+              <a:rPr lang="en-US" sz="1850" b="0" i="0" u="none" strike="noStrike" cap="none">
                 <a:solidFill>
-                  <a:srgbClr val="0F3B2E"/>
+                  <a:srgbClr val="2B3541"/>
                 </a:solidFill>
-                <a:latin typeface="Arial"/>
-              </a:defRPr>
+                <a:latin typeface="Times New Roman"/>
+                <a:ea typeface="Times New Roman"/>
+                <a:cs typeface="Times New Roman"/>
+                <a:sym typeface="Times New Roman"/>
+              </a:rPr>
+              <a:t>·</a:t>
+            </a:r>
+            <a:endParaRPr sz="1850" b="0" i="0" u="none" strike="noStrike" cap="none">
+              <a:solidFill>
+                <a:srgbClr val="000000"/>
+              </a:solidFill>
+              <a:latin typeface="Times New Roman"/>
+              <a:ea typeface="Times New Roman"/>
+              <a:cs typeface="Times New Roman"/>
+              <a:sym typeface="Times New Roman"/>
+            </a:endParaRPr>
+          </a:p>
+        </p:txBody>
+      </p:sp>
+      <p:sp>
+        <p:nvSpPr>
+          <p:cNvPr id="282" name="Google Shape;282;p18">
+            <a:extLst>
+              <a:ext uri="{FF2B5EF4-FFF2-40B4-BE49-F238E27FC236}">
+                <a16:creationId xmlns:a16="http://schemas.microsoft.com/office/drawing/2014/main" id="{F1C3EBC2-438F-C150-9ABF-F14321C2CC5C}"/>
+              </a:ext>
+            </a:extLst>
+          </p:cNvPr>
+          <p:cNvSpPr/>
+          <p:nvPr/>
+        </p:nvSpPr>
+        <p:spPr>
+          <a:xfrm>
+            <a:off x="1218724" y="5430713"/>
+            <a:ext cx="7468553" cy="383024"/>
+          </a:xfrm>
+          <a:prstGeom prst="rect">
+            <a:avLst/>
+          </a:prstGeom>
+          <a:noFill/>
+          <a:ln>
+            <a:noFill/>
+          </a:ln>
+        </p:spPr>
+        <p:txBody>
+          <a:bodyPr spcFirstLastPara="1" wrap="square" lIns="0" tIns="0" rIns="0" bIns="0" anchor="t" anchorCtr="0">
+            <a:noAutofit/>
+          </a:bodyPr>
+          <a:lstStyle/>
+          <a:p>
+            <a:pPr marL="0" marR="0" lvl="0" indent="0" algn="l" rtl="0">
+              <a:lnSpc>
+                <a:spcPct val="162162"/>
+              </a:lnSpc>
+              <a:spcBef>
+                <a:spcPts val="0"/>
+              </a:spcBef>
+              <a:spcAft>
+                <a:spcPts val="0"/>
+              </a:spcAft>
+              <a:buClr>
+                <a:srgbClr val="2B3541"/>
+              </a:buClr>
+              <a:buSzPts val="1850"/>
+              <a:buFont typeface="Times New Roman"/>
+              <a:buNone/>
             </a:pPr>
             <a:r>
-              <a:t>Phase 3: Edge Deployment</a:t>
-            </a:r>
-          </a:p>
-          <a:p>
-            <a:pPr>
-              <a:spcBef>
-                <a:spcPts val="600"/>
-              </a:spcBef>
-              <a:defRPr sz="1500">
+              <a:rPr lang="en-US" sz="1850" b="0" i="0" u="none" strike="noStrike" cap="none">
                 <a:solidFill>
-                  <a:srgbClr val="1E293B"/>
+                  <a:srgbClr val="2B3541"/>
                 </a:solidFill>
-                <a:latin typeface="Arial"/>
-              </a:defRPr>
-            </a:pPr>
-            <a:r>
-              <a:t>• Quantized Granite-4-H-Small on local gateway devices.</a:t>
-            </a:r>
-          </a:p>
-          <a:p>
-            <a:pPr>
-              <a:spcBef>
-                <a:spcPts val="600"/>
-              </a:spcBef>
-              <a:defRPr sz="1500">
-                <a:solidFill>
-                  <a:srgbClr val="1E293B"/>
-                </a:solidFill>
-                <a:latin typeface="Arial"/>
-              </a:defRPr>
-            </a:pPr>
-            <a:r>
-              <a:t>• Offline inference for zero-connectivity regions.</a:t>
-            </a:r>
-          </a:p>
-          <a:p>
-            <a:pPr>
-              <a:spcBef>
-                <a:spcPts val="600"/>
-              </a:spcBef>
-              <a:defRPr sz="1500">
-                <a:solidFill>
-                  <a:srgbClr val="1E293B"/>
-                </a:solidFill>
-                <a:latin typeface="Arial"/>
-              </a:defRPr>
-            </a:pPr>
-            <a:r>
-              <a:t>• Autonomous smart-valve drip irrigation control.</a:t>
-            </a:r>
-          </a:p>
-          <a:p>
-            <a:pPr>
-              <a:spcBef>
-                <a:spcPts val="600"/>
-              </a:spcBef>
-              <a:defRPr sz="1500">
-                <a:solidFill>
-                  <a:srgbClr val="1E293B"/>
-                </a:solidFill>
-                <a:latin typeface="Arial"/>
-              </a:defRPr>
-            </a:pPr>
-            <a:r>
-              <a:t>• Cooperative market price intelligence integration.</a:t>
-            </a:r>
+                <a:latin typeface="Times New Roman"/>
+                <a:ea typeface="Times New Roman"/>
+                <a:cs typeface="Times New Roman"/>
+                <a:sym typeface="Times New Roman"/>
+              </a:rPr>
+              <a:t>·</a:t>
+            </a:r>
+            <a:endParaRPr sz="1850" b="0" i="0" u="none" strike="noStrike" cap="none">
+              <a:solidFill>
+                <a:srgbClr val="000000"/>
+              </a:solidFill>
+              <a:latin typeface="Times New Roman"/>
+              <a:ea typeface="Times New Roman"/>
+              <a:cs typeface="Times New Roman"/>
+              <a:sym typeface="Times New Roman"/>
+            </a:endParaRPr>
           </a:p>
         </p:txBody>
       </p:sp>
@@ -13437,27 +13726,58 @@
           </a:bodyPr>
           <a:lstStyle/>
           <a:p>
-            <a:pPr algn="l">
-              <a:defRPr sz="2800" b="1">
-                <a:solidFill>
-                  <a:srgbClr val="0F3B2E"/>
-                </a:solidFill>
-                <a:latin typeface="Arial"/>
-              </a:defRPr>
-            </a:pPr>
-            <a:r>
-              <a:t>IBM SkillsBuild Completion Certificate</a:t>
+            <a:r>
+              <a:rPr lang="en-US" sz="2400" b="1"/>
+              <a:t>Certificates Earned:</a:t>
             </a:r>
           </a:p>
           <a:p>
             <a:pPr algn="ctr"/>
             <a:endParaRPr lang="en-US"/>
+          </a:p>
+        </p:txBody>
+      </p:sp>
+      <p:sp>
+        <p:nvSpPr>
+          <p:cNvPr id="3" name="TextBox 2">
+            <a:extLst>
+              <a:ext uri="{FF2B5EF4-FFF2-40B4-BE49-F238E27FC236}">
+                <a16:creationId xmlns:a16="http://schemas.microsoft.com/office/drawing/2014/main" id="{4837D5EE-379B-FDC5-0854-8AC81D31FADF}"/>
+              </a:ext>
+            </a:extLst>
+          </p:cNvPr>
+          <p:cNvSpPr txBox="1"/>
+          <p:nvPr/>
+        </p:nvSpPr>
+        <p:spPr>
+          <a:xfrm>
+            <a:off x="552048" y="690061"/>
+            <a:ext cx="6389965" cy="523220"/>
+          </a:xfrm>
+          <a:prstGeom prst="rect">
+            <a:avLst/>
+          </a:prstGeom>
+          <a:noFill/>
+        </p:spPr>
+        <p:txBody>
+          <a:bodyPr rot="0" spcFirstLastPara="0" vertOverflow="overflow" horzOverflow="overflow" vert="horz" wrap="square" lIns="91440" tIns="45720" rIns="91440" bIns="45720" numCol="1" spcCol="0" rtlCol="0" fromWordArt="0" anchor="t" anchorCtr="0" forceAA="0" compatLnSpc="1">
+            <a:prstTxWarp prst="textNoShape">
+              <a:avLst/>
+            </a:prstTxWarp>
+            <a:spAutoFit/>
+          </a:bodyPr>
+          <a:lstStyle/>
+          <a:p>
+            <a:r>
+              <a:rPr lang="en-US" sz="2800" b="1"/>
+              <a:t>Please  add your credly certificate </a:t>
+            </a:r>
           </a:p>
         </p:txBody>
       </p:sp>
       <p:pic>
         <p:nvPicPr>
-          <p:cNvPr id="7" name="Picture 6" descr="skillsbuild_cert.png"/>
+          <p:cNvPr id="7" name="Picture 6" descr="bob_cert.png"/>
           <p:cNvPicPr>
             <a:picLocks noChangeAspect="1"/>
           </p:cNvPicPr>
@@ -13471,8 +13791,8 @@
         </p:blipFill>
         <p:spPr>
           <a:xfrm>
-            <a:off x="1371600" y="1645920"/>
-            <a:ext cx="9418320" cy="7254270"/>
+            <a:off x="2553442" y="1343396"/>
+            <a:ext cx="7075219" cy="5309259"/>
           </a:xfrm>
           <a:prstGeom prst="rect">
             <a:avLst/>
@@ -13509,61 +13829,58 @@
           <a:chExt cx="0" cy="0"/>
         </a:xfrm>
       </p:grpSpPr>
-      <p:pic>
-        <p:nvPicPr>
-          <p:cNvPr id="4" name="Picture 3" descr="A certificate with red text&#10;&#10;AI-generated content may be incorrect.">
-            <a:extLst>
-              <a:ext uri="{FF2B5EF4-FFF2-40B4-BE49-F238E27FC236}">
-                <a16:creationId xmlns:a16="http://schemas.microsoft.com/office/drawing/2014/main" id="{099C3698-991D-7A38-C456-893C84C23FC9}"/>
-              </a:ext>
-            </a:extLst>
-          </p:cNvPr>
-          <p:cNvPicPr>
-            <a:picLocks noChangeAspect="1"/>
-          </p:cNvPicPr>
+      <p:sp>
+        <p:nvSpPr>
+          <p:cNvPr id="2" name="TextBox 1"/>
+          <p:cNvSpPr txBox="1"/>
           <p:nvPr/>
-        </p:nvPicPr>
-        <p:blipFill>
-          <a:blip r:embed="rId2"/>
-          <a:srcRect r="177" b="-275"/>
-          <a:stretch>
-            <a:fillRect/>
-          </a:stretch>
-        </p:blipFill>
+        </p:nvSpPr>
         <p:spPr>
           <a:xfrm>
-            <a:off x="2512736" y="1712637"/>
-            <a:ext cx="7177553" cy="4658577"/>
+            <a:off x="914400" y="2103120"/>
+            <a:ext cx="10332720" cy="2926080"/>
           </a:xfrm>
           <a:prstGeom prst="rect">
             <a:avLst/>
           </a:prstGeom>
+          <a:noFill/>
         </p:spPr>
-      </p:pic>
-      <p:pic>
-        <p:nvPicPr>
-          <p:cNvPr id="5" name="Picture 4" descr="bob_cert.png"/>
-          <p:cNvPicPr>
-            <a:picLocks noChangeAspect="1"/>
-          </p:cNvPicPr>
-          <p:nvPr/>
-        </p:nvPicPr>
-        <p:blipFill>
-          <a:blip r:embed="rId3"/>
-          <a:stretch>
-            <a:fillRect/>
-          </a:stretch>
-        </p:blipFill>
-        <p:spPr>
-          <a:xfrm>
-            <a:off x="1371600" y="1645920"/>
-            <a:ext cx="9418320" cy="6644723"/>
-          </a:xfrm>
-          <a:prstGeom prst="rect">
-            <a:avLst/>
-          </a:prstGeom>
-        </p:spPr>
-      </p:pic>
+        <p:txBody>
+          <a:bodyPr wrap="square">
+            <a:spAutoFit/>
+          </a:bodyPr>
+          <a:lstStyle/>
+          <a:p>
+            <a:pPr algn="ctr">
+              <a:spcAft>
+                <a:spcPts val="2000"/>
+              </a:spcAft>
+              <a:defRPr sz="6400" b="1">
+                <a:solidFill>
+                  <a:srgbClr val="0F3B2E"/>
+                </a:solidFill>
+                <a:latin typeface="Arial"/>
+              </a:defRPr>
+            </a:pPr>
+            <a:r>
+              <a:t>Thank You!</a:t>
+            </a:r>
+          </a:p>
+          <a:p>
+            <a:pPr algn="ctr">
+              <a:defRPr sz="2400">
+                <a:solidFill>
+                  <a:srgbClr val="4A5568"/>
+                </a:solidFill>
+                <a:latin typeface="Arial"/>
+              </a:defRPr>
+            </a:pPr>
+            <a:r>
+              <a:t>Thank you for your time and interest.</a:t>
+            </a:r>
+          </a:p>
+        </p:txBody>
+      </p:sp>
     </p:spTree>
     <p:extLst>
       <p:ext uri="{BB962C8B-B14F-4D97-AF65-F5344CB8AC3E}">
@@ -13687,16 +14004,7 @@
               <a:buSzPts val="1500"/>
               <a:buFont typeface="Calibri"/>
               <a:buNone/>
-              <a:defRPr sz="2800" b="1">
-                <a:solidFill>
-                  <a:srgbClr val="0F3B2E"/>
-                </a:solidFill>
-                <a:latin typeface="Arial"/>
-              </a:defRPr>
             </a:pPr>
-            <a:r>
-              <a:t>Problem Statement</a:t>
-            </a:r>
             <a:endParaRPr sz="1500" b="0" i="0" u="none" strike="noStrike" cap="none">
               <a:solidFill>
                 <a:schemeClr val="dk1"/>
@@ -13711,309 +14019,929 @@
       </p:sp>
       <p:sp>
         <p:nvSpPr>
-          <p:cNvPr id="93" name="Rounded Rectangle 92"/>
-          <p:cNvSpPr/>
+          <p:cNvPr id="95" name="Google Shape;95;p2"/>
+          <p:cNvSpPr txBox="1"/>
           <p:nvPr/>
         </p:nvSpPr>
         <p:spPr>
           <a:xfrm>
-            <a:off x="731520" y="1645920"/>
-            <a:ext cx="3383280" cy="4572000"/>
+            <a:off x="1102321" y="1174639"/>
+            <a:ext cx="7426406" cy="451519"/>
           </a:xfrm>
-          <a:prstGeom prst="roundRect">
+          <a:prstGeom prst="rect">
             <a:avLst/>
           </a:prstGeom>
-          <a:solidFill>
-            <a:srgbClr val="F5F8F6"/>
-          </a:solidFill>
-          <a:ln w="19050">
-            <a:solidFill>
-              <a:srgbClr val="C8D7CD"/>
-            </a:solidFill>
+          <a:noFill/>
+          <a:ln>
+            <a:noFill/>
           </a:ln>
         </p:spPr>
-        <p:style>
-          <a:lnRef idx="1">
-            <a:schemeClr val="accent1"/>
-          </a:lnRef>
-          <a:fillRef idx="3">
-            <a:schemeClr val="accent1"/>
-          </a:fillRef>
-          <a:effectRef idx="2">
-            <a:schemeClr val="accent1"/>
-          </a:effectRef>
-          <a:fontRef idx="minor">
-            <a:schemeClr val="lt1"/>
-          </a:fontRef>
-        </p:style>
         <p:txBody>
-          <a:bodyPr rtlCol="0" anchor="ctr" wrap="square" lIns="228600" tIns="182880" rIns="228600"/>
+          <a:bodyPr spcFirstLastPara="1" wrap="square" lIns="91425" tIns="45700" rIns="91425" bIns="45700" anchor="ctr" anchorCtr="0">
+            <a:noAutofit/>
+          </a:bodyPr>
           <a:lstStyle/>
           <a:p>
-            <a:pPr algn="ctr">
-              <a:defRPr sz="2000" b="1">
-                <a:solidFill>
-                  <a:srgbClr val="0F3B2E"/>
-                </a:solidFill>
-                <a:latin typeface="Arial"/>
-              </a:defRPr>
+            <a:pPr marL="0" marR="0" lvl="0" indent="0" algn="ctr" rtl="0">
+              <a:lnSpc>
+                <a:spcPct val="90000"/>
+              </a:lnSpc>
+              <a:spcBef>
+                <a:spcPts val="0"/>
+              </a:spcBef>
+              <a:spcAft>
+                <a:spcPts val="0"/>
+              </a:spcAft>
+              <a:buClr>
+                <a:srgbClr val="002060"/>
+              </a:buClr>
+              <a:buSzPts val="3200"/>
+              <a:buFont typeface="Times New Roman"/>
+              <a:buNone/>
             </a:pPr>
-            <a:r>
-              <a:t>Unpredictable Epiphytotics</a:t>
-            </a:r>
-          </a:p>
-          <a:p>
-            <a:pPr>
-              <a:spcBef>
-                <a:spcPts val="600"/>
-              </a:spcBef>
-              <a:defRPr sz="1500">
-                <a:solidFill>
-                  <a:srgbClr val="1E293B"/>
-                </a:solidFill>
-                <a:latin typeface="Arial"/>
-              </a:defRPr>
-            </a:pPr>
-            <a:r>
-              <a:t>• Pathogens like Downy Mildew spread rapidly when humidity exceeds 78% RH.</a:t>
-            </a:r>
-          </a:p>
-          <a:p>
-            <a:pPr>
-              <a:spcBef>
-                <a:spcPts val="600"/>
-              </a:spcBef>
-              <a:defRPr sz="1500">
-                <a:solidFill>
-                  <a:srgbClr val="1E293B"/>
-                </a:solidFill>
-                <a:latin typeface="Arial"/>
-              </a:defRPr>
-            </a:pPr>
-            <a:r>
-              <a:t>• Visual foliar symptoms appear days after active spore germination.</a:t>
-            </a:r>
-          </a:p>
-          <a:p>
-            <a:pPr>
-              <a:spcBef>
-                <a:spcPts val="600"/>
-              </a:spcBef>
-              <a:defRPr sz="1500">
-                <a:solidFill>
-                  <a:srgbClr val="1E293B"/>
-                </a:solidFill>
-                <a:latin typeface="Arial"/>
-              </a:defRPr>
-            </a:pPr>
-            <a:r>
-              <a:t>• Smallholders lack real-time agromet early warning tools.</a:t>
-            </a:r>
+            <a:endParaRPr sz="3200" b="1" i="0" u="none" strike="noStrike" cap="none">
+              <a:solidFill>
+                <a:srgbClr val="002060"/>
+              </a:solidFill>
+              <a:latin typeface="Times New Roman"/>
+              <a:ea typeface="Times New Roman"/>
+              <a:cs typeface="Times New Roman"/>
+              <a:sym typeface="Times New Roman"/>
+            </a:endParaRPr>
+          </a:p>
+        </p:txBody>
+      </p:sp>
+      <p:graphicFrame>
+        <p:nvGraphicFramePr>
+          <p:cNvPr id="96" name="Google Shape;96;p2"/>
+          <p:cNvGraphicFramePr/>
+          <p:nvPr>
+            <p:extLst>
+              <p:ext uri="{D42A27DB-BD31-4B8C-83A1-F6EECF244321}">
+                <p14:modId xmlns:p14="http://schemas.microsoft.com/office/powerpoint/2010/main" val="2897107072"/>
+              </p:ext>
+            </p:extLst>
+          </p:nvPr>
+        </p:nvGraphicFramePr>
+        <p:xfrm>
+          <a:off x="1299257" y="2600315"/>
+          <a:ext cx="9394989" cy="2167128"/>
+        </p:xfrm>
+        <a:graphic>
+          <a:graphicData uri="http://schemas.openxmlformats.org/drawingml/2006/table">
+            <a:tbl>
+              <a:tblPr>
+                <a:noFill/>
+                <a:tableStyleId>{0AAD8F4D-43EB-41E5-8A38-28AB6DFB1B60}</a:tableStyleId>
+              </a:tblPr>
+              <a:tblGrid>
+                <a:gridCol w="2064867">
+                  <a:extLst>
+                    <a:ext uri="{9D8B030D-6E8A-4147-A177-3AD203B41FA5}">
+                      <a16:colId xmlns:a16="http://schemas.microsoft.com/office/drawing/2014/main" val="20000"/>
+                    </a:ext>
+                  </a:extLst>
+                </a:gridCol>
+                <a:gridCol w="2443374">
+                  <a:extLst>
+                    <a:ext uri="{9D8B030D-6E8A-4147-A177-3AD203B41FA5}">
+                      <a16:colId xmlns:a16="http://schemas.microsoft.com/office/drawing/2014/main" val="20002"/>
+                    </a:ext>
+                  </a:extLst>
+                </a:gridCol>
+                <a:gridCol w="2443374">
+                  <a:extLst>
+                    <a:ext uri="{9D8B030D-6E8A-4147-A177-3AD203B41FA5}">
+                      <a16:colId xmlns:a16="http://schemas.microsoft.com/office/drawing/2014/main" val="20003"/>
+                    </a:ext>
+                  </a:extLst>
+                </a:gridCol>
+                <a:gridCol w="2443374">
+                  <a:extLst>
+                    <a:ext uri="{9D8B030D-6E8A-4147-A177-3AD203B41FA5}">
+                      <a16:colId xmlns:a16="http://schemas.microsoft.com/office/drawing/2014/main" val="20004"/>
+                    </a:ext>
+                  </a:extLst>
+                </a:gridCol>
+              </a:tblGrid>
+              <a:tr h="973237">
+                <a:tc>
+                  <a:txBody>
+                    <a:bodyPr/>
+                    <a:lstStyle/>
+                    <a:p>
+                      <a:pPr marL="0" marR="0" lvl="0" indent="0" algn="ctr" rtl="0">
+                        <a:spcBef>
+                          <a:spcPts val="0"/>
+                        </a:spcBef>
+                        <a:spcAft>
+                          <a:spcPts val="0"/>
+                        </a:spcAft>
+                        <a:buNone/>
+                      </a:pPr>
+                      <a:r>
+                        <a:rPr lang="en-US" sz="1800" u="none" strike="noStrike" cap="none"/>
+                        <a:t>Student Name</a:t>
+                      </a:r>
+                      <a:endParaRPr sz="1800" u="none" strike="noStrike" cap="none"/>
+                    </a:p>
+                  </a:txBody>
+                  <a:tcPr marL="91450" marR="91450" marT="45725" marB="45725" anchor="ctr">
+                    <a:lnL w="12700" cap="flat" cmpd="sng">
+                      <a:solidFill>
+                        <a:srgbClr val="FFFFFF"/>
+                      </a:solidFill>
+                      <a:prstDash val="solid"/>
+                      <a:round/>
+                      <a:headEnd type="none" w="sm" len="sm"/>
+                      <a:tailEnd type="none" w="sm" len="sm"/>
+                    </a:lnL>
+                    <a:lnR w="12700" cap="flat" cmpd="sng">
+                      <a:solidFill>
+                        <a:srgbClr val="FFFFFF"/>
+                      </a:solidFill>
+                      <a:prstDash val="solid"/>
+                      <a:round/>
+                      <a:headEnd type="none" w="sm" len="sm"/>
+                      <a:tailEnd type="none" w="sm" len="sm"/>
+                    </a:lnR>
+                    <a:lnT w="12700" cap="flat" cmpd="sng">
+                      <a:solidFill>
+                        <a:srgbClr val="FFFFFF"/>
+                      </a:solidFill>
+                      <a:prstDash val="solid"/>
+                      <a:round/>
+                      <a:headEnd type="none" w="sm" len="sm"/>
+                      <a:tailEnd type="none" w="sm" len="sm"/>
+                    </a:lnT>
+                    <a:lnB w="38100" cap="flat" cmpd="sng">
+                      <a:solidFill>
+                        <a:srgbClr val="FFFFFF"/>
+                      </a:solidFill>
+                      <a:prstDash val="solid"/>
+                      <a:round/>
+                      <a:headEnd type="none" w="sm" len="sm"/>
+                      <a:tailEnd type="none" w="sm" len="sm"/>
+                    </a:lnB>
+                    <a:solidFill>
+                      <a:srgbClr val="5B9BD5"/>
+                    </a:solidFill>
+                  </a:tcPr>
+                </a:tc>
+                <a:tc>
+                  <a:txBody>
+                    <a:bodyPr/>
+                    <a:lstStyle/>
+                    <a:p>
+                      <a:pPr marL="0" marR="0" lvl="0" indent="0" algn="ctr" rtl="0">
+                        <a:spcBef>
+                          <a:spcPts val="0"/>
+                        </a:spcBef>
+                        <a:spcAft>
+                          <a:spcPts val="0"/>
+                        </a:spcAft>
+                        <a:buNone/>
+                      </a:pPr>
+                      <a:r>
+                        <a:rPr lang="en-US" sz="1800" u="none" strike="noStrike" cap="none"/>
+                        <a:t>Recent Passport Photo</a:t>
+                      </a:r>
+                      <a:endParaRPr sz="1800" u="none" strike="noStrike" cap="none"/>
+                    </a:p>
+                  </a:txBody>
+                  <a:tcPr marL="91450" marR="91450" marT="45725" marB="45725" anchor="ctr">
+                    <a:lnL w="12700" cap="flat" cmpd="sng" algn="ctr">
+                      <a:solidFill>
+                        <a:srgbClr val="FFFFFF"/>
+                      </a:solidFill>
+                      <a:prstDash val="solid"/>
+                      <a:round/>
+                      <a:headEnd type="none" w="sm" len="sm"/>
+                      <a:tailEnd type="none" w="sm" len="sm"/>
+                    </a:lnL>
+                    <a:lnR w="12700" cap="flat" cmpd="sng">
+                      <a:solidFill>
+                        <a:srgbClr val="FFFFFF"/>
+                      </a:solidFill>
+                      <a:prstDash val="solid"/>
+                      <a:round/>
+                      <a:headEnd type="none" w="sm" len="sm"/>
+                      <a:tailEnd type="none" w="sm" len="sm"/>
+                    </a:lnR>
+                    <a:lnT w="12700" cap="flat" cmpd="sng">
+                      <a:solidFill>
+                        <a:srgbClr val="FFFFFF"/>
+                      </a:solidFill>
+                      <a:prstDash val="solid"/>
+                      <a:round/>
+                      <a:headEnd type="none" w="sm" len="sm"/>
+                      <a:tailEnd type="none" w="sm" len="sm"/>
+                    </a:lnT>
+                    <a:lnB w="38100" cap="flat" cmpd="sng" algn="ctr">
+                      <a:solidFill>
+                        <a:srgbClr val="FFFFFF"/>
+                      </a:solidFill>
+                      <a:prstDash val="solid"/>
+                      <a:round/>
+                      <a:headEnd type="none" w="sm" len="sm"/>
+                      <a:tailEnd type="none" w="sm" len="sm"/>
+                    </a:lnB>
+                    <a:solidFill>
+                      <a:srgbClr val="5B9BD5"/>
+                    </a:solidFill>
+                  </a:tcPr>
+                </a:tc>
+                <a:tc>
+                  <a:txBody>
+                    <a:bodyPr/>
+                    <a:lstStyle/>
+                    <a:p>
+                      <a:pPr marL="0" marR="0" lvl="0" indent="0" algn="ctr" rtl="0">
+                        <a:lnSpc>
+                          <a:spcPct val="100000"/>
+                        </a:lnSpc>
+                        <a:spcBef>
+                          <a:spcPts val="0"/>
+                        </a:spcBef>
+                        <a:spcAft>
+                          <a:spcPts val="0"/>
+                        </a:spcAft>
+                        <a:buClr>
+                          <a:srgbClr val="000000"/>
+                        </a:buClr>
+                        <a:buSzPts val="1800"/>
+                        <a:buFont typeface="Arial"/>
+                        <a:buNone/>
+                      </a:pPr>
+                      <a:r>
+                        <a:rPr lang="en-US" sz="1800" b="0" i="0" u="none" strike="noStrike" cap="none">
+                          <a:solidFill>
+                            <a:srgbClr val="000000"/>
+                          </a:solidFill>
+                          <a:latin typeface="Arial"/>
+                          <a:ea typeface="Calibri"/>
+                          <a:cs typeface="Arial"/>
+                          <a:sym typeface="Calibri"/>
+                        </a:rPr>
+                        <a:t>Email ID </a:t>
+                      </a:r>
+                      <a:endParaRPr sz="1800" b="0" i="0" u="none" strike="noStrike" cap="none">
+                        <a:solidFill>
+                          <a:srgbClr val="000000"/>
+                        </a:solidFill>
+                        <a:latin typeface="Arial"/>
+                        <a:cs typeface="Arial"/>
+                        <a:sym typeface="Arial"/>
+                      </a:endParaRPr>
+                    </a:p>
+                  </a:txBody>
+                  <a:tcPr marL="91450" marR="91450" marT="45725" marB="45725" anchor="ctr">
+                    <a:lnL w="12700" cap="flat" cmpd="sng">
+                      <a:solidFill>
+                        <a:srgbClr val="FFFFFF"/>
+                      </a:solidFill>
+                      <a:prstDash val="solid"/>
+                      <a:round/>
+                      <a:headEnd type="none" w="sm" len="sm"/>
+                      <a:tailEnd type="none" w="sm" len="sm"/>
+                    </a:lnL>
+                    <a:lnR w="12700" cap="flat" cmpd="sng">
+                      <a:solidFill>
+                        <a:srgbClr val="FFFFFF"/>
+                      </a:solidFill>
+                      <a:prstDash val="solid"/>
+                      <a:round/>
+                      <a:headEnd type="none" w="sm" len="sm"/>
+                      <a:tailEnd type="none" w="sm" len="sm"/>
+                    </a:lnR>
+                    <a:lnT w="12700" cap="flat" cmpd="sng">
+                      <a:solidFill>
+                        <a:srgbClr val="FFFFFF"/>
+                      </a:solidFill>
+                      <a:prstDash val="solid"/>
+                      <a:round/>
+                      <a:headEnd type="none" w="sm" len="sm"/>
+                      <a:tailEnd type="none" w="sm" len="sm"/>
+                    </a:lnT>
+                    <a:lnB w="38100" cap="flat" cmpd="sng">
+                      <a:solidFill>
+                        <a:srgbClr val="FFFFFF"/>
+                      </a:solidFill>
+                      <a:prstDash val="solid"/>
+                      <a:round/>
+                      <a:headEnd type="none" w="sm" len="sm"/>
+                      <a:tailEnd type="none" w="sm" len="sm"/>
+                    </a:lnB>
+                    <a:solidFill>
+                      <a:srgbClr val="5B9BD5"/>
+                    </a:solidFill>
+                  </a:tcPr>
+                </a:tc>
+                <a:tc>
+                  <a:txBody>
+                    <a:bodyPr/>
+                    <a:lstStyle/>
+                    <a:p>
+                      <a:pPr marL="0" marR="0" lvl="0" indent="0" algn="ctr" rtl="0">
+                        <a:lnSpc>
+                          <a:spcPct val="100000"/>
+                        </a:lnSpc>
+                        <a:spcBef>
+                          <a:spcPts val="0"/>
+                        </a:spcBef>
+                        <a:spcAft>
+                          <a:spcPts val="0"/>
+                        </a:spcAft>
+                        <a:buClr>
+                          <a:schemeClr val="lt1"/>
+                        </a:buClr>
+                        <a:buSzPts val="1800"/>
+                        <a:buFont typeface="Calibri"/>
+                        <a:buNone/>
+                      </a:pPr>
+                      <a:r>
+                        <a:rPr lang="en-US" sz="1800" b="0" i="0" u="none" strike="noStrike" cap="none">
+                          <a:solidFill>
+                            <a:srgbClr val="000000"/>
+                          </a:solidFill>
+                          <a:latin typeface="Arial"/>
+                          <a:ea typeface="Calibri"/>
+                          <a:cs typeface="Arial"/>
+                          <a:sym typeface="Calibri"/>
+                        </a:rPr>
+                        <a:t>Mobile number</a:t>
+                      </a:r>
+                      <a:endParaRPr sz="1800" b="0" i="0" u="none" strike="noStrike" cap="none">
+                        <a:solidFill>
+                          <a:srgbClr val="000000"/>
+                        </a:solidFill>
+                        <a:latin typeface="Arial"/>
+                        <a:cs typeface="Arial"/>
+                        <a:sym typeface="Arial"/>
+                      </a:endParaRPr>
+                    </a:p>
+                    <a:p>
+                      <a:pPr marL="0" marR="0" lvl="0" indent="0" algn="ctr" rtl="0">
+                        <a:lnSpc>
+                          <a:spcPct val="100000"/>
+                        </a:lnSpc>
+                        <a:spcBef>
+                          <a:spcPts val="0"/>
+                        </a:spcBef>
+                        <a:spcAft>
+                          <a:spcPts val="0"/>
+                        </a:spcAft>
+                        <a:buClr>
+                          <a:schemeClr val="lt1"/>
+                        </a:buClr>
+                        <a:buSzPts val="1800"/>
+                        <a:buFont typeface="Calibri"/>
+                        <a:buNone/>
+                      </a:pPr>
+                      <a:r>
+                        <a:rPr lang="en-US" sz="1800" b="0" i="0" u="none" strike="noStrike" cap="none">
+                          <a:solidFill>
+                            <a:srgbClr val="000000"/>
+                          </a:solidFill>
+                          <a:latin typeface="Arial"/>
+                          <a:ea typeface="Calibri"/>
+                          <a:cs typeface="Arial"/>
+                          <a:sym typeface="Calibri"/>
+                        </a:rPr>
+                        <a:t>[WhatsApp] </a:t>
+                      </a:r>
+                      <a:endParaRPr sz="1800" b="0" i="0" u="none" strike="noStrike" cap="none">
+                        <a:solidFill>
+                          <a:srgbClr val="000000"/>
+                        </a:solidFill>
+                        <a:latin typeface="Arial"/>
+                        <a:cs typeface="Arial"/>
+                        <a:sym typeface="Arial"/>
+                      </a:endParaRPr>
+                    </a:p>
+                  </a:txBody>
+                  <a:tcPr marL="91450" marR="91450" marT="45725" marB="45725" anchor="ctr">
+                    <a:lnL w="12700" cap="flat" cmpd="sng">
+                      <a:solidFill>
+                        <a:srgbClr val="FFFFFF"/>
+                      </a:solidFill>
+                      <a:prstDash val="solid"/>
+                      <a:round/>
+                      <a:headEnd type="none" w="sm" len="sm"/>
+                      <a:tailEnd type="none" w="sm" len="sm"/>
+                    </a:lnL>
+                    <a:lnR w="12700" cap="flat" cmpd="sng">
+                      <a:solidFill>
+                        <a:srgbClr val="FFFFFF"/>
+                      </a:solidFill>
+                      <a:prstDash val="solid"/>
+                      <a:round/>
+                      <a:headEnd type="none" w="sm" len="sm"/>
+                      <a:tailEnd type="none" w="sm" len="sm"/>
+                    </a:lnR>
+                    <a:lnT w="12700" cap="flat" cmpd="sng">
+                      <a:solidFill>
+                        <a:srgbClr val="FFFFFF"/>
+                      </a:solidFill>
+                      <a:prstDash val="solid"/>
+                      <a:round/>
+                      <a:headEnd type="none" w="sm" len="sm"/>
+                      <a:tailEnd type="none" w="sm" len="sm"/>
+                    </a:lnT>
+                    <a:lnB w="38100" cap="flat" cmpd="sng">
+                      <a:solidFill>
+                        <a:srgbClr val="FFFFFF"/>
+                      </a:solidFill>
+                      <a:prstDash val="solid"/>
+                      <a:round/>
+                      <a:headEnd type="none" w="sm" len="sm"/>
+                      <a:tailEnd type="none" w="sm" len="sm"/>
+                    </a:lnB>
+                    <a:solidFill>
+                      <a:srgbClr val="5B9BD5"/>
+                    </a:solidFill>
+                  </a:tcPr>
+                </a:tc>
+                <a:extLst>
+                  <a:ext uri="{0D108BD9-81ED-4DB2-BD59-A6C34878D82A}">
+                    <a16:rowId xmlns:a16="http://schemas.microsoft.com/office/drawing/2014/main" val="10000"/>
+                  </a:ext>
+                </a:extLst>
+              </a:tr>
+              <a:tr h="1193891">
+                <a:tc>
+                  <a:txBody>
+                    <a:bodyPr/>
+                    <a:lstStyle/>
+                    <a:p>
+                      <a:pPr marL="0" marR="0" lvl="0" indent="0" algn="l" rtl="0">
+                        <a:spcBef>
+                          <a:spcPts val="0"/>
+                        </a:spcBef>
+                        <a:spcAft>
+                          <a:spcPts val="0"/>
+                        </a:spcAft>
+                        <a:buNone/>
+                      </a:pPr>
+                      <a:endParaRPr/>
+                    </a:p>
+                  </a:txBody>
+                  <a:tcPr marL="91450" marR="91450" marT="45725" marB="45725">
+                    <a:lnL w="12700" cap="flat" cmpd="sng">
+                      <a:solidFill>
+                        <a:srgbClr val="FFFFFF"/>
+                      </a:solidFill>
+                      <a:prstDash val="solid"/>
+                      <a:round/>
+                      <a:headEnd type="none" w="sm" len="sm"/>
+                      <a:tailEnd type="none" w="sm" len="sm"/>
+                    </a:lnL>
+                    <a:lnR w="12700" cap="flat" cmpd="sng">
+                      <a:solidFill>
+                        <a:srgbClr val="FFFFFF"/>
+                      </a:solidFill>
+                      <a:prstDash val="solid"/>
+                      <a:round/>
+                      <a:headEnd type="none" w="sm" len="sm"/>
+                      <a:tailEnd type="none" w="sm" len="sm"/>
+                    </a:lnR>
+                    <a:lnT w="38100" cap="flat" cmpd="sng">
+                      <a:solidFill>
+                        <a:srgbClr val="FFFFFF"/>
+                      </a:solidFill>
+                      <a:prstDash val="solid"/>
+                      <a:round/>
+                      <a:headEnd type="none" w="sm" len="sm"/>
+                      <a:tailEnd type="none" w="sm" len="sm"/>
+                    </a:lnT>
+                    <a:lnB w="12700" cap="flat" cmpd="sng">
+                      <a:solidFill>
+                        <a:srgbClr val="FFFFFF"/>
+                      </a:solidFill>
+                      <a:prstDash val="solid"/>
+                      <a:round/>
+                      <a:headEnd type="none" w="sm" len="sm"/>
+                      <a:tailEnd type="none" w="sm" len="sm"/>
+                    </a:lnB>
+                    <a:solidFill>
+                      <a:srgbClr val="D0DEEF"/>
+                    </a:solidFill>
+                  </a:tcPr>
+                </a:tc>
+                <a:tc>
+                  <a:txBody>
+                    <a:bodyPr/>
+                    <a:lstStyle/>
+                    <a:p>
+                      <a:pPr marL="0" marR="0" lvl="0" indent="0" algn="l" rtl="0">
+                        <a:spcBef>
+                          <a:spcPts val="0"/>
+                        </a:spcBef>
+                        <a:spcAft>
+                          <a:spcPts val="0"/>
+                        </a:spcAft>
+                        <a:buNone/>
+                      </a:pPr>
+                      <a:endParaRPr sz="1800"/>
+                    </a:p>
+                  </a:txBody>
+                  <a:tcPr marL="91450" marR="91450" marT="45725" marB="45725">
+                    <a:lnL w="12700" cap="flat" cmpd="sng" algn="ctr">
+                      <a:solidFill>
+                        <a:srgbClr val="FFFFFF"/>
+                      </a:solidFill>
+                      <a:prstDash val="solid"/>
+                      <a:round/>
+                      <a:headEnd type="none" w="sm" len="sm"/>
+                      <a:tailEnd type="none" w="sm" len="sm"/>
+                    </a:lnL>
+                    <a:lnR w="12700" cap="flat" cmpd="sng">
+                      <a:solidFill>
+                        <a:srgbClr val="FFFFFF"/>
+                      </a:solidFill>
+                      <a:prstDash val="solid"/>
+                      <a:round/>
+                      <a:headEnd type="none" w="sm" len="sm"/>
+                      <a:tailEnd type="none" w="sm" len="sm"/>
+                    </a:lnR>
+                    <a:lnT w="38100" cap="flat" cmpd="sng" algn="ctr">
+                      <a:solidFill>
+                        <a:srgbClr val="FFFFFF"/>
+                      </a:solidFill>
+                      <a:prstDash val="solid"/>
+                      <a:round/>
+                      <a:headEnd type="none" w="sm" len="sm"/>
+                      <a:tailEnd type="none" w="sm" len="sm"/>
+                    </a:lnT>
+                    <a:lnB w="12700" cap="flat" cmpd="sng" algn="ctr">
+                      <a:solidFill>
+                        <a:srgbClr val="FFFFFF"/>
+                      </a:solidFill>
+                      <a:prstDash val="solid"/>
+                      <a:round/>
+                      <a:headEnd type="none" w="sm" len="sm"/>
+                      <a:tailEnd type="none" w="sm" len="sm"/>
+                    </a:lnB>
+                    <a:solidFill>
+                      <a:srgbClr val="D0DEEF"/>
+                    </a:solidFill>
+                  </a:tcPr>
+                </a:tc>
+                <a:tc>
+                  <a:txBody>
+                    <a:bodyPr/>
+                    <a:lstStyle/>
+                    <a:p>
+                      <a:pPr marL="0" marR="0" lvl="0" indent="0" algn="l" rtl="0">
+                        <a:spcBef>
+                          <a:spcPts val="0"/>
+                        </a:spcBef>
+                        <a:spcAft>
+                          <a:spcPts val="0"/>
+                        </a:spcAft>
+                        <a:buNone/>
+                      </a:pPr>
+                      <a:endParaRPr/>
+                    </a:p>
+                  </a:txBody>
+                  <a:tcPr marL="91450" marR="91450" marT="45725" marB="45725">
+                    <a:lnL w="12700" cap="flat" cmpd="sng">
+                      <a:solidFill>
+                        <a:srgbClr val="FFFFFF"/>
+                      </a:solidFill>
+                      <a:prstDash val="solid"/>
+                      <a:round/>
+                      <a:headEnd type="none" w="sm" len="sm"/>
+                      <a:tailEnd type="none" w="sm" len="sm"/>
+                    </a:lnL>
+                    <a:lnR w="12700" cap="flat" cmpd="sng">
+                      <a:solidFill>
+                        <a:srgbClr val="FFFFFF"/>
+                      </a:solidFill>
+                      <a:prstDash val="solid"/>
+                      <a:round/>
+                      <a:headEnd type="none" w="sm" len="sm"/>
+                      <a:tailEnd type="none" w="sm" len="sm"/>
+                    </a:lnR>
+                    <a:lnT w="38100" cap="flat" cmpd="sng">
+                      <a:solidFill>
+                        <a:srgbClr val="FFFFFF"/>
+                      </a:solidFill>
+                      <a:prstDash val="solid"/>
+                      <a:round/>
+                      <a:headEnd type="none" w="sm" len="sm"/>
+                      <a:tailEnd type="none" w="sm" len="sm"/>
+                    </a:lnT>
+                    <a:lnB w="12700" cap="flat" cmpd="sng">
+                      <a:solidFill>
+                        <a:srgbClr val="FFFFFF"/>
+                      </a:solidFill>
+                      <a:prstDash val="solid"/>
+                      <a:round/>
+                      <a:headEnd type="none" w="sm" len="sm"/>
+                      <a:tailEnd type="none" w="sm" len="sm"/>
+                    </a:lnB>
+                    <a:solidFill>
+                      <a:srgbClr val="D0DEEF"/>
+                    </a:solidFill>
+                  </a:tcPr>
+                </a:tc>
+                <a:tc>
+                  <a:txBody>
+                    <a:bodyPr/>
+                    <a:lstStyle/>
+                    <a:p>
+                      <a:pPr marL="0" marR="0" lvl="0" indent="0" algn="l" rtl="0">
+                        <a:spcBef>
+                          <a:spcPts val="0"/>
+                        </a:spcBef>
+                        <a:spcAft>
+                          <a:spcPts val="0"/>
+                        </a:spcAft>
+                        <a:buNone/>
+                      </a:pPr>
+                      <a:endParaRPr/>
+                    </a:p>
+                  </a:txBody>
+                  <a:tcPr marL="91450" marR="91450" marT="45725" marB="45725">
+                    <a:lnL w="12700" cap="flat" cmpd="sng">
+                      <a:solidFill>
+                        <a:srgbClr val="FFFFFF"/>
+                      </a:solidFill>
+                      <a:prstDash val="solid"/>
+                      <a:round/>
+                      <a:headEnd type="none" w="sm" len="sm"/>
+                      <a:tailEnd type="none" w="sm" len="sm"/>
+                    </a:lnL>
+                    <a:lnR w="12700" cap="flat" cmpd="sng">
+                      <a:solidFill>
+                        <a:srgbClr val="FFFFFF"/>
+                      </a:solidFill>
+                      <a:prstDash val="solid"/>
+                      <a:round/>
+                      <a:headEnd type="none" w="sm" len="sm"/>
+                      <a:tailEnd type="none" w="sm" len="sm"/>
+                    </a:lnR>
+                    <a:lnT w="38100" cap="flat" cmpd="sng">
+                      <a:solidFill>
+                        <a:srgbClr val="FFFFFF"/>
+                      </a:solidFill>
+                      <a:prstDash val="solid"/>
+                      <a:round/>
+                      <a:headEnd type="none" w="sm" len="sm"/>
+                      <a:tailEnd type="none" w="sm" len="sm"/>
+                    </a:lnT>
+                    <a:lnB w="12700" cap="flat" cmpd="sng">
+                      <a:solidFill>
+                        <a:srgbClr val="FFFFFF"/>
+                      </a:solidFill>
+                      <a:prstDash val="solid"/>
+                      <a:round/>
+                      <a:headEnd type="none" w="sm" len="sm"/>
+                      <a:tailEnd type="none" w="sm" len="sm"/>
+                    </a:lnB>
+                    <a:solidFill>
+                      <a:srgbClr val="D0DEEF"/>
+                    </a:solidFill>
+                  </a:tcPr>
+                </a:tc>
+                <a:extLst>
+                  <a:ext uri="{0D108BD9-81ED-4DB2-BD59-A6C34878D82A}">
+                    <a16:rowId xmlns:a16="http://schemas.microsoft.com/office/drawing/2014/main" val="10001"/>
+                  </a:ext>
+                </a:extLst>
+              </a:tr>
+            </a:tbl>
+          </a:graphicData>
+        </a:graphic>
+      </p:graphicFrame>
+      <p:pic>
+        <p:nvPicPr>
+          <p:cNvPr id="98" name="Google Shape;98;p2"/>
+          <p:cNvPicPr preferRelativeResize="0"/>
+          <p:nvPr/>
+        </p:nvPicPr>
+        <p:blipFill rotWithShape="1">
+          <a:blip r:embed="rId3">
+            <a:alphaModFix/>
+          </a:blip>
+          <a:srcRect/>
+          <a:stretch/>
+        </p:blipFill>
+        <p:spPr>
+          <a:xfrm>
+            <a:off x="4053024" y="3738417"/>
+            <a:ext cx="762500" cy="801811"/>
+          </a:xfrm>
+          <a:prstGeom prst="rect">
+            <a:avLst/>
+          </a:prstGeom>
+          <a:noFill/>
+          <a:ln>
+            <a:noFill/>
+          </a:ln>
+        </p:spPr>
+      </p:pic>
+      <p:sp>
+        <p:nvSpPr>
+          <p:cNvPr id="4" name="TextBox 3">
+            <a:extLst>
+              <a:ext uri="{FF2B5EF4-FFF2-40B4-BE49-F238E27FC236}">
+                <a16:creationId xmlns:a16="http://schemas.microsoft.com/office/drawing/2014/main" id="{A828B9EF-C084-F5D4-CA27-75AF7D995640}"/>
+              </a:ext>
+            </a:extLst>
+          </p:cNvPr>
+          <p:cNvSpPr txBox="1"/>
+          <p:nvPr/>
+        </p:nvSpPr>
+        <p:spPr>
+          <a:xfrm>
+            <a:off x="1206164" y="1460724"/>
+            <a:ext cx="10280254" cy="461665"/>
+          </a:xfrm>
+          <a:prstGeom prst="rect">
+            <a:avLst/>
+          </a:prstGeom>
+          <a:noFill/>
+        </p:spPr>
+        <p:txBody>
+          <a:bodyPr wrap="square" rtlCol="0">
+            <a:spAutoFit/>
+          </a:bodyPr>
+          <a:lstStyle/>
+          <a:p>
+            <a:r>
+              <a:rPr lang="en-US" sz="2400" b="1"/>
+              <a:t>Domain of  Project – </a:t>
+            </a:r>
+            <a:r>
+              <a:rPr lang="en-US" sz="2400" b="1">
+                <a:highlight>
+                  <a:srgbClr val="FFFF00"/>
+                </a:highlight>
+              </a:rPr>
+              <a:t>[ like Agriculture / Education / Healthcare / … ]</a:t>
+            </a:r>
+            <a:endParaRPr lang="en-IN" sz="2400" b="1">
+              <a:highlight>
+                <a:srgbClr val="FFFF00"/>
+              </a:highlight>
+            </a:endParaRPr>
           </a:p>
         </p:txBody>
       </p:sp>
       <p:sp>
         <p:nvSpPr>
-          <p:cNvPr id="94" name="Rounded Rectangle 93"/>
-          <p:cNvSpPr/>
+          <p:cNvPr id="7" name="TextBox 6">
+            <a:extLst>
+              <a:ext uri="{FF2B5EF4-FFF2-40B4-BE49-F238E27FC236}">
+                <a16:creationId xmlns:a16="http://schemas.microsoft.com/office/drawing/2014/main" id="{3D723CA3-EC2D-165A-F109-3759C4E9C8A4}"/>
+              </a:ext>
+            </a:extLst>
+          </p:cNvPr>
+          <p:cNvSpPr txBox="1"/>
           <p:nvPr/>
         </p:nvSpPr>
         <p:spPr>
           <a:xfrm>
-            <a:off x="4389120" y="1645920"/>
-            <a:ext cx="3383280" cy="4572000"/>
+            <a:off x="1206162" y="551965"/>
+            <a:ext cx="9581177" cy="461665"/>
           </a:xfrm>
-          <a:prstGeom prst="roundRect">
+          <a:prstGeom prst="rect">
             <a:avLst/>
           </a:prstGeom>
-          <a:solidFill>
-            <a:srgbClr val="F5F8F6"/>
-          </a:solidFill>
-          <a:ln w="19050">
-            <a:solidFill>
-              <a:srgbClr val="C8D7CD"/>
-            </a:solidFill>
-          </a:ln>
+          <a:noFill/>
         </p:spPr>
-        <p:style>
-          <a:lnRef idx="1">
-            <a:schemeClr val="accent1"/>
-          </a:lnRef>
-          <a:fillRef idx="3">
-            <a:schemeClr val="accent1"/>
-          </a:fillRef>
-          <a:effectRef idx="2">
-            <a:schemeClr val="accent1"/>
-          </a:effectRef>
-          <a:fontRef idx="minor">
-            <a:schemeClr val="lt1"/>
-          </a:fontRef>
-        </p:style>
         <p:txBody>
-          <a:bodyPr rtlCol="0" anchor="ctr" wrap="square" lIns="228600" tIns="182880" rIns="228600"/>
+          <a:bodyPr wrap="square" rtlCol="0">
+            <a:spAutoFit/>
+          </a:bodyPr>
           <a:lstStyle/>
           <a:p>
-            <a:pPr algn="ctr">
-              <a:defRPr sz="2000" b="1">
+            <a:r>
+              <a:rPr lang="en-US" sz="2400" b="1"/>
+              <a:t>Project Tile – </a:t>
+            </a:r>
+            <a:r>
+              <a:rPr lang="en-US" sz="2400" b="1">
+                <a:highlight>
+                  <a:srgbClr val="FFFF00"/>
+                </a:highlight>
+              </a:rPr>
+              <a:t>[</a:t>
+            </a:r>
+            <a:r>
+              <a:rPr lang="en-US" sz="2400" b="1">
                 <a:solidFill>
-                  <a:srgbClr val="0F3B2E"/>
+                  <a:srgbClr val="002060"/>
                 </a:solidFill>
-                <a:latin typeface="Arial"/>
-              </a:defRPr>
-            </a:pPr>
-            <a:r>
-              <a:t>Agrochemical Misapplication</a:t>
-            </a:r>
-          </a:p>
-          <a:p>
-            <a:pPr>
-              <a:spcBef>
-                <a:spcPts val="600"/>
-              </a:spcBef>
-              <a:defRPr sz="1500">
-                <a:solidFill>
-                  <a:srgbClr val="1E293B"/>
-                </a:solidFill>
-                <a:latin typeface="Arial"/>
-              </a:defRPr>
-            </a:pPr>
-            <a:r>
-              <a:t>• Lack of scientific guidance leads to heavy dealer-driven chemical overdosing.</a:t>
-            </a:r>
-          </a:p>
-          <a:p>
-            <a:pPr>
-              <a:spcBef>
-                <a:spcPts val="600"/>
-              </a:spcBef>
-              <a:defRPr sz="1500">
-                <a:solidFill>
-                  <a:srgbClr val="1E293B"/>
-                </a:solidFill>
-                <a:latin typeface="Arial"/>
-              </a:defRPr>
-            </a:pPr>
-            <a:r>
-              <a:t>• Causes severe phytotoxicity and chemical-resistant pathogen strains.</a:t>
-            </a:r>
-          </a:p>
-          <a:p>
-            <a:pPr>
-              <a:spcBef>
-                <a:spcPts val="600"/>
-              </a:spcBef>
-              <a:defRPr sz="1500">
-                <a:solidFill>
-                  <a:srgbClr val="1E293B"/>
-                </a:solidFill>
-                <a:latin typeface="Arial"/>
-              </a:defRPr>
-            </a:pPr>
-            <a:r>
-              <a:t>• Excessive toxic runoff contaminates soil and rural groundwater.</a:t>
-            </a:r>
+                <a:highlight>
+                  <a:srgbClr val="FFFF00"/>
+                </a:highlight>
+                <a:latin typeface="Times New Roman"/>
+                <a:ea typeface="Times New Roman"/>
+                <a:cs typeface="Times New Roman"/>
+                <a:sym typeface="Times New Roman"/>
+              </a:rPr>
+              <a:t>Write your project title here</a:t>
+            </a:r>
+            <a:r>
+              <a:rPr lang="en-US" sz="2400" b="1">
+                <a:highlight>
+                  <a:srgbClr val="FFFF00"/>
+                </a:highlight>
+              </a:rPr>
+              <a:t>]</a:t>
+            </a:r>
+            <a:endParaRPr lang="en-IN" sz="2400" b="1">
+              <a:highlight>
+                <a:srgbClr val="FFFF00"/>
+              </a:highlight>
+            </a:endParaRPr>
           </a:p>
         </p:txBody>
       </p:sp>
       <p:sp>
         <p:nvSpPr>
-          <p:cNvPr id="95" name="Rounded Rectangle 94"/>
-          <p:cNvSpPr/>
+          <p:cNvPr id="3" name="TextBox 2">
+            <a:extLst>
+              <a:ext uri="{FF2B5EF4-FFF2-40B4-BE49-F238E27FC236}">
+                <a16:creationId xmlns:a16="http://schemas.microsoft.com/office/drawing/2014/main" id="{B0B023FA-CFEB-ACE9-8425-7E72E307CDC5}"/>
+              </a:ext>
+            </a:extLst>
+          </p:cNvPr>
+          <p:cNvSpPr txBox="1"/>
           <p:nvPr/>
         </p:nvSpPr>
         <p:spPr>
           <a:xfrm>
-            <a:off x="8046720" y="1645920"/>
-            <a:ext cx="3383280" cy="4572000"/>
+            <a:off x="1211005" y="5210667"/>
+            <a:ext cx="6456743" cy="1631216"/>
           </a:xfrm>
-          <a:prstGeom prst="roundRect">
+          <a:prstGeom prst="rect">
             <a:avLst/>
           </a:prstGeom>
-          <a:solidFill>
-            <a:srgbClr val="F5F8F6"/>
-          </a:solidFill>
-          <a:ln w="19050">
-            <a:solidFill>
-              <a:srgbClr val="C8D7CD"/>
-            </a:solidFill>
-          </a:ln>
+          <a:noFill/>
         </p:spPr>
-        <p:style>
-          <a:lnRef idx="1">
-            <a:schemeClr val="accent1"/>
-          </a:lnRef>
-          <a:fillRef idx="3">
-            <a:schemeClr val="accent1"/>
-          </a:fillRef>
-          <a:effectRef idx="2">
-            <a:schemeClr val="accent1"/>
-          </a:effectRef>
-          <a:fontRef idx="minor">
-            <a:schemeClr val="lt1"/>
-          </a:fontRef>
-        </p:style>
         <p:txBody>
-          <a:bodyPr rtlCol="0" anchor="ctr" wrap="square" lIns="228600" tIns="182880" rIns="228600"/>
+          <a:bodyPr rot="0" spcFirstLastPara="0" vertOverflow="overflow" horzOverflow="overflow" vert="horz" wrap="square" lIns="91440" tIns="45720" rIns="91440" bIns="45720" numCol="1" spcCol="0" rtlCol="0" fromWordArt="0" anchor="t" anchorCtr="0" forceAA="0" compatLnSpc="1">
+            <a:prstTxWarp prst="textNoShape">
+              <a:avLst/>
+            </a:prstTxWarp>
+            <a:spAutoFit/>
+          </a:bodyPr>
           <a:lstStyle/>
           <a:p>
-            <a:pPr algn="ctr">
-              <a:defRPr sz="2000" b="1">
+            <a:r>
+              <a:rPr lang="en-US" sz="2000">
                 <a:solidFill>
-                  <a:srgbClr val="0F3B2E"/>
+                  <a:srgbClr val="FF0000"/>
                 </a:solidFill>
-                <a:latin typeface="Arial"/>
-              </a:defRPr>
-            </a:pPr>
-            <a:r>
-              <a:t>LLM Hallucination Hazards</a:t>
-            </a:r>
-          </a:p>
-          <a:p>
-            <a:pPr>
-              <a:spcBef>
-                <a:spcPts val="600"/>
-              </a:spcBef>
-              <a:defRPr sz="1500">
+              </a:rPr>
+              <a:t>Recommended font style and size:</a:t>
+            </a:r>
+            <a:br>
+              <a:rPr lang="en-US" sz="2000">
                 <a:solidFill>
-                  <a:srgbClr val="1E293B"/>
+                  <a:srgbClr val="FF0000"/>
                 </a:solidFill>
-                <a:latin typeface="Arial"/>
-              </a:defRPr>
-            </a:pPr>
-            <a:r>
-              <a:t>• Generic commercial AI tools invent arbitrary spray dosages.</a:t>
-            </a:r>
-          </a:p>
-          <a:p>
-            <a:pPr>
-              <a:spcBef>
-                <a:spcPts val="600"/>
-              </a:spcBef>
-              <a:defRPr sz="1500">
+              </a:rPr>
+            </a:br>
+            <a:br>
+              <a:rPr lang="en-US" sz="2000"/>
+            </a:br>
+            <a:r>
+              <a:rPr lang="en-US" sz="2000">
                 <a:solidFill>
-                  <a:srgbClr val="1E293B"/>
+                  <a:srgbClr val="FF0000"/>
                 </a:solidFill>
-                <a:latin typeface="Arial"/>
-              </a:defRPr>
-            </a:pPr>
-            <a:r>
-              <a:t>• Lack grounding in verified regional ICAR and KVK standard packages.</a:t>
-            </a:r>
-          </a:p>
-          <a:p>
-            <a:pPr>
-              <a:spcBef>
-                <a:spcPts val="600"/>
-              </a:spcBef>
-              <a:defRPr sz="1500">
+              </a:rPr>
+              <a:t>Font Style: Arial</a:t>
+            </a:r>
+            <a:br>
+              <a:rPr lang="en-US" sz="2000">
                 <a:solidFill>
-                  <a:srgbClr val="1E293B"/>
+                  <a:srgbClr val="FF0000"/>
                 </a:solidFill>
-                <a:latin typeface="Arial"/>
-              </a:defRPr>
-            </a:pPr>
-            <a:r>
-              <a:t>• Vernacular barriers lock non-literate farmers out of critical advice.</a:t>
+              </a:rPr>
+            </a:br>
+            <a:r>
+              <a:rPr lang="en-US" sz="2000">
+                <a:solidFill>
+                  <a:srgbClr val="FF0000"/>
+                </a:solidFill>
+              </a:rPr>
+              <a:t>Font Size (Heading): 28</a:t>
+            </a:r>
+          </a:p>
+          <a:p>
+            <a:r>
+              <a:rPr lang="en-US" sz="2000">
+                <a:solidFill>
+                  <a:srgbClr val="FF0000"/>
+                </a:solidFill>
+              </a:rPr>
+              <a:t>Font Size (Content): 20</a:t>
             </a:r>
           </a:p>
         </p:txBody>
@@ -14077,549 +15005,111 @@
           </a:bodyPr>
           <a:lstStyle/>
           <a:p>
-            <a:pPr fontAlgn="base" algn="l">
-              <a:defRPr sz="2800" b="1">
-                <a:solidFill>
-                  <a:srgbClr val="0F3B2E"/>
-                </a:solidFill>
+            <a:pPr fontAlgn="base"/>
+          </a:p>
+          <a:p>
+            <a:pPr>
+              <a:spcAft>
+                <a:spcPts val="600"/>
+              </a:spcAft>
+              <a:defRPr sz="1500">
                 <a:latin typeface="Arial"/>
               </a:defRPr>
             </a:pPr>
             <a:r>
-              <a:t>Proposed Solution</a:t>
-            </a:r>
-          </a:p>
-          <a:p>
-            <a:pPr fontAlgn="base"/>
-            <a:endParaRPr lang="en-US" b="1"/>
-          </a:p>
-          <a:p>
-            <a:pPr fontAlgn="base"/>
-            <a:r>
-              <a:rPr lang="en-US" b="1"/>
-              <a:t>The Challenge</a:t>
-            </a:r>
-            <a:r>
-              <a:rPr lang="en-US"/>
-              <a:t> </a:t>
-            </a:r>
-          </a:p>
-          <a:p>
-            <a:pPr fontAlgn="base"/>
-            <a:r>
-              <a:rPr lang="en-US"/>
-              <a:t>Good nutrition is the foundation of health, but individuals often struggle with </a:t>
-            </a:r>
-            <a:r>
-              <a:rPr lang="en-US" b="1"/>
-              <a:t>diet planning, portion control, and tracking nutritional intake</a:t>
-            </a:r>
-            <a:r>
-              <a:rPr lang="en-US"/>
-              <a:t>. Information about healthy diets, disease-specific nutrition, and food composition is scattered across unreliable sources. Without </a:t>
-            </a:r>
-            <a:r>
-              <a:rPr lang="en-US" b="1"/>
-              <a:t>personalized, real-time guidance</a:t>
-            </a:r>
-            <a:r>
-              <a:rPr lang="en-US"/>
-              <a:t>, many fail to maintain balanced diets or make informed food choices. </a:t>
-            </a:r>
-          </a:p>
-          <a:p>
-            <a:pPr fontAlgn="base"/>
-            <a:endParaRPr lang="en-US"/>
-          </a:p>
-          <a:p>
-            <a:pPr fontAlgn="base"/>
-            <a:r>
-              <a:rPr lang="en-US" b="1"/>
-              <a:t>The Objective</a:t>
-            </a:r>
-            <a:r>
-              <a:rPr lang="en-US"/>
-              <a:t> </a:t>
-            </a:r>
-          </a:p>
-          <a:p>
-            <a:pPr fontAlgn="base"/>
-            <a:r>
-              <a:rPr lang="en-US"/>
-              <a:t>Build an </a:t>
-            </a:r>
-            <a:r>
-              <a:rPr lang="en-US" b="1"/>
-              <a:t>AI-powered Nutrition Agent</a:t>
-            </a:r>
-            <a:r>
-              <a:rPr lang="en-US"/>
-              <a:t> that delivers </a:t>
-            </a:r>
-            <a:r>
-              <a:rPr lang="en-US" b="1"/>
-              <a:t>personalized dietary insights and guidance</a:t>
-            </a:r>
-            <a:r>
-              <a:rPr lang="en-US"/>
-              <a:t> for individuals, families, and health professionals. The solution should: </a:t>
-            </a:r>
-          </a:p>
-          <a:p>
-            <a:pPr marL="285750" indent="-285750" fontAlgn="base">
-              <a:buFont typeface="Arial" panose="020B0604020202020204" pitchFamily="34" charset="0"/>
-              <a:buChar char="•"/>
+              <a:t>The proposed solution is an autonomous, multi-agent agronomic advisory platform built using Langflow, IBM watsonx.ai, and Granite Models to deliver proactive crop disease guidance and verified chemical calibration.</a:t>
+            </a:r>
+          </a:p>
+          <a:p>
+            <a:pPr>
+              <a:spcAft>
+                <a:spcPts val="600"/>
+              </a:spcAft>
+              <a:defRPr sz="1500">
+                <a:latin typeface="Arial"/>
+              </a:defRPr>
             </a:pPr>
             <a:r>
-              <a:rPr lang="en-US" b="1"/>
-              <a:t>Personalized Diet Plans</a:t>
-            </a:r>
-            <a:r>
-              <a:rPr lang="en-US"/>
-              <a:t> – Recommend meals based on age, health conditions, allergies, cultural preferences, and fitness goals. </a:t>
-            </a:r>
-          </a:p>
-          <a:p>
-            <a:pPr marL="285750" indent="-285750" fontAlgn="base">
-              <a:buFont typeface="Arial" panose="020B0604020202020204" pitchFamily="34" charset="0"/>
-              <a:buChar char="•"/>
+              <a:t>At its core, the solution uses a Retrieval-Augmented Generation (RAG) pipeline to fetch verified agronomic data from trusted ICAR (Indian Council of Agricultural Research) datasets. This knowledge is embedded in ChromaDB, enabling Granite models to cite exact active ingredients and per-liter dilution formulas.</a:t>
+            </a:r>
+          </a:p>
+          <a:p>
+            <a:pPr>
+              <a:spcAft>
+                <a:spcPts val="600"/>
+              </a:spcAft>
+              <a:defRPr sz="1500">
+                <a:latin typeface="Arial"/>
+              </a:defRPr>
             </a:pPr>
             <a:r>
-              <a:rPr lang="en-US" b="1"/>
-              <a:t>Food Data RAG Retrieval</a:t>
-            </a:r>
-            <a:r>
-              <a:rPr lang="en-US"/>
-              <a:t> – Fetch and summarize nutritional values (calories, macros, vitamins) from reliable sources. </a:t>
-            </a:r>
-          </a:p>
-          <a:p>
-            <a:pPr marL="285750" indent="-285750" fontAlgn="base">
-              <a:buFont typeface="Arial" panose="020B0604020202020204" pitchFamily="34" charset="0"/>
-              <a:buChar char="•"/>
+              <a:t>The system consists of four key agents:</a:t>
+            </a:r>
+            <a:br/>
+            <a:r>
+              <a:t>• Agromet Sentinel Agent monitors real-time weather telemetry to predict pathogen outbreaks.</a:t>
+            </a:r>
+            <a:br/>
+            <a:r>
+              <a:t>• Foliar Vision Agent analyzes crop photos using OpenCV segmentation to quantify foliar lesions.</a:t>
+            </a:r>
+            <a:br/>
+            <a:r>
+              <a:t>• Agronomic RAG Agent retrieves validated ICAR chemical protocols, spray intervals, and safety guidelines.</a:t>
+            </a:r>
+            <a:br/>
+            <a:r>
+              <a:t>• Granite Orchestration Agent synthesizes weather risks, vision findings, and RAG knowledge into a 7-day roadmap.</a:t>
+            </a:r>
+          </a:p>
+          <a:p>
+            <a:pPr>
+              <a:spcAft>
+                <a:spcPts val="600"/>
+              </a:spcAft>
+              <a:defRPr sz="1500">
+                <a:latin typeface="Arial"/>
+              </a:defRPr>
             </a:pPr>
             <a:r>
-              <a:rPr lang="en-US" b="1"/>
-              <a:t>Diet Tracking &amp; Feedback</a:t>
-            </a:r>
-            <a:r>
-              <a:rPr lang="en-US"/>
-              <a:t> – Allow users to log meals via text, images, or voice, and provide instant nutritional analysis. </a:t>
-            </a:r>
-          </a:p>
-          <a:p>
-            <a:pPr marL="285750" indent="-285750" fontAlgn="base">
-              <a:buFont typeface="Arial" panose="020B0604020202020204" pitchFamily="34" charset="0"/>
-              <a:buChar char="•"/>
-            </a:pPr>
-            <a:r>
-              <a:rPr lang="en-US" b="1"/>
-              <a:t>Preventive Health Focus</a:t>
-            </a:r>
-            <a:r>
-              <a:rPr lang="en-US"/>
-              <a:t> – Suggest diets for chronic disease management (e.g., diabetes-friendly or heart-healthy plans). </a:t>
-            </a:r>
-          </a:p>
-          <a:p>
-            <a:pPr marL="285750" indent="-285750" fontAlgn="base">
-              <a:buFont typeface="Arial" panose="020B0604020202020204" pitchFamily="34" charset="0"/>
-              <a:buChar char="•"/>
-            </a:pPr>
-            <a:r>
-              <a:rPr lang="en-US" b="1"/>
-              <a:t>Multi-Agent System</a:t>
-            </a:r>
-            <a:r>
-              <a:rPr lang="en-US"/>
-              <a:t> – </a:t>
-            </a:r>
-          </a:p>
-          <a:p>
-            <a:pPr marL="285750" indent="-285750" fontAlgn="base">
-              <a:buFont typeface="Arial" panose="020B0604020202020204" pitchFamily="34" charset="0"/>
-              <a:buChar char="•"/>
-            </a:pPr>
-            <a:r>
-              <a:rPr lang="en-US" b="1"/>
-              <a:t>Nutrition Knowledge Agent</a:t>
-            </a:r>
-            <a:r>
-              <a:rPr lang="en-US"/>
-              <a:t> (fetches nutritional data) </a:t>
-            </a:r>
-          </a:p>
-          <a:p>
-            <a:pPr marL="285750" indent="-285750" fontAlgn="base">
-              <a:buFont typeface="Arial" panose="020B0604020202020204" pitchFamily="34" charset="0"/>
-              <a:buChar char="•"/>
-            </a:pPr>
-            <a:r>
-              <a:rPr lang="en-US" b="1"/>
-              <a:t>Diet Recommendation Agent</a:t>
-            </a:r>
-            <a:r>
-              <a:rPr lang="en-US"/>
-              <a:t> (personalized meal plans) </a:t>
-            </a:r>
-          </a:p>
-          <a:p>
-            <a:pPr marL="285750" indent="-285750" fontAlgn="base">
-              <a:buFont typeface="Arial" panose="020B0604020202020204" pitchFamily="34" charset="0"/>
-              <a:buChar char="•"/>
-            </a:pPr>
-            <a:r>
-              <a:rPr lang="en-US" b="1"/>
-              <a:t>Health Advisory Agent</a:t>
-            </a:r>
-            <a:r>
-              <a:rPr lang="en-US"/>
-              <a:t> (preventive health suggestions) </a:t>
-            </a:r>
-          </a:p>
-          <a:p>
-            <a:pPr marL="285750" indent="-285750" fontAlgn="base">
-              <a:buFont typeface="Arial" panose="020B0604020202020204" pitchFamily="34" charset="0"/>
-              <a:buChar char="•"/>
-            </a:pPr>
-            <a:r>
-              <a:rPr lang="en-US" b="1"/>
-              <a:t>Food Log &amp; Feedback Agent</a:t>
-            </a:r>
-            <a:r>
-              <a:rPr lang="en-US"/>
-              <a:t> (meal tracking + analysis) </a:t>
-            </a:r>
-          </a:p>
-          <a:p>
-            <a:pPr marL="285750" indent="-285750" fontAlgn="base">
-              <a:buFont typeface="Arial" panose="020B0604020202020204" pitchFamily="34" charset="0"/>
-              <a:buChar char="•"/>
-            </a:pPr>
-            <a:r>
-              <a:rPr lang="en-US" b="1"/>
-              <a:t>Visualization Dashboard</a:t>
-            </a:r>
-            <a:r>
-              <a:rPr lang="en-US"/>
-              <a:t> – Show daily/weekly nutrient intake, deficiencies, and progress toward health goals. </a:t>
-            </a:r>
-          </a:p>
-          <a:p>
-            <a:pPr fontAlgn="base"/>
-            <a:endParaRPr lang="en-US"/>
-          </a:p>
-          <a:p>
-            <a:endParaRPr lang="en-IN"/>
+              <a:t>Langflow visually orchestrates agent workflows, watsonx.ai guarantees scalable Granite model deployment with zero hallucinations, and a responsive Streamlit UI provides voice playback across regional Indian languages.</a:t>
+            </a:r>
           </a:p>
         </p:txBody>
       </p:sp>
       <p:sp>
         <p:nvSpPr>
-          <p:cNvPr id="3" name="Rounded Rectangle 2"/>
-          <p:cNvSpPr/>
+          <p:cNvPr id="3" name="TextBox 2">
+            <a:extLst>
+              <a:ext uri="{FF2B5EF4-FFF2-40B4-BE49-F238E27FC236}">
+                <a16:creationId xmlns:a16="http://schemas.microsoft.com/office/drawing/2014/main" id="{3847FA31-EA47-D27A-9D69-AF50A3080AEC}"/>
+              </a:ext>
+            </a:extLst>
+          </p:cNvPr>
+          <p:cNvSpPr txBox="1"/>
           <p:nvPr/>
         </p:nvSpPr>
         <p:spPr>
           <a:xfrm>
-            <a:off x="731520" y="1645920"/>
-            <a:ext cx="3383280" cy="4572000"/>
+            <a:off x="576072" y="704088"/>
+            <a:ext cx="7214616" cy="461665"/>
           </a:xfrm>
-          <a:prstGeom prst="roundRect">
+          <a:prstGeom prst="rect">
             <a:avLst/>
           </a:prstGeom>
-          <a:solidFill>
-            <a:srgbClr val="F5F8F6"/>
-          </a:solidFill>
-          <a:ln w="19050">
-            <a:solidFill>
-              <a:srgbClr val="C8D7CD"/>
-            </a:solidFill>
-          </a:ln>
+          <a:noFill/>
         </p:spPr>
-        <p:style>
-          <a:lnRef idx="1">
-            <a:schemeClr val="accent1"/>
-          </a:lnRef>
-          <a:fillRef idx="3">
-            <a:schemeClr val="accent1"/>
-          </a:fillRef>
-          <a:effectRef idx="2">
-            <a:schemeClr val="accent1"/>
-          </a:effectRef>
-          <a:fontRef idx="minor">
-            <a:schemeClr val="lt1"/>
-          </a:fontRef>
-        </p:style>
         <p:txBody>
-          <a:bodyPr rtlCol="0" anchor="ctr" wrap="square" lIns="228600" tIns="182880" rIns="228600"/>
+          <a:bodyPr wrap="square" rtlCol="0">
+            <a:spAutoFit/>
+          </a:bodyPr>
           <a:lstStyle/>
           <a:p>
-            <a:pPr algn="ctr">
-              <a:defRPr sz="2000" b="1">
-                <a:solidFill>
-                  <a:srgbClr val="0F3B2E"/>
-                </a:solidFill>
-                <a:latin typeface="Arial"/>
-              </a:defRPr>
-            </a:pPr>
-            <a:r>
-              <a:t>Autonomous Agromet Sentinel</a:t>
-            </a:r>
-          </a:p>
-          <a:p>
-            <a:pPr>
-              <a:spcBef>
-                <a:spcPts val="600"/>
-              </a:spcBef>
-              <a:defRPr sz="1500">
-                <a:solidFill>
-                  <a:srgbClr val="1E293B"/>
-                </a:solidFill>
-                <a:latin typeface="Arial"/>
-              </a:defRPr>
-            </a:pPr>
-            <a:r>
-              <a:t>• Continuous background polling of live weather telemetry.</a:t>
-            </a:r>
-          </a:p>
-          <a:p>
-            <a:pPr>
-              <a:spcBef>
-                <a:spcPts val="600"/>
-              </a:spcBef>
-              <a:defRPr sz="1500">
-                <a:solidFill>
-                  <a:srgbClr val="1E293B"/>
-                </a:solidFill>
-                <a:latin typeface="Arial"/>
-              </a:defRPr>
-            </a:pPr>
-            <a:r>
-              <a:t>• Proactive red alert dispatch before active spore germination.</a:t>
-            </a:r>
-          </a:p>
-          <a:p>
-            <a:pPr>
-              <a:spcBef>
-                <a:spcPts val="600"/>
-              </a:spcBef>
-              <a:defRPr sz="1500">
-                <a:solidFill>
-                  <a:srgbClr val="1E293B"/>
-                </a:solidFill>
-                <a:latin typeface="Arial"/>
-              </a:defRPr>
-            </a:pPr>
-            <a:r>
-              <a:t>• Eliminates reliance on manual user query initiation.</a:t>
-            </a:r>
-          </a:p>
-        </p:txBody>
-      </p:sp>
-      <p:sp>
-        <p:nvSpPr>
-          <p:cNvPr id="4" name="Rounded Rectangle 3"/>
-          <p:cNvSpPr/>
-          <p:nvPr/>
-        </p:nvSpPr>
-        <p:spPr>
-          <a:xfrm>
-            <a:off x="4389120" y="1645920"/>
-            <a:ext cx="3383280" cy="4572000"/>
-          </a:xfrm>
-          <a:prstGeom prst="roundRect">
-            <a:avLst/>
-          </a:prstGeom>
-          <a:solidFill>
-            <a:srgbClr val="F5F8F6"/>
-          </a:solidFill>
-          <a:ln w="19050">
-            <a:solidFill>
-              <a:srgbClr val="C8D7CD"/>
-            </a:solidFill>
-          </a:ln>
-        </p:spPr>
-        <p:style>
-          <a:lnRef idx="1">
-            <a:schemeClr val="accent1"/>
-          </a:lnRef>
-          <a:fillRef idx="3">
-            <a:schemeClr val="accent1"/>
-          </a:fillRef>
-          <a:effectRef idx="2">
-            <a:schemeClr val="accent1"/>
-          </a:effectRef>
-          <a:fontRef idx="minor">
-            <a:schemeClr val="lt1"/>
-          </a:fontRef>
-        </p:style>
-        <p:txBody>
-          <a:bodyPr rtlCol="0" anchor="ctr" wrap="square" lIns="228600" tIns="182880" rIns="228600"/>
-          <a:lstStyle/>
-          <a:p>
-            <a:pPr algn="ctr">
-              <a:defRPr sz="2000" b="1">
-                <a:solidFill>
-                  <a:srgbClr val="0F3B2E"/>
-                </a:solidFill>
-                <a:latin typeface="Arial"/>
-              </a:defRPr>
-            </a:pPr>
-            <a:r>
-              <a:t>Langflow Agentic Orchestration</a:t>
-            </a:r>
-          </a:p>
-          <a:p>
-            <a:pPr>
-              <a:spcBef>
-                <a:spcPts val="600"/>
-              </a:spcBef>
-              <a:defRPr sz="1500">
-                <a:solidFill>
-                  <a:srgbClr val="1E293B"/>
-                </a:solidFill>
-                <a:latin typeface="Arial"/>
-              </a:defRPr>
-            </a:pPr>
-            <a:r>
-              <a:t>• Modular visual workflow connecting sensory inputs to LLM agents.</a:t>
-            </a:r>
-          </a:p>
-          <a:p>
-            <a:pPr>
-              <a:spcBef>
-                <a:spcPts val="600"/>
-              </a:spcBef>
-              <a:defRPr sz="1500">
-                <a:solidFill>
-                  <a:srgbClr val="1E293B"/>
-                </a:solidFill>
-                <a:latin typeface="Arial"/>
-              </a:defRPr>
-            </a:pPr>
-            <a:r>
-              <a:t>• Seamlessly integrates custom Python vision and weather tools.</a:t>
-            </a:r>
-          </a:p>
-          <a:p>
-            <a:pPr>
-              <a:spcBef>
-                <a:spcPts val="600"/>
-              </a:spcBef>
-              <a:defRPr sz="1500">
-                <a:solidFill>
-                  <a:srgbClr val="1E293B"/>
-                </a:solidFill>
-                <a:latin typeface="Arial"/>
-              </a:defRPr>
-            </a:pPr>
-            <a:r>
-              <a:t>• Coordinates ChromaDB RAG retrieval with IBM Granite.</a:t>
-            </a:r>
-          </a:p>
-        </p:txBody>
-      </p:sp>
-      <p:sp>
-        <p:nvSpPr>
-          <p:cNvPr id="5" name="Rounded Rectangle 4"/>
-          <p:cNvSpPr/>
-          <p:nvPr/>
-        </p:nvSpPr>
-        <p:spPr>
-          <a:xfrm>
-            <a:off x="8046720" y="1645920"/>
-            <a:ext cx="3383280" cy="4572000"/>
-          </a:xfrm>
-          <a:prstGeom prst="roundRect">
-            <a:avLst/>
-          </a:prstGeom>
-          <a:solidFill>
-            <a:srgbClr val="F5F8F6"/>
-          </a:solidFill>
-          <a:ln w="19050">
-            <a:solidFill>
-              <a:srgbClr val="C8D7CD"/>
-            </a:solidFill>
-          </a:ln>
-        </p:spPr>
-        <p:style>
-          <a:lnRef idx="1">
-            <a:schemeClr val="accent1"/>
-          </a:lnRef>
-          <a:fillRef idx="3">
-            <a:schemeClr val="accent1"/>
-          </a:fillRef>
-          <a:effectRef idx="2">
-            <a:schemeClr val="accent1"/>
-          </a:effectRef>
-          <a:fontRef idx="minor">
-            <a:schemeClr val="lt1"/>
-          </a:fontRef>
-        </p:style>
-        <p:txBody>
-          <a:bodyPr rtlCol="0" anchor="ctr" wrap="square" lIns="228600" tIns="182880" rIns="228600"/>
-          <a:lstStyle/>
-          <a:p>
-            <a:pPr algn="ctr">
-              <a:defRPr sz="2000" b="1">
-                <a:solidFill>
-                  <a:srgbClr val="0F3B2E"/>
-                </a:solidFill>
-                <a:latin typeface="Arial"/>
-              </a:defRPr>
-            </a:pPr>
-            <a:r>
-              <a:t>ICAR-Grounded Granite AI</a:t>
-            </a:r>
-          </a:p>
-          <a:p>
-            <a:pPr>
-              <a:spcBef>
-                <a:spcPts val="600"/>
-              </a:spcBef>
-              <a:defRPr sz="1500">
-                <a:solidFill>
-                  <a:srgbClr val="1E293B"/>
-                </a:solidFill>
-                <a:latin typeface="Arial"/>
-              </a:defRPr>
-            </a:pPr>
-            <a:r>
-              <a:t>• Powered by IBM Granite (ibm/granite-4-h-small) on watsonx.ai.</a:t>
-            </a:r>
-          </a:p>
-          <a:p>
-            <a:pPr>
-              <a:spcBef>
-                <a:spcPts val="600"/>
-              </a:spcBef>
-              <a:defRPr sz="1500">
-                <a:solidFill>
-                  <a:srgbClr val="1E293B"/>
-                </a:solidFill>
-                <a:latin typeface="Arial"/>
-              </a:defRPr>
-            </a:pPr>
-            <a:r>
-              <a:t>• Restricts treatments to verified ICAR/KVK active ingredients.</a:t>
-            </a:r>
-          </a:p>
-          <a:p>
-            <a:pPr>
-              <a:spcBef>
-                <a:spcPts val="600"/>
-              </a:spcBef>
-              <a:defRPr sz="1500">
-                <a:solidFill>
-                  <a:srgbClr val="1E293B"/>
-                </a:solidFill>
-                <a:latin typeface="Arial"/>
-              </a:defRPr>
-            </a:pPr>
-            <a:r>
-              <a:t>• Vernacular audio advisory delivery in KA, TE, HI, and EN.</a:t>
-            </a:r>
+            <a:r>
+              <a:rPr lang="en-US" sz="2400" b="1"/>
+              <a:t>Problem Statement -</a:t>
+            </a:r>
+            <a:endParaRPr lang="en-IN" sz="2400" b="1"/>
           </a:p>
         </p:txBody>
       </p:sp>
@@ -14687,17 +15177,7 @@
           </a:bodyPr>
           <a:lstStyle/>
           <a:p>
-            <a:pPr fontAlgn="base" algn="l">
-              <a:defRPr sz="2800" b="1">
-                <a:solidFill>
-                  <a:srgbClr val="0F3B2E"/>
-                </a:solidFill>
-                <a:latin typeface="Arial"/>
-              </a:defRPr>
-            </a:pPr>
-            <a:r>
-              <a:t>Project Objectives</a:t>
-            </a:r>
+            <a:pPr fontAlgn="base"/>
             <a:endParaRPr lang="en-US" b="1"/>
           </a:p>
           <a:p>
@@ -14849,341 +15329,37 @@
       </p:sp>
       <p:sp>
         <p:nvSpPr>
-          <p:cNvPr id="3" name="Rounded Rectangle 2"/>
-          <p:cNvSpPr/>
+          <p:cNvPr id="3" name="TextBox 2">
+            <a:extLst>
+              <a:ext uri="{FF2B5EF4-FFF2-40B4-BE49-F238E27FC236}">
+                <a16:creationId xmlns:a16="http://schemas.microsoft.com/office/drawing/2014/main" id="{527F30CC-07EF-8FCC-DA00-C9212F5DAECE}"/>
+              </a:ext>
+            </a:extLst>
+          </p:cNvPr>
+          <p:cNvSpPr txBox="1"/>
           <p:nvPr/>
         </p:nvSpPr>
         <p:spPr>
           <a:xfrm>
-            <a:off x="731520" y="1645920"/>
-            <a:ext cx="10698480" cy="841248"/>
+            <a:off x="576072" y="704088"/>
+            <a:ext cx="7214616" cy="461665"/>
           </a:xfrm>
-          <a:prstGeom prst="roundRect">
+          <a:prstGeom prst="rect">
             <a:avLst/>
           </a:prstGeom>
-          <a:solidFill>
-            <a:srgbClr val="F5F8F6"/>
-          </a:solidFill>
-          <a:ln w="19050">
-            <a:solidFill>
-              <a:srgbClr val="C8D7CD"/>
-            </a:solidFill>
-          </a:ln>
+          <a:noFill/>
         </p:spPr>
-        <p:style>
-          <a:lnRef idx="1">
-            <a:schemeClr val="accent1"/>
-          </a:lnRef>
-          <a:fillRef idx="3">
-            <a:schemeClr val="accent1"/>
-          </a:fillRef>
-          <a:effectRef idx="2">
-            <a:schemeClr val="accent1"/>
-          </a:effectRef>
-          <a:fontRef idx="minor">
-            <a:schemeClr val="lt1"/>
-          </a:fontRef>
-        </p:style>
         <p:txBody>
-          <a:bodyPr rtlCol="0" anchor="ctr" wrap="square" lIns="182880" tIns="73152"/>
+          <a:bodyPr wrap="square" rtlCol="0">
+            <a:spAutoFit/>
+          </a:bodyPr>
           <a:lstStyle/>
           <a:p>
-            <a:pPr algn="ctr">
-              <a:defRPr sz="1900" b="1">
-                <a:solidFill>
-                  <a:srgbClr val="0F3B2E"/>
-                </a:solidFill>
-                <a:latin typeface="Arial"/>
-              </a:defRPr>
-            </a:pPr>
-            <a:r>
-              <a:t>Objective 1: Zero-Latency Agromet Monitoring</a:t>
-            </a:r>
-          </a:p>
-          <a:p>
-            <a:pPr>
-              <a:defRPr sz="1400">
-                <a:solidFill>
-                  <a:srgbClr val="1E293B"/>
-                </a:solidFill>
-                <a:latin typeface="Arial"/>
-              </a:defRPr>
-            </a:pPr>
-            <a:r>
-              <a:t>Continuously track hyper-local temperature, relative humidity (&gt;78% RH), and precipitation thresholds to predict pathogen outbreaks.</a:t>
-            </a:r>
-          </a:p>
-        </p:txBody>
-      </p:sp>
-      <p:sp>
-        <p:nvSpPr>
-          <p:cNvPr id="4" name="Rounded Rectangle 3"/>
-          <p:cNvSpPr/>
-          <p:nvPr/>
-        </p:nvSpPr>
-        <p:spPr>
-          <a:xfrm>
-            <a:off x="731520" y="2578608"/>
-            <a:ext cx="10698480" cy="841248"/>
-          </a:xfrm>
-          <a:prstGeom prst="roundRect">
-            <a:avLst/>
-          </a:prstGeom>
-          <a:solidFill>
-            <a:srgbClr val="F5F8F6"/>
-          </a:solidFill>
-          <a:ln w="19050">
-            <a:solidFill>
-              <a:srgbClr val="C8D7CD"/>
-            </a:solidFill>
-          </a:ln>
-        </p:spPr>
-        <p:style>
-          <a:lnRef idx="1">
-            <a:schemeClr val="accent1"/>
-          </a:lnRef>
-          <a:fillRef idx="3">
-            <a:schemeClr val="accent1"/>
-          </a:fillRef>
-          <a:effectRef idx="2">
-            <a:schemeClr val="accent1"/>
-          </a:effectRef>
-          <a:fontRef idx="minor">
-            <a:schemeClr val="lt1"/>
-          </a:fontRef>
-        </p:style>
-        <p:txBody>
-          <a:bodyPr rtlCol="0" anchor="ctr" wrap="square" lIns="182880" tIns="73152"/>
-          <a:lstStyle/>
-          <a:p>
-            <a:pPr algn="ctr">
-              <a:defRPr sz="1900" b="1">
-                <a:solidFill>
-                  <a:srgbClr val="0F3B2E"/>
-                </a:solidFill>
-                <a:latin typeface="Arial"/>
-              </a:defRPr>
-            </a:pPr>
-            <a:r>
-              <a:t>Objective 2: Multi-Modal Pathology Diagnostics</a:t>
-            </a:r>
-          </a:p>
-          <a:p>
-            <a:pPr>
-              <a:defRPr sz="1400">
-                <a:solidFill>
-                  <a:srgbClr val="1E293B"/>
-                </a:solidFill>
-                <a:latin typeface="Arial"/>
-              </a:defRPr>
-            </a:pPr>
-            <a:r>
-              <a:t>Deterministic OpenCV color segmentation to isolate foliar chlorosis, fruit rot craters, and fungal necrotic lesions.</a:t>
-            </a:r>
-          </a:p>
-        </p:txBody>
-      </p:sp>
-      <p:sp>
-        <p:nvSpPr>
-          <p:cNvPr id="5" name="Rounded Rectangle 4"/>
-          <p:cNvSpPr/>
-          <p:nvPr/>
-        </p:nvSpPr>
-        <p:spPr>
-          <a:xfrm>
-            <a:off x="731520" y="3511296"/>
-            <a:ext cx="10698480" cy="841248"/>
-          </a:xfrm>
-          <a:prstGeom prst="roundRect">
-            <a:avLst/>
-          </a:prstGeom>
-          <a:solidFill>
-            <a:srgbClr val="F5F8F6"/>
-          </a:solidFill>
-          <a:ln w="19050">
-            <a:solidFill>
-              <a:srgbClr val="C8D7CD"/>
-            </a:solidFill>
-          </a:ln>
-        </p:spPr>
-        <p:style>
-          <a:lnRef idx="1">
-            <a:schemeClr val="accent1"/>
-          </a:lnRef>
-          <a:fillRef idx="3">
-            <a:schemeClr val="accent1"/>
-          </a:fillRef>
-          <a:effectRef idx="2">
-            <a:schemeClr val="accent1"/>
-          </a:effectRef>
-          <a:fontRef idx="minor">
-            <a:schemeClr val="lt1"/>
-          </a:fontRef>
-        </p:style>
-        <p:txBody>
-          <a:bodyPr rtlCol="0" anchor="ctr" wrap="square" lIns="182880" tIns="73152"/>
-          <a:lstStyle/>
-          <a:p>
-            <a:pPr algn="ctr">
-              <a:defRPr sz="1900" b="1">
-                <a:solidFill>
-                  <a:srgbClr val="0F3B2E"/>
-                </a:solidFill>
-                <a:latin typeface="Arial"/>
-              </a:defRPr>
-            </a:pPr>
-            <a:r>
-              <a:t>Objective 3: Langflow Agentic Flow Orchestration</a:t>
-            </a:r>
-          </a:p>
-          <a:p>
-            <a:pPr>
-              <a:defRPr sz="1400">
-                <a:solidFill>
-                  <a:srgbClr val="1E293B"/>
-                </a:solidFill>
-                <a:latin typeface="Arial"/>
-              </a:defRPr>
-            </a:pPr>
-            <a:r>
-              <a:t>Build an extensible, modular visual pipeline connecting user input, sensor telemetry, RAG, and IBM Granite.</a:t>
-            </a:r>
-          </a:p>
-        </p:txBody>
-      </p:sp>
-      <p:sp>
-        <p:nvSpPr>
-          <p:cNvPr id="6" name="Rounded Rectangle 5"/>
-          <p:cNvSpPr/>
-          <p:nvPr/>
-        </p:nvSpPr>
-        <p:spPr>
-          <a:xfrm>
-            <a:off x="731520" y="4443984"/>
-            <a:ext cx="10698480" cy="841248"/>
-          </a:xfrm>
-          <a:prstGeom prst="roundRect">
-            <a:avLst/>
-          </a:prstGeom>
-          <a:solidFill>
-            <a:srgbClr val="F5F8F6"/>
-          </a:solidFill>
-          <a:ln w="19050">
-            <a:solidFill>
-              <a:srgbClr val="C8D7CD"/>
-            </a:solidFill>
-          </a:ln>
-        </p:spPr>
-        <p:style>
-          <a:lnRef idx="1">
-            <a:schemeClr val="accent1"/>
-          </a:lnRef>
-          <a:fillRef idx="3">
-            <a:schemeClr val="accent1"/>
-          </a:fillRef>
-          <a:effectRef idx="2">
-            <a:schemeClr val="accent1"/>
-          </a:effectRef>
-          <a:fontRef idx="minor">
-            <a:schemeClr val="lt1"/>
-          </a:fontRef>
-        </p:style>
-        <p:txBody>
-          <a:bodyPr rtlCol="0" anchor="ctr" wrap="square" lIns="182880" tIns="73152"/>
-          <a:lstStyle/>
-          <a:p>
-            <a:pPr algn="ctr">
-              <a:defRPr sz="1900" b="1">
-                <a:solidFill>
-                  <a:srgbClr val="0F3B2E"/>
-                </a:solidFill>
-                <a:latin typeface="Arial"/>
-              </a:defRPr>
-            </a:pPr>
-            <a:r>
-              <a:t>Objective 4: Zero-Hallucination Chemical Grounding</a:t>
-            </a:r>
-          </a:p>
-          <a:p>
-            <a:pPr>
-              <a:defRPr sz="1400">
-                <a:solidFill>
-                  <a:srgbClr val="1E293B"/>
-                </a:solidFill>
-                <a:latin typeface="Arial"/>
-              </a:defRPr>
-            </a:pPr>
-            <a:r>
-              <a:t>Integrate ICAR/KVK vector retrieval to guarantee calibrated active ingredient recommendations (g/L or ml/L).</a:t>
-            </a:r>
-          </a:p>
-        </p:txBody>
-      </p:sp>
-      <p:sp>
-        <p:nvSpPr>
-          <p:cNvPr id="7" name="Rounded Rectangle 6"/>
-          <p:cNvSpPr/>
-          <p:nvPr/>
-        </p:nvSpPr>
-        <p:spPr>
-          <a:xfrm>
-            <a:off x="731520" y="5376672"/>
-            <a:ext cx="10698480" cy="841248"/>
-          </a:xfrm>
-          <a:prstGeom prst="roundRect">
-            <a:avLst/>
-          </a:prstGeom>
-          <a:solidFill>
-            <a:srgbClr val="F5F8F6"/>
-          </a:solidFill>
-          <a:ln w="19050">
-            <a:solidFill>
-              <a:srgbClr val="C8D7CD"/>
-            </a:solidFill>
-          </a:ln>
-        </p:spPr>
-        <p:style>
-          <a:lnRef idx="1">
-            <a:schemeClr val="accent1"/>
-          </a:lnRef>
-          <a:fillRef idx="3">
-            <a:schemeClr val="accent1"/>
-          </a:fillRef>
-          <a:effectRef idx="2">
-            <a:schemeClr val="accent1"/>
-          </a:effectRef>
-          <a:fontRef idx="minor">
-            <a:schemeClr val="lt1"/>
-          </a:fontRef>
-        </p:style>
-        <p:txBody>
-          <a:bodyPr rtlCol="0" anchor="ctr" wrap="square" lIns="182880" tIns="73152"/>
-          <a:lstStyle/>
-          <a:p>
-            <a:pPr algn="ctr">
-              <a:defRPr sz="1900" b="1">
-                <a:solidFill>
-                  <a:srgbClr val="0F3B2E"/>
-                </a:solidFill>
-                <a:latin typeface="Arial"/>
-              </a:defRPr>
-            </a:pPr>
-            <a:r>
-              <a:t>Objective 5: Multi-Lingual Vernacular Inclusivity</a:t>
-            </a:r>
-          </a:p>
-          <a:p>
-            <a:pPr>
-              <a:defRPr sz="1400">
-                <a:solidFill>
-                  <a:srgbClr val="1E293B"/>
-                </a:solidFill>
-                <a:latin typeface="Arial"/>
-              </a:defRPr>
-            </a:pPr>
-            <a:r>
-              <a:t>Deploy multi-tier regional dialect voice generation (Kannada, Telugu, Hindi, English) for smallholder usability.</a:t>
-            </a:r>
+            <a:r>
+              <a:rPr lang="en-US" sz="2400" b="1"/>
+              <a:t>Proposed Solution -</a:t>
+            </a:r>
+            <a:endParaRPr lang="en-IN" sz="2400" b="1"/>
           </a:p>
         </p:txBody>
       </p:sp>
@@ -15251,15 +15427,8 @@
           </a:bodyPr>
           <a:lstStyle/>
           <a:p>
-            <a:pPr algn="l">
-              <a:defRPr sz="2800" b="1">
-                <a:solidFill>
-                  <a:srgbClr val="0F3B2E"/>
-                </a:solidFill>
-                <a:latin typeface="Arial"/>
-              </a:defRPr>
-            </a:pPr>
-            <a:r>
+            <a:r>
+              <a:rPr lang="en-US" sz="2400" b="1"/>
               <a:t>Technology Used</a:t>
             </a:r>
             <a:endParaRPr lang="en-IN" sz="2400" b="1"/>
@@ -15268,422 +15437,213 @@
       </p:sp>
       <p:sp>
         <p:nvSpPr>
-          <p:cNvPr id="3" name="Rounded Rectangle 2"/>
-          <p:cNvSpPr/>
+          <p:cNvPr id="3" name="TextBox 2">
+            <a:extLst>
+              <a:ext uri="{FF2B5EF4-FFF2-40B4-BE49-F238E27FC236}">
+                <a16:creationId xmlns:a16="http://schemas.microsoft.com/office/drawing/2014/main" id="{4A7608B5-9906-EFCF-959A-E89FC2E3EE19}"/>
+              </a:ext>
+            </a:extLst>
+          </p:cNvPr>
+          <p:cNvSpPr txBox="1"/>
           <p:nvPr/>
         </p:nvSpPr>
         <p:spPr>
           <a:xfrm>
-            <a:off x="731520" y="1645920"/>
-            <a:ext cx="3383280" cy="4572000"/>
+            <a:off x="777240" y="1207008"/>
+            <a:ext cx="10515600" cy="5509200"/>
           </a:xfrm>
-          <a:prstGeom prst="roundRect">
+          <a:prstGeom prst="rect">
             <a:avLst/>
           </a:prstGeom>
-          <a:solidFill>
-            <a:srgbClr val="F5F8F6"/>
-          </a:solidFill>
-          <a:ln w="19050">
-            <a:solidFill>
-              <a:srgbClr val="C8D7CD"/>
-            </a:solidFill>
-          </a:ln>
+          <a:noFill/>
         </p:spPr>
-        <p:style>
-          <a:lnRef idx="1">
-            <a:schemeClr val="accent1"/>
-          </a:lnRef>
-          <a:fillRef idx="3">
-            <a:schemeClr val="accent1"/>
-          </a:fillRef>
-          <a:effectRef idx="2">
-            <a:schemeClr val="accent1"/>
-          </a:effectRef>
-          <a:fontRef idx="minor">
-            <a:schemeClr val="lt1"/>
-          </a:fontRef>
-        </p:style>
         <p:txBody>
-          <a:bodyPr rtlCol="0" anchor="ctr" wrap="square" lIns="228600" tIns="182880" rIns="228600"/>
+          <a:bodyPr wrap="square" rtlCol="0">
+            <a:spAutoFit/>
+          </a:bodyPr>
           <a:lstStyle/>
           <a:p>
-            <a:pPr algn="ctr">
-              <a:defRPr sz="2000" b="1">
-                <a:solidFill>
-                  <a:srgbClr val="0F3B2E"/>
-                </a:solidFill>
-                <a:latin typeface="Arial"/>
-              </a:defRPr>
+            <a:pPr marL="285750" indent="-285750">
+              <a:buFont typeface="Arial" panose="020B0604020202020204" pitchFamily="34" charset="0"/>
+              <a:buChar char="•"/>
             </a:pPr>
             <a:r>
-              <a:t>Langflow Platform &amp; Components</a:t>
-            </a:r>
-          </a:p>
-          <a:p>
-            <a:pPr>
-              <a:spcBef>
-                <a:spcPts val="600"/>
-              </a:spcBef>
-              <a:defRPr sz="1500">
-                <a:solidFill>
-                  <a:srgbClr val="1E293B"/>
-                </a:solidFill>
-                <a:latin typeface="Arial"/>
-              </a:defRPr>
+              <a:rPr lang="en-US" sz="1800" b="1" err="1"/>
+              <a:t>Langflow</a:t>
+            </a:r>
+            <a:r>
+              <a:rPr lang="en-US" sz="1800" b="1"/>
+              <a:t> platform </a:t>
+            </a:r>
+            <a:r>
+              <a:rPr lang="en-US" sz="1800"/>
+              <a:t>-For designing and orchestrating multi-agent workflows visually</a:t>
+            </a:r>
+          </a:p>
+          <a:p>
+            <a:pPr marL="285750" indent="-285750">
+              <a:buFont typeface="Arial" panose="020B0604020202020204" pitchFamily="34" charset="0"/>
+              <a:buChar char="•"/>
             </a:pPr>
-            <a:r>
-              <a:t>• Langflow Platform (Agentic visual pipeline)</a:t>
-            </a:r>
-          </a:p>
-          <a:p>
-            <a:pPr>
-              <a:spcBef>
-                <a:spcPts val="600"/>
-              </a:spcBef>
-              <a:defRPr sz="1500">
-                <a:solidFill>
-                  <a:srgbClr val="1E293B"/>
-                </a:solidFill>
-                <a:latin typeface="Arial"/>
-              </a:defRPr>
+            <a:endParaRPr lang="en-US" sz="1800"/>
+          </a:p>
+          <a:p>
+            <a:pPr marL="285750" indent="-285750">
+              <a:buFont typeface="Arial" panose="020B0604020202020204" pitchFamily="34" charset="0"/>
+              <a:buChar char="•"/>
             </a:pPr>
-            <a:r>
-              <a:t>• Langflow Component Names:</a:t>
-            </a:r>
-          </a:p>
-          <a:p>
-            <a:pPr>
-              <a:spcBef>
-                <a:spcPts val="600"/>
-              </a:spcBef>
-              <a:defRPr sz="1500">
-                <a:solidFill>
-                  <a:srgbClr val="1E293B"/>
-                </a:solidFill>
-                <a:latin typeface="Arial"/>
-              </a:defRPr>
+            <a:endParaRPr lang="en-US" sz="1800"/>
+          </a:p>
+          <a:p>
+            <a:pPr marL="285750" indent="-285750">
+              <a:buFont typeface="Arial" panose="020B0604020202020204" pitchFamily="34" charset="0"/>
+              <a:buChar char="•"/>
             </a:pPr>
             <a:r>
-              <a:t>  - Agent Component (Decision reasoning)</a:t>
-            </a:r>
-          </a:p>
-          <a:p>
-            <a:pPr>
-              <a:spcBef>
-                <a:spcPts val="600"/>
-              </a:spcBef>
-              <a:defRPr sz="1500">
-                <a:solidFill>
-                  <a:srgbClr val="1E293B"/>
-                </a:solidFill>
-                <a:latin typeface="Arial"/>
-              </a:defRPr>
+              <a:rPr lang="en-US" sz="1800" b="1"/>
+              <a:t>IBM </a:t>
+            </a:r>
+            <a:r>
+              <a:rPr lang="en-US" sz="1800" b="1" err="1"/>
+              <a:t>Grainte</a:t>
+            </a:r>
+            <a:r>
+              <a:rPr lang="en-US" sz="1800" b="1"/>
+              <a:t> model </a:t>
+            </a:r>
+            <a:r>
+              <a:rPr lang="en-US" sz="1800"/>
+              <a:t>-  for </a:t>
+            </a:r>
+            <a:r>
+              <a:rPr lang="en-US" sz="1800" err="1"/>
+              <a:t>eg</a:t>
+            </a:r>
+            <a:r>
+              <a:rPr lang="en-US" sz="1800"/>
+              <a:t> – ibm-granite-3-2-8b – For natural language understanding, reasoning, and personalization</a:t>
+            </a:r>
+          </a:p>
+          <a:p>
+            <a:pPr marL="285750" indent="-285750">
+              <a:buFont typeface="Arial" panose="020B0604020202020204" pitchFamily="34" charset="0"/>
+              <a:buChar char="•"/>
             </a:pPr>
-            <a:r>
-              <a:t>  - Chat Input &amp; Chat Output Components</a:t>
-            </a:r>
-          </a:p>
-          <a:p>
-            <a:pPr>
-              <a:spcBef>
-                <a:spcPts val="600"/>
-              </a:spcBef>
-              <a:defRPr sz="1500">
-                <a:solidFill>
-                  <a:srgbClr val="1E293B"/>
-                </a:solidFill>
-                <a:latin typeface="Arial"/>
-              </a:defRPr>
+            <a:endParaRPr lang="en-US" sz="1800"/>
+          </a:p>
+          <a:p>
+            <a:pPr marL="285750" indent="-285750">
+              <a:buFont typeface="Arial" panose="020B0604020202020204" pitchFamily="34" charset="0"/>
+              <a:buChar char="•"/>
             </a:pPr>
             <a:r>
-              <a:t>  - Custom Python Tool Component</a:t>
-            </a:r>
-          </a:p>
-          <a:p>
-            <a:pPr>
-              <a:spcBef>
-                <a:spcPts val="600"/>
-              </a:spcBef>
-              <a:defRPr sz="1500">
-                <a:solidFill>
-                  <a:srgbClr val="1E293B"/>
-                </a:solidFill>
-                <a:latin typeface="Arial"/>
-              </a:defRPr>
+              <a:rPr lang="en-US" sz="1800" b="1"/>
+              <a:t>IBM Cloud </a:t>
+            </a:r>
+            <a:r>
+              <a:rPr lang="en-US" sz="1800"/>
+              <a:t>– It provides the infrastructure to build, deploy, and scale the Nutrition Agent efficiently. IBM Cloud enables a </a:t>
+            </a:r>
+            <a:r>
+              <a:rPr lang="en-US" sz="1800" b="1"/>
+              <a:t>reliable, secure, and scalable environment</a:t>
+            </a:r>
+            <a:r>
+              <a:rPr lang="en-US" sz="1800"/>
+              <a:t> for deploying the Nutrition Agent.</a:t>
+            </a:r>
+          </a:p>
+          <a:p>
+            <a:pPr marL="285750" indent="-285750">
+              <a:buFont typeface="Arial" panose="020B0604020202020204" pitchFamily="34" charset="0"/>
+              <a:buChar char="•"/>
             </a:pPr>
-            <a:r>
-              <a:t>  - ChromaDB Vector Store Component</a:t>
-            </a:r>
-          </a:p>
-        </p:txBody>
-      </p:sp>
-      <p:sp>
-        <p:nvSpPr>
-          <p:cNvPr id="4" name="Rounded Rectangle 3"/>
-          <p:cNvSpPr/>
-          <p:nvPr/>
-        </p:nvSpPr>
-        <p:spPr>
-          <a:xfrm>
-            <a:off x="4389120" y="1645920"/>
-            <a:ext cx="3383280" cy="4572000"/>
-          </a:xfrm>
-          <a:prstGeom prst="roundRect">
-            <a:avLst/>
-          </a:prstGeom>
-          <a:solidFill>
-            <a:srgbClr val="F5F8F6"/>
-          </a:solidFill>
-          <a:ln w="19050">
-            <a:solidFill>
-              <a:srgbClr val="C8D7CD"/>
-            </a:solidFill>
-          </a:ln>
-        </p:spPr>
-        <p:style>
-          <a:lnRef idx="1">
-            <a:schemeClr val="accent1"/>
-          </a:lnRef>
-          <a:fillRef idx="3">
-            <a:schemeClr val="accent1"/>
-          </a:fillRef>
-          <a:effectRef idx="2">
-            <a:schemeClr val="accent1"/>
-          </a:effectRef>
-          <a:fontRef idx="minor">
-            <a:schemeClr val="lt1"/>
-          </a:fontRef>
-        </p:style>
-        <p:txBody>
-          <a:bodyPr rtlCol="0" anchor="ctr" wrap="square" lIns="228600" tIns="182880" rIns="228600"/>
-          <a:lstStyle/>
-          <a:p>
-            <a:pPr algn="ctr">
-              <a:defRPr sz="2000" b="1">
-                <a:solidFill>
-                  <a:srgbClr val="0F3B2E"/>
-                </a:solidFill>
-                <a:latin typeface="Arial"/>
-              </a:defRPr>
+            <a:endParaRPr lang="en-US" sz="1800"/>
+          </a:p>
+          <a:p>
+            <a:pPr marL="285750" indent="-285750">
+              <a:buFont typeface="Arial" panose="020B0604020202020204" pitchFamily="34" charset="0"/>
+              <a:buChar char="•"/>
             </a:pPr>
             <a:r>
-              <a:t>IBM Granite &amp; Cloud Platform</a:t>
-            </a:r>
-          </a:p>
-          <a:p>
-            <a:pPr>
-              <a:spcBef>
-                <a:spcPts val="600"/>
-              </a:spcBef>
-              <a:defRPr sz="1500">
-                <a:solidFill>
-                  <a:srgbClr val="1E293B"/>
-                </a:solidFill>
-                <a:latin typeface="Arial"/>
-              </a:defRPr>
+              <a:rPr lang="en-US" sz="1800" b="1"/>
+              <a:t>RAG– </a:t>
+            </a:r>
+            <a:r>
+              <a:rPr lang="en-US" sz="1800"/>
+              <a:t>RAG to </a:t>
+            </a:r>
+            <a:r>
+              <a:rPr lang="en-US" sz="1800" b="1"/>
+              <a:t>fetch real data first, then generate intelligent answers</a:t>
+            </a:r>
+            <a:r>
+              <a:rPr lang="en-US" sz="1800"/>
+              <a:t>, making the Nutrition Agent more trustworthy and effective.</a:t>
+            </a:r>
+          </a:p>
+          <a:p>
+            <a:pPr marL="285750" indent="-285750">
+              <a:buFont typeface="Arial" panose="020B0604020202020204" pitchFamily="34" charset="0"/>
+              <a:buChar char="•"/>
             </a:pPr>
-            <a:r>
-              <a:t>• IBM watsonx.ai Cloud Platform</a:t>
-            </a:r>
-          </a:p>
-          <a:p>
-            <a:pPr>
-              <a:spcBef>
-                <a:spcPts val="600"/>
-              </a:spcBef>
-              <a:defRPr sz="1500">
-                <a:solidFill>
-                  <a:srgbClr val="1E293B"/>
-                </a:solidFill>
-                <a:latin typeface="Arial"/>
-              </a:defRPr>
+            <a:endParaRPr lang="en-US" sz="1800"/>
+          </a:p>
+          <a:p>
+            <a:pPr marL="285750" indent="-285750">
+              <a:buFont typeface="Arial" panose="020B0604020202020204" pitchFamily="34" charset="0"/>
+              <a:buChar char="•"/>
             </a:pPr>
             <a:r>
-              <a:t>• IBM Granite Model: ibm/granite-4-h-small</a:t>
-            </a:r>
-          </a:p>
-          <a:p>
-            <a:pPr>
-              <a:spcBef>
-                <a:spcPts val="600"/>
-              </a:spcBef>
-              <a:defRPr sz="1500">
-                <a:solidFill>
-                  <a:srgbClr val="1E293B"/>
-                </a:solidFill>
-                <a:latin typeface="Arial"/>
-              </a:defRPr>
+              <a:rPr lang="en-US" sz="1800" b="1"/>
+              <a:t>IBM Watsonx.ai - </a:t>
+            </a:r>
+            <a:r>
+              <a:rPr lang="en-US" sz="1800"/>
+              <a:t>For model deployment, embeddings, and AI governance</a:t>
+            </a:r>
+          </a:p>
+          <a:p>
+            <a:pPr marL="285750" indent="-285750">
+              <a:buFont typeface="Arial" panose="020B0604020202020204" pitchFamily="34" charset="0"/>
+              <a:buChar char="•"/>
             </a:pPr>
-            <a:r>
-              <a:t>• IBM Cloud IAM Security Authentication</a:t>
-            </a:r>
-          </a:p>
-          <a:p>
-            <a:pPr>
-              <a:spcBef>
-                <a:spcPts val="600"/>
-              </a:spcBef>
-              <a:defRPr sz="1500">
-                <a:solidFill>
-                  <a:srgbClr val="1E293B"/>
-                </a:solidFill>
-                <a:latin typeface="Arial"/>
-              </a:defRPr>
+            <a:endParaRPr lang="en-US" sz="1800"/>
+          </a:p>
+          <a:p>
+            <a:pPr marL="285750" indent="-285750">
+              <a:buFont typeface="Arial" panose="020B0604020202020204" pitchFamily="34" charset="0"/>
+              <a:buChar char="•"/>
             </a:pPr>
             <a:r>
-              <a:t>• Strict Agronomic JSON Schema Enforcement</a:t>
-            </a:r>
-          </a:p>
-          <a:p>
-            <a:pPr>
-              <a:spcBef>
-                <a:spcPts val="600"/>
-              </a:spcBef>
-              <a:defRPr sz="1500">
-                <a:solidFill>
-                  <a:srgbClr val="1E293B"/>
-                </a:solidFill>
-                <a:latin typeface="Arial"/>
-              </a:defRPr>
+              <a:rPr lang="en-IN" sz="1800" b="1"/>
+              <a:t>Vector Database </a:t>
+            </a:r>
+            <a:r>
+              <a:rPr lang="en-IN" sz="1800"/>
+              <a:t>(FAISS/Chroma) – For RAG-based nutritional data retrieval</a:t>
+            </a:r>
+            <a:endParaRPr lang="en-US" sz="1800"/>
+          </a:p>
+          <a:p>
+            <a:pPr marL="285750" indent="-285750">
+              <a:buFont typeface="Arial" panose="020B0604020202020204" pitchFamily="34" charset="0"/>
+              <a:buChar char="•"/>
             </a:pPr>
-            <a:r>
-              <a:t>• Hosting Region: Dallas (us-south)</a:t>
-            </a:r>
-          </a:p>
-        </p:txBody>
-      </p:sp>
-      <p:sp>
-        <p:nvSpPr>
-          <p:cNvPr id="5" name="Rounded Rectangle 4"/>
-          <p:cNvSpPr/>
-          <p:nvPr/>
-        </p:nvSpPr>
-        <p:spPr>
-          <a:xfrm>
-            <a:off x="8046720" y="1645920"/>
-            <a:ext cx="3383280" cy="4572000"/>
-          </a:xfrm>
-          <a:prstGeom prst="roundRect">
-            <a:avLst/>
-          </a:prstGeom>
-          <a:solidFill>
-            <a:srgbClr val="F5F8F6"/>
-          </a:solidFill>
-          <a:ln w="19050">
-            <a:solidFill>
-              <a:srgbClr val="C8D7CD"/>
-            </a:solidFill>
-          </a:ln>
-        </p:spPr>
-        <p:style>
-          <a:lnRef idx="1">
-            <a:schemeClr val="accent1"/>
-          </a:lnRef>
-          <a:fillRef idx="3">
-            <a:schemeClr val="accent1"/>
-          </a:fillRef>
-          <a:effectRef idx="2">
-            <a:schemeClr val="accent1"/>
-          </a:effectRef>
-          <a:fontRef idx="minor">
-            <a:schemeClr val="lt1"/>
-          </a:fontRef>
-        </p:style>
-        <p:txBody>
-          <a:bodyPr rtlCol="0" anchor="ctr" wrap="square" lIns="228600" tIns="182880" rIns="228600"/>
-          <a:lstStyle/>
-          <a:p>
-            <a:pPr algn="ctr">
-              <a:defRPr sz="2000" b="1">
-                <a:solidFill>
-                  <a:srgbClr val="0F3B2E"/>
-                </a:solidFill>
-                <a:latin typeface="Arial"/>
-              </a:defRPr>
+            <a:endParaRPr lang="en-US" sz="1800"/>
+          </a:p>
+          <a:p>
+            <a:pPr marL="285750" indent="-285750">
+              <a:buFont typeface="Arial" panose="020B0604020202020204" pitchFamily="34" charset="0"/>
+              <a:buChar char="•"/>
             </a:pPr>
-            <a:r>
-              <a:t>Vision, Storage &amp; Audio Stack</a:t>
-            </a:r>
-          </a:p>
-          <a:p>
-            <a:pPr>
-              <a:spcBef>
-                <a:spcPts val="600"/>
-              </a:spcBef>
-              <a:defRPr sz="1500">
-                <a:solidFill>
-                  <a:srgbClr val="1E293B"/>
-                </a:solidFill>
-                <a:latin typeface="Arial"/>
-              </a:defRPr>
-            </a:pPr>
-            <a:r>
-              <a:t>• ChromaDB Vector Store (ICAR/KVK protocols)</a:t>
-            </a:r>
-          </a:p>
-          <a:p>
-            <a:pPr>
-              <a:spcBef>
-                <a:spcPts val="600"/>
-              </a:spcBef>
-              <a:defRPr sz="1500">
-                <a:solidFill>
-                  <a:srgbClr val="1E293B"/>
-                </a:solidFill>
-                <a:latin typeface="Arial"/>
-              </a:defRPr>
-            </a:pPr>
-            <a:r>
-              <a:t>• OpenCV Deterministic Foliar Segmentation</a:t>
-            </a:r>
-          </a:p>
-          <a:p>
-            <a:pPr>
-              <a:spcBef>
-                <a:spcPts val="600"/>
-              </a:spcBef>
-              <a:defRPr sz="1500">
-                <a:solidFill>
-                  <a:srgbClr val="1E293B"/>
-                </a:solidFill>
-                <a:latin typeface="Arial"/>
-              </a:defRPr>
-            </a:pPr>
-            <a:r>
-              <a:t>• Streamlit Native Dashboard Interface</a:t>
-            </a:r>
-          </a:p>
-          <a:p>
-            <a:pPr>
-              <a:spcBef>
-                <a:spcPts val="600"/>
-              </a:spcBef>
-              <a:defRPr sz="1500">
-                <a:solidFill>
-                  <a:srgbClr val="1E293B"/>
-                </a:solidFill>
-                <a:latin typeface="Arial"/>
-              </a:defRPr>
-            </a:pPr>
-            <a:r>
-              <a:t>• gTTS Regional Edge Text-to-Speech Engine</a:t>
-            </a:r>
-          </a:p>
-          <a:p>
-            <a:pPr>
-              <a:spcBef>
-                <a:spcPts val="600"/>
-              </a:spcBef>
-              <a:defRPr sz="1500">
-                <a:solidFill>
-                  <a:srgbClr val="1E293B"/>
-                </a:solidFill>
-                <a:latin typeface="Arial"/>
-              </a:defRPr>
-            </a:pPr>
-            <a:r>
-              <a:t>• Python 3.10+ Asynchronous Architecture</a:t>
-            </a:r>
+            <a:endParaRPr lang="en-US" sz="1800"/>
+          </a:p>
+          <a:p>
+            <a:endParaRPr lang="en-US"/>
+          </a:p>
+          <a:p>
+            <a:endParaRPr lang="en-IN"/>
           </a:p>
         </p:txBody>
       </p:sp>
@@ -15770,15 +15730,30 @@
               <a:buSzPts val="3500"/>
               <a:buFont typeface="Times New Roman"/>
               <a:buNone/>
-              <a:defRPr sz="2800" b="1">
+            </a:pPr>
+            <a:r>
+              <a:rPr lang="en-US" sz="2400" b="1" err="1">
+                <a:sym typeface="Times New Roman"/>
+              </a:rPr>
+              <a:t>Langflow</a:t>
+            </a:r>
+            <a:r>
+              <a:rPr lang="en-US" sz="3500" b="1" i="0" u="none" strike="noStrike" cap="none">
                 <a:solidFill>
-                  <a:srgbClr val="0F3B2E"/>
+                  <a:srgbClr val="051D3A"/>
                 </a:solidFill>
-                <a:latin typeface="Arial"/>
-              </a:defRPr>
-            </a:pPr>
-            <a:r>
-              <a:t>Langflow component Used</a:t>
+                <a:latin typeface="Times New Roman"/>
+                <a:ea typeface="Times New Roman"/>
+                <a:cs typeface="Times New Roman"/>
+                <a:sym typeface="Times New Roman"/>
+              </a:rPr>
+              <a:t> </a:t>
+            </a:r>
+            <a:r>
+              <a:rPr lang="en-US" sz="2400" b="1">
+                <a:sym typeface="Times New Roman"/>
+              </a:rPr>
+              <a:t>component Used -</a:t>
             </a:r>
             <a:endParaRPr sz="2400" b="1">
               <a:sym typeface="Times New Roman"/>
@@ -15788,344 +15763,553 @@
       </p:sp>
       <p:sp>
         <p:nvSpPr>
-          <p:cNvPr id="136" name="Rounded Rectangle 135"/>
+          <p:cNvPr id="148" name="Google Shape;148;p5">
+            <a:extLst>
+              <a:ext uri="{FF2B5EF4-FFF2-40B4-BE49-F238E27FC236}">
+                <a16:creationId xmlns:a16="http://schemas.microsoft.com/office/drawing/2014/main" id="{69E3EADC-1EAD-7419-145C-20998925206E}"/>
+              </a:ext>
+            </a:extLst>
+          </p:cNvPr>
           <p:cNvSpPr/>
           <p:nvPr/>
         </p:nvSpPr>
         <p:spPr>
           <a:xfrm>
-            <a:off x="731520" y="1645920"/>
-            <a:ext cx="10698480" cy="841248"/>
+            <a:off x="2264331" y="6784578"/>
+            <a:ext cx="2140744" cy="224195"/>
           </a:xfrm>
-          <a:prstGeom prst="roundRect">
+          <a:prstGeom prst="rect">
             <a:avLst/>
           </a:prstGeom>
-          <a:solidFill>
-            <a:srgbClr val="F5F8F6"/>
-          </a:solidFill>
-          <a:ln w="19050">
-            <a:solidFill>
-              <a:srgbClr val="C8D7CD"/>
-            </a:solidFill>
+          <a:noFill/>
+          <a:ln>
+            <a:noFill/>
           </a:ln>
         </p:spPr>
-        <p:style>
-          <a:lnRef idx="1">
-            <a:schemeClr val="accent1"/>
-          </a:lnRef>
-          <a:fillRef idx="3">
-            <a:schemeClr val="accent1"/>
-          </a:fillRef>
-          <a:effectRef idx="2">
-            <a:schemeClr val="accent1"/>
-          </a:effectRef>
-          <a:fontRef idx="minor">
-            <a:schemeClr val="lt1"/>
-          </a:fontRef>
-        </p:style>
         <p:txBody>
-          <a:bodyPr rtlCol="0" anchor="ctr" wrap="square" lIns="182880" tIns="73152"/>
+          <a:bodyPr spcFirstLastPara="1" wrap="square" lIns="0" tIns="0" rIns="0" bIns="0" anchor="t" anchorCtr="0">
+            <a:noAutofit/>
+          </a:bodyPr>
           <a:lstStyle/>
           <a:p>
-            <a:pPr algn="ctr">
-              <a:defRPr sz="1900" b="1">
-                <a:solidFill>
-                  <a:srgbClr val="0F3B2E"/>
-                </a:solidFill>
-                <a:latin typeface="Arial"/>
-              </a:defRPr>
+            <a:pPr marL="0" marR="0" lvl="0" indent="0" algn="ctr" rtl="0">
+              <a:lnSpc>
+                <a:spcPct val="109375"/>
+              </a:lnSpc>
+              <a:spcBef>
+                <a:spcPts val="0"/>
+              </a:spcBef>
+              <a:spcAft>
+                <a:spcPts val="0"/>
+              </a:spcAft>
+              <a:buClr>
+                <a:schemeClr val="dk1"/>
+              </a:buClr>
+              <a:buSzPts val="1600"/>
+              <a:buFont typeface="Calibri"/>
+              <a:buNone/>
             </a:pPr>
-            <a:r>
-              <a:t>1. Chat Input Component</a:t>
-            </a:r>
-          </a:p>
-          <a:p>
-            <a:pPr>
-              <a:defRPr sz="1400">
-                <a:solidFill>
-                  <a:srgbClr val="1E293B"/>
-                </a:solidFill>
-                <a:latin typeface="Arial"/>
-              </a:defRPr>
-            </a:pPr>
-            <a:r>
-              <a:t>Ingests farmer queries, targeted crop selection, field location coordinates, and high-resolution foliar disease photography.</a:t>
-            </a:r>
+            <a:endParaRPr sz="1600" b="0" i="0" u="none" strike="noStrike" cap="none">
+              <a:solidFill>
+                <a:srgbClr val="000000"/>
+              </a:solidFill>
+              <a:latin typeface="Times New Roman"/>
+              <a:ea typeface="Times New Roman"/>
+              <a:cs typeface="Times New Roman"/>
+              <a:sym typeface="Times New Roman"/>
+            </a:endParaRPr>
           </a:p>
         </p:txBody>
       </p:sp>
       <p:sp>
         <p:nvSpPr>
-          <p:cNvPr id="137" name="Rounded Rectangle 136"/>
+          <p:cNvPr id="149" name="Google Shape;149;p5">
+            <a:extLst>
+              <a:ext uri="{FF2B5EF4-FFF2-40B4-BE49-F238E27FC236}">
+                <a16:creationId xmlns:a16="http://schemas.microsoft.com/office/drawing/2014/main" id="{04E5872A-C331-C8F3-5D71-8E953BAAFE03}"/>
+              </a:ext>
+            </a:extLst>
+          </p:cNvPr>
           <p:cNvSpPr/>
           <p:nvPr/>
         </p:nvSpPr>
         <p:spPr>
           <a:xfrm>
-            <a:off x="731520" y="2578608"/>
-            <a:ext cx="10698480" cy="841248"/>
+            <a:off x="1782604" y="7100213"/>
+            <a:ext cx="3104198" cy="731877"/>
           </a:xfrm>
-          <a:prstGeom prst="roundRect">
+          <a:prstGeom prst="rect">
             <a:avLst/>
           </a:prstGeom>
-          <a:solidFill>
-            <a:srgbClr val="F5F8F6"/>
-          </a:solidFill>
-          <a:ln w="19050">
-            <a:solidFill>
-              <a:srgbClr val="C8D7CD"/>
-            </a:solidFill>
+          <a:noFill/>
+          <a:ln>
+            <a:noFill/>
           </a:ln>
         </p:spPr>
-        <p:style>
-          <a:lnRef idx="1">
-            <a:schemeClr val="accent1"/>
-          </a:lnRef>
-          <a:fillRef idx="3">
-            <a:schemeClr val="accent1"/>
-          </a:fillRef>
-          <a:effectRef idx="2">
-            <a:schemeClr val="accent1"/>
-          </a:effectRef>
-          <a:fontRef idx="minor">
-            <a:schemeClr val="lt1"/>
-          </a:fontRef>
-        </p:style>
         <p:txBody>
-          <a:bodyPr rtlCol="0" anchor="ctr" wrap="square" lIns="182880" tIns="73152"/>
+          <a:bodyPr spcFirstLastPara="1" wrap="square" lIns="0" tIns="0" rIns="0" bIns="0" anchor="t" anchorCtr="0">
+            <a:noAutofit/>
+          </a:bodyPr>
           <a:lstStyle/>
           <a:p>
-            <a:pPr algn="ctr">
-              <a:defRPr sz="1900" b="1">
-                <a:solidFill>
-                  <a:srgbClr val="0F3B2E"/>
-                </a:solidFill>
-                <a:latin typeface="Arial"/>
-              </a:defRPr>
+            <a:pPr marL="0" marR="0" lvl="0" indent="0" algn="ctr" rtl="0">
+              <a:lnSpc>
+                <a:spcPct val="118750"/>
+              </a:lnSpc>
+              <a:spcBef>
+                <a:spcPts val="0"/>
+              </a:spcBef>
+              <a:spcAft>
+                <a:spcPts val="0"/>
+              </a:spcAft>
+              <a:buClr>
+                <a:schemeClr val="dk1"/>
+              </a:buClr>
+              <a:buSzPts val="1600"/>
+              <a:buFont typeface="Calibri"/>
+              <a:buNone/>
             </a:pPr>
-            <a:r>
-              <a:t>2. Custom Python Component (Agromet Sentinel)</a:t>
-            </a:r>
-          </a:p>
-          <a:p>
-            <a:pPr>
-              <a:defRPr sz="1400">
-                <a:solidFill>
-                  <a:srgbClr val="1E293B"/>
-                </a:solidFill>
-                <a:latin typeface="Arial"/>
-              </a:defRPr>
-            </a:pPr>
-            <a:r>
-              <a:t>Non-blocking daemon executing live agrometeorological evaluation against biological danger zones (RH &gt; 78% and rain probability).</a:t>
-            </a:r>
+            <a:endParaRPr sz="1600" b="0" i="0" u="none" strike="noStrike" cap="none">
+              <a:solidFill>
+                <a:srgbClr val="000000"/>
+              </a:solidFill>
+              <a:latin typeface="Times New Roman"/>
+              <a:ea typeface="Times New Roman"/>
+              <a:cs typeface="Times New Roman"/>
+              <a:sym typeface="Times New Roman"/>
+            </a:endParaRPr>
           </a:p>
         </p:txBody>
       </p:sp>
       <p:sp>
         <p:nvSpPr>
-          <p:cNvPr id="138" name="Rounded Rectangle 137"/>
+          <p:cNvPr id="150" name="Google Shape;150;p5">
+            <a:extLst>
+              <a:ext uri="{FF2B5EF4-FFF2-40B4-BE49-F238E27FC236}">
+                <a16:creationId xmlns:a16="http://schemas.microsoft.com/office/drawing/2014/main" id="{76EF3801-5D99-5EFA-9AA2-AD265775E354}"/>
+              </a:ext>
+            </a:extLst>
+          </p:cNvPr>
           <p:cNvSpPr/>
           <p:nvPr/>
         </p:nvSpPr>
         <p:spPr>
           <a:xfrm>
-            <a:off x="731520" y="3511296"/>
-            <a:ext cx="10698480" cy="841248"/>
+            <a:off x="5732383" y="6784578"/>
+            <a:ext cx="1793915" cy="224195"/>
           </a:xfrm>
-          <a:prstGeom prst="roundRect">
+          <a:prstGeom prst="rect">
             <a:avLst/>
           </a:prstGeom>
-          <a:solidFill>
-            <a:srgbClr val="F5F8F6"/>
-          </a:solidFill>
-          <a:ln w="19050">
-            <a:solidFill>
-              <a:srgbClr val="C8D7CD"/>
-            </a:solidFill>
+          <a:noFill/>
+          <a:ln>
+            <a:noFill/>
           </a:ln>
         </p:spPr>
-        <p:style>
-          <a:lnRef idx="1">
-            <a:schemeClr val="accent1"/>
-          </a:lnRef>
-          <a:fillRef idx="3">
-            <a:schemeClr val="accent1"/>
-          </a:fillRef>
-          <a:effectRef idx="2">
-            <a:schemeClr val="accent1"/>
-          </a:effectRef>
-          <a:fontRef idx="minor">
-            <a:schemeClr val="lt1"/>
-          </a:fontRef>
-        </p:style>
         <p:txBody>
-          <a:bodyPr rtlCol="0" anchor="ctr" wrap="square" lIns="182880" tIns="73152"/>
+          <a:bodyPr spcFirstLastPara="1" wrap="square" lIns="0" tIns="0" rIns="0" bIns="0" anchor="t" anchorCtr="0">
+            <a:noAutofit/>
+          </a:bodyPr>
           <a:lstStyle/>
           <a:p>
-            <a:pPr algn="ctr">
-              <a:defRPr sz="1900" b="1">
-                <a:solidFill>
-                  <a:srgbClr val="0F3B2E"/>
-                </a:solidFill>
-                <a:latin typeface="Arial"/>
-              </a:defRPr>
+            <a:pPr marL="0" marR="0" lvl="0" indent="0" algn="ctr" rtl="0">
+              <a:lnSpc>
+                <a:spcPct val="109375"/>
+              </a:lnSpc>
+              <a:spcBef>
+                <a:spcPts val="0"/>
+              </a:spcBef>
+              <a:spcAft>
+                <a:spcPts val="0"/>
+              </a:spcAft>
+              <a:buClr>
+                <a:schemeClr val="dk1"/>
+              </a:buClr>
+              <a:buSzPts val="1600"/>
+              <a:buFont typeface="Calibri"/>
+              <a:buNone/>
             </a:pPr>
-            <a:r>
-              <a:t>3. Custom Vision Component (OpenCV Pathology)</a:t>
-            </a:r>
-          </a:p>
-          <a:p>
-            <a:pPr>
-              <a:defRPr sz="1400">
-                <a:solidFill>
-                  <a:srgbClr val="1E293B"/>
-                </a:solidFill>
-                <a:latin typeface="Arial"/>
-              </a:defRPr>
-            </a:pPr>
-            <a:r>
-              <a:t>Performs deterministic RGB color segmentation to compute necrotic lesion surface percentages and foliar chlorosis patterns.</a:t>
-            </a:r>
+            <a:endParaRPr sz="1600" b="0" i="0" u="none" strike="noStrike" cap="none">
+              <a:solidFill>
+                <a:srgbClr val="000000"/>
+              </a:solidFill>
+              <a:latin typeface="Times New Roman"/>
+              <a:ea typeface="Times New Roman"/>
+              <a:cs typeface="Times New Roman"/>
+              <a:sym typeface="Times New Roman"/>
+            </a:endParaRPr>
           </a:p>
         </p:txBody>
       </p:sp>
       <p:sp>
         <p:nvSpPr>
-          <p:cNvPr id="139" name="Rounded Rectangle 138"/>
+          <p:cNvPr id="151" name="Google Shape;151;p5">
+            <a:extLst>
+              <a:ext uri="{FF2B5EF4-FFF2-40B4-BE49-F238E27FC236}">
+                <a16:creationId xmlns:a16="http://schemas.microsoft.com/office/drawing/2014/main" id="{DAD76A8A-9F2C-9EA9-25E9-40CD0FFAA869}"/>
+              </a:ext>
+            </a:extLst>
+          </p:cNvPr>
           <p:cNvSpPr/>
           <p:nvPr/>
         </p:nvSpPr>
         <p:spPr>
           <a:xfrm>
-            <a:off x="731520" y="4443984"/>
-            <a:ext cx="10698480" cy="841248"/>
+            <a:off x="5077301" y="7100213"/>
+            <a:ext cx="3104198" cy="731877"/>
           </a:xfrm>
-          <a:prstGeom prst="roundRect">
+          <a:prstGeom prst="rect">
             <a:avLst/>
           </a:prstGeom>
-          <a:solidFill>
-            <a:srgbClr val="F5F8F6"/>
-          </a:solidFill>
-          <a:ln w="19050">
-            <a:solidFill>
-              <a:srgbClr val="C8D7CD"/>
-            </a:solidFill>
+          <a:noFill/>
+          <a:ln>
+            <a:noFill/>
           </a:ln>
         </p:spPr>
-        <p:style>
-          <a:lnRef idx="1">
-            <a:schemeClr val="accent1"/>
-          </a:lnRef>
-          <a:fillRef idx="3">
-            <a:schemeClr val="accent1"/>
-          </a:fillRef>
-          <a:effectRef idx="2">
-            <a:schemeClr val="accent1"/>
-          </a:effectRef>
-          <a:fontRef idx="minor">
-            <a:schemeClr val="lt1"/>
-          </a:fontRef>
-        </p:style>
         <p:txBody>
-          <a:bodyPr rtlCol="0" anchor="ctr" wrap="square" lIns="182880" tIns="73152"/>
+          <a:bodyPr spcFirstLastPara="1" wrap="square" lIns="0" tIns="0" rIns="0" bIns="0" anchor="t" anchorCtr="0">
+            <a:noAutofit/>
+          </a:bodyPr>
           <a:lstStyle/>
           <a:p>
-            <a:pPr algn="ctr">
-              <a:defRPr sz="1900" b="1">
-                <a:solidFill>
-                  <a:srgbClr val="0F3B2E"/>
-                </a:solidFill>
-                <a:latin typeface="Arial"/>
-              </a:defRPr>
+            <a:pPr marL="0" marR="0" lvl="0" indent="0" algn="ctr" rtl="0">
+              <a:lnSpc>
+                <a:spcPct val="118750"/>
+              </a:lnSpc>
+              <a:spcBef>
+                <a:spcPts val="0"/>
+              </a:spcBef>
+              <a:spcAft>
+                <a:spcPts val="0"/>
+              </a:spcAft>
+              <a:buClr>
+                <a:schemeClr val="dk1"/>
+              </a:buClr>
+              <a:buSzPts val="1600"/>
+              <a:buFont typeface="Calibri"/>
+              <a:buNone/>
             </a:pPr>
-            <a:r>
-              <a:t>4. Vector Store Component (ChromaDB RAG)</a:t>
-            </a:r>
-          </a:p>
-          <a:p>
-            <a:pPr>
-              <a:defRPr sz="1400">
-                <a:solidFill>
-                  <a:srgbClr val="1E293B"/>
-                </a:solidFill>
-                <a:latin typeface="Arial"/>
-              </a:defRPr>
-            </a:pPr>
-            <a:r>
-              <a:t>Retrieves verified ICAR and KVK agronomic protocols to inject calibrated active ingredients, dilution ratios, and safety intervals.</a:t>
-            </a:r>
+            <a:endParaRPr sz="1600" b="0" i="0" u="none" strike="noStrike" cap="none">
+              <a:solidFill>
+                <a:srgbClr val="000000"/>
+              </a:solidFill>
+              <a:latin typeface="Times New Roman"/>
+              <a:ea typeface="Times New Roman"/>
+              <a:cs typeface="Times New Roman"/>
+              <a:sym typeface="Times New Roman"/>
+            </a:endParaRPr>
           </a:p>
         </p:txBody>
       </p:sp>
       <p:sp>
         <p:nvSpPr>
-          <p:cNvPr id="140" name="Rounded Rectangle 139"/>
+          <p:cNvPr id="152" name="Google Shape;152;p5">
+            <a:extLst>
+              <a:ext uri="{FF2B5EF4-FFF2-40B4-BE49-F238E27FC236}">
+                <a16:creationId xmlns:a16="http://schemas.microsoft.com/office/drawing/2014/main" id="{8D9C4260-2673-337C-C898-4C22E0F8FD65}"/>
+              </a:ext>
+            </a:extLst>
+          </p:cNvPr>
           <p:cNvSpPr/>
           <p:nvPr/>
         </p:nvSpPr>
         <p:spPr>
           <a:xfrm>
-            <a:off x="731520" y="5376672"/>
-            <a:ext cx="10698480" cy="841248"/>
+            <a:off x="9027081" y="6784578"/>
+            <a:ext cx="1793915" cy="224195"/>
           </a:xfrm>
-          <a:prstGeom prst="roundRect">
+          <a:prstGeom prst="rect">
             <a:avLst/>
           </a:prstGeom>
-          <a:solidFill>
-            <a:srgbClr val="F5F8F6"/>
-          </a:solidFill>
-          <a:ln w="19050">
-            <a:solidFill>
-              <a:srgbClr val="C8D7CD"/>
-            </a:solidFill>
+          <a:noFill/>
+          <a:ln>
+            <a:noFill/>
           </a:ln>
         </p:spPr>
-        <p:style>
-          <a:lnRef idx="1">
-            <a:schemeClr val="accent1"/>
-          </a:lnRef>
-          <a:fillRef idx="3">
-            <a:schemeClr val="accent1"/>
-          </a:fillRef>
-          <a:effectRef idx="2">
-            <a:schemeClr val="accent1"/>
-          </a:effectRef>
-          <a:fontRef idx="minor">
-            <a:schemeClr val="lt1"/>
-          </a:fontRef>
-        </p:style>
         <p:txBody>
-          <a:bodyPr rtlCol="0" anchor="ctr" wrap="square" lIns="182880" tIns="73152"/>
+          <a:bodyPr spcFirstLastPara="1" wrap="square" lIns="0" tIns="0" rIns="0" bIns="0" anchor="t" anchorCtr="0">
+            <a:noAutofit/>
+          </a:bodyPr>
           <a:lstStyle/>
           <a:p>
-            <a:pPr algn="ctr">
-              <a:defRPr sz="1900" b="1">
-                <a:solidFill>
-                  <a:srgbClr val="0F3B2E"/>
-                </a:solidFill>
-                <a:latin typeface="Arial"/>
-              </a:defRPr>
+            <a:pPr marL="0" marR="0" lvl="0" indent="0" algn="ctr" rtl="0">
+              <a:lnSpc>
+                <a:spcPct val="109375"/>
+              </a:lnSpc>
+              <a:spcBef>
+                <a:spcPts val="0"/>
+              </a:spcBef>
+              <a:spcAft>
+                <a:spcPts val="0"/>
+              </a:spcAft>
+              <a:buClr>
+                <a:schemeClr val="dk1"/>
+              </a:buClr>
+              <a:buSzPts val="1600"/>
+              <a:buFont typeface="Calibri"/>
+              <a:buNone/>
             </a:pPr>
-            <a:r>
-              <a:t>5. Agent &amp; Chat Output Component (IBM Granite)</a:t>
-            </a:r>
-          </a:p>
-          <a:p>
-            <a:pPr>
-              <a:defRPr sz="1400">
-                <a:solidFill>
-                  <a:srgbClr val="1E293B"/>
-                </a:solidFill>
-                <a:latin typeface="Arial"/>
-              </a:defRPr>
-            </a:pPr>
-            <a:r>
-              <a:t>Orchestrates ibm/granite-4-h-small to synthesize inputs into a 4-tab structured advisory and triggers edge vernacular audio playback.</a:t>
-            </a:r>
+            <a:endParaRPr sz="1600" b="0" i="0" u="none" strike="noStrike" cap="none">
+              <a:solidFill>
+                <a:srgbClr val="000000"/>
+              </a:solidFill>
+              <a:latin typeface="Times New Roman"/>
+              <a:ea typeface="Times New Roman"/>
+              <a:cs typeface="Times New Roman"/>
+              <a:sym typeface="Times New Roman"/>
+            </a:endParaRPr>
           </a:p>
         </p:txBody>
       </p:sp>
+      <p:sp>
+        <p:nvSpPr>
+          <p:cNvPr id="153" name="Google Shape;153;p5">
+            <a:extLst>
+              <a:ext uri="{FF2B5EF4-FFF2-40B4-BE49-F238E27FC236}">
+                <a16:creationId xmlns:a16="http://schemas.microsoft.com/office/drawing/2014/main" id="{6167C3C6-3747-E373-84C3-3927C443B067}"/>
+              </a:ext>
+            </a:extLst>
+          </p:cNvPr>
+          <p:cNvSpPr/>
+          <p:nvPr/>
+        </p:nvSpPr>
+        <p:spPr>
+          <a:xfrm>
+            <a:off x="8371999" y="7100213"/>
+            <a:ext cx="3104198" cy="731877"/>
+          </a:xfrm>
+          <a:prstGeom prst="rect">
+            <a:avLst/>
+          </a:prstGeom>
+          <a:noFill/>
+          <a:ln>
+            <a:noFill/>
+          </a:ln>
+        </p:spPr>
+        <p:txBody>
+          <a:bodyPr spcFirstLastPara="1" wrap="square" lIns="0" tIns="0" rIns="0" bIns="0" anchor="t" anchorCtr="0">
+            <a:noAutofit/>
+          </a:bodyPr>
+          <a:lstStyle/>
+          <a:p>
+            <a:pPr marL="0" marR="0" lvl="0" indent="0" algn="ctr" rtl="0">
+              <a:lnSpc>
+                <a:spcPct val="118750"/>
+              </a:lnSpc>
+              <a:spcBef>
+                <a:spcPts val="0"/>
+              </a:spcBef>
+              <a:spcAft>
+                <a:spcPts val="0"/>
+              </a:spcAft>
+              <a:buClr>
+                <a:schemeClr val="dk1"/>
+              </a:buClr>
+              <a:buSzPts val="1600"/>
+              <a:buFont typeface="Calibri"/>
+              <a:buNone/>
+            </a:pPr>
+            <a:endParaRPr sz="1600" b="0" i="0" u="none" strike="noStrike" cap="none">
+              <a:solidFill>
+                <a:srgbClr val="000000"/>
+              </a:solidFill>
+              <a:latin typeface="Times New Roman"/>
+              <a:ea typeface="Times New Roman"/>
+              <a:cs typeface="Times New Roman"/>
+              <a:sym typeface="Times New Roman"/>
+            </a:endParaRPr>
+          </a:p>
+        </p:txBody>
+      </p:sp>
+      <p:sp>
+        <p:nvSpPr>
+          <p:cNvPr id="2" name="TextBox 1">
+            <a:extLst>
+              <a:ext uri="{FF2B5EF4-FFF2-40B4-BE49-F238E27FC236}">
+                <a16:creationId xmlns:a16="http://schemas.microsoft.com/office/drawing/2014/main" id="{9BB86949-7ED1-C43B-B1E3-5122BB67A596}"/>
+              </a:ext>
+            </a:extLst>
+          </p:cNvPr>
+          <p:cNvSpPr txBox="1"/>
+          <p:nvPr/>
+        </p:nvSpPr>
+        <p:spPr>
+          <a:xfrm>
+            <a:off x="474822" y="863187"/>
+            <a:ext cx="8823960" cy="5262979"/>
+          </a:xfrm>
+          <a:prstGeom prst="rect">
+            <a:avLst/>
+          </a:prstGeom>
+          <a:noFill/>
+        </p:spPr>
+        <p:txBody>
+          <a:bodyPr wrap="square" rtlCol="0">
+            <a:spAutoFit/>
+          </a:bodyPr>
+          <a:lstStyle/>
+          <a:p>
+            <a:endParaRPr lang="en-US"/>
+          </a:p>
+          <a:p>
+            <a:r>
+              <a:rPr lang="en-US" b="1"/>
+              <a:t>1) Chat Input </a:t>
+            </a:r>
+            <a:r>
+              <a:rPr lang="en-US"/>
+              <a:t>– Interface where users enter their queries, preferences, or meal details (text/voice/image).</a:t>
+            </a:r>
+          </a:p>
+          <a:p>
+            <a:endParaRPr lang="en-US"/>
+          </a:p>
+          <a:p>
+            <a:r>
+              <a:rPr lang="en-US" b="1"/>
+              <a:t>2) IBM </a:t>
+            </a:r>
+            <a:r>
+              <a:rPr lang="en-US" b="1" err="1"/>
+              <a:t>watsonx</a:t>
+            </a:r>
+            <a:r>
+              <a:rPr lang="en-US" b="1"/>
+              <a:t> AI Agent </a:t>
+            </a:r>
+            <a:r>
+              <a:rPr lang="en-US"/>
+              <a:t>- Processes user input using Granite models to generate personalized nutrition insights and recommendations. </a:t>
+            </a:r>
+          </a:p>
+          <a:p>
+            <a:endParaRPr lang="en-US"/>
+          </a:p>
+          <a:p>
+            <a:r>
+              <a:rPr lang="en-US" b="1"/>
+              <a:t>3) Name of IBM Granite model - </a:t>
+            </a:r>
+            <a:r>
+              <a:rPr lang="en-US"/>
+              <a:t>Granite-4.0-8B-Instruct → Fast, efficient for real-time diet recommendations</a:t>
+            </a:r>
+          </a:p>
+          <a:p>
+            <a:endParaRPr lang="en-US"/>
+          </a:p>
+          <a:p>
+            <a:r>
+              <a:rPr lang="en-US" b="1"/>
+              <a:t>4) Chat output -</a:t>
+            </a:r>
+            <a:r>
+              <a:rPr lang="en-US"/>
+              <a:t>Displays AI-generated responses such as diet plans, nutritional analysis, and health suggestions. </a:t>
+            </a:r>
+          </a:p>
+          <a:p>
+            <a:endParaRPr lang="en-US"/>
+          </a:p>
+          <a:p>
+            <a:r>
+              <a:rPr lang="en-US" b="1"/>
+              <a:t>5) </a:t>
+            </a:r>
+            <a:r>
+              <a:rPr lang="en-US" b="1">
+                <a:highlight>
+                  <a:srgbClr val="FFFF00"/>
+                </a:highlight>
+              </a:rPr>
+              <a:t>File component - </a:t>
+            </a:r>
+            <a:r>
+              <a:rPr lang="en-US">
+                <a:highlight>
+                  <a:srgbClr val="FFFF00"/>
+                </a:highlight>
+              </a:rPr>
+              <a:t>Stores and retrieves user data, meal logs, and nutritional datasets for analysis and tracking.</a:t>
+            </a:r>
+          </a:p>
+          <a:p>
+            <a:endParaRPr lang="en-US"/>
+          </a:p>
+          <a:p>
+            <a:endParaRPr lang="en-US"/>
+          </a:p>
+          <a:p>
+            <a:r>
+              <a:rPr lang="en-US"/>
+              <a:t>6) </a:t>
+            </a:r>
+            <a:r>
+              <a:rPr lang="en-US">
+                <a:highlight>
+                  <a:srgbClr val="FFFF00"/>
+                </a:highlight>
+              </a:rPr>
+              <a:t>Add name of any other component used.</a:t>
+            </a:r>
+          </a:p>
+          <a:p>
+            <a:pPr marL="342900" indent="-342900">
+              <a:buAutoNum type="arabicParenR" startAt="3"/>
+            </a:pPr>
+            <a:endParaRPr lang="en-US"/>
+          </a:p>
+          <a:p>
+            <a:endParaRPr lang="en-US"/>
+          </a:p>
+          <a:p>
+            <a:endParaRPr lang="en-US"/>
+          </a:p>
+          <a:p>
+            <a:endParaRPr lang="en-US"/>
+          </a:p>
+          <a:p>
+            <a:endParaRPr lang="en-US"/>
+          </a:p>
+          <a:p>
+            <a:endParaRPr lang="en-US"/>
+          </a:p>
+          <a:p>
+            <a:endParaRPr lang="en-US"/>
+          </a:p>
+          <a:p>
+            <a:r>
+              <a:rPr lang="en-US"/>
+              <a:t> </a:t>
+            </a:r>
+            <a:endParaRPr lang="en-IN"/>
+          </a:p>
+        </p:txBody>
+      </p:sp>
+      <p:pic>
+        <p:nvPicPr>
+          <p:cNvPr id="154" name="Picture 153" descr="langflow_workflow.png"/>
+          <p:cNvPicPr>
+            <a:picLocks noChangeAspect="1"/>
+          </p:cNvPicPr>
+          <p:nvPr/>
+        </p:nvPicPr>
+        <p:blipFill>
+          <a:blip r:embed="rId3"/>
+          <a:stretch>
+            <a:fillRect/>
+          </a:stretch>
+        </p:blipFill>
+        <p:spPr>
+          <a:xfrm>
+            <a:off x="731520" y="1645920"/>
+            <a:ext cx="10698480" cy="4572000"/>
+          </a:xfrm>
+          <a:prstGeom prst="rect">
+            <a:avLst/>
+          </a:prstGeom>
+        </p:spPr>
+      </p:pic>
     </p:spTree>
     <p:extLst>
       <p:ext uri="{BB962C8B-B14F-4D97-AF65-F5344CB8AC3E}">
@@ -16209,15 +16393,30 @@
               <a:buSzPts val="3500"/>
               <a:buFont typeface="Times New Roman"/>
               <a:buNone/>
-              <a:defRPr sz="2800" b="1">
+            </a:pPr>
+            <a:r>
+              <a:rPr lang="en-US" sz="2400" b="1" err="1">
+                <a:sym typeface="Times New Roman"/>
+              </a:rPr>
+              <a:t>Langflow</a:t>
+            </a:r>
+            <a:r>
+              <a:rPr lang="en-US" sz="3500" b="1" i="0" u="none" strike="noStrike" cap="none">
                 <a:solidFill>
-                  <a:srgbClr val="0F3B2E"/>
+                  <a:srgbClr val="051D3A"/>
                 </a:solidFill>
-                <a:latin typeface="Arial"/>
-              </a:defRPr>
-            </a:pPr>
-            <a:r>
-              <a:t>Technical flow diagram- Architecture blueprint</a:t>
+                <a:latin typeface="Times New Roman"/>
+                <a:ea typeface="Times New Roman"/>
+                <a:cs typeface="Times New Roman"/>
+                <a:sym typeface="Times New Roman"/>
+              </a:rPr>
+              <a:t> </a:t>
+            </a:r>
+            <a:r>
+              <a:rPr lang="en-US" sz="2400" b="1">
+                <a:sym typeface="Times New Roman"/>
+              </a:rPr>
+              <a:t>workflow -</a:t>
             </a:r>
             <a:endParaRPr sz="2400" b="1">
               <a:sym typeface="Times New Roman"/>
@@ -16225,411 +16424,30 @@
           </a:p>
         </p:txBody>
       </p:sp>
-      <p:sp>
-        <p:nvSpPr>
-          <p:cNvPr id="3" name="Rounded Rectangle 2"/>
-          <p:cNvSpPr/>
+      <p:pic>
+        <p:nvPicPr>
+          <p:cNvPr id="3" name="Picture 2" descr="architecture_blueprint.png"/>
+          <p:cNvPicPr>
+            <a:picLocks noChangeAspect="1"/>
+          </p:cNvPicPr>
           <p:nvPr/>
-        </p:nvSpPr>
+        </p:nvPicPr>
+        <p:blipFill>
+          <a:blip r:embed="rId4"/>
+          <a:stretch>
+            <a:fillRect/>
+          </a:stretch>
+        </p:blipFill>
         <p:spPr>
           <a:xfrm>
             <a:off x="731520" y="1645920"/>
-            <a:ext cx="3383280" cy="4572000"/>
+            <a:ext cx="10698480" cy="4572000"/>
           </a:xfrm>
-          <a:prstGeom prst="roundRect">
+          <a:prstGeom prst="rect">
             <a:avLst/>
           </a:prstGeom>
-          <a:solidFill>
-            <a:srgbClr val="F5F8F6"/>
-          </a:solidFill>
-          <a:ln w="19050">
-            <a:solidFill>
-              <a:srgbClr val="C8D7CD"/>
-            </a:solidFill>
-          </a:ln>
         </p:spPr>
-        <p:style>
-          <a:lnRef idx="1">
-            <a:schemeClr val="accent1"/>
-          </a:lnRef>
-          <a:fillRef idx="3">
-            <a:schemeClr val="accent1"/>
-          </a:fillRef>
-          <a:effectRef idx="2">
-            <a:schemeClr val="accent1"/>
-          </a:effectRef>
-          <a:fontRef idx="minor">
-            <a:schemeClr val="lt1"/>
-          </a:fontRef>
-        </p:style>
-        <p:txBody>
-          <a:bodyPr rtlCol="0" anchor="ctr" wrap="square" lIns="228600" tIns="182880" rIns="228600"/>
-          <a:lstStyle/>
-          <a:p>
-            <a:pPr algn="ctr">
-              <a:defRPr sz="2000" b="1">
-                <a:solidFill>
-                  <a:srgbClr val="0F3B2E"/>
-                </a:solidFill>
-                <a:latin typeface="Arial"/>
-              </a:defRPr>
-            </a:pPr>
-            <a:r>
-              <a:t>Tier 1: Presentation &amp; Vernacular UI</a:t>
-            </a:r>
-          </a:p>
-          <a:p>
-            <a:pPr>
-              <a:spcBef>
-                <a:spcPts val="600"/>
-              </a:spcBef>
-              <a:defRPr sz="1500">
-                <a:solidFill>
-                  <a:srgbClr val="1E293B"/>
-                </a:solidFill>
-                <a:latin typeface="Arial"/>
-              </a:defRPr>
-            </a:pPr>
-            <a:r>
-              <a:t>• Responsive Streamlit Dashboard Interface</a:t>
-            </a:r>
-          </a:p>
-          <a:p>
-            <a:pPr>
-              <a:spcBef>
-                <a:spcPts val="600"/>
-              </a:spcBef>
-              <a:defRPr sz="1500">
-                <a:solidFill>
-                  <a:srgbClr val="1E293B"/>
-                </a:solidFill>
-                <a:latin typeface="Arial"/>
-              </a:defRPr>
-            </a:pPr>
-            <a:r>
-              <a:t>• Langflow Chat Interface &amp; Flow Runner</a:t>
-            </a:r>
-          </a:p>
-          <a:p>
-            <a:pPr>
-              <a:spcBef>
-                <a:spcPts val="600"/>
-              </a:spcBef>
-              <a:defRPr sz="1500">
-                <a:solidFill>
-                  <a:srgbClr val="1E293B"/>
-                </a:solidFill>
-                <a:latin typeface="Arial"/>
-              </a:defRPr>
-            </a:pPr>
-            <a:r>
-              <a:t>• Vernacular Localization (KA / TE / HI / EN)</a:t>
-            </a:r>
-          </a:p>
-          <a:p>
-            <a:pPr>
-              <a:spcBef>
-                <a:spcPts val="600"/>
-              </a:spcBef>
-              <a:defRPr sz="1500">
-                <a:solidFill>
-                  <a:srgbClr val="1E293B"/>
-                </a:solidFill>
-                <a:latin typeface="Arial"/>
-              </a:defRPr>
-            </a:pPr>
-            <a:r>
-              <a:t>• Edge Audio Playback (gTTS Synthesis)</a:t>
-            </a:r>
-          </a:p>
-          <a:p>
-            <a:pPr>
-              <a:spcBef>
-                <a:spcPts val="600"/>
-              </a:spcBef>
-              <a:defRPr sz="1500">
-                <a:solidFill>
-                  <a:srgbClr val="1E293B"/>
-                </a:solidFill>
-                <a:latin typeface="Arial"/>
-              </a:defRPr>
-            </a:pPr>
-            <a:r>
-              <a:t>• High-Resolution Foliar Image Uploader</a:t>
-            </a:r>
-          </a:p>
-        </p:txBody>
-      </p:sp>
-      <p:sp>
-        <p:nvSpPr>
-          <p:cNvPr id="4" name="Rounded Rectangle 3"/>
-          <p:cNvSpPr/>
-          <p:nvPr/>
-        </p:nvSpPr>
-        <p:spPr>
-          <a:xfrm>
-            <a:off x="4389120" y="1645920"/>
-            <a:ext cx="3383280" cy="4572000"/>
-          </a:xfrm>
-          <a:prstGeom prst="roundRect">
-            <a:avLst/>
-          </a:prstGeom>
-          <a:solidFill>
-            <a:srgbClr val="F5F8F6"/>
-          </a:solidFill>
-          <a:ln w="19050">
-            <a:solidFill>
-              <a:srgbClr val="C8D7CD"/>
-            </a:solidFill>
-          </a:ln>
-        </p:spPr>
-        <p:style>
-          <a:lnRef idx="1">
-            <a:schemeClr val="accent1"/>
-          </a:lnRef>
-          <a:fillRef idx="3">
-            <a:schemeClr val="accent1"/>
-          </a:fillRef>
-          <a:effectRef idx="2">
-            <a:schemeClr val="accent1"/>
-          </a:effectRef>
-          <a:fontRef idx="minor">
-            <a:schemeClr val="lt1"/>
-          </a:fontRef>
-        </p:style>
-        <p:txBody>
-          <a:bodyPr rtlCol="0" anchor="ctr" wrap="square" lIns="228600" tIns="182880" rIns="228600"/>
-          <a:lstStyle/>
-          <a:p>
-            <a:pPr algn="ctr">
-              <a:defRPr sz="2000" b="1">
-                <a:solidFill>
-                  <a:srgbClr val="0F3B2E"/>
-                </a:solidFill>
-                <a:latin typeface="Arial"/>
-              </a:defRPr>
-            </a:pPr>
-            <a:r>
-              <a:t>Tier 2: Langflow Orchestration &amp; RAG</a:t>
-            </a:r>
-          </a:p>
-          <a:p>
-            <a:pPr>
-              <a:spcBef>
-                <a:spcPts val="600"/>
-              </a:spcBef>
-              <a:defRPr sz="1500">
-                <a:solidFill>
-                  <a:srgbClr val="1E293B"/>
-                </a:solidFill>
-                <a:latin typeface="Arial"/>
-              </a:defRPr>
-            </a:pPr>
-            <a:r>
-              <a:t>• Modular Langflow Agentic Flow Pipeline</a:t>
-            </a:r>
-          </a:p>
-          <a:p>
-            <a:pPr>
-              <a:spcBef>
-                <a:spcPts val="600"/>
-              </a:spcBef>
-              <a:defRPr sz="1500">
-                <a:solidFill>
-                  <a:srgbClr val="1E293B"/>
-                </a:solidFill>
-                <a:latin typeface="Arial"/>
-              </a:defRPr>
-            </a:pPr>
-            <a:r>
-              <a:t>• SentinelDaemon: Async Agromet Poll (RH &gt; 78%)</a:t>
-            </a:r>
-          </a:p>
-          <a:p>
-            <a:pPr>
-              <a:spcBef>
-                <a:spcPts val="600"/>
-              </a:spcBef>
-              <a:defRPr sz="1500">
-                <a:solidFill>
-                  <a:srgbClr val="1E293B"/>
-                </a:solidFill>
-                <a:latin typeface="Arial"/>
-              </a:defRPr>
-            </a:pPr>
-            <a:r>
-              <a:t>• VisionService: Deterministic OpenCV Masking</a:t>
-            </a:r>
-          </a:p>
-          <a:p>
-            <a:pPr>
-              <a:spcBef>
-                <a:spcPts val="600"/>
-              </a:spcBef>
-              <a:defRPr sz="1500">
-                <a:solidFill>
-                  <a:srgbClr val="1E293B"/>
-                </a:solidFill>
-                <a:latin typeface="Arial"/>
-              </a:defRPr>
-            </a:pPr>
-            <a:r>
-              <a:t>• ChromaDB Vector Store: ICAR/KVK Protocols</a:t>
-            </a:r>
-          </a:p>
-          <a:p>
-            <a:pPr>
-              <a:spcBef>
-                <a:spcPts val="600"/>
-              </a:spcBef>
-              <a:defRPr sz="1500">
-                <a:solidFill>
-                  <a:srgbClr val="1E293B"/>
-                </a:solidFill>
-                <a:latin typeface="Arial"/>
-              </a:defRPr>
-            </a:pPr>
-            <a:r>
-              <a:t>• Multi-Variable Agronomic Context Fusion</a:t>
-            </a:r>
-          </a:p>
-        </p:txBody>
-      </p:sp>
-      <p:sp>
-        <p:nvSpPr>
-          <p:cNvPr id="5" name="Rounded Rectangle 4"/>
-          <p:cNvSpPr/>
-          <p:nvPr/>
-        </p:nvSpPr>
-        <p:spPr>
-          <a:xfrm>
-            <a:off x="8046720" y="1645920"/>
-            <a:ext cx="3383280" cy="4572000"/>
-          </a:xfrm>
-          <a:prstGeom prst="roundRect">
-            <a:avLst/>
-          </a:prstGeom>
-          <a:solidFill>
-            <a:srgbClr val="F5F8F6"/>
-          </a:solidFill>
-          <a:ln w="19050">
-            <a:solidFill>
-              <a:srgbClr val="C8D7CD"/>
-            </a:solidFill>
-          </a:ln>
-        </p:spPr>
-        <p:style>
-          <a:lnRef idx="1">
-            <a:schemeClr val="accent1"/>
-          </a:lnRef>
-          <a:fillRef idx="3">
-            <a:schemeClr val="accent1"/>
-          </a:fillRef>
-          <a:effectRef idx="2">
-            <a:schemeClr val="accent1"/>
-          </a:effectRef>
-          <a:fontRef idx="minor">
-            <a:schemeClr val="lt1"/>
-          </a:fontRef>
-        </p:style>
-        <p:txBody>
-          <a:bodyPr rtlCol="0" anchor="ctr" wrap="square" lIns="228600" tIns="182880" rIns="228600"/>
-          <a:lstStyle/>
-          <a:p>
-            <a:pPr algn="ctr">
-              <a:defRPr sz="2000" b="1">
-                <a:solidFill>
-                  <a:srgbClr val="0F3B2E"/>
-                </a:solidFill>
-                <a:latin typeface="Arial"/>
-              </a:defRPr>
-            </a:pPr>
-            <a:r>
-              <a:t>Tier 3: Foundation Model &amp; Cloud</a:t>
-            </a:r>
-          </a:p>
-          <a:p>
-            <a:pPr>
-              <a:spcBef>
-                <a:spcPts val="600"/>
-              </a:spcBef>
-              <a:defRPr sz="1500">
-                <a:solidFill>
-                  <a:srgbClr val="1E293B"/>
-                </a:solidFill>
-                <a:latin typeface="Arial"/>
-              </a:defRPr>
-            </a:pPr>
-            <a:r>
-              <a:t>• IBM watsonx.ai Platform (Dallas Region)</a:t>
-            </a:r>
-          </a:p>
-          <a:p>
-            <a:pPr>
-              <a:spcBef>
-                <a:spcPts val="600"/>
-              </a:spcBef>
-              <a:defRPr sz="1500">
-                <a:solidFill>
-                  <a:srgbClr val="1E293B"/>
-                </a:solidFill>
-                <a:latin typeface="Arial"/>
-              </a:defRPr>
-            </a:pPr>
-            <a:r>
-              <a:t>• Foundation Model: ibm/granite-4-h-small</a:t>
-            </a:r>
-          </a:p>
-          <a:p>
-            <a:pPr>
-              <a:spcBef>
-                <a:spcPts val="600"/>
-              </a:spcBef>
-              <a:defRPr sz="1500">
-                <a:solidFill>
-                  <a:srgbClr val="1E293B"/>
-                </a:solidFill>
-                <a:latin typeface="Arial"/>
-              </a:defRPr>
-            </a:pPr>
-            <a:r>
-              <a:t>• Strict Agronomic JSON Schema Enforcement</a:t>
-            </a:r>
-          </a:p>
-          <a:p>
-            <a:pPr>
-              <a:spcBef>
-                <a:spcPts val="600"/>
-              </a:spcBef>
-              <a:defRPr sz="1500">
-                <a:solidFill>
-                  <a:srgbClr val="1E293B"/>
-                </a:solidFill>
-                <a:latin typeface="Arial"/>
-              </a:defRPr>
-            </a:pPr>
-            <a:r>
-              <a:t>• IBM Cloud IAM Security Token Authentication</a:t>
-            </a:r>
-          </a:p>
-          <a:p>
-            <a:pPr>
-              <a:spcBef>
-                <a:spcPts val="600"/>
-              </a:spcBef>
-              <a:defRPr sz="1500">
-                <a:solidFill>
-                  <a:srgbClr val="1E293B"/>
-                </a:solidFill>
-                <a:latin typeface="Arial"/>
-              </a:defRPr>
-            </a:pPr>
-            <a:r>
-              <a:t>• Autonomous Self-Healing Fallback Daemon</a:t>
-            </a:r>
-          </a:p>
-        </p:txBody>
-      </p:sp>
+      </p:pic>
     </p:spTree>
     <p:extLst>
       <p:ext uri="{BB962C8B-B14F-4D97-AF65-F5344CB8AC3E}">
@@ -16691,378 +16509,53 @@
           </a:bodyPr>
           <a:lstStyle/>
           <a:p>
-            <a:pPr lvl="0" algn="l">
-              <a:defRPr sz="2800" b="1">
+            <a:pPr lvl="0"/>
+            <a:r>
+              <a:rPr lang="en-US" sz="2400" b="1">
                 <a:solidFill>
-                  <a:srgbClr val="0F3B2E"/>
+                  <a:schemeClr val="dk1"/>
                 </a:solidFill>
-                <a:latin typeface="Arial"/>
-              </a:defRPr>
-            </a:pPr>
-            <a:r>
-              <a:t>Core Implementation &amp; Functional Modules</a:t>
+                <a:latin typeface="Calibri"/>
+                <a:ea typeface="Calibri"/>
+                <a:cs typeface="Calibri"/>
+                <a:sym typeface="Calibri"/>
+              </a:rPr>
+              <a:t>Architecture blueprint</a:t>
             </a:r>
             <a:endParaRPr lang="en-US" sz="2400"/>
           </a:p>
         </p:txBody>
       </p:sp>
-      <p:sp>
-        <p:nvSpPr>
-          <p:cNvPr id="3" name="Rounded Rectangle 2"/>
-          <p:cNvSpPr/>
+      <p:pic>
+        <p:nvPicPr>
+          <p:cNvPr id="3" name="Picture 2">
+            <a:extLst>
+              <a:ext uri="{FF2B5EF4-FFF2-40B4-BE49-F238E27FC236}">
+                <a16:creationId xmlns:a16="http://schemas.microsoft.com/office/drawing/2014/main" id="{81932CE2-F219-0CA8-0102-55B8C682B8A2}"/>
+              </a:ext>
+            </a:extLst>
+          </p:cNvPr>
+          <p:cNvPicPr>
+            <a:picLocks noChangeAspect="1"/>
+          </p:cNvPicPr>
           <p:nvPr/>
-        </p:nvSpPr>
+        </p:nvPicPr>
+        <p:blipFill>
+          <a:blip r:embed="rId3"/>
+          <a:stretch>
+            <a:fillRect/>
+          </a:stretch>
+        </p:blipFill>
         <p:spPr>
           <a:xfrm>
-            <a:off x="731520" y="1645920"/>
-            <a:ext cx="3383280" cy="4572000"/>
+            <a:off x="535570" y="675732"/>
+            <a:ext cx="11468100" cy="6181725"/>
           </a:xfrm>
-          <a:prstGeom prst="roundRect">
+          <a:prstGeom prst="rect">
             <a:avLst/>
           </a:prstGeom>
-          <a:solidFill>
-            <a:srgbClr val="F5F8F6"/>
-          </a:solidFill>
-          <a:ln w="19050">
-            <a:solidFill>
-              <a:srgbClr val="C8D7CD"/>
-            </a:solidFill>
-          </a:ln>
         </p:spPr>
-        <p:style>
-          <a:lnRef idx="1">
-            <a:schemeClr val="accent1"/>
-          </a:lnRef>
-          <a:fillRef idx="3">
-            <a:schemeClr val="accent1"/>
-          </a:fillRef>
-          <a:effectRef idx="2">
-            <a:schemeClr val="accent1"/>
-          </a:effectRef>
-          <a:fontRef idx="minor">
-            <a:schemeClr val="lt1"/>
-          </a:fontRef>
-        </p:style>
-        <p:txBody>
-          <a:bodyPr rtlCol="0" anchor="ctr" wrap="square" lIns="228600" tIns="182880" rIns="228600"/>
-          <a:lstStyle/>
-          <a:p>
-            <a:pPr algn="ctr">
-              <a:defRPr sz="2000" b="1">
-                <a:solidFill>
-                  <a:srgbClr val="0F3B2E"/>
-                </a:solidFill>
-                <a:latin typeface="Arial"/>
-              </a:defRPr>
-            </a:pPr>
-            <a:r>
-              <a:t>SentinelDaemon Module</a:t>
-            </a:r>
-          </a:p>
-          <a:p>
-            <a:pPr>
-              <a:spcBef>
-                <a:spcPts val="600"/>
-              </a:spcBef>
-              <a:defRPr sz="1500">
-                <a:solidFill>
-                  <a:srgbClr val="1E293B"/>
-                </a:solidFill>
-                <a:latin typeface="Arial"/>
-              </a:defRPr>
-            </a:pPr>
-            <a:r>
-              <a:t>• Asynchronous agromet polling daemon.</a:t>
-            </a:r>
-          </a:p>
-          <a:p>
-            <a:pPr>
-              <a:spcBef>
-                <a:spcPts val="600"/>
-              </a:spcBef>
-              <a:defRPr sz="1500">
-                <a:solidFill>
-                  <a:srgbClr val="1E293B"/>
-                </a:solidFill>
-                <a:latin typeface="Arial"/>
-              </a:defRPr>
-            </a:pPr>
-            <a:r>
-              <a:t>• Evaluates RH &gt; 78% and rainfall probability.</a:t>
-            </a:r>
-          </a:p>
-          <a:p>
-            <a:pPr>
-              <a:spcBef>
-                <a:spcPts val="600"/>
-              </a:spcBef>
-              <a:defRPr sz="1500">
-                <a:solidFill>
-                  <a:srgbClr val="1E293B"/>
-                </a:solidFill>
-                <a:latin typeface="Arial"/>
-              </a:defRPr>
-            </a:pPr>
-            <a:r>
-              <a:t>• Computes composite biological threat levels.</a:t>
-            </a:r>
-          </a:p>
-          <a:p>
-            <a:pPr>
-              <a:spcBef>
-                <a:spcPts val="600"/>
-              </a:spcBef>
-              <a:defRPr sz="1500">
-                <a:solidFill>
-                  <a:srgbClr val="1E293B"/>
-                </a:solidFill>
-                <a:latin typeface="Arial"/>
-              </a:defRPr>
-            </a:pPr>
-            <a:r>
-              <a:t>• Dispatches proactive hazard alerts.</a:t>
-            </a:r>
-          </a:p>
-        </p:txBody>
-      </p:sp>
-      <p:sp>
-        <p:nvSpPr>
-          <p:cNvPr id="4" name="Rounded Rectangle 3"/>
-          <p:cNvSpPr/>
-          <p:nvPr/>
-        </p:nvSpPr>
-        <p:spPr>
-          <a:xfrm>
-            <a:off x="4389120" y="1645920"/>
-            <a:ext cx="3383280" cy="4572000"/>
-          </a:xfrm>
-          <a:prstGeom prst="roundRect">
-            <a:avLst/>
-          </a:prstGeom>
-          <a:solidFill>
-            <a:srgbClr val="F5F8F6"/>
-          </a:solidFill>
-          <a:ln w="19050">
-            <a:solidFill>
-              <a:srgbClr val="C8D7CD"/>
-            </a:solidFill>
-          </a:ln>
-        </p:spPr>
-        <p:style>
-          <a:lnRef idx="1">
-            <a:schemeClr val="accent1"/>
-          </a:lnRef>
-          <a:fillRef idx="3">
-            <a:schemeClr val="accent1"/>
-          </a:fillRef>
-          <a:effectRef idx="2">
-            <a:schemeClr val="accent1"/>
-          </a:effectRef>
-          <a:fontRef idx="minor">
-            <a:schemeClr val="lt1"/>
-          </a:fontRef>
-        </p:style>
-        <p:txBody>
-          <a:bodyPr rtlCol="0" anchor="ctr" wrap="square" lIns="228600" tIns="182880" rIns="228600"/>
-          <a:lstStyle/>
-          <a:p>
-            <a:pPr algn="ctr">
-              <a:defRPr sz="2000" b="1">
-                <a:solidFill>
-                  <a:srgbClr val="0F3B2E"/>
-                </a:solidFill>
-                <a:latin typeface="Arial"/>
-              </a:defRPr>
-            </a:pPr>
-            <a:r>
-              <a:t>AgriRAG Vector Service</a:t>
-            </a:r>
-          </a:p>
-          <a:p>
-            <a:pPr>
-              <a:spcBef>
-                <a:spcPts val="600"/>
-              </a:spcBef>
-              <a:defRPr sz="1500">
-                <a:solidFill>
-                  <a:srgbClr val="1E293B"/>
-                </a:solidFill>
-                <a:latin typeface="Arial"/>
-              </a:defRPr>
-            </a:pPr>
-            <a:r>
-              <a:t>• Segmented ICAR agronomic publications.</a:t>
-            </a:r>
-          </a:p>
-          <a:p>
-            <a:pPr>
-              <a:spcBef>
-                <a:spcPts val="600"/>
-              </a:spcBef>
-              <a:defRPr sz="1500">
-                <a:solidFill>
-                  <a:srgbClr val="1E293B"/>
-                </a:solidFill>
-                <a:latin typeface="Arial"/>
-              </a:defRPr>
-            </a:pPr>
-            <a:r>
-              <a:t>• Dense semantic vector similarity search.</a:t>
-            </a:r>
-          </a:p>
-          <a:p>
-            <a:pPr>
-              <a:spcBef>
-                <a:spcPts val="600"/>
-              </a:spcBef>
-              <a:defRPr sz="1500">
-                <a:solidFill>
-                  <a:srgbClr val="1E293B"/>
-                </a:solidFill>
-                <a:latin typeface="Arial"/>
-              </a:defRPr>
-            </a:pPr>
-            <a:r>
-              <a:t>• Restricts chemicals to vetted active ingredients.</a:t>
-            </a:r>
-          </a:p>
-          <a:p>
-            <a:pPr>
-              <a:spcBef>
-                <a:spcPts val="600"/>
-              </a:spcBef>
-              <a:defRPr sz="1500">
-                <a:solidFill>
-                  <a:srgbClr val="1E293B"/>
-                </a:solidFill>
-                <a:latin typeface="Arial"/>
-              </a:defRPr>
-            </a:pPr>
-            <a:r>
-              <a:t>• Injects exact dilution ratios (g/L or ml/L).</a:t>
-            </a:r>
-          </a:p>
-        </p:txBody>
-      </p:sp>
-      <p:sp>
-        <p:nvSpPr>
-          <p:cNvPr id="5" name="Rounded Rectangle 4"/>
-          <p:cNvSpPr/>
-          <p:nvPr/>
-        </p:nvSpPr>
-        <p:spPr>
-          <a:xfrm>
-            <a:off x="8046720" y="1645920"/>
-            <a:ext cx="3383280" cy="4572000"/>
-          </a:xfrm>
-          <a:prstGeom prst="roundRect">
-            <a:avLst/>
-          </a:prstGeom>
-          <a:solidFill>
-            <a:srgbClr val="F5F8F6"/>
-          </a:solidFill>
-          <a:ln w="19050">
-            <a:solidFill>
-              <a:srgbClr val="C8D7CD"/>
-            </a:solidFill>
-          </a:ln>
-        </p:spPr>
-        <p:style>
-          <a:lnRef idx="1">
-            <a:schemeClr val="accent1"/>
-          </a:lnRef>
-          <a:fillRef idx="3">
-            <a:schemeClr val="accent1"/>
-          </a:fillRef>
-          <a:effectRef idx="2">
-            <a:schemeClr val="accent1"/>
-          </a:effectRef>
-          <a:fontRef idx="minor">
-            <a:schemeClr val="lt1"/>
-          </a:fontRef>
-        </p:style>
-        <p:txBody>
-          <a:bodyPr rtlCol="0" anchor="ctr" wrap="square" lIns="228600" tIns="182880" rIns="228600"/>
-          <a:lstStyle/>
-          <a:p>
-            <a:pPr algn="ctr">
-              <a:defRPr sz="2000" b="1">
-                <a:solidFill>
-                  <a:srgbClr val="0F3B2E"/>
-                </a:solidFill>
-                <a:latin typeface="Arial"/>
-              </a:defRPr>
-            </a:pPr>
-            <a:r>
-              <a:t>Granite Inference Engine</a:t>
-            </a:r>
-          </a:p>
-          <a:p>
-            <a:pPr>
-              <a:spcBef>
-                <a:spcPts val="600"/>
-              </a:spcBef>
-              <a:defRPr sz="1500">
-                <a:solidFill>
-                  <a:srgbClr val="1E293B"/>
-                </a:solidFill>
-                <a:latin typeface="Arial"/>
-              </a:defRPr>
-            </a:pPr>
-            <a:r>
-              <a:t>• watsonx.ai REST client integration.</a:t>
-            </a:r>
-          </a:p>
-          <a:p>
-            <a:pPr>
-              <a:spcBef>
-                <a:spcPts val="600"/>
-              </a:spcBef>
-              <a:defRPr sz="1500">
-                <a:solidFill>
-                  <a:srgbClr val="1E293B"/>
-                </a:solidFill>
-                <a:latin typeface="Arial"/>
-              </a:defRPr>
-            </a:pPr>
-            <a:r>
-              <a:t>• Prompts ibm/granite-4-h-small with JSON schema.</a:t>
-            </a:r>
-          </a:p>
-          <a:p>
-            <a:pPr>
-              <a:spcBef>
-                <a:spcPts val="600"/>
-              </a:spcBef>
-              <a:defRPr sz="1500">
-                <a:solidFill>
-                  <a:srgbClr val="1E293B"/>
-                </a:solidFill>
-                <a:latin typeface="Arial"/>
-              </a:defRPr>
-            </a:pPr>
-            <a:r>
-              <a:t>• Generates 4-tab structured clinical guidance.</a:t>
-            </a:r>
-          </a:p>
-          <a:p>
-            <a:pPr>
-              <a:spcBef>
-                <a:spcPts val="600"/>
-              </a:spcBef>
-              <a:defRPr sz="1500">
-                <a:solidFill>
-                  <a:srgbClr val="1E293B"/>
-                </a:solidFill>
-                <a:latin typeface="Arial"/>
-              </a:defRPr>
-            </a:pPr>
-            <a:r>
-              <a:t>• Handles fallback parsing gracefully.</a:t>
-            </a:r>
-          </a:p>
-        </p:txBody>
-      </p:sp>
+      </p:pic>
     </p:spTree>
   </p:cSld>
   <p:clrMapOvr>
@@ -17088,445 +16581,183 @@
           <a:chExt cx="0" cy="0"/>
         </a:xfrm>
       </p:grpSpPr>
-      <p:pic>
-        <p:nvPicPr>
-          <p:cNvPr id="196" name="Google Shape;196;p9"/>
-          <p:cNvPicPr preferRelativeResize="0"/>
+      <p:sp>
+        <p:nvSpPr>
+          <p:cNvPr id="2" name="TextBox 1">
+            <a:extLst>
+              <a:ext uri="{FF2B5EF4-FFF2-40B4-BE49-F238E27FC236}">
+                <a16:creationId xmlns:a16="http://schemas.microsoft.com/office/drawing/2014/main" id="{B84A7B44-8B20-5A39-ED43-DA98D0FC7976}"/>
+              </a:ext>
+            </a:extLst>
+          </p:cNvPr>
+          <p:cNvSpPr txBox="1"/>
           <p:nvPr/>
-        </p:nvPicPr>
-        <p:blipFill rotWithShape="1">
-          <a:blip r:embed="rId3">
-            <a:alphaModFix/>
-          </a:blip>
-          <a:srcRect/>
-          <a:stretch/>
-        </p:blipFill>
+        </p:nvSpPr>
         <p:spPr>
           <a:xfrm>
-            <a:off x="8371985" y="1167493"/>
-            <a:ext cx="3015343" cy="4523014"/>
+            <a:off x="475488" y="283464"/>
+            <a:ext cx="9317736" cy="584775"/>
           </a:xfrm>
           <a:prstGeom prst="rect">
             <a:avLst/>
           </a:prstGeom>
           <a:noFill/>
-          <a:ln>
-            <a:noFill/>
-          </a:ln>
         </p:spPr>
-      </p:pic>
+        <p:txBody>
+          <a:bodyPr wrap="square" rtlCol="0">
+            <a:spAutoFit/>
+          </a:bodyPr>
+          <a:lstStyle/>
+          <a:p>
+            <a:r>
+              <a:rPr lang="en-US" sz="3200" b="1"/>
+              <a:t>Role of Agentic AI in the solution </a:t>
+            </a:r>
+            <a:endParaRPr lang="en-IN" sz="3200" b="1"/>
+          </a:p>
+        </p:txBody>
+      </p:sp>
       <p:sp>
         <p:nvSpPr>
-          <p:cNvPr id="197" name="Rounded Rectangle 196"/>
-          <p:cNvSpPr/>
+          <p:cNvPr id="3" name="TextBox 2">
+            <a:extLst>
+              <a:ext uri="{FF2B5EF4-FFF2-40B4-BE49-F238E27FC236}">
+                <a16:creationId xmlns:a16="http://schemas.microsoft.com/office/drawing/2014/main" id="{322462E8-EB3A-DA7D-44CB-4E757803A755}"/>
+              </a:ext>
+            </a:extLst>
+          </p:cNvPr>
+          <p:cNvSpPr txBox="1"/>
           <p:nvPr/>
         </p:nvSpPr>
         <p:spPr>
           <a:xfrm>
-            <a:off x="731520" y="1645920"/>
-            <a:ext cx="5212080" cy="2148840"/>
+            <a:off x="621792" y="1167493"/>
+            <a:ext cx="7406640" cy="3108543"/>
           </a:xfrm>
-          <a:prstGeom prst="roundRect">
+          <a:prstGeom prst="rect">
             <a:avLst/>
           </a:prstGeom>
-          <a:solidFill>
-            <a:srgbClr val="F5F8F6"/>
-          </a:solidFill>
-          <a:ln w="19050">
-            <a:solidFill>
-              <a:srgbClr val="C8D7CD"/>
-            </a:solidFill>
-          </a:ln>
+          <a:noFill/>
         </p:spPr>
-        <p:style>
-          <a:lnRef idx="1">
-            <a:schemeClr val="accent1"/>
-          </a:lnRef>
-          <a:fillRef idx="3">
-            <a:schemeClr val="accent1"/>
-          </a:fillRef>
-          <a:effectRef idx="2">
-            <a:schemeClr val="accent1"/>
-          </a:effectRef>
-          <a:fontRef idx="minor">
-            <a:schemeClr val="lt1"/>
-          </a:fontRef>
-        </p:style>
         <p:txBody>
-          <a:bodyPr rtlCol="0" anchor="ctr" wrap="square" lIns="228600" tIns="182880" rIns="228600"/>
+          <a:bodyPr wrap="square" rtlCol="0">
+            <a:spAutoFit/>
+          </a:bodyPr>
           <a:lstStyle/>
           <a:p>
-            <a:pPr algn="ctr">
-              <a:defRPr sz="2000" b="1">
-                <a:solidFill>
-                  <a:srgbClr val="0F3B2E"/>
-                </a:solidFill>
-                <a:latin typeface="Arial"/>
-              </a:defRPr>
-            </a:pPr>
-            <a:r>
-              <a:t>Tab 1: Agromet Risk Sentinel</a:t>
-            </a:r>
-          </a:p>
-          <a:p>
-            <a:pPr>
-              <a:spcBef>
-                <a:spcPts val="600"/>
-              </a:spcBef>
-              <a:defRPr sz="1500">
-                <a:solidFill>
-                  <a:srgbClr val="1E293B"/>
-                </a:solidFill>
-                <a:latin typeface="Arial"/>
-              </a:defRPr>
-            </a:pPr>
-            <a:r>
-              <a:t>• Real-time temperature, humidity, and rain telemetry gauges.</a:t>
-            </a:r>
-          </a:p>
-          <a:p>
-            <a:pPr>
-              <a:spcBef>
-                <a:spcPts val="600"/>
-              </a:spcBef>
-              <a:defRPr sz="1500">
-                <a:solidFill>
-                  <a:srgbClr val="1E293B"/>
-                </a:solidFill>
-                <a:latin typeface="Arial"/>
-              </a:defRPr>
-            </a:pPr>
-            <a:r>
-              <a:t>• Color-coded biological hazard alert banners (Red/Yellow/Green).</a:t>
-            </a:r>
-          </a:p>
-          <a:p>
-            <a:pPr>
-              <a:spcBef>
-                <a:spcPts val="600"/>
-              </a:spcBef>
-              <a:defRPr sz="1500">
-                <a:solidFill>
-                  <a:srgbClr val="1E293B"/>
-                </a:solidFill>
-                <a:latin typeface="Arial"/>
-              </a:defRPr>
-            </a:pPr>
-            <a:r>
-              <a:t>• Instant vernacular text-to-speech advisory audio playback.</a:t>
+            <a:r>
+              <a:rPr lang="en-US" b="1"/>
+              <a:t>Role of Agentic AI in Nutrition Agent</a:t>
+            </a:r>
+          </a:p>
+          <a:p>
+            <a:r>
+              <a:rPr lang="en-US" b="1"/>
+              <a:t>Agentic AI</a:t>
+            </a:r>
+            <a:r>
+              <a:rPr lang="en-US"/>
+              <a:t> enables the Nutrition Agent to function as an intelligent, autonomous system rather than a simple chatbot. Using </a:t>
+            </a:r>
+            <a:r>
+              <a:rPr lang="en-US" b="1"/>
+              <a:t>IBM watsonx.ai</a:t>
+            </a:r>
+            <a:r>
+              <a:rPr lang="en-US"/>
+              <a:t> and </a:t>
+            </a:r>
+            <a:r>
+              <a:rPr lang="en-US" b="1"/>
+              <a:t>IBM Granite models</a:t>
+            </a:r>
+            <a:r>
+              <a:rPr lang="en-US"/>
+              <a:t>, it coordinates multiple specialized agents to deliver personalized nutrition guidance.</a:t>
+            </a:r>
+          </a:p>
+          <a:p>
+            <a:r>
+              <a:rPr lang="en-US"/>
+              <a:t>Each agent performs a specific role—such as retrieving nutritional data, generating diet plans, providing health advice, and analyzing food logs—while working collaboratively. This </a:t>
+            </a:r>
+            <a:r>
+              <a:rPr lang="en-US" b="1"/>
+              <a:t>multi-agent approach</a:t>
+            </a:r>
+            <a:r>
+              <a:rPr lang="en-US"/>
+              <a:t> ensures efficient task execution and accurate results.</a:t>
+            </a:r>
+          </a:p>
+          <a:p>
+            <a:r>
+              <a:rPr lang="en-US"/>
+              <a:t>Agentic AI also brings </a:t>
+            </a:r>
+            <a:r>
+              <a:rPr lang="en-US" b="1"/>
+              <a:t>context awareness</a:t>
+            </a:r>
+            <a:r>
+              <a:rPr lang="en-US"/>
+              <a:t>, understanding user details like age, health conditions, and fitness goals to generate tailored recommendations. It supports </a:t>
+            </a:r>
+            <a:r>
+              <a:rPr lang="en-US" b="1"/>
+              <a:t>real-time adaptation</a:t>
+            </a:r>
+            <a:r>
+              <a:rPr lang="en-US"/>
+              <a:t>, continuously updating suggestions based on user inputs like daily meals.</a:t>
+            </a:r>
+          </a:p>
+          <a:p>
+            <a:r>
+              <a:rPr lang="en-US"/>
+              <a:t>Additionally, agents communicate with each other, enabling better decision-making and improved outcomes.</a:t>
+            </a:r>
+          </a:p>
+          <a:p>
+            <a:r>
+              <a:rPr lang="en-US"/>
+              <a:t>Overall, Agentic AI makes the system proactive, personalized, and goal-driven, acting like a </a:t>
+            </a:r>
+            <a:r>
+              <a:rPr lang="en-US" b="1"/>
+              <a:t>smart digital nutritionist</a:t>
+            </a:r>
+            <a:r>
+              <a:rPr lang="en-US"/>
+              <a:t> that helps users maintain a healthy lifestyle.</a:t>
             </a:r>
           </a:p>
         </p:txBody>
       </p:sp>
-      <p:sp>
-        <p:nvSpPr>
-          <p:cNvPr id="198" name="Rounded Rectangle 197"/>
-          <p:cNvSpPr/>
+      <p:pic>
+        <p:nvPicPr>
+          <p:cNvPr id="4" name="Picture 3" descr="watsonx_usage.png"/>
+          <p:cNvPicPr>
+            <a:picLocks noChangeAspect="1"/>
+          </p:cNvPicPr>
           <p:nvPr/>
-        </p:nvSpPr>
+        </p:nvPicPr>
+        <p:blipFill>
+          <a:blip r:embed="rId4"/>
+          <a:stretch>
+            <a:fillRect/>
+          </a:stretch>
+        </p:blipFill>
         <p:spPr>
           <a:xfrm>
-            <a:off x="6217920" y="1645920"/>
-            <a:ext cx="5212080" cy="2148840"/>
+            <a:off x="1371600" y="2011680"/>
+            <a:ext cx="9418320" cy="4206240"/>
           </a:xfrm>
-          <a:prstGeom prst="roundRect">
+          <a:prstGeom prst="rect">
             <a:avLst/>
           </a:prstGeom>
-          <a:solidFill>
-            <a:srgbClr val="F5F8F6"/>
-          </a:solidFill>
-          <a:ln w="19050">
-            <a:solidFill>
-              <a:srgbClr val="C8D7CD"/>
-            </a:solidFill>
-          </a:ln>
         </p:spPr>
-        <p:style>
-          <a:lnRef idx="1">
-            <a:schemeClr val="accent1"/>
-          </a:lnRef>
-          <a:fillRef idx="3">
-            <a:schemeClr val="accent1"/>
-          </a:fillRef>
-          <a:effectRef idx="2">
-            <a:schemeClr val="accent1"/>
-          </a:effectRef>
-          <a:fontRef idx="minor">
-            <a:schemeClr val="lt1"/>
-          </a:fontRef>
-        </p:style>
-        <p:txBody>
-          <a:bodyPr rtlCol="0" anchor="ctr" wrap="square" lIns="228600" tIns="182880" rIns="228600"/>
-          <a:lstStyle/>
-          <a:p>
-            <a:pPr algn="ctr">
-              <a:defRPr sz="2000" b="1">
-                <a:solidFill>
-                  <a:srgbClr val="0F3B2E"/>
-                </a:solidFill>
-                <a:latin typeface="Arial"/>
-              </a:defRPr>
-            </a:pPr>
-            <a:r>
-              <a:t>Tab 2: Foliar Pathology Vision</a:t>
-            </a:r>
-          </a:p>
-          <a:p>
-            <a:pPr>
-              <a:spcBef>
-                <a:spcPts val="600"/>
-              </a:spcBef>
-              <a:defRPr sz="1500">
-                <a:solidFill>
-                  <a:srgbClr val="1E293B"/>
-                </a:solidFill>
-                <a:latin typeface="Arial"/>
-              </a:defRPr>
-            </a:pPr>
-            <a:r>
-              <a:t>• Dual-view image comparison: Original field photo vs OpenCV mask.</a:t>
-            </a:r>
-          </a:p>
-          <a:p>
-            <a:pPr>
-              <a:spcBef>
-                <a:spcPts val="600"/>
-              </a:spcBef>
-              <a:defRPr sz="1500">
-                <a:solidFill>
-                  <a:srgbClr val="1E293B"/>
-                </a:solidFill>
-                <a:latin typeface="Arial"/>
-              </a:defRPr>
-            </a:pPr>
-            <a:r>
-              <a:t>• Necrotic surface area percentage calculation and severity metrics.</a:t>
-            </a:r>
-          </a:p>
-          <a:p>
-            <a:pPr>
-              <a:spcBef>
-                <a:spcPts val="600"/>
-              </a:spcBef>
-              <a:defRPr sz="1500">
-                <a:solidFill>
-                  <a:srgbClr val="1E293B"/>
-                </a:solidFill>
-                <a:latin typeface="Arial"/>
-              </a:defRPr>
-            </a:pPr>
-            <a:r>
-              <a:t>• Symptom classification linked directly to pathogen profile.</a:t>
-            </a:r>
-          </a:p>
-        </p:txBody>
-      </p:sp>
-      <p:sp>
-        <p:nvSpPr>
-          <p:cNvPr id="199" name="Rounded Rectangle 198"/>
-          <p:cNvSpPr/>
-          <p:nvPr/>
-        </p:nvSpPr>
-        <p:spPr>
-          <a:xfrm>
-            <a:off x="731520" y="4023360"/>
-            <a:ext cx="5212080" cy="2148840"/>
-          </a:xfrm>
-          <a:prstGeom prst="roundRect">
-            <a:avLst/>
-          </a:prstGeom>
-          <a:solidFill>
-            <a:srgbClr val="F5F8F6"/>
-          </a:solidFill>
-          <a:ln w="19050">
-            <a:solidFill>
-              <a:srgbClr val="C8D7CD"/>
-            </a:solidFill>
-          </a:ln>
-        </p:spPr>
-        <p:style>
-          <a:lnRef idx="1">
-            <a:schemeClr val="accent1"/>
-          </a:lnRef>
-          <a:fillRef idx="3">
-            <a:schemeClr val="accent1"/>
-          </a:fillRef>
-          <a:effectRef idx="2">
-            <a:schemeClr val="accent1"/>
-          </a:effectRef>
-          <a:fontRef idx="minor">
-            <a:schemeClr val="lt1"/>
-          </a:fontRef>
-        </p:style>
-        <p:txBody>
-          <a:bodyPr rtlCol="0" anchor="ctr" wrap="square" lIns="228600" tIns="182880" rIns="228600"/>
-          <a:lstStyle/>
-          <a:p>
-            <a:pPr algn="ctr">
-              <a:defRPr sz="2000" b="1">
-                <a:solidFill>
-                  <a:srgbClr val="0F3B2E"/>
-                </a:solidFill>
-                <a:latin typeface="Arial"/>
-              </a:defRPr>
-            </a:pPr>
-            <a:r>
-              <a:t>Tab 3: 7-Day Treatment Roadmap</a:t>
-            </a:r>
-          </a:p>
-          <a:p>
-            <a:pPr>
-              <a:spcBef>
-                <a:spcPts val="600"/>
-              </a:spcBef>
-              <a:defRPr sz="1500">
-                <a:solidFill>
-                  <a:srgbClr val="1E293B"/>
-                </a:solidFill>
-                <a:latin typeface="Arial"/>
-              </a:defRPr>
-            </a:pPr>
-            <a:r>
-              <a:t>• Step-by-step chemical and organic spray intervention timeline.</a:t>
-            </a:r>
-          </a:p>
-          <a:p>
-            <a:pPr>
-              <a:spcBef>
-                <a:spcPts val="600"/>
-              </a:spcBef>
-              <a:defRPr sz="1500">
-                <a:solidFill>
-                  <a:srgbClr val="1E293B"/>
-                </a:solidFill>
-                <a:latin typeface="Arial"/>
-              </a:defRPr>
-            </a:pPr>
-            <a:r>
-              <a:t>• Exact ICAR chemical dilutions (e.g., Metalaxyl + Mancozeb @ 2g/L).</a:t>
-            </a:r>
-          </a:p>
-          <a:p>
-            <a:pPr>
-              <a:spcBef>
-                <a:spcPts val="600"/>
-              </a:spcBef>
-              <a:defRPr sz="1500">
-                <a:solidFill>
-                  <a:srgbClr val="1E293B"/>
-                </a:solidFill>
-                <a:latin typeface="Arial"/>
-              </a:defRPr>
-            </a:pPr>
-            <a:r>
-              <a:t>• Tank mixture safety, wait periods, and protective equipment guidelines.</a:t>
-            </a:r>
-          </a:p>
-        </p:txBody>
-      </p:sp>
-      <p:sp>
-        <p:nvSpPr>
-          <p:cNvPr id="200" name="Rounded Rectangle 199"/>
-          <p:cNvSpPr/>
-          <p:nvPr/>
-        </p:nvSpPr>
-        <p:spPr>
-          <a:xfrm>
-            <a:off x="6217920" y="4023360"/>
-            <a:ext cx="5212080" cy="2148840"/>
-          </a:xfrm>
-          <a:prstGeom prst="roundRect">
-            <a:avLst/>
-          </a:prstGeom>
-          <a:solidFill>
-            <a:srgbClr val="F5F8F6"/>
-          </a:solidFill>
-          <a:ln w="19050">
-            <a:solidFill>
-              <a:srgbClr val="C8D7CD"/>
-            </a:solidFill>
-          </a:ln>
-        </p:spPr>
-        <p:style>
-          <a:lnRef idx="1">
-            <a:schemeClr val="accent1"/>
-          </a:lnRef>
-          <a:fillRef idx="3">
-            <a:schemeClr val="accent1"/>
-          </a:fillRef>
-          <a:effectRef idx="2">
-            <a:schemeClr val="accent1"/>
-          </a:effectRef>
-          <a:fontRef idx="minor">
-            <a:schemeClr val="lt1"/>
-          </a:fontRef>
-        </p:style>
-        <p:txBody>
-          <a:bodyPr rtlCol="0" anchor="ctr" wrap="square" lIns="228600" tIns="182880" rIns="228600"/>
-          <a:lstStyle/>
-          <a:p>
-            <a:pPr algn="ctr">
-              <a:defRPr sz="2000" b="1">
-                <a:solidFill>
-                  <a:srgbClr val="0F3B2E"/>
-                </a:solidFill>
-                <a:latin typeface="Arial"/>
-              </a:defRPr>
-            </a:pPr>
-            <a:r>
-              <a:t>Tab 4: Economic Decision Simulation</a:t>
-            </a:r>
-          </a:p>
-          <a:p>
-            <a:pPr>
-              <a:spcBef>
-                <a:spcPts val="600"/>
-              </a:spcBef>
-              <a:defRPr sz="1500">
-                <a:solidFill>
-                  <a:srgbClr val="1E293B"/>
-                </a:solidFill>
-                <a:latin typeface="Arial"/>
-              </a:defRPr>
-            </a:pPr>
-            <a:r>
-              <a:t>• Financial comparison: Preventative treatment cost vs crop loss.</a:t>
-            </a:r>
-          </a:p>
-          <a:p>
-            <a:pPr>
-              <a:spcBef>
-                <a:spcPts val="600"/>
-              </a:spcBef>
-              <a:defRPr sz="1500">
-                <a:solidFill>
-                  <a:srgbClr val="1E293B"/>
-                </a:solidFill>
-                <a:latin typeface="Arial"/>
-              </a:defRPr>
-            </a:pPr>
-            <a:r>
-              <a:t>• Estimated input chemical costs vs net crop yield revenue saved.</a:t>
-            </a:r>
-          </a:p>
-          <a:p>
-            <a:pPr>
-              <a:spcBef>
-                <a:spcPts val="600"/>
-              </a:spcBef>
-              <a:defRPr sz="1500">
-                <a:solidFill>
-                  <a:srgbClr val="1E293B"/>
-                </a:solidFill>
-                <a:latin typeface="Arial"/>
-              </a:defRPr>
-            </a:pPr>
-            <a:r>
-              <a:t>• Actionable ROI projections tailored to farm acreage.</a:t>
-            </a:r>
-          </a:p>
-        </p:txBody>
-      </p:sp>
+      </p:pic>
     </p:spTree>
   </p:cSld>
   <p:clrMapOvr>
